--- a/毕业答辩/论文答辩_朱博林.pptx
+++ b/毕业答辩/论文答辩_朱博林.pptx
@@ -13,35 +13,38 @@
     <p:sldId id="258" r:id="rId6"/>
     <p:sldId id="261" r:id="rId7"/>
     <p:sldId id="260" r:id="rId8"/>
-    <p:sldId id="362" r:id="rId9"/>
-    <p:sldId id="262" r:id="rId10"/>
-    <p:sldId id="334" r:id="rId11"/>
-    <p:sldId id="333" r:id="rId12"/>
-    <p:sldId id="363" r:id="rId13"/>
-    <p:sldId id="335" r:id="rId14"/>
-    <p:sldId id="337" r:id="rId15"/>
-    <p:sldId id="355" r:id="rId16"/>
-    <p:sldId id="356" r:id="rId17"/>
-    <p:sldId id="357" r:id="rId18"/>
-    <p:sldId id="364" r:id="rId19"/>
-    <p:sldId id="338" r:id="rId20"/>
-    <p:sldId id="339" r:id="rId21"/>
-    <p:sldId id="344" r:id="rId22"/>
-    <p:sldId id="350" r:id="rId23"/>
-    <p:sldId id="336" r:id="rId24"/>
-    <p:sldId id="351" r:id="rId25"/>
-    <p:sldId id="352" r:id="rId26"/>
-    <p:sldId id="354" r:id="rId27"/>
-    <p:sldId id="365" r:id="rId28"/>
-    <p:sldId id="366" r:id="rId29"/>
-    <p:sldId id="359" r:id="rId30"/>
-    <p:sldId id="360" r:id="rId31"/>
-    <p:sldId id="282" r:id="rId32"/>
+    <p:sldId id="368" r:id="rId9"/>
+    <p:sldId id="362" r:id="rId10"/>
+    <p:sldId id="370" r:id="rId11"/>
+    <p:sldId id="369" r:id="rId12"/>
+    <p:sldId id="262" r:id="rId13"/>
+    <p:sldId id="334" r:id="rId14"/>
+    <p:sldId id="333" r:id="rId15"/>
+    <p:sldId id="363" r:id="rId16"/>
+    <p:sldId id="335" r:id="rId17"/>
+    <p:sldId id="337" r:id="rId18"/>
+    <p:sldId id="355" r:id="rId19"/>
+    <p:sldId id="356" r:id="rId20"/>
+    <p:sldId id="357" r:id="rId21"/>
+    <p:sldId id="364" r:id="rId22"/>
+    <p:sldId id="338" r:id="rId23"/>
+    <p:sldId id="339" r:id="rId24"/>
+    <p:sldId id="344" r:id="rId25"/>
+    <p:sldId id="350" r:id="rId26"/>
+    <p:sldId id="336" r:id="rId27"/>
+    <p:sldId id="351" r:id="rId28"/>
+    <p:sldId id="352" r:id="rId29"/>
+    <p:sldId id="354" r:id="rId30"/>
+    <p:sldId id="365" r:id="rId31"/>
+    <p:sldId id="366" r:id="rId32"/>
+    <p:sldId id="359" r:id="rId33"/>
+    <p:sldId id="360" r:id="rId34"/>
+    <p:sldId id="282" r:id="rId35"/>
   </p:sldIdLst>
   <p:sldSz cx="6864350" cy="5147945"/>
   <p:notesSz cx="6858000" cy="9144000"/>
   <p:custDataLst>
-    <p:tags r:id="rId36"/>
+    <p:tags r:id="rId39"/>
   </p:custDataLst>
   <p:defaultTextStyle>
     <a:defPPr>
@@ -147,7 +150,10 @@
             <p14:sldId id="258"/>
             <p14:sldId id="261"/>
             <p14:sldId id="260"/>
+            <p14:sldId id="368"/>
             <p14:sldId id="362"/>
+            <p14:sldId id="370"/>
+            <p14:sldId id="369"/>
             <p14:sldId id="262"/>
             <p14:sldId id="334"/>
             <p14:sldId id="333"/>
@@ -606,19 +612,19 @@
             <a:spLocks noGrp="1" noRot="1" noChangeAspect="1"/>
           </p:cNvSpPr>
           <p:nvPr>
-            <p:ph type="sldImg"/>
+            <p:ph type="sldImg" idx="2"/>
           </p:nvPr>
         </p:nvSpPr>
         <p:spPr/>
       </p:sp>
       <p:sp>
         <p:nvSpPr>
-          <p:cNvPr id="3" name="备注占位符 2"/>
-          <p:cNvSpPr>
-            <a:spLocks noGrp="1"/>
-          </p:cNvSpPr>
-          <p:nvPr>
-            <p:ph type="body" idx="1"/>
+          <p:cNvPr id="3" name="文本占位符 2"/>
+          <p:cNvSpPr>
+            <a:spLocks noGrp="1"/>
+          </p:cNvSpPr>
+          <p:nvPr>
+            <p:ph type="body" idx="3"/>
           </p:nvPr>
         </p:nvSpPr>
         <p:spPr/>
@@ -627,28 +633,6 @@
           <a:lstStyle/>
           <a:p>
             <a:endParaRPr lang="zh-CN" altLang="en-US" dirty="0"/>
-          </a:p>
-        </p:txBody>
-      </p:sp>
-      <p:sp>
-        <p:nvSpPr>
-          <p:cNvPr id="4" name="灯片编号占位符 3"/>
-          <p:cNvSpPr>
-            <a:spLocks noGrp="1"/>
-          </p:cNvSpPr>
-          <p:nvPr>
-            <p:ph type="sldNum" sz="quarter" idx="10"/>
-          </p:nvPr>
-        </p:nvSpPr>
-        <p:spPr/>
-        <p:txBody>
-          <a:bodyPr/>
-          <a:lstStyle/>
-          <a:p>
-            <a:fld id="{6D665937-FCC7-47CE-8B46-06F747D53510}" type="slidenum">
-              <a:rPr lang="zh-CN" altLang="en-US" smtClean="0"/>
-            </a:fld>
-            <a:endParaRPr lang="zh-CN" altLang="en-US"/>
           </a:p>
         </p:txBody>
       </p:sp>
@@ -684,19 +668,19 @@
             <a:spLocks noGrp="1" noRot="1" noChangeAspect="1"/>
           </p:cNvSpPr>
           <p:nvPr>
-            <p:ph type="sldImg"/>
+            <p:ph type="sldImg" idx="2"/>
           </p:nvPr>
         </p:nvSpPr>
         <p:spPr/>
       </p:sp>
       <p:sp>
         <p:nvSpPr>
-          <p:cNvPr id="3" name="备注占位符 2"/>
-          <p:cNvSpPr>
-            <a:spLocks noGrp="1"/>
-          </p:cNvSpPr>
-          <p:nvPr>
-            <p:ph type="body" idx="1"/>
+          <p:cNvPr id="3" name="文本占位符 2"/>
+          <p:cNvSpPr>
+            <a:spLocks noGrp="1"/>
+          </p:cNvSpPr>
+          <p:nvPr>
+            <p:ph type="body" idx="3"/>
           </p:nvPr>
         </p:nvSpPr>
         <p:spPr/>
@@ -705,28 +689,6 @@
           <a:lstStyle/>
           <a:p>
             <a:endParaRPr lang="zh-CN" altLang="en-US" dirty="0"/>
-          </a:p>
-        </p:txBody>
-      </p:sp>
-      <p:sp>
-        <p:nvSpPr>
-          <p:cNvPr id="4" name="灯片编号占位符 3"/>
-          <p:cNvSpPr>
-            <a:spLocks noGrp="1"/>
-          </p:cNvSpPr>
-          <p:nvPr>
-            <p:ph type="sldNum" sz="quarter" idx="10"/>
-          </p:nvPr>
-        </p:nvSpPr>
-        <p:spPr/>
-        <p:txBody>
-          <a:bodyPr/>
-          <a:lstStyle/>
-          <a:p>
-            <a:fld id="{6D665937-FCC7-47CE-8B46-06F747D53510}" type="slidenum">
-              <a:rPr lang="zh-CN" altLang="en-US" smtClean="0"/>
-            </a:fld>
-            <a:endParaRPr lang="zh-CN" altLang="en-US"/>
           </a:p>
         </p:txBody>
       </p:sp>
@@ -747,63 +709,33 @@
         <p:cNvGrpSpPr/>
         <p:nvPr/>
       </p:nvGrpSpPr>
-      <p:grpSpPr>
-        <a:xfrm>
-          <a:off x="0" y="0"/>
-          <a:ext cx="0" cy="0"/>
-          <a:chOff x="0" y="0"/>
-          <a:chExt cx="0" cy="0"/>
-        </a:xfrm>
-      </p:grpSpPr>
+      <p:grpSpPr/>
       <p:sp>
         <p:nvSpPr>
           <p:cNvPr id="2" name="幻灯片图像占位符 1"/>
           <p:cNvSpPr>
-            <a:spLocks noGrp="1" noRot="1" noChangeAspect="1"/>
-          </p:cNvSpPr>
-          <p:nvPr>
-            <p:ph type="sldImg"/>
+            <a:spLocks noGrp="1"/>
+          </p:cNvSpPr>
+          <p:nvPr>
+            <p:ph type="sldImg" idx="2"/>
           </p:nvPr>
         </p:nvSpPr>
         <p:spPr/>
       </p:sp>
       <p:sp>
         <p:nvSpPr>
-          <p:cNvPr id="3" name="备注占位符 2"/>
-          <p:cNvSpPr>
-            <a:spLocks noGrp="1"/>
-          </p:cNvSpPr>
-          <p:nvPr>
-            <p:ph type="body" idx="1"/>
+          <p:cNvPr id="3" name="文本占位符 2"/>
+          <p:cNvSpPr>
+            <a:spLocks noGrp="1"/>
+          </p:cNvSpPr>
+          <p:nvPr>
+            <p:ph type="body" idx="3"/>
           </p:nvPr>
         </p:nvSpPr>
         <p:spPr/>
         <p:txBody>
           <a:bodyPr/>
-          <a:lstStyle/>
-          <a:p>
-            <a:endParaRPr lang="zh-CN" altLang="en-US" dirty="0"/>
-          </a:p>
-        </p:txBody>
-      </p:sp>
-      <p:sp>
-        <p:nvSpPr>
-          <p:cNvPr id="4" name="灯片编号占位符 3"/>
-          <p:cNvSpPr>
-            <a:spLocks noGrp="1"/>
-          </p:cNvSpPr>
-          <p:nvPr>
-            <p:ph type="sldNum" sz="quarter" idx="10"/>
-          </p:nvPr>
-        </p:nvSpPr>
-        <p:spPr/>
-        <p:txBody>
-          <a:bodyPr/>
-          <a:lstStyle/>
-          <a:p>
-            <a:fld id="{6D665937-FCC7-47CE-8B46-06F747D53510}" type="slidenum">
-              <a:rPr lang="zh-CN" altLang="en-US" smtClean="0"/>
-            </a:fld>
+          <a:p>
             <a:endParaRPr lang="zh-CN" altLang="en-US"/>
           </a:p>
         </p:txBody>
@@ -981,33 +913,63 @@
         <p:cNvGrpSpPr/>
         <p:nvPr/>
       </p:nvGrpSpPr>
-      <p:grpSpPr/>
+      <p:grpSpPr>
+        <a:xfrm>
+          <a:off x="0" y="0"/>
+          <a:ext cx="0" cy="0"/>
+          <a:chOff x="0" y="0"/>
+          <a:chExt cx="0" cy="0"/>
+        </a:xfrm>
+      </p:grpSpPr>
       <p:sp>
         <p:nvSpPr>
           <p:cNvPr id="2" name="幻灯片图像占位符 1"/>
           <p:cNvSpPr>
-            <a:spLocks noGrp="1"/>
-          </p:cNvSpPr>
-          <p:nvPr>
-            <p:ph type="sldImg" idx="2"/>
+            <a:spLocks noGrp="1" noRot="1" noChangeAspect="1"/>
+          </p:cNvSpPr>
+          <p:nvPr>
+            <p:ph type="sldImg"/>
           </p:nvPr>
         </p:nvSpPr>
         <p:spPr/>
       </p:sp>
       <p:sp>
         <p:nvSpPr>
-          <p:cNvPr id="3" name="文本占位符 2"/>
-          <p:cNvSpPr>
-            <a:spLocks noGrp="1"/>
-          </p:cNvSpPr>
-          <p:nvPr>
-            <p:ph type="body" idx="3"/>
+          <p:cNvPr id="3" name="备注占位符 2"/>
+          <p:cNvSpPr>
+            <a:spLocks noGrp="1"/>
+          </p:cNvSpPr>
+          <p:nvPr>
+            <p:ph type="body" idx="1"/>
           </p:nvPr>
         </p:nvSpPr>
         <p:spPr/>
         <p:txBody>
           <a:bodyPr/>
-          <a:p>
+          <a:lstStyle/>
+          <a:p>
+            <a:endParaRPr lang="zh-CN" altLang="en-US" dirty="0"/>
+          </a:p>
+        </p:txBody>
+      </p:sp>
+      <p:sp>
+        <p:nvSpPr>
+          <p:cNvPr id="4" name="灯片编号占位符 3"/>
+          <p:cNvSpPr>
+            <a:spLocks noGrp="1"/>
+          </p:cNvSpPr>
+          <p:nvPr>
+            <p:ph type="sldNum" sz="quarter" idx="10"/>
+          </p:nvPr>
+        </p:nvSpPr>
+        <p:spPr/>
+        <p:txBody>
+          <a:bodyPr/>
+          <a:lstStyle/>
+          <a:p>
+            <a:fld id="{6D665937-FCC7-47CE-8B46-06F747D53510}" type="slidenum">
+              <a:rPr lang="zh-CN" altLang="en-US" smtClean="0"/>
+            </a:fld>
             <a:endParaRPr lang="zh-CN" altLang="en-US"/>
           </a:p>
         </p:txBody>
@@ -1185,79 +1147,33 @@
         <p:cNvGrpSpPr/>
         <p:nvPr/>
       </p:nvGrpSpPr>
-      <p:grpSpPr>
-        <a:xfrm>
-          <a:off x="0" y="0"/>
-          <a:ext cx="0" cy="0"/>
-          <a:chOff x="0" y="0"/>
-          <a:chExt cx="0" cy="0"/>
-        </a:xfrm>
-      </p:grpSpPr>
+      <p:grpSpPr/>
       <p:sp>
         <p:nvSpPr>
           <p:cNvPr id="2" name="幻灯片图像占位符 1"/>
           <p:cNvSpPr>
-            <a:spLocks noGrp="1" noRot="1" noChangeAspect="1"/>
-          </p:cNvSpPr>
-          <p:nvPr>
-            <p:ph type="sldImg"/>
+            <a:spLocks noGrp="1"/>
+          </p:cNvSpPr>
+          <p:nvPr>
+            <p:ph type="sldImg" idx="2"/>
           </p:nvPr>
         </p:nvSpPr>
         <p:spPr/>
       </p:sp>
       <p:sp>
         <p:nvSpPr>
-          <p:cNvPr id="3" name="备注占位符 2"/>
-          <p:cNvSpPr>
-            <a:spLocks noGrp="1"/>
-          </p:cNvSpPr>
-          <p:nvPr>
-            <p:ph type="body" idx="1"/>
+          <p:cNvPr id="3" name="文本占位符 2"/>
+          <p:cNvSpPr>
+            <a:spLocks noGrp="1"/>
+          </p:cNvSpPr>
+          <p:nvPr>
+            <p:ph type="body" idx="3"/>
           </p:nvPr>
         </p:nvSpPr>
         <p:spPr/>
         <p:txBody>
           <a:bodyPr/>
-          <a:lstStyle/>
-          <a:p>
-            <a:pPr marL="0" marR="0" lvl="0" indent="0" algn="l" defTabSz="687705" rtl="0" eaLnBrk="1" fontAlgn="auto" latinLnBrk="0" hangingPunct="1">
-              <a:lnSpc>
-                <a:spcPct val="100000"/>
-              </a:lnSpc>
-              <a:spcBef>
-                <a:spcPts val="0"/>
-              </a:spcBef>
-              <a:spcAft>
-                <a:spcPts val="0"/>
-              </a:spcAft>
-              <a:buClrTx/>
-              <a:buSzTx/>
-              <a:buFontTx/>
-              <a:buNone/>
-              <a:defRPr/>
-            </a:pPr>
-            <a:endParaRPr lang="zh-CN" altLang="en-US" dirty="0"/>
-          </a:p>
-        </p:txBody>
-      </p:sp>
-      <p:sp>
-        <p:nvSpPr>
-          <p:cNvPr id="4" name="灯片编号占位符 3"/>
-          <p:cNvSpPr>
-            <a:spLocks noGrp="1"/>
-          </p:cNvSpPr>
-          <p:nvPr>
-            <p:ph type="sldNum" sz="quarter" idx="10"/>
-          </p:nvPr>
-        </p:nvSpPr>
-        <p:spPr/>
-        <p:txBody>
-          <a:bodyPr/>
-          <a:lstStyle/>
-          <a:p>
-            <a:fld id="{6D665937-FCC7-47CE-8B46-06F747D53510}" type="slidenum">
-              <a:rPr lang="zh-CN" altLang="en-US" smtClean="0"/>
-            </a:fld>
+          <a:p>
             <a:endParaRPr lang="zh-CN" altLang="en-US"/>
           </a:p>
         </p:txBody>
@@ -1518,6 +1434,22 @@
           <a:bodyPr/>
           <a:lstStyle/>
           <a:p>
+            <a:pPr marL="0" marR="0" lvl="0" indent="0" algn="l" defTabSz="687705" rtl="0" eaLnBrk="1" fontAlgn="auto" latinLnBrk="0" hangingPunct="1">
+              <a:lnSpc>
+                <a:spcPct val="100000"/>
+              </a:lnSpc>
+              <a:spcBef>
+                <a:spcPts val="0"/>
+              </a:spcBef>
+              <a:spcAft>
+                <a:spcPts val="0"/>
+              </a:spcAft>
+              <a:buClrTx/>
+              <a:buSzTx/>
+              <a:buFontTx/>
+              <a:buNone/>
+              <a:defRPr/>
+            </a:pPr>
             <a:endParaRPr lang="zh-CN" altLang="en-US" dirty="0"/>
           </a:p>
         </p:txBody>
@@ -1717,33 +1649,63 @@
         <p:cNvGrpSpPr/>
         <p:nvPr/>
       </p:nvGrpSpPr>
-      <p:grpSpPr/>
+      <p:grpSpPr>
+        <a:xfrm>
+          <a:off x="0" y="0"/>
+          <a:ext cx="0" cy="0"/>
+          <a:chOff x="0" y="0"/>
+          <a:chExt cx="0" cy="0"/>
+        </a:xfrm>
+      </p:grpSpPr>
       <p:sp>
         <p:nvSpPr>
           <p:cNvPr id="2" name="幻灯片图像占位符 1"/>
           <p:cNvSpPr>
-            <a:spLocks noGrp="1"/>
-          </p:cNvSpPr>
-          <p:nvPr>
-            <p:ph type="sldImg" idx="2"/>
+            <a:spLocks noGrp="1" noRot="1" noChangeAspect="1"/>
+          </p:cNvSpPr>
+          <p:nvPr>
+            <p:ph type="sldImg"/>
           </p:nvPr>
         </p:nvSpPr>
         <p:spPr/>
       </p:sp>
       <p:sp>
         <p:nvSpPr>
-          <p:cNvPr id="3" name="文本占位符 2"/>
-          <p:cNvSpPr>
-            <a:spLocks noGrp="1"/>
-          </p:cNvSpPr>
-          <p:nvPr>
-            <p:ph type="body" idx="3"/>
+          <p:cNvPr id="3" name="备注占位符 2"/>
+          <p:cNvSpPr>
+            <a:spLocks noGrp="1"/>
+          </p:cNvSpPr>
+          <p:nvPr>
+            <p:ph type="body" idx="1"/>
           </p:nvPr>
         </p:nvSpPr>
         <p:spPr/>
         <p:txBody>
           <a:bodyPr/>
-          <a:p>
+          <a:lstStyle/>
+          <a:p>
+            <a:endParaRPr lang="zh-CN" altLang="en-US" dirty="0"/>
+          </a:p>
+        </p:txBody>
+      </p:sp>
+      <p:sp>
+        <p:nvSpPr>
+          <p:cNvPr id="4" name="灯片编号占位符 3"/>
+          <p:cNvSpPr>
+            <a:spLocks noGrp="1"/>
+          </p:cNvSpPr>
+          <p:nvPr>
+            <p:ph type="sldNum" sz="quarter" idx="10"/>
+          </p:nvPr>
+        </p:nvSpPr>
+        <p:spPr/>
+        <p:txBody>
+          <a:bodyPr/>
+          <a:lstStyle/>
+          <a:p>
+            <a:fld id="{6D665937-FCC7-47CE-8B46-06F747D53510}" type="slidenum">
+              <a:rPr lang="zh-CN" altLang="en-US" smtClean="0"/>
+            </a:fld>
             <a:endParaRPr lang="zh-CN" altLang="en-US"/>
           </a:p>
         </p:txBody>
@@ -1765,33 +1727,63 @@
         <p:cNvGrpSpPr/>
         <p:nvPr/>
       </p:nvGrpSpPr>
-      <p:grpSpPr/>
+      <p:grpSpPr>
+        <a:xfrm>
+          <a:off x="0" y="0"/>
+          <a:ext cx="0" cy="0"/>
+          <a:chOff x="0" y="0"/>
+          <a:chExt cx="0" cy="0"/>
+        </a:xfrm>
+      </p:grpSpPr>
       <p:sp>
         <p:nvSpPr>
           <p:cNvPr id="2" name="幻灯片图像占位符 1"/>
           <p:cNvSpPr>
-            <a:spLocks noGrp="1"/>
-          </p:cNvSpPr>
-          <p:nvPr>
-            <p:ph type="sldImg" idx="2"/>
+            <a:spLocks noGrp="1" noRot="1" noChangeAspect="1"/>
+          </p:cNvSpPr>
+          <p:nvPr>
+            <p:ph type="sldImg"/>
           </p:nvPr>
         </p:nvSpPr>
         <p:spPr/>
       </p:sp>
       <p:sp>
         <p:nvSpPr>
-          <p:cNvPr id="3" name="文本占位符 2"/>
-          <p:cNvSpPr>
-            <a:spLocks noGrp="1"/>
-          </p:cNvSpPr>
-          <p:nvPr>
-            <p:ph type="body" idx="3"/>
+          <p:cNvPr id="3" name="备注占位符 2"/>
+          <p:cNvSpPr>
+            <a:spLocks noGrp="1"/>
+          </p:cNvSpPr>
+          <p:nvPr>
+            <p:ph type="body" idx="1"/>
           </p:nvPr>
         </p:nvSpPr>
         <p:spPr/>
         <p:txBody>
           <a:bodyPr/>
-          <a:p>
+          <a:lstStyle/>
+          <a:p>
+            <a:endParaRPr lang="zh-CN" altLang="en-US" dirty="0"/>
+          </a:p>
+        </p:txBody>
+      </p:sp>
+      <p:sp>
+        <p:nvSpPr>
+          <p:cNvPr id="4" name="灯片编号占位符 3"/>
+          <p:cNvSpPr>
+            <a:spLocks noGrp="1"/>
+          </p:cNvSpPr>
+          <p:nvPr>
+            <p:ph type="sldNum" sz="quarter" idx="10"/>
+          </p:nvPr>
+        </p:nvSpPr>
+        <p:spPr/>
+        <p:txBody>
+          <a:bodyPr/>
+          <a:lstStyle/>
+          <a:p>
+            <a:fld id="{6D665937-FCC7-47CE-8B46-06F747D53510}" type="slidenum">
+              <a:rPr lang="zh-CN" altLang="en-US" smtClean="0"/>
+            </a:fld>
             <a:endParaRPr lang="zh-CN" altLang="en-US"/>
           </a:p>
         </p:txBody>
@@ -1813,33 +1805,63 @@
         <p:cNvGrpSpPr/>
         <p:nvPr/>
       </p:nvGrpSpPr>
-      <p:grpSpPr/>
+      <p:grpSpPr>
+        <a:xfrm>
+          <a:off x="0" y="0"/>
+          <a:ext cx="0" cy="0"/>
+          <a:chOff x="0" y="0"/>
+          <a:chExt cx="0" cy="0"/>
+        </a:xfrm>
+      </p:grpSpPr>
       <p:sp>
         <p:nvSpPr>
           <p:cNvPr id="2" name="幻灯片图像占位符 1"/>
           <p:cNvSpPr>
-            <a:spLocks noGrp="1"/>
-          </p:cNvSpPr>
-          <p:nvPr>
-            <p:ph type="sldImg" idx="2"/>
+            <a:spLocks noGrp="1" noRot="1" noChangeAspect="1"/>
+          </p:cNvSpPr>
+          <p:nvPr>
+            <p:ph type="sldImg"/>
           </p:nvPr>
         </p:nvSpPr>
         <p:spPr/>
       </p:sp>
       <p:sp>
         <p:nvSpPr>
-          <p:cNvPr id="3" name="文本占位符 2"/>
-          <p:cNvSpPr>
-            <a:spLocks noGrp="1"/>
-          </p:cNvSpPr>
-          <p:nvPr>
-            <p:ph type="body" idx="3"/>
+          <p:cNvPr id="3" name="备注占位符 2"/>
+          <p:cNvSpPr>
+            <a:spLocks noGrp="1"/>
+          </p:cNvSpPr>
+          <p:nvPr>
+            <p:ph type="body" idx="1"/>
           </p:nvPr>
         </p:nvSpPr>
         <p:spPr/>
         <p:txBody>
           <a:bodyPr/>
-          <a:p>
+          <a:lstStyle/>
+          <a:p>
+            <a:endParaRPr lang="zh-CN" altLang="en-US" dirty="0"/>
+          </a:p>
+        </p:txBody>
+      </p:sp>
+      <p:sp>
+        <p:nvSpPr>
+          <p:cNvPr id="4" name="灯片编号占位符 3"/>
+          <p:cNvSpPr>
+            <a:spLocks noGrp="1"/>
+          </p:cNvSpPr>
+          <p:nvPr>
+            <p:ph type="sldNum" sz="quarter" idx="10"/>
+          </p:nvPr>
+        </p:nvSpPr>
+        <p:spPr/>
+        <p:txBody>
+          <a:bodyPr/>
+          <a:lstStyle/>
+          <a:p>
+            <a:fld id="{6D665937-FCC7-47CE-8B46-06F747D53510}" type="slidenum">
+              <a:rPr lang="zh-CN" altLang="en-US" smtClean="0"/>
+            </a:fld>
             <a:endParaRPr lang="zh-CN" altLang="en-US"/>
           </a:p>
         </p:txBody>
@@ -1861,63 +1883,33 @@
         <p:cNvGrpSpPr/>
         <p:nvPr/>
       </p:nvGrpSpPr>
-      <p:grpSpPr>
-        <a:xfrm>
-          <a:off x="0" y="0"/>
-          <a:ext cx="0" cy="0"/>
-          <a:chOff x="0" y="0"/>
-          <a:chExt cx="0" cy="0"/>
-        </a:xfrm>
-      </p:grpSpPr>
+      <p:grpSpPr/>
       <p:sp>
         <p:nvSpPr>
           <p:cNvPr id="2" name="幻灯片图像占位符 1"/>
           <p:cNvSpPr>
-            <a:spLocks noGrp="1" noRot="1" noChangeAspect="1"/>
-          </p:cNvSpPr>
-          <p:nvPr>
-            <p:ph type="sldImg"/>
+            <a:spLocks noGrp="1"/>
+          </p:cNvSpPr>
+          <p:nvPr>
+            <p:ph type="sldImg" idx="2"/>
           </p:nvPr>
         </p:nvSpPr>
         <p:spPr/>
       </p:sp>
       <p:sp>
         <p:nvSpPr>
-          <p:cNvPr id="3" name="备注占位符 2"/>
-          <p:cNvSpPr>
-            <a:spLocks noGrp="1"/>
-          </p:cNvSpPr>
-          <p:nvPr>
-            <p:ph type="body" idx="1"/>
+          <p:cNvPr id="3" name="文本占位符 2"/>
+          <p:cNvSpPr>
+            <a:spLocks noGrp="1"/>
+          </p:cNvSpPr>
+          <p:nvPr>
+            <p:ph type="body" idx="3"/>
           </p:nvPr>
         </p:nvSpPr>
         <p:spPr/>
         <p:txBody>
           <a:bodyPr/>
-          <a:lstStyle/>
-          <a:p>
-            <a:endParaRPr lang="zh-CN" altLang="en-US" dirty="0"/>
-          </a:p>
-        </p:txBody>
-      </p:sp>
-      <p:sp>
-        <p:nvSpPr>
-          <p:cNvPr id="4" name="灯片编号占位符 3"/>
-          <p:cNvSpPr>
-            <a:spLocks noGrp="1"/>
-          </p:cNvSpPr>
-          <p:nvPr>
-            <p:ph type="sldNum" sz="quarter" idx="5"/>
-          </p:nvPr>
-        </p:nvSpPr>
-        <p:spPr/>
-        <p:txBody>
-          <a:bodyPr/>
-          <a:lstStyle/>
-          <a:p>
-            <a:fld id="{6D665937-FCC7-47CE-8B46-06F747D53510}" type="slidenum">
-              <a:rPr lang="zh-CN" altLang="en-US" smtClean="0"/>
-            </a:fld>
+          <a:p>
             <a:endParaRPr lang="zh-CN" altLang="en-US"/>
           </a:p>
         </p:txBody>
@@ -1978,7 +1970,181 @@
 </p:notes>
 </file>
 
+<file path=ppt/notesSlides/notesSlide29.xml><?xml version="1.0" encoding="utf-8"?>
+<p:notes xmlns:a="http://schemas.openxmlformats.org/drawingml/2006/main" xmlns:r="http://schemas.openxmlformats.org/officeDocument/2006/relationships" xmlns:p="http://schemas.openxmlformats.org/presentationml/2006/main">
+  <p:cSld>
+    <p:spTree>
+      <p:nvGrpSpPr>
+        <p:cNvPr id="1" name=""/>
+        <p:cNvGrpSpPr/>
+        <p:nvPr/>
+      </p:nvGrpSpPr>
+      <p:grpSpPr/>
+      <p:sp>
+        <p:nvSpPr>
+          <p:cNvPr id="2" name="幻灯片图像占位符 1"/>
+          <p:cNvSpPr>
+            <a:spLocks noGrp="1"/>
+          </p:cNvSpPr>
+          <p:nvPr>
+            <p:ph type="sldImg" idx="2"/>
+          </p:nvPr>
+        </p:nvSpPr>
+        <p:spPr/>
+      </p:sp>
+      <p:sp>
+        <p:nvSpPr>
+          <p:cNvPr id="3" name="文本占位符 2"/>
+          <p:cNvSpPr>
+            <a:spLocks noGrp="1"/>
+          </p:cNvSpPr>
+          <p:nvPr>
+            <p:ph type="body" idx="3"/>
+          </p:nvPr>
+        </p:nvSpPr>
+        <p:spPr/>
+        <p:txBody>
+          <a:bodyPr/>
+          <a:p>
+            <a:endParaRPr lang="zh-CN" altLang="en-US"/>
+          </a:p>
+        </p:txBody>
+      </p:sp>
+    </p:spTree>
+  </p:cSld>
+  <p:clrMapOvr>
+    <a:masterClrMapping/>
+  </p:clrMapOvr>
+</p:notes>
+</file>
+
 <file path=ppt/notesSlides/notesSlide3.xml><?xml version="1.0" encoding="utf-8"?>
+<p:notes xmlns:a="http://schemas.openxmlformats.org/drawingml/2006/main" xmlns:r="http://schemas.openxmlformats.org/officeDocument/2006/relationships" xmlns:p="http://schemas.openxmlformats.org/presentationml/2006/main">
+  <p:cSld>
+    <p:spTree>
+      <p:nvGrpSpPr>
+        <p:cNvPr id="1" name=""/>
+        <p:cNvGrpSpPr/>
+        <p:nvPr/>
+      </p:nvGrpSpPr>
+      <p:grpSpPr/>
+      <p:sp>
+        <p:nvSpPr>
+          <p:cNvPr id="2" name="幻灯片图像占位符 1"/>
+          <p:cNvSpPr>
+            <a:spLocks noGrp="1"/>
+          </p:cNvSpPr>
+          <p:nvPr>
+            <p:ph type="sldImg" idx="2"/>
+          </p:nvPr>
+        </p:nvSpPr>
+        <p:spPr/>
+      </p:sp>
+      <p:sp>
+        <p:nvSpPr>
+          <p:cNvPr id="3" name="文本占位符 2"/>
+          <p:cNvSpPr>
+            <a:spLocks noGrp="1"/>
+          </p:cNvSpPr>
+          <p:nvPr>
+            <p:ph type="body" idx="3"/>
+          </p:nvPr>
+        </p:nvSpPr>
+        <p:spPr/>
+        <p:txBody>
+          <a:bodyPr/>
+          <a:p>
+            <a:endParaRPr lang="zh-CN" altLang="en-US"/>
+          </a:p>
+        </p:txBody>
+      </p:sp>
+    </p:spTree>
+  </p:cSld>
+  <p:clrMapOvr>
+    <a:masterClrMapping/>
+  </p:clrMapOvr>
+</p:notes>
+</file>
+
+<file path=ppt/notesSlides/notesSlide30.xml><?xml version="1.0" encoding="utf-8"?>
+<p:notes xmlns:a="http://schemas.openxmlformats.org/drawingml/2006/main" xmlns:r="http://schemas.openxmlformats.org/officeDocument/2006/relationships" xmlns:p="http://schemas.openxmlformats.org/presentationml/2006/main">
+  <p:cSld>
+    <p:spTree>
+      <p:nvGrpSpPr>
+        <p:cNvPr id="1" name=""/>
+        <p:cNvGrpSpPr/>
+        <p:nvPr/>
+      </p:nvGrpSpPr>
+      <p:grpSpPr>
+        <a:xfrm>
+          <a:off x="0" y="0"/>
+          <a:ext cx="0" cy="0"/>
+          <a:chOff x="0" y="0"/>
+          <a:chExt cx="0" cy="0"/>
+        </a:xfrm>
+      </p:grpSpPr>
+      <p:sp>
+        <p:nvSpPr>
+          <p:cNvPr id="2" name="幻灯片图像占位符 1"/>
+          <p:cNvSpPr>
+            <a:spLocks noGrp="1" noRot="1" noChangeAspect="1"/>
+          </p:cNvSpPr>
+          <p:nvPr>
+            <p:ph type="sldImg"/>
+          </p:nvPr>
+        </p:nvSpPr>
+        <p:spPr/>
+      </p:sp>
+      <p:sp>
+        <p:nvSpPr>
+          <p:cNvPr id="3" name="备注占位符 2"/>
+          <p:cNvSpPr>
+            <a:spLocks noGrp="1"/>
+          </p:cNvSpPr>
+          <p:nvPr>
+            <p:ph type="body" idx="1"/>
+          </p:nvPr>
+        </p:nvSpPr>
+        <p:spPr/>
+        <p:txBody>
+          <a:bodyPr/>
+          <a:lstStyle/>
+          <a:p>
+            <a:endParaRPr lang="zh-CN" altLang="en-US" dirty="0"/>
+          </a:p>
+        </p:txBody>
+      </p:sp>
+      <p:sp>
+        <p:nvSpPr>
+          <p:cNvPr id="4" name="灯片编号占位符 3"/>
+          <p:cNvSpPr>
+            <a:spLocks noGrp="1"/>
+          </p:cNvSpPr>
+          <p:nvPr>
+            <p:ph type="sldNum" sz="quarter" idx="5"/>
+          </p:nvPr>
+        </p:nvSpPr>
+        <p:spPr/>
+        <p:txBody>
+          <a:bodyPr/>
+          <a:lstStyle/>
+          <a:p>
+            <a:fld id="{6D665937-FCC7-47CE-8B46-06F747D53510}" type="slidenum">
+              <a:rPr lang="zh-CN" altLang="en-US" smtClean="0"/>
+            </a:fld>
+            <a:endParaRPr lang="zh-CN" altLang="en-US"/>
+          </a:p>
+        </p:txBody>
+      </p:sp>
+    </p:spTree>
+  </p:cSld>
+  <p:clrMapOvr>
+    <a:masterClrMapping/>
+  </p:clrMapOvr>
+</p:notes>
+</file>
+
+<file path=ppt/notesSlides/notesSlide31.xml><?xml version="1.0" encoding="utf-8"?>
 <p:notes xmlns:a="http://schemas.openxmlformats.org/drawingml/2006/main" xmlns:r="http://schemas.openxmlformats.org/officeDocument/2006/relationships" xmlns:p="http://schemas.openxmlformats.org/presentationml/2006/main">
   <p:cSld>
     <p:spTree>
@@ -2131,33 +2297,81 @@
         <p:cNvGrpSpPr/>
         <p:nvPr/>
       </p:nvGrpSpPr>
-      <p:grpSpPr/>
+      <p:grpSpPr>
+        <a:xfrm>
+          <a:off x="0" y="0"/>
+          <a:ext cx="0" cy="0"/>
+          <a:chOff x="0" y="0"/>
+          <a:chExt cx="0" cy="0"/>
+        </a:xfrm>
+      </p:grpSpPr>
       <p:sp>
         <p:nvSpPr>
           <p:cNvPr id="2" name="幻灯片图像占位符 1"/>
           <p:cNvSpPr>
-            <a:spLocks noGrp="1"/>
-          </p:cNvSpPr>
-          <p:nvPr>
-            <p:ph type="sldImg" idx="2"/>
+            <a:spLocks noGrp="1" noRot="1" noChangeAspect="1"/>
+          </p:cNvSpPr>
+          <p:nvPr>
+            <p:ph type="sldImg"/>
           </p:nvPr>
         </p:nvSpPr>
         <p:spPr/>
       </p:sp>
       <p:sp>
         <p:nvSpPr>
-          <p:cNvPr id="3" name="文本占位符 2"/>
-          <p:cNvSpPr>
-            <a:spLocks noGrp="1"/>
-          </p:cNvSpPr>
-          <p:nvPr>
-            <p:ph type="body" idx="3"/>
+          <p:cNvPr id="3" name="备注占位符 2"/>
+          <p:cNvSpPr>
+            <a:spLocks noGrp="1"/>
+          </p:cNvSpPr>
+          <p:nvPr>
+            <p:ph type="body" idx="1"/>
           </p:nvPr>
         </p:nvSpPr>
         <p:spPr/>
         <p:txBody>
           <a:bodyPr/>
-          <a:p>
+          <a:lstStyle/>
+          <a:p>
+            <a:pPr marL="0" marR="0" lvl="0" indent="0" algn="l" defTabSz="687705" rtl="0" eaLnBrk="1" fontAlgn="auto" latinLnBrk="0" hangingPunct="1">
+              <a:lnSpc>
+                <a:spcPct val="100000"/>
+              </a:lnSpc>
+              <a:spcBef>
+                <a:spcPts val="0"/>
+              </a:spcBef>
+              <a:spcAft>
+                <a:spcPts val="0"/>
+              </a:spcAft>
+              <a:buClrTx/>
+              <a:buSzTx/>
+              <a:buFontTx/>
+              <a:buNone/>
+              <a:defRPr/>
+            </a:pPr>
+            <a:endParaRPr lang="zh-CN" altLang="en-US" dirty="0">
+              <a:effectLst/>
+            </a:endParaRPr>
+          </a:p>
+        </p:txBody>
+      </p:sp>
+      <p:sp>
+        <p:nvSpPr>
+          <p:cNvPr id="4" name="灯片编号占位符 3"/>
+          <p:cNvSpPr>
+            <a:spLocks noGrp="1"/>
+          </p:cNvSpPr>
+          <p:nvPr>
+            <p:ph type="sldNum" sz="quarter" idx="10"/>
+          </p:nvPr>
+        </p:nvSpPr>
+        <p:spPr/>
+        <p:txBody>
+          <a:bodyPr/>
+          <a:lstStyle/>
+          <a:p>
+            <a:fld id="{6D665937-FCC7-47CE-8B46-06F747D53510}" type="slidenum">
+              <a:rPr lang="zh-CN" altLang="en-US" smtClean="0"/>
+            </a:fld>
             <a:endParaRPr lang="zh-CN" altLang="en-US"/>
           </a:p>
         </p:txBody>
@@ -2179,79 +2393,33 @@
         <p:cNvGrpSpPr/>
         <p:nvPr/>
       </p:nvGrpSpPr>
-      <p:grpSpPr>
-        <a:xfrm>
-          <a:off x="0" y="0"/>
-          <a:ext cx="0" cy="0"/>
-          <a:chOff x="0" y="0"/>
-          <a:chExt cx="0" cy="0"/>
-        </a:xfrm>
-      </p:grpSpPr>
+      <p:grpSpPr/>
       <p:sp>
         <p:nvSpPr>
           <p:cNvPr id="2" name="幻灯片图像占位符 1"/>
           <p:cNvSpPr>
-            <a:spLocks noGrp="1" noRot="1" noChangeAspect="1"/>
-          </p:cNvSpPr>
-          <p:nvPr>
-            <p:ph type="sldImg"/>
+            <a:spLocks noGrp="1"/>
+          </p:cNvSpPr>
+          <p:nvPr>
+            <p:ph type="sldImg" idx="2"/>
           </p:nvPr>
         </p:nvSpPr>
         <p:spPr/>
       </p:sp>
       <p:sp>
         <p:nvSpPr>
-          <p:cNvPr id="3" name="备注占位符 2"/>
-          <p:cNvSpPr>
-            <a:spLocks noGrp="1"/>
-          </p:cNvSpPr>
-          <p:nvPr>
-            <p:ph type="body" idx="1"/>
+          <p:cNvPr id="3" name="文本占位符 2"/>
+          <p:cNvSpPr>
+            <a:spLocks noGrp="1"/>
+          </p:cNvSpPr>
+          <p:nvPr>
+            <p:ph type="body" idx="3"/>
           </p:nvPr>
         </p:nvSpPr>
         <p:spPr/>
         <p:txBody>
           <a:bodyPr/>
-          <a:lstStyle/>
-          <a:p>
-            <a:pPr marL="0" marR="0" lvl="0" indent="0" algn="l" defTabSz="687705" rtl="0" eaLnBrk="1" fontAlgn="auto" latinLnBrk="0" hangingPunct="1">
-              <a:lnSpc>
-                <a:spcPct val="100000"/>
-              </a:lnSpc>
-              <a:spcBef>
-                <a:spcPts val="0"/>
-              </a:spcBef>
-              <a:spcAft>
-                <a:spcPts val="0"/>
-              </a:spcAft>
-              <a:buClrTx/>
-              <a:buSzTx/>
-              <a:buFontTx/>
-              <a:buNone/>
-              <a:defRPr/>
-            </a:pPr>
-            <a:endParaRPr lang="zh-CN" altLang="en-US" dirty="0"/>
-          </a:p>
-        </p:txBody>
-      </p:sp>
-      <p:sp>
-        <p:nvSpPr>
-          <p:cNvPr id="4" name="灯片编号占位符 3"/>
-          <p:cNvSpPr>
-            <a:spLocks noGrp="1"/>
-          </p:cNvSpPr>
-          <p:nvPr>
-            <p:ph type="sldNum" sz="quarter" idx="10"/>
-          </p:nvPr>
-        </p:nvSpPr>
-        <p:spPr/>
-        <p:txBody>
-          <a:bodyPr/>
-          <a:lstStyle/>
-          <a:p>
-            <a:fld id="{6D665937-FCC7-47CE-8B46-06F747D53510}" type="slidenum">
-              <a:rPr lang="zh-CN" altLang="en-US" smtClean="0"/>
-            </a:fld>
+          <a:p>
             <a:endParaRPr lang="zh-CN" altLang="en-US"/>
           </a:p>
         </p:txBody>
@@ -2288,19 +2456,19 @@
             <a:spLocks noGrp="1" noRot="1" noChangeAspect="1"/>
           </p:cNvSpPr>
           <p:nvPr>
-            <p:ph type="sldImg" idx="2"/>
+            <p:ph type="sldImg"/>
           </p:nvPr>
         </p:nvSpPr>
         <p:spPr/>
       </p:sp>
       <p:sp>
         <p:nvSpPr>
-          <p:cNvPr id="3" name="文本占位符 2"/>
-          <p:cNvSpPr>
-            <a:spLocks noGrp="1"/>
-          </p:cNvSpPr>
-          <p:nvPr>
-            <p:ph type="body" idx="3"/>
+          <p:cNvPr id="3" name="备注占位符 2"/>
+          <p:cNvSpPr>
+            <a:spLocks noGrp="1"/>
+          </p:cNvSpPr>
+          <p:nvPr>
+            <p:ph type="body" idx="1"/>
           </p:nvPr>
         </p:nvSpPr>
         <p:spPr/>
@@ -2308,7 +2476,47 @@
           <a:bodyPr/>
           <a:lstStyle/>
           <a:p>
-            <a:endParaRPr lang="zh-CN" altLang="en-US" dirty="0"/>
+            <a:pPr marL="0" marR="0" lvl="0" indent="0" algn="l" defTabSz="687705" rtl="0" eaLnBrk="1" fontAlgn="auto" latinLnBrk="0" hangingPunct="1">
+              <a:lnSpc>
+                <a:spcPct val="100000"/>
+              </a:lnSpc>
+              <a:spcBef>
+                <a:spcPts val="0"/>
+              </a:spcBef>
+              <a:spcAft>
+                <a:spcPts val="0"/>
+              </a:spcAft>
+              <a:buClrTx/>
+              <a:buSzTx/>
+              <a:buFontTx/>
+              <a:buNone/>
+              <a:defRPr/>
+            </a:pPr>
+            <a:endParaRPr lang="zh-CN" altLang="en-US" dirty="0">
+              <a:effectLst/>
+            </a:endParaRPr>
+          </a:p>
+        </p:txBody>
+      </p:sp>
+      <p:sp>
+        <p:nvSpPr>
+          <p:cNvPr id="4" name="灯片编号占位符 3"/>
+          <p:cNvSpPr>
+            <a:spLocks noGrp="1"/>
+          </p:cNvSpPr>
+          <p:nvPr>
+            <p:ph type="sldNum" sz="quarter" idx="10"/>
+          </p:nvPr>
+        </p:nvSpPr>
+        <p:spPr/>
+        <p:txBody>
+          <a:bodyPr/>
+          <a:lstStyle/>
+          <a:p>
+            <a:fld id="{6D665937-FCC7-47CE-8B46-06F747D53510}" type="slidenum">
+              <a:rPr lang="zh-CN" altLang="en-US" smtClean="0"/>
+            </a:fld>
+            <a:endParaRPr lang="zh-CN" altLang="en-US"/>
           </a:p>
         </p:txBody>
       </p:sp>
@@ -2344,19 +2552,19 @@
             <a:spLocks noGrp="1" noRot="1" noChangeAspect="1"/>
           </p:cNvSpPr>
           <p:nvPr>
-            <p:ph type="sldImg" idx="2"/>
+            <p:ph type="sldImg"/>
           </p:nvPr>
         </p:nvSpPr>
         <p:spPr/>
       </p:sp>
       <p:sp>
         <p:nvSpPr>
-          <p:cNvPr id="3" name="文本占位符 2"/>
-          <p:cNvSpPr>
-            <a:spLocks noGrp="1"/>
-          </p:cNvSpPr>
-          <p:nvPr>
-            <p:ph type="body" idx="3"/>
+          <p:cNvPr id="3" name="备注占位符 2"/>
+          <p:cNvSpPr>
+            <a:spLocks noGrp="1"/>
+          </p:cNvSpPr>
+          <p:nvPr>
+            <p:ph type="body" idx="1"/>
           </p:nvPr>
         </p:nvSpPr>
         <p:spPr/>
@@ -2364,7 +2572,47 @@
           <a:bodyPr/>
           <a:lstStyle/>
           <a:p>
-            <a:endParaRPr lang="zh-CN" altLang="en-US" dirty="0"/>
+            <a:pPr marL="0" marR="0" lvl="0" indent="0" algn="l" defTabSz="687705" rtl="0" eaLnBrk="1" fontAlgn="auto" latinLnBrk="0" hangingPunct="1">
+              <a:lnSpc>
+                <a:spcPct val="100000"/>
+              </a:lnSpc>
+              <a:spcBef>
+                <a:spcPts val="0"/>
+              </a:spcBef>
+              <a:spcAft>
+                <a:spcPts val="0"/>
+              </a:spcAft>
+              <a:buClrTx/>
+              <a:buSzTx/>
+              <a:buFontTx/>
+              <a:buNone/>
+              <a:defRPr/>
+            </a:pPr>
+            <a:endParaRPr lang="zh-CN" altLang="en-US" dirty="0">
+              <a:effectLst/>
+            </a:endParaRPr>
+          </a:p>
+        </p:txBody>
+      </p:sp>
+      <p:sp>
+        <p:nvSpPr>
+          <p:cNvPr id="4" name="灯片编号占位符 3"/>
+          <p:cNvSpPr>
+            <a:spLocks noGrp="1"/>
+          </p:cNvSpPr>
+          <p:nvPr>
+            <p:ph type="sldNum" sz="quarter" idx="10"/>
+          </p:nvPr>
+        </p:nvSpPr>
+        <p:spPr/>
+        <p:txBody>
+          <a:bodyPr/>
+          <a:lstStyle/>
+          <a:p>
+            <a:fld id="{6D665937-FCC7-47CE-8B46-06F747D53510}" type="slidenum">
+              <a:rPr lang="zh-CN" altLang="en-US" smtClean="0"/>
+            </a:fld>
+            <a:endParaRPr lang="zh-CN" altLang="en-US"/>
           </a:p>
         </p:txBody>
       </p:sp>
@@ -2385,33 +2633,79 @@
         <p:cNvGrpSpPr/>
         <p:nvPr/>
       </p:nvGrpSpPr>
-      <p:grpSpPr/>
+      <p:grpSpPr>
+        <a:xfrm>
+          <a:off x="0" y="0"/>
+          <a:ext cx="0" cy="0"/>
+          <a:chOff x="0" y="0"/>
+          <a:chExt cx="0" cy="0"/>
+        </a:xfrm>
+      </p:grpSpPr>
       <p:sp>
         <p:nvSpPr>
           <p:cNvPr id="2" name="幻灯片图像占位符 1"/>
           <p:cNvSpPr>
-            <a:spLocks noGrp="1"/>
-          </p:cNvSpPr>
-          <p:nvPr>
-            <p:ph type="sldImg" idx="2"/>
+            <a:spLocks noGrp="1" noRot="1" noChangeAspect="1"/>
+          </p:cNvSpPr>
+          <p:nvPr>
+            <p:ph type="sldImg"/>
           </p:nvPr>
         </p:nvSpPr>
         <p:spPr/>
       </p:sp>
       <p:sp>
         <p:nvSpPr>
-          <p:cNvPr id="3" name="文本占位符 2"/>
-          <p:cNvSpPr>
-            <a:spLocks noGrp="1"/>
-          </p:cNvSpPr>
-          <p:nvPr>
-            <p:ph type="body" idx="3"/>
+          <p:cNvPr id="3" name="备注占位符 2"/>
+          <p:cNvSpPr>
+            <a:spLocks noGrp="1"/>
+          </p:cNvSpPr>
+          <p:nvPr>
+            <p:ph type="body" idx="1"/>
           </p:nvPr>
         </p:nvSpPr>
         <p:spPr/>
         <p:txBody>
           <a:bodyPr/>
-          <a:p>
+          <a:lstStyle/>
+          <a:p>
+            <a:pPr marL="0" marR="0" lvl="0" indent="0" algn="l" defTabSz="687705" rtl="0" eaLnBrk="1" fontAlgn="auto" latinLnBrk="0" hangingPunct="1">
+              <a:lnSpc>
+                <a:spcPct val="100000"/>
+              </a:lnSpc>
+              <a:spcBef>
+                <a:spcPts val="0"/>
+              </a:spcBef>
+              <a:spcAft>
+                <a:spcPts val="0"/>
+              </a:spcAft>
+              <a:buClrTx/>
+              <a:buSzTx/>
+              <a:buFontTx/>
+              <a:buNone/>
+              <a:defRPr/>
+            </a:pPr>
+            <a:endParaRPr lang="zh-CN" altLang="en-US" dirty="0"/>
+          </a:p>
+        </p:txBody>
+      </p:sp>
+      <p:sp>
+        <p:nvSpPr>
+          <p:cNvPr id="4" name="灯片编号占位符 3"/>
+          <p:cNvSpPr>
+            <a:spLocks noGrp="1"/>
+          </p:cNvSpPr>
+          <p:nvPr>
+            <p:ph type="sldNum" sz="quarter" idx="10"/>
+          </p:nvPr>
+        </p:nvSpPr>
+        <p:spPr/>
+        <p:txBody>
+          <a:bodyPr/>
+          <a:lstStyle/>
+          <a:p>
+            <a:fld id="{6D665937-FCC7-47CE-8B46-06F747D53510}" type="slidenum">
+              <a:rPr lang="zh-CN" altLang="en-US" smtClean="0"/>
+            </a:fld>
             <a:endParaRPr lang="zh-CN" altLang="en-US"/>
           </a:p>
         </p:txBody>
@@ -13685,6 +13979,590 @@
       </p:grpSpPr>
       <p:sp>
         <p:nvSpPr>
+          <p:cNvPr id="3" name="日期占位符 2"/>
+          <p:cNvSpPr>
+            <a:spLocks noGrp="1"/>
+          </p:cNvSpPr>
+          <p:nvPr>
+            <p:ph type="dt" sz="half" idx="10"/>
+          </p:nvPr>
+        </p:nvSpPr>
+        <p:spPr/>
+        <p:txBody>
+          <a:bodyPr/>
+          <a:lstStyle/>
+          <a:p>
+            <a:fld id="{137329C2-3C36-4069-9E85-5BF3A0DCB578}" type="datetime1">
+              <a:rPr lang="zh-CN" altLang="en-US" smtClean="0"/>
+            </a:fld>
+            <a:endParaRPr lang="zh-CN" altLang="en-US" dirty="0"/>
+          </a:p>
+        </p:txBody>
+      </p:sp>
+      <p:sp>
+        <p:nvSpPr>
+          <p:cNvPr id="4" name="灯片编号占位符 3"/>
+          <p:cNvSpPr>
+            <a:spLocks noGrp="1"/>
+          </p:cNvSpPr>
+          <p:nvPr>
+            <p:ph type="sldNum" sz="quarter" idx="11"/>
+          </p:nvPr>
+        </p:nvSpPr>
+        <p:spPr/>
+        <p:txBody>
+          <a:bodyPr/>
+          <a:lstStyle/>
+          <a:p>
+            <a:fld id="{463E1EE8-403A-4D2D-AB26-5BF439A27F60}" type="slidenum">
+              <a:rPr lang="zh-CN" altLang="en-US" smtClean="0"/>
+            </a:fld>
+            <a:endParaRPr lang="zh-CN" altLang="en-US" dirty="0"/>
+          </a:p>
+        </p:txBody>
+      </p:sp>
+      <p:sp>
+        <p:nvSpPr>
+          <p:cNvPr id="7" name="文本框 6"/>
+          <p:cNvSpPr txBox="1"/>
+          <p:nvPr/>
+        </p:nvSpPr>
+        <p:spPr>
+          <a:xfrm>
+            <a:off x="351155" y="616585"/>
+            <a:ext cx="5965825" cy="1658620"/>
+          </a:xfrm>
+          <a:prstGeom prst="rect">
+            <a:avLst/>
+          </a:prstGeom>
+          <a:noFill/>
+        </p:spPr>
+        <p:txBody>
+          <a:bodyPr wrap="square" rtlCol="0">
+            <a:spAutoFit/>
+          </a:bodyPr>
+          <a:lstStyle/>
+          <a:p>
+            <a:pPr marL="285750" indent="-285750">
+              <a:buFont typeface="Wingdings" panose="05000000000000000000" charset="0"/>
+              <a:buChar char="n"/>
+            </a:pPr>
+            <a:r>
+              <a:rPr lang="zh-CN" altLang="en-US"/>
+              <a:t>常见技术路线</a:t>
+            </a:r>
+            <a:r>
+              <a:rPr lang="en-US" altLang="zh-CN"/>
+              <a:t>-Medusa</a:t>
+            </a:r>
+            <a:r>
+              <a:rPr lang="zh-CN" altLang="en-US"/>
+              <a:t>框架</a:t>
+            </a:r>
+            <a:endParaRPr lang="zh-CN" altLang="en-US"/>
+          </a:p>
+          <a:p>
+            <a:pPr marL="285750" indent="-285750">
+              <a:buFont typeface="Wingdings" panose="05000000000000000000" charset="0"/>
+              <a:buChar char="n"/>
+            </a:pPr>
+            <a:endParaRPr lang="zh-CN" altLang="en-US"/>
+          </a:p>
+          <a:p>
+            <a:pPr marL="742950" lvl="1" indent="-285750">
+              <a:lnSpc>
+                <a:spcPct val="150000"/>
+              </a:lnSpc>
+              <a:buFont typeface="Arial" panose="020B0604020202020204" pitchFamily="34" charset="0"/>
+              <a:buChar char="•"/>
+            </a:pPr>
+            <a:r>
+              <a:rPr lang="zh-CN" altLang="en-US" dirty="0">
+                <a:sym typeface="+mn-ea"/>
+              </a:rPr>
+              <a:t>多个解码头：每个解码头负责预测下一个或后续若干个</a:t>
+            </a:r>
+            <a:r>
+              <a:rPr lang="en-US" altLang="zh-CN" dirty="0">
+                <a:sym typeface="+mn-ea"/>
+              </a:rPr>
+              <a:t> Token</a:t>
+            </a:r>
+            <a:endParaRPr lang="en-US" altLang="zh-CN" dirty="0">
+              <a:sym typeface="+mn-ea"/>
+            </a:endParaRPr>
+          </a:p>
+          <a:p>
+            <a:pPr marL="285750" indent="-285750">
+              <a:lnSpc>
+                <a:spcPct val="150000"/>
+              </a:lnSpc>
+              <a:buFont typeface="Arial" panose="020B0604020202020204" pitchFamily="34" charset="0"/>
+              <a:buChar char="•"/>
+            </a:pPr>
+            <a:endParaRPr lang="en-US" altLang="zh-CN" dirty="0">
+              <a:sym typeface="+mn-ea"/>
+            </a:endParaRPr>
+          </a:p>
+          <a:p>
+            <a:pPr marL="742950" lvl="1" indent="-285750">
+              <a:lnSpc>
+                <a:spcPct val="150000"/>
+              </a:lnSpc>
+              <a:buFont typeface="Arial" panose="020B0604020202020204" pitchFamily="34" charset="0"/>
+              <a:buChar char="•"/>
+            </a:pPr>
+            <a:r>
+              <a:rPr lang="zh-CN" altLang="en-US" dirty="0">
+                <a:sym typeface="+mn-ea"/>
+              </a:rPr>
+              <a:t>树型注意力：关注各自前驱</a:t>
+            </a:r>
+            <a:endParaRPr lang="en-US" altLang="zh-CN" dirty="0">
+              <a:sym typeface="+mn-ea"/>
+            </a:endParaRPr>
+          </a:p>
+          <a:p>
+            <a:pPr marL="285750" indent="-285750">
+              <a:buFont typeface="Wingdings" panose="05000000000000000000" charset="0"/>
+              <a:buChar char="n"/>
+            </a:pPr>
+            <a:endParaRPr lang="zh-CN" altLang="en-US"/>
+          </a:p>
+        </p:txBody>
+      </p:sp>
+      <p:pic>
+        <p:nvPicPr>
+          <p:cNvPr id="2" name="图片 1"/>
+          <p:cNvPicPr>
+            <a:picLocks noChangeAspect="1"/>
+          </p:cNvPicPr>
+          <p:nvPr/>
+        </p:nvPicPr>
+        <p:blipFill>
+          <a:blip r:embed="rId1"/>
+          <a:stretch>
+            <a:fillRect/>
+          </a:stretch>
+        </p:blipFill>
+        <p:spPr>
+          <a:xfrm>
+            <a:off x="0" y="2472690"/>
+            <a:ext cx="3281045" cy="2287270"/>
+          </a:xfrm>
+          <a:prstGeom prst="rect">
+            <a:avLst/>
+          </a:prstGeom>
+        </p:spPr>
+      </p:pic>
+      <p:pic>
+        <p:nvPicPr>
+          <p:cNvPr id="5" name="图片 4"/>
+          <p:cNvPicPr>
+            <a:picLocks noChangeAspect="1"/>
+          </p:cNvPicPr>
+          <p:nvPr/>
+        </p:nvPicPr>
+        <p:blipFill>
+          <a:blip r:embed="rId2"/>
+          <a:stretch>
+            <a:fillRect/>
+          </a:stretch>
+        </p:blipFill>
+        <p:spPr>
+          <a:xfrm>
+            <a:off x="3432175" y="2680335"/>
+            <a:ext cx="3288665" cy="2028190"/>
+          </a:xfrm>
+          <a:prstGeom prst="rect">
+            <a:avLst/>
+          </a:prstGeom>
+        </p:spPr>
+      </p:pic>
+    </p:spTree>
+  </p:cSld>
+  <p:clrMapOvr>
+    <a:masterClrMapping/>
+  </p:clrMapOvr>
+</p:sld>
+</file>
+
+<file path=ppt/slides/slide11.xml><?xml version="1.0" encoding="utf-8"?>
+<p:sld xmlns:a="http://schemas.openxmlformats.org/drawingml/2006/main" xmlns:r="http://schemas.openxmlformats.org/officeDocument/2006/relationships" xmlns:p="http://schemas.openxmlformats.org/presentationml/2006/main">
+  <p:cSld>
+    <p:spTree>
+      <p:nvGrpSpPr>
+        <p:cNvPr id="1" name=""/>
+        <p:cNvGrpSpPr/>
+        <p:nvPr/>
+      </p:nvGrpSpPr>
+      <p:grpSpPr>
+        <a:xfrm>
+          <a:off x="0" y="0"/>
+          <a:ext cx="0" cy="0"/>
+          <a:chOff x="0" y="0"/>
+          <a:chExt cx="0" cy="0"/>
+        </a:xfrm>
+      </p:grpSpPr>
+      <p:sp>
+        <p:nvSpPr>
+          <p:cNvPr id="3" name="日期占位符 2"/>
+          <p:cNvSpPr>
+            <a:spLocks noGrp="1"/>
+          </p:cNvSpPr>
+          <p:nvPr>
+            <p:ph type="dt" sz="half" idx="10"/>
+          </p:nvPr>
+        </p:nvSpPr>
+        <p:spPr/>
+        <p:txBody>
+          <a:bodyPr/>
+          <a:lstStyle/>
+          <a:p>
+            <a:fld id="{137329C2-3C36-4069-9E85-5BF3A0DCB578}" type="datetime1">
+              <a:rPr lang="zh-CN" altLang="en-US" smtClean="0"/>
+            </a:fld>
+            <a:endParaRPr lang="zh-CN" altLang="en-US" dirty="0"/>
+          </a:p>
+        </p:txBody>
+      </p:sp>
+      <p:sp>
+        <p:nvSpPr>
+          <p:cNvPr id="4" name="灯片编号占位符 3"/>
+          <p:cNvSpPr>
+            <a:spLocks noGrp="1"/>
+          </p:cNvSpPr>
+          <p:nvPr>
+            <p:ph type="sldNum" sz="quarter" idx="11"/>
+          </p:nvPr>
+        </p:nvSpPr>
+        <p:spPr/>
+        <p:txBody>
+          <a:bodyPr/>
+          <a:lstStyle/>
+          <a:p>
+            <a:fld id="{463E1EE8-403A-4D2D-AB26-5BF439A27F60}" type="slidenum">
+              <a:rPr lang="zh-CN" altLang="en-US" smtClean="0"/>
+            </a:fld>
+            <a:endParaRPr lang="zh-CN" altLang="en-US" dirty="0"/>
+          </a:p>
+        </p:txBody>
+      </p:sp>
+      <p:sp>
+        <p:nvSpPr>
+          <p:cNvPr id="7" name="文本框 6"/>
+          <p:cNvSpPr txBox="1"/>
+          <p:nvPr/>
+        </p:nvSpPr>
+        <p:spPr>
+          <a:xfrm>
+            <a:off x="432435" y="415290"/>
+            <a:ext cx="6909435" cy="2599690"/>
+          </a:xfrm>
+          <a:prstGeom prst="rect">
+            <a:avLst/>
+          </a:prstGeom>
+          <a:noFill/>
+        </p:spPr>
+        <p:txBody>
+          <a:bodyPr wrap="square" rtlCol="0">
+            <a:spAutoFit/>
+          </a:bodyPr>
+          <a:lstStyle/>
+          <a:p>
+            <a:pPr marL="285750" indent="-285750">
+              <a:buFont typeface="Wingdings" panose="05000000000000000000" charset="0"/>
+              <a:buChar char="n"/>
+            </a:pPr>
+            <a:r>
+              <a:rPr lang="zh-CN" altLang="en-US" dirty="0"/>
+              <a:t>常见技术路线</a:t>
+            </a:r>
+            <a:r>
+              <a:rPr lang="en-US" altLang="zh-CN" dirty="0"/>
+              <a:t>-</a:t>
+            </a:r>
+            <a:r>
+              <a:rPr lang="zh-CN" altLang="en-US" dirty="0"/>
+              <a:t>投机解码</a:t>
+            </a:r>
+            <a:endParaRPr lang="zh-CN" altLang="en-US" dirty="0"/>
+          </a:p>
+          <a:p>
+            <a:pPr marL="285750" indent="-285750">
+              <a:buFont typeface="Wingdings" panose="05000000000000000000" charset="0"/>
+              <a:buChar char="n"/>
+            </a:pPr>
+            <a:endParaRPr lang="zh-CN" altLang="en-US" dirty="0"/>
+          </a:p>
+          <a:p>
+            <a:pPr marL="742950" lvl="1" indent="-285750">
+              <a:lnSpc>
+                <a:spcPct val="150000"/>
+              </a:lnSpc>
+              <a:buFont typeface="Arial" panose="020B0604020202020204" pitchFamily="34" charset="0"/>
+              <a:buChar char="•"/>
+            </a:pPr>
+            <a:r>
+              <a:rPr lang="zh-CN" altLang="en-US" dirty="0">
+                <a:sym typeface="+mn-ea"/>
+              </a:rPr>
+              <a:t>草稿模型生成候选</a:t>
+            </a:r>
+            <a:r>
+              <a:rPr lang="en-US" altLang="zh-CN" dirty="0">
+                <a:sym typeface="+mn-ea"/>
+              </a:rPr>
+              <a:t>token</a:t>
+            </a:r>
+            <a:r>
+              <a:rPr lang="zh-CN" altLang="en-US" dirty="0">
+                <a:sym typeface="+mn-ea"/>
+              </a:rPr>
+              <a:t>，大模型验证</a:t>
+            </a:r>
+            <a:endParaRPr lang="zh-CN" altLang="en-US" dirty="0">
+              <a:sym typeface="+mn-ea"/>
+            </a:endParaRPr>
+          </a:p>
+          <a:p>
+            <a:pPr marL="742950" lvl="1" indent="-285750">
+              <a:lnSpc>
+                <a:spcPct val="150000"/>
+              </a:lnSpc>
+              <a:buFont typeface="Arial" panose="020B0604020202020204" pitchFamily="34" charset="0"/>
+              <a:buChar char="•"/>
+            </a:pPr>
+            <a:r>
+              <a:rPr lang="zh-CN" altLang="en-US" dirty="0">
+                <a:sym typeface="+mn-ea"/>
+              </a:rPr>
+              <a:t>缺点：高度依赖草稿模型、难以集成</a:t>
+            </a:r>
+            <a:endParaRPr lang="zh-CN" altLang="en-US" dirty="0">
+              <a:sym typeface="+mn-ea"/>
+            </a:endParaRPr>
+          </a:p>
+          <a:p>
+            <a:pPr marL="742950" lvl="1" indent="-285750">
+              <a:lnSpc>
+                <a:spcPct val="150000"/>
+              </a:lnSpc>
+              <a:buFont typeface="Arial" panose="020B0604020202020204" pitchFamily="34" charset="0"/>
+              <a:buChar char="•"/>
+            </a:pPr>
+            <a:endParaRPr lang="zh-CN" altLang="en-US" dirty="0">
+              <a:sym typeface="+mn-ea"/>
+            </a:endParaRPr>
+          </a:p>
+          <a:p>
+            <a:pPr marL="0" lvl="1" indent="-285750">
+              <a:lnSpc>
+                <a:spcPct val="150000"/>
+              </a:lnSpc>
+              <a:buFont typeface="Wingdings" panose="05000000000000000000" charset="0"/>
+              <a:buChar char="n"/>
+            </a:pPr>
+            <a:r>
+              <a:rPr lang="zh-CN" altLang="en-US">
+                <a:sym typeface="+mn-ea"/>
+              </a:rPr>
+              <a:t>优化局限性：现有方法聚焦步骤数压缩，但未解决自注意力机制的高计算</a:t>
+            </a:r>
+            <a:endParaRPr lang="zh-CN" altLang="en-US">
+              <a:sym typeface="+mn-ea"/>
+            </a:endParaRPr>
+          </a:p>
+          <a:p>
+            <a:pPr marL="0" lvl="1" indent="0">
+              <a:lnSpc>
+                <a:spcPct val="150000"/>
+              </a:lnSpc>
+              <a:buFont typeface="Wingdings" panose="05000000000000000000" charset="0"/>
+              <a:buNone/>
+            </a:pPr>
+            <a:r>
+              <a:rPr lang="zh-CN" altLang="en-US">
+                <a:sym typeface="+mn-ea"/>
+              </a:rPr>
+              <a:t>复杂度问题（单步耗时未减少）</a:t>
+            </a:r>
+            <a:endParaRPr lang="zh-CN" altLang="en-US"/>
+          </a:p>
+          <a:p>
+            <a:pPr marL="742950" lvl="1" indent="-285750">
+              <a:lnSpc>
+                <a:spcPct val="150000"/>
+              </a:lnSpc>
+              <a:buFont typeface="Arial" panose="020B0604020202020204" pitchFamily="34" charset="0"/>
+              <a:buChar char="•"/>
+            </a:pPr>
+            <a:endParaRPr lang="zh-CN" altLang="en-US" dirty="0">
+              <a:sym typeface="+mn-ea"/>
+            </a:endParaRPr>
+          </a:p>
+          <a:p>
+            <a:pPr marL="285750" indent="-285750">
+              <a:buFont typeface="Wingdings" panose="05000000000000000000" charset="0"/>
+              <a:buChar char="n"/>
+            </a:pPr>
+            <a:endParaRPr lang="zh-CN" altLang="en-US" dirty="0"/>
+          </a:p>
+        </p:txBody>
+      </p:sp>
+      <p:pic>
+        <p:nvPicPr>
+          <p:cNvPr id="2" name="图片 1"/>
+          <p:cNvPicPr>
+            <a:picLocks noChangeAspect="1"/>
+          </p:cNvPicPr>
+          <p:nvPr/>
+        </p:nvPicPr>
+        <p:blipFill>
+          <a:blip r:embed="rId1"/>
+          <a:srcRect b="2775"/>
+          <a:stretch>
+            <a:fillRect/>
+          </a:stretch>
+        </p:blipFill>
+        <p:spPr>
+          <a:xfrm>
+            <a:off x="86995" y="2670810"/>
+            <a:ext cx="6689725" cy="2113915"/>
+          </a:xfrm>
+          <a:prstGeom prst="rect">
+            <a:avLst/>
+          </a:prstGeom>
+        </p:spPr>
+      </p:pic>
+    </p:spTree>
+  </p:cSld>
+  <p:clrMapOvr>
+    <a:masterClrMapping/>
+  </p:clrMapOvr>
+</p:sld>
+</file>
+
+<file path=ppt/slides/slide12.xml><?xml version="1.0" encoding="utf-8"?>
+<p:sld xmlns:a="http://schemas.openxmlformats.org/drawingml/2006/main" xmlns:r="http://schemas.openxmlformats.org/officeDocument/2006/relationships" xmlns:p="http://schemas.openxmlformats.org/presentationml/2006/main">
+  <p:cSld>
+    <p:spTree>
+      <p:nvGrpSpPr>
+        <p:cNvPr id="1" name=""/>
+        <p:cNvGrpSpPr/>
+        <p:nvPr/>
+      </p:nvGrpSpPr>
+      <p:grpSpPr>
+        <a:xfrm>
+          <a:off x="0" y="0"/>
+          <a:ext cx="0" cy="0"/>
+          <a:chOff x="0" y="0"/>
+          <a:chExt cx="0" cy="0"/>
+        </a:xfrm>
+      </p:grpSpPr>
+      <p:sp>
+        <p:nvSpPr>
+          <p:cNvPr id="6" name="标题 5"/>
+          <p:cNvSpPr>
+            <a:spLocks noGrp="1"/>
+          </p:cNvSpPr>
+          <p:nvPr>
+            <p:ph type="title"/>
+          </p:nvPr>
+        </p:nvSpPr>
+        <p:spPr>
+          <a:xfrm>
+            <a:off x="0" y="1282065"/>
+            <a:ext cx="6864985" cy="1292860"/>
+          </a:xfrm>
+        </p:spPr>
+        <p:txBody>
+          <a:bodyPr/>
+          <a:lstStyle/>
+          <a:p>
+            <a:pPr algn="ctr"/>
+            <a:r>
+              <a:rPr lang="zh-CN" altLang="en-US" dirty="0">
+                <a:sym typeface="+mn-ea"/>
+              </a:rPr>
+              <a:t>基于公式的数值推理数据集构建</a:t>
+            </a:r>
+            <a:endParaRPr lang="zh-CN" altLang="en-US" dirty="0"/>
+          </a:p>
+        </p:txBody>
+      </p:sp>
+      <p:sp>
+        <p:nvSpPr>
+          <p:cNvPr id="3" name="日期占位符 2"/>
+          <p:cNvSpPr>
+            <a:spLocks noGrp="1"/>
+          </p:cNvSpPr>
+          <p:nvPr>
+            <p:ph type="dt" sz="half" idx="10"/>
+          </p:nvPr>
+        </p:nvSpPr>
+        <p:spPr/>
+        <p:txBody>
+          <a:bodyPr/>
+          <a:lstStyle/>
+          <a:p>
+            <a:fld id="{2FBB519E-D9EB-47F0-AD65-082D85248404}" type="datetime1">
+              <a:rPr lang="zh-CN" altLang="en-US" smtClean="0"/>
+            </a:fld>
+            <a:endParaRPr lang="zh-CN" altLang="en-US" dirty="0"/>
+          </a:p>
+        </p:txBody>
+      </p:sp>
+      <p:sp>
+        <p:nvSpPr>
+          <p:cNvPr id="4" name="灯片编号占位符 3"/>
+          <p:cNvSpPr>
+            <a:spLocks noGrp="1"/>
+          </p:cNvSpPr>
+          <p:nvPr>
+            <p:ph type="sldNum" sz="quarter" idx="11"/>
+          </p:nvPr>
+        </p:nvSpPr>
+        <p:spPr/>
+        <p:txBody>
+          <a:bodyPr/>
+          <a:lstStyle/>
+          <a:p>
+            <a:fld id="{463E1EE8-403A-4D2D-AB26-5BF439A27F60}" type="slidenum">
+              <a:rPr lang="zh-CN" altLang="en-US" smtClean="0"/>
+            </a:fld>
+            <a:endParaRPr lang="zh-CN" altLang="en-US" dirty="0"/>
+          </a:p>
+        </p:txBody>
+      </p:sp>
+    </p:spTree>
+  </p:cSld>
+  <p:clrMapOvr>
+    <a:masterClrMapping/>
+  </p:clrMapOvr>
+  <p:transition advTm="1284"/>
+</p:sld>
+</file>
+
+<file path=ppt/slides/slide13.xml><?xml version="1.0" encoding="utf-8"?>
+<p:sld xmlns:a="http://schemas.openxmlformats.org/drawingml/2006/main" xmlns:r="http://schemas.openxmlformats.org/officeDocument/2006/relationships" xmlns:p="http://schemas.openxmlformats.org/presentationml/2006/main">
+  <p:cSld>
+    <p:spTree>
+      <p:nvGrpSpPr>
+        <p:cNvPr id="1" name=""/>
+        <p:cNvGrpSpPr/>
+        <p:nvPr/>
+      </p:nvGrpSpPr>
+      <p:grpSpPr>
+        <a:xfrm>
+          <a:off x="0" y="0"/>
+          <a:ext cx="0" cy="0"/>
+          <a:chOff x="0" y="0"/>
+          <a:chExt cx="0" cy="0"/>
+        </a:xfrm>
+      </p:grpSpPr>
+      <p:sp>
+        <p:nvSpPr>
           <p:cNvPr id="2" name="标题 1"/>
           <p:cNvSpPr>
             <a:spLocks noGrp="1"/>
@@ -13861,7 +14739,7 @@
 </p:sld>
 </file>
 
-<file path=ppt/slides/slide11.xml><?xml version="1.0" encoding="utf-8"?>
+<file path=ppt/slides/slide14.xml><?xml version="1.0" encoding="utf-8"?>
 <p:sld xmlns:a="http://schemas.openxmlformats.org/drawingml/2006/main" xmlns:r="http://schemas.openxmlformats.org/officeDocument/2006/relationships" xmlns:p="http://schemas.openxmlformats.org/presentationml/2006/main">
   <p:cSld>
     <p:spTree>
@@ -14174,7 +15052,7 @@
 </p:sld>
 </file>
 
-<file path=ppt/slides/slide12.xml><?xml version="1.0" encoding="utf-8"?>
+<file path=ppt/slides/slide15.xml><?xml version="1.0" encoding="utf-8"?>
 <p:sld xmlns:a="http://schemas.openxmlformats.org/drawingml/2006/main" xmlns:r="http://schemas.openxmlformats.org/officeDocument/2006/relationships" xmlns:p="http://schemas.openxmlformats.org/presentationml/2006/main">
   <p:cSld>
     <p:spTree>
@@ -14565,7 +15443,7 @@
 </p:sld>
 </file>
 
-<file path=ppt/slides/slide13.xml><?xml version="1.0" encoding="utf-8"?>
+<file path=ppt/slides/slide16.xml><?xml version="1.0" encoding="utf-8"?>
 <p:sld xmlns:a="http://schemas.openxmlformats.org/drawingml/2006/main" xmlns:r="http://schemas.openxmlformats.org/officeDocument/2006/relationships" xmlns:p="http://schemas.openxmlformats.org/presentationml/2006/main">
   <p:cSld>
     <p:spTree>
@@ -14843,7 +15721,7 @@
 </p:sld>
 </file>
 
-<file path=ppt/slides/slide14.xml><?xml version="1.0" encoding="utf-8"?>
+<file path=ppt/slides/slide17.xml><?xml version="1.0" encoding="utf-8"?>
 <p:sld xmlns:a="http://schemas.openxmlformats.org/drawingml/2006/main" xmlns:r="http://schemas.openxmlformats.org/officeDocument/2006/relationships" xmlns:p="http://schemas.openxmlformats.org/presentationml/2006/main">
   <p:cSld>
     <p:spTree>
@@ -15076,7 +15954,7 @@
 </p:sld>
 </file>
 
-<file path=ppt/slides/slide15.xml><?xml version="1.0" encoding="utf-8"?>
+<file path=ppt/slides/slide18.xml><?xml version="1.0" encoding="utf-8"?>
 <p:sld xmlns:a="http://schemas.openxmlformats.org/drawingml/2006/main" xmlns:r="http://schemas.openxmlformats.org/officeDocument/2006/relationships" xmlns:p="http://schemas.openxmlformats.org/presentationml/2006/main">
   <p:cSld>
     <p:spTree>
@@ -15183,7 +16061,7 @@
 </p:sld>
 </file>
 
-<file path=ppt/slides/slide16.xml><?xml version="1.0" encoding="utf-8"?>
+<file path=ppt/slides/slide19.xml><?xml version="1.0" encoding="utf-8"?>
 <p:sld xmlns:a="http://schemas.openxmlformats.org/drawingml/2006/main" xmlns:r="http://schemas.openxmlformats.org/officeDocument/2006/relationships" xmlns:p="http://schemas.openxmlformats.org/presentationml/2006/main">
   <p:cSld>
     <p:spTree>
@@ -15545,7 +16423,232 @@
 </p:sld>
 </file>
 
-<file path=ppt/slides/slide17.xml><?xml version="1.0" encoding="utf-8"?>
+<file path=ppt/slides/slide2.xml><?xml version="1.0" encoding="utf-8"?>
+<p:sld xmlns:a="http://schemas.openxmlformats.org/drawingml/2006/main" xmlns:r="http://schemas.openxmlformats.org/officeDocument/2006/relationships" xmlns:p="http://schemas.openxmlformats.org/presentationml/2006/main">
+  <p:cSld>
+    <p:spTree>
+      <p:nvGrpSpPr>
+        <p:cNvPr id="1" name=""/>
+        <p:cNvGrpSpPr/>
+        <p:nvPr/>
+      </p:nvGrpSpPr>
+      <p:grpSpPr>
+        <a:xfrm>
+          <a:off x="0" y="0"/>
+          <a:ext cx="0" cy="0"/>
+          <a:chOff x="0" y="0"/>
+          <a:chExt cx="0" cy="0"/>
+        </a:xfrm>
+      </p:grpSpPr>
+      <p:sp>
+        <p:nvSpPr>
+          <p:cNvPr id="6" name="标题 5"/>
+          <p:cNvSpPr>
+            <a:spLocks noGrp="1"/>
+          </p:cNvSpPr>
+          <p:nvPr>
+            <p:ph type="title"/>
+          </p:nvPr>
+        </p:nvSpPr>
+        <p:spPr>
+          <a:xfrm>
+            <a:off x="572936" y="360418"/>
+            <a:ext cx="1075656" cy="443194"/>
+          </a:xfrm>
+        </p:spPr>
+        <p:txBody>
+          <a:bodyPr>
+            <a:noAutofit/>
+          </a:bodyPr>
+          <a:lstStyle/>
+          <a:p>
+            <a:r>
+              <a:rPr lang="zh-CN" altLang="en-US" sz="3200" dirty="0"/>
+              <a:t>目录</a:t>
+            </a:r>
+            <a:endParaRPr lang="zh-CN" altLang="en-US" sz="3200" dirty="0"/>
+          </a:p>
+        </p:txBody>
+      </p:sp>
+      <p:sp>
+        <p:nvSpPr>
+          <p:cNvPr id="7" name="内容占位符 6"/>
+          <p:cNvSpPr>
+            <a:spLocks noGrp="1"/>
+          </p:cNvSpPr>
+          <p:nvPr>
+            <p:ph idx="1"/>
+          </p:nvPr>
+        </p:nvSpPr>
+        <p:spPr>
+          <a:xfrm>
+            <a:off x="1405890" y="1127760"/>
+            <a:ext cx="4525010" cy="3286125"/>
+          </a:xfrm>
+        </p:spPr>
+        <p:txBody>
+          <a:bodyPr>
+            <a:normAutofit/>
+          </a:bodyPr>
+          <a:lstStyle/>
+          <a:p>
+            <a:pPr fontAlgn="auto">
+              <a:lnSpc>
+                <a:spcPct val="150000"/>
+              </a:lnSpc>
+              <a:spcBef>
+                <a:spcPts val="0"/>
+              </a:spcBef>
+            </a:pPr>
+            <a:r>
+              <a:rPr lang="zh-CN" altLang="en-US" sz="2000" dirty="0"/>
+              <a:t>研究背景</a:t>
+            </a:r>
+            <a:endParaRPr lang="en-US" altLang="zh-CN" sz="2000" dirty="0"/>
+          </a:p>
+          <a:p>
+            <a:pPr fontAlgn="auto">
+              <a:lnSpc>
+                <a:spcPct val="150000"/>
+              </a:lnSpc>
+              <a:spcBef>
+                <a:spcPts val="0"/>
+              </a:spcBef>
+            </a:pPr>
+            <a:r>
+              <a:rPr lang="zh-CN" altLang="en-US" sz="2000" dirty="0"/>
+              <a:t>相关工作</a:t>
+            </a:r>
+            <a:endParaRPr lang="en-US" altLang="zh-CN" sz="2000" dirty="0"/>
+          </a:p>
+          <a:p>
+            <a:pPr fontAlgn="auto">
+              <a:lnSpc>
+                <a:spcPct val="150000"/>
+              </a:lnSpc>
+              <a:spcBef>
+                <a:spcPts val="0"/>
+              </a:spcBef>
+            </a:pPr>
+            <a:r>
+              <a:rPr lang="zh-CN" altLang="en-US" sz="2000" dirty="0">
+                <a:sym typeface="+mn-ea"/>
+              </a:rPr>
+              <a:t>基于公式的数值推理数据集构建</a:t>
+            </a:r>
+            <a:endParaRPr lang="zh-CN" altLang="en-US" sz="2000" dirty="0"/>
+          </a:p>
+          <a:p>
+            <a:pPr fontAlgn="auto">
+              <a:lnSpc>
+                <a:spcPct val="150000"/>
+              </a:lnSpc>
+              <a:spcBef>
+                <a:spcPts val="0"/>
+              </a:spcBef>
+            </a:pPr>
+            <a:r>
+              <a:rPr lang="zh-CN" altLang="en-US" sz="2000" dirty="0">
+                <a:sym typeface="+mn-ea"/>
+              </a:rPr>
+              <a:t>基于公式的数值推理方法评测</a:t>
+            </a:r>
+            <a:endParaRPr lang="en-US" altLang="zh-CN" sz="2000" dirty="0"/>
+          </a:p>
+          <a:p>
+            <a:pPr fontAlgn="auto">
+              <a:lnSpc>
+                <a:spcPct val="150000"/>
+              </a:lnSpc>
+              <a:spcBef>
+                <a:spcPts val="0"/>
+              </a:spcBef>
+            </a:pPr>
+            <a:r>
+              <a:rPr lang="zh-CN" altLang="en-US" sz="2000" dirty="0">
+                <a:sym typeface="+mn-ea"/>
+              </a:rPr>
+              <a:t>一种基于公式的数值推理方法</a:t>
+            </a:r>
+            <a:endParaRPr lang="zh-CN" altLang="en-US" sz="2000" dirty="0">
+              <a:sym typeface="+mn-ea"/>
+            </a:endParaRPr>
+          </a:p>
+          <a:p>
+            <a:pPr fontAlgn="auto">
+              <a:lnSpc>
+                <a:spcPct val="150000"/>
+              </a:lnSpc>
+              <a:spcBef>
+                <a:spcPts val="0"/>
+              </a:spcBef>
+            </a:pPr>
+            <a:r>
+              <a:rPr lang="zh-CN" altLang="en-US" sz="2000" dirty="0"/>
+              <a:t>总结与</a:t>
+            </a:r>
+            <a:r>
+              <a:rPr lang="zh-CN" altLang="en-US" sz="2000" dirty="0"/>
+              <a:t>展望</a:t>
+            </a:r>
+            <a:endParaRPr lang="zh-CN" altLang="en-US" sz="2000" dirty="0"/>
+          </a:p>
+        </p:txBody>
+      </p:sp>
+      <p:sp>
+        <p:nvSpPr>
+          <p:cNvPr id="3" name="日期占位符 2"/>
+          <p:cNvSpPr>
+            <a:spLocks noGrp="1"/>
+          </p:cNvSpPr>
+          <p:nvPr>
+            <p:ph type="dt" sz="half" idx="10"/>
+          </p:nvPr>
+        </p:nvSpPr>
+        <p:spPr/>
+        <p:txBody>
+          <a:bodyPr/>
+          <a:lstStyle/>
+          <a:p>
+            <a:fld id="{2FBB519E-D9EB-47F0-AD65-082D85248404}" type="datetime1">
+              <a:rPr lang="zh-CN" altLang="en-US" smtClean="0"/>
+            </a:fld>
+            <a:endParaRPr lang="zh-CN" altLang="en-US" dirty="0"/>
+          </a:p>
+        </p:txBody>
+      </p:sp>
+      <p:sp>
+        <p:nvSpPr>
+          <p:cNvPr id="4" name="灯片编号占位符 3"/>
+          <p:cNvSpPr>
+            <a:spLocks noGrp="1"/>
+          </p:cNvSpPr>
+          <p:nvPr>
+            <p:ph type="sldNum" sz="quarter" idx="11"/>
+          </p:nvPr>
+        </p:nvSpPr>
+        <p:spPr/>
+        <p:txBody>
+          <a:bodyPr/>
+          <a:lstStyle/>
+          <a:p>
+            <a:fld id="{463E1EE8-403A-4D2D-AB26-5BF439A27F60}" type="slidenum">
+              <a:rPr lang="zh-CN" altLang="en-US" smtClean="0"/>
+            </a:fld>
+            <a:endParaRPr lang="zh-CN" altLang="en-US" dirty="0"/>
+          </a:p>
+        </p:txBody>
+      </p:sp>
+    </p:spTree>
+  </p:cSld>
+  <p:clrMapOvr>
+    <a:masterClrMapping/>
+  </p:clrMapOvr>
+  <p:transition advTm="6799"/>
+</p:sld>
+</file>
+
+<file path=ppt/slides/slide20.xml><?xml version="1.0" encoding="utf-8"?>
 <p:sld xmlns:a="http://schemas.openxmlformats.org/drawingml/2006/main" xmlns:r="http://schemas.openxmlformats.org/officeDocument/2006/relationships" xmlns:p="http://schemas.openxmlformats.org/presentationml/2006/main">
   <p:cSld>
     <p:spTree>
@@ -16209,7 +17312,7 @@
 </p:sld>
 </file>
 
-<file path=ppt/slides/slide18.xml><?xml version="1.0" encoding="utf-8"?>
+<file path=ppt/slides/slide21.xml><?xml version="1.0" encoding="utf-8"?>
 <p:sld xmlns:a="http://schemas.openxmlformats.org/drawingml/2006/main" xmlns:r="http://schemas.openxmlformats.org/officeDocument/2006/relationships" xmlns:p="http://schemas.openxmlformats.org/presentationml/2006/main">
   <p:cSld>
     <p:spTree>
@@ -16613,7 +17716,7 @@
 </p:sld>
 </file>
 
-<file path=ppt/slides/slide19.xml><?xml version="1.0" encoding="utf-8"?>
+<file path=ppt/slides/slide22.xml><?xml version="1.0" encoding="utf-8"?>
 <p:sld xmlns:a="http://schemas.openxmlformats.org/drawingml/2006/main" xmlns:r="http://schemas.openxmlformats.org/officeDocument/2006/relationships" xmlns:p="http://schemas.openxmlformats.org/presentationml/2006/main">
   <p:cSld>
     <p:spTree>
@@ -17104,232 +18207,7 @@
 </p:sld>
 </file>
 
-<file path=ppt/slides/slide2.xml><?xml version="1.0" encoding="utf-8"?>
-<p:sld xmlns:a="http://schemas.openxmlformats.org/drawingml/2006/main" xmlns:r="http://schemas.openxmlformats.org/officeDocument/2006/relationships" xmlns:p="http://schemas.openxmlformats.org/presentationml/2006/main">
-  <p:cSld>
-    <p:spTree>
-      <p:nvGrpSpPr>
-        <p:cNvPr id="1" name=""/>
-        <p:cNvGrpSpPr/>
-        <p:nvPr/>
-      </p:nvGrpSpPr>
-      <p:grpSpPr>
-        <a:xfrm>
-          <a:off x="0" y="0"/>
-          <a:ext cx="0" cy="0"/>
-          <a:chOff x="0" y="0"/>
-          <a:chExt cx="0" cy="0"/>
-        </a:xfrm>
-      </p:grpSpPr>
-      <p:sp>
-        <p:nvSpPr>
-          <p:cNvPr id="6" name="标题 5"/>
-          <p:cNvSpPr>
-            <a:spLocks noGrp="1"/>
-          </p:cNvSpPr>
-          <p:nvPr>
-            <p:ph type="title"/>
-          </p:nvPr>
-        </p:nvSpPr>
-        <p:spPr>
-          <a:xfrm>
-            <a:off x="572936" y="360418"/>
-            <a:ext cx="1075656" cy="443194"/>
-          </a:xfrm>
-        </p:spPr>
-        <p:txBody>
-          <a:bodyPr>
-            <a:noAutofit/>
-          </a:bodyPr>
-          <a:lstStyle/>
-          <a:p>
-            <a:r>
-              <a:rPr lang="zh-CN" altLang="en-US" sz="3200" dirty="0"/>
-              <a:t>目录</a:t>
-            </a:r>
-            <a:endParaRPr lang="zh-CN" altLang="en-US" sz="3200" dirty="0"/>
-          </a:p>
-        </p:txBody>
-      </p:sp>
-      <p:sp>
-        <p:nvSpPr>
-          <p:cNvPr id="7" name="内容占位符 6"/>
-          <p:cNvSpPr>
-            <a:spLocks noGrp="1"/>
-          </p:cNvSpPr>
-          <p:nvPr>
-            <p:ph idx="1"/>
-          </p:nvPr>
-        </p:nvSpPr>
-        <p:spPr>
-          <a:xfrm>
-            <a:off x="1405890" y="1127760"/>
-            <a:ext cx="4525010" cy="3286125"/>
-          </a:xfrm>
-        </p:spPr>
-        <p:txBody>
-          <a:bodyPr>
-            <a:normAutofit/>
-          </a:bodyPr>
-          <a:lstStyle/>
-          <a:p>
-            <a:pPr fontAlgn="auto">
-              <a:lnSpc>
-                <a:spcPct val="150000"/>
-              </a:lnSpc>
-              <a:spcBef>
-                <a:spcPts val="0"/>
-              </a:spcBef>
-            </a:pPr>
-            <a:r>
-              <a:rPr lang="zh-CN" altLang="en-US" sz="2000" dirty="0"/>
-              <a:t>研究背景</a:t>
-            </a:r>
-            <a:endParaRPr lang="en-US" altLang="zh-CN" sz="2000" dirty="0"/>
-          </a:p>
-          <a:p>
-            <a:pPr fontAlgn="auto">
-              <a:lnSpc>
-                <a:spcPct val="150000"/>
-              </a:lnSpc>
-              <a:spcBef>
-                <a:spcPts val="0"/>
-              </a:spcBef>
-            </a:pPr>
-            <a:r>
-              <a:rPr lang="zh-CN" altLang="en-US" sz="2000" dirty="0"/>
-              <a:t>相关工作</a:t>
-            </a:r>
-            <a:endParaRPr lang="en-US" altLang="zh-CN" sz="2000" dirty="0"/>
-          </a:p>
-          <a:p>
-            <a:pPr fontAlgn="auto">
-              <a:lnSpc>
-                <a:spcPct val="150000"/>
-              </a:lnSpc>
-              <a:spcBef>
-                <a:spcPts val="0"/>
-              </a:spcBef>
-            </a:pPr>
-            <a:r>
-              <a:rPr lang="zh-CN" altLang="en-US" sz="2000" dirty="0">
-                <a:sym typeface="+mn-ea"/>
-              </a:rPr>
-              <a:t>基于公式的数值推理数据集构建</a:t>
-            </a:r>
-            <a:endParaRPr lang="zh-CN" altLang="en-US" sz="2000" dirty="0"/>
-          </a:p>
-          <a:p>
-            <a:pPr fontAlgn="auto">
-              <a:lnSpc>
-                <a:spcPct val="150000"/>
-              </a:lnSpc>
-              <a:spcBef>
-                <a:spcPts val="0"/>
-              </a:spcBef>
-            </a:pPr>
-            <a:r>
-              <a:rPr lang="zh-CN" altLang="en-US" sz="2000" dirty="0">
-                <a:sym typeface="+mn-ea"/>
-              </a:rPr>
-              <a:t>基于公式的数值推理方法评测</a:t>
-            </a:r>
-            <a:endParaRPr lang="en-US" altLang="zh-CN" sz="2000" dirty="0"/>
-          </a:p>
-          <a:p>
-            <a:pPr fontAlgn="auto">
-              <a:lnSpc>
-                <a:spcPct val="150000"/>
-              </a:lnSpc>
-              <a:spcBef>
-                <a:spcPts val="0"/>
-              </a:spcBef>
-            </a:pPr>
-            <a:r>
-              <a:rPr lang="zh-CN" altLang="en-US" sz="2000" dirty="0">
-                <a:sym typeface="+mn-ea"/>
-              </a:rPr>
-              <a:t>一种基于公式的数值推理方法</a:t>
-            </a:r>
-            <a:endParaRPr lang="zh-CN" altLang="en-US" sz="2000" dirty="0">
-              <a:sym typeface="+mn-ea"/>
-            </a:endParaRPr>
-          </a:p>
-          <a:p>
-            <a:pPr fontAlgn="auto">
-              <a:lnSpc>
-                <a:spcPct val="150000"/>
-              </a:lnSpc>
-              <a:spcBef>
-                <a:spcPts val="0"/>
-              </a:spcBef>
-            </a:pPr>
-            <a:r>
-              <a:rPr lang="zh-CN" altLang="en-US" sz="2000" dirty="0"/>
-              <a:t>总结与</a:t>
-            </a:r>
-            <a:r>
-              <a:rPr lang="zh-CN" altLang="en-US" sz="2000" dirty="0"/>
-              <a:t>展望</a:t>
-            </a:r>
-            <a:endParaRPr lang="zh-CN" altLang="en-US" sz="2000" dirty="0"/>
-          </a:p>
-        </p:txBody>
-      </p:sp>
-      <p:sp>
-        <p:nvSpPr>
-          <p:cNvPr id="3" name="日期占位符 2"/>
-          <p:cNvSpPr>
-            <a:spLocks noGrp="1"/>
-          </p:cNvSpPr>
-          <p:nvPr>
-            <p:ph type="dt" sz="half" idx="10"/>
-          </p:nvPr>
-        </p:nvSpPr>
-        <p:spPr/>
-        <p:txBody>
-          <a:bodyPr/>
-          <a:lstStyle/>
-          <a:p>
-            <a:fld id="{2FBB519E-D9EB-47F0-AD65-082D85248404}" type="datetime1">
-              <a:rPr lang="zh-CN" altLang="en-US" smtClean="0"/>
-            </a:fld>
-            <a:endParaRPr lang="zh-CN" altLang="en-US" dirty="0"/>
-          </a:p>
-        </p:txBody>
-      </p:sp>
-      <p:sp>
-        <p:nvSpPr>
-          <p:cNvPr id="4" name="灯片编号占位符 3"/>
-          <p:cNvSpPr>
-            <a:spLocks noGrp="1"/>
-          </p:cNvSpPr>
-          <p:nvPr>
-            <p:ph type="sldNum" sz="quarter" idx="11"/>
-          </p:nvPr>
-        </p:nvSpPr>
-        <p:spPr/>
-        <p:txBody>
-          <a:bodyPr/>
-          <a:lstStyle/>
-          <a:p>
-            <a:fld id="{463E1EE8-403A-4D2D-AB26-5BF439A27F60}" type="slidenum">
-              <a:rPr lang="zh-CN" altLang="en-US" smtClean="0"/>
-            </a:fld>
-            <a:endParaRPr lang="zh-CN" altLang="en-US" dirty="0"/>
-          </a:p>
-        </p:txBody>
-      </p:sp>
-    </p:spTree>
-  </p:cSld>
-  <p:clrMapOvr>
-    <a:masterClrMapping/>
-  </p:clrMapOvr>
-  <p:transition advTm="6799"/>
-</p:sld>
-</file>
-
-<file path=ppt/slides/slide20.xml><?xml version="1.0" encoding="utf-8"?>
+<file path=ppt/slides/slide23.xml><?xml version="1.0" encoding="utf-8"?>
 <p:sld xmlns:a="http://schemas.openxmlformats.org/drawingml/2006/main" xmlns:r="http://schemas.openxmlformats.org/officeDocument/2006/relationships" xmlns:p="http://schemas.openxmlformats.org/presentationml/2006/main">
   <p:cSld>
     <p:spTree>
@@ -17593,7 +18471,7 @@
 </p:sld>
 </file>
 
-<file path=ppt/slides/slide21.xml><?xml version="1.0" encoding="utf-8"?>
+<file path=ppt/slides/slide24.xml><?xml version="1.0" encoding="utf-8"?>
 <p:sld xmlns:a="http://schemas.openxmlformats.org/drawingml/2006/main" xmlns:r="http://schemas.openxmlformats.org/officeDocument/2006/relationships" xmlns:p="http://schemas.openxmlformats.org/presentationml/2006/main">
   <p:cSld>
     <p:spTree>
@@ -17835,7 +18713,7 @@
 </p:sld>
 </file>
 
-<file path=ppt/slides/slide22.xml><?xml version="1.0" encoding="utf-8"?>
+<file path=ppt/slides/slide25.xml><?xml version="1.0" encoding="utf-8"?>
 <p:sld xmlns:a="http://schemas.openxmlformats.org/drawingml/2006/main" xmlns:r="http://schemas.openxmlformats.org/officeDocument/2006/relationships" xmlns:p="http://schemas.openxmlformats.org/presentationml/2006/main">
   <p:cSld>
     <p:spTree>
@@ -18107,7 +18985,7 @@
 </p:sld>
 </file>
 
-<file path=ppt/slides/slide23.xml><?xml version="1.0" encoding="utf-8"?>
+<file path=ppt/slides/slide26.xml><?xml version="1.0" encoding="utf-8"?>
 <p:sld xmlns:a="http://schemas.openxmlformats.org/drawingml/2006/main" xmlns:r="http://schemas.openxmlformats.org/officeDocument/2006/relationships" xmlns:p="http://schemas.openxmlformats.org/presentationml/2006/main">
   <p:cSld>
     <p:spTree>
@@ -18297,422 +19175,6 @@
 </p:sld>
 </file>
 
-<file path=ppt/slides/slide24.xml><?xml version="1.0" encoding="utf-8"?>
-<p:sld xmlns:a="http://schemas.openxmlformats.org/drawingml/2006/main" xmlns:r="http://schemas.openxmlformats.org/officeDocument/2006/relationships" xmlns:p="http://schemas.openxmlformats.org/presentationml/2006/main">
-  <p:cSld>
-    <p:spTree>
-      <p:nvGrpSpPr>
-        <p:cNvPr id="1" name=""/>
-        <p:cNvGrpSpPr/>
-        <p:nvPr/>
-      </p:nvGrpSpPr>
-      <p:grpSpPr>
-        <a:xfrm>
-          <a:off x="0" y="0"/>
-          <a:ext cx="0" cy="0"/>
-          <a:chOff x="0" y="0"/>
-          <a:chExt cx="0" cy="0"/>
-        </a:xfrm>
-      </p:grpSpPr>
-      <p:sp>
-        <p:nvSpPr>
-          <p:cNvPr id="6" name="标题 5"/>
-          <p:cNvSpPr>
-            <a:spLocks noGrp="1"/>
-          </p:cNvSpPr>
-          <p:nvPr>
-            <p:ph type="title"/>
-          </p:nvPr>
-        </p:nvSpPr>
-        <p:spPr>
-          <a:xfrm>
-            <a:off x="0" y="1282065"/>
-            <a:ext cx="6864985" cy="1292860"/>
-          </a:xfrm>
-        </p:spPr>
-        <p:txBody>
-          <a:bodyPr/>
-          <a:lstStyle/>
-          <a:p>
-            <a:pPr algn="ctr"/>
-            <a:r>
-              <a:rPr lang="zh-CN" altLang="en-US" dirty="0">
-                <a:sym typeface="+mn-ea"/>
-              </a:rPr>
-              <a:t>一种基于公式的数值推理方法</a:t>
-            </a:r>
-            <a:endParaRPr lang="zh-CN" altLang="en-US" dirty="0"/>
-          </a:p>
-        </p:txBody>
-      </p:sp>
-      <p:sp>
-        <p:nvSpPr>
-          <p:cNvPr id="3" name="日期占位符 2"/>
-          <p:cNvSpPr>
-            <a:spLocks noGrp="1"/>
-          </p:cNvSpPr>
-          <p:nvPr>
-            <p:ph type="dt" sz="half" idx="10"/>
-          </p:nvPr>
-        </p:nvSpPr>
-        <p:spPr/>
-        <p:txBody>
-          <a:bodyPr/>
-          <a:lstStyle/>
-          <a:p>
-            <a:fld id="{2FBB519E-D9EB-47F0-AD65-082D85248404}" type="datetime1">
-              <a:rPr lang="zh-CN" altLang="en-US" smtClean="0"/>
-            </a:fld>
-            <a:endParaRPr lang="zh-CN" altLang="en-US" dirty="0"/>
-          </a:p>
-        </p:txBody>
-      </p:sp>
-      <p:sp>
-        <p:nvSpPr>
-          <p:cNvPr id="4" name="灯片编号占位符 3"/>
-          <p:cNvSpPr>
-            <a:spLocks noGrp="1"/>
-          </p:cNvSpPr>
-          <p:nvPr>
-            <p:ph type="sldNum" sz="quarter" idx="11"/>
-          </p:nvPr>
-        </p:nvSpPr>
-        <p:spPr/>
-        <p:txBody>
-          <a:bodyPr/>
-          <a:lstStyle/>
-          <a:p>
-            <a:fld id="{463E1EE8-403A-4D2D-AB26-5BF439A27F60}" type="slidenum">
-              <a:rPr lang="zh-CN" altLang="en-US" smtClean="0"/>
-            </a:fld>
-            <a:endParaRPr lang="zh-CN" altLang="en-US" dirty="0"/>
-          </a:p>
-        </p:txBody>
-      </p:sp>
-    </p:spTree>
-  </p:cSld>
-  <p:clrMapOvr>
-    <a:masterClrMapping/>
-  </p:clrMapOvr>
-  <p:transition advTm="1284"/>
-</p:sld>
-</file>
-
-<file path=ppt/slides/slide25.xml><?xml version="1.0" encoding="utf-8"?>
-<p:sld xmlns:a="http://schemas.openxmlformats.org/drawingml/2006/main" xmlns:r="http://schemas.openxmlformats.org/officeDocument/2006/relationships" xmlns:p="http://schemas.openxmlformats.org/presentationml/2006/main">
-  <p:cSld>
-    <p:spTree>
-      <p:nvGrpSpPr>
-        <p:cNvPr id="1" name=""/>
-        <p:cNvGrpSpPr/>
-        <p:nvPr/>
-      </p:nvGrpSpPr>
-      <p:grpSpPr>
-        <a:xfrm>
-          <a:off x="0" y="0"/>
-          <a:ext cx="0" cy="0"/>
-          <a:chOff x="0" y="0"/>
-          <a:chExt cx="0" cy="0"/>
-        </a:xfrm>
-      </p:grpSpPr>
-      <p:sp>
-        <p:nvSpPr>
-          <p:cNvPr id="6" name="标题 5"/>
-          <p:cNvSpPr>
-            <a:spLocks noGrp="1"/>
-          </p:cNvSpPr>
-          <p:nvPr>
-            <p:ph type="title"/>
-          </p:nvPr>
-        </p:nvSpPr>
-        <p:spPr>
-          <a:xfrm>
-            <a:off x="0" y="1282065"/>
-            <a:ext cx="6864985" cy="1292860"/>
-          </a:xfrm>
-        </p:spPr>
-        <p:txBody>
-          <a:bodyPr/>
-          <a:lstStyle/>
-          <a:p>
-            <a:pPr algn="ctr"/>
-            <a:r>
-              <a:rPr lang="zh-CN" altLang="en-US" dirty="0">
-                <a:sym typeface="+mn-ea"/>
-              </a:rPr>
-              <a:t>总结与</a:t>
-            </a:r>
-            <a:r>
-              <a:rPr lang="zh-CN" altLang="en-US" dirty="0">
-                <a:sym typeface="+mn-ea"/>
-              </a:rPr>
-              <a:t>展望</a:t>
-            </a:r>
-            <a:endParaRPr lang="zh-CN" altLang="en-US" dirty="0">
-              <a:sym typeface="+mn-ea"/>
-            </a:endParaRPr>
-          </a:p>
-        </p:txBody>
-      </p:sp>
-      <p:sp>
-        <p:nvSpPr>
-          <p:cNvPr id="3" name="日期占位符 2"/>
-          <p:cNvSpPr>
-            <a:spLocks noGrp="1"/>
-          </p:cNvSpPr>
-          <p:nvPr>
-            <p:ph type="dt" sz="half" idx="10"/>
-          </p:nvPr>
-        </p:nvSpPr>
-        <p:spPr/>
-        <p:txBody>
-          <a:bodyPr/>
-          <a:lstStyle/>
-          <a:p>
-            <a:fld id="{2FBB519E-D9EB-47F0-AD65-082D85248404}" type="datetime1">
-              <a:rPr lang="zh-CN" altLang="en-US" smtClean="0"/>
-            </a:fld>
-            <a:endParaRPr lang="zh-CN" altLang="en-US" dirty="0"/>
-          </a:p>
-        </p:txBody>
-      </p:sp>
-      <p:sp>
-        <p:nvSpPr>
-          <p:cNvPr id="4" name="灯片编号占位符 3"/>
-          <p:cNvSpPr>
-            <a:spLocks noGrp="1"/>
-          </p:cNvSpPr>
-          <p:nvPr>
-            <p:ph type="sldNum" sz="quarter" idx="11"/>
-          </p:nvPr>
-        </p:nvSpPr>
-        <p:spPr/>
-        <p:txBody>
-          <a:bodyPr/>
-          <a:lstStyle/>
-          <a:p>
-            <a:fld id="{463E1EE8-403A-4D2D-AB26-5BF439A27F60}" type="slidenum">
-              <a:rPr lang="zh-CN" altLang="en-US" smtClean="0"/>
-            </a:fld>
-            <a:endParaRPr lang="zh-CN" altLang="en-US" dirty="0"/>
-          </a:p>
-        </p:txBody>
-      </p:sp>
-    </p:spTree>
-  </p:cSld>
-  <p:clrMapOvr>
-    <a:masterClrMapping/>
-  </p:clrMapOvr>
-  <p:transition advTm="1284"/>
-</p:sld>
-</file>
-
-<file path=ppt/slides/slide26.xml><?xml version="1.0" encoding="utf-8"?>
-<p:sld xmlns:a="http://schemas.openxmlformats.org/drawingml/2006/main" xmlns:r="http://schemas.openxmlformats.org/officeDocument/2006/relationships" xmlns:p="http://schemas.openxmlformats.org/presentationml/2006/main">
-  <p:cSld>
-    <p:spTree>
-      <p:nvGrpSpPr>
-        <p:cNvPr id="1" name=""/>
-        <p:cNvGrpSpPr/>
-        <p:nvPr/>
-      </p:nvGrpSpPr>
-      <p:grpSpPr>
-        <a:xfrm>
-          <a:off x="0" y="0"/>
-          <a:ext cx="0" cy="0"/>
-          <a:chOff x="0" y="0"/>
-          <a:chExt cx="0" cy="0"/>
-        </a:xfrm>
-      </p:grpSpPr>
-      <p:sp>
-        <p:nvSpPr>
-          <p:cNvPr id="4" name="日期占位符 3"/>
-          <p:cNvSpPr>
-            <a:spLocks noGrp="1"/>
-          </p:cNvSpPr>
-          <p:nvPr>
-            <p:ph type="dt" sz="half" idx="10"/>
-          </p:nvPr>
-        </p:nvSpPr>
-        <p:spPr/>
-        <p:txBody>
-          <a:bodyPr/>
-          <a:lstStyle/>
-          <a:p>
-            <a:fld id="{22622B08-3EA3-41BF-B421-FEB4AE47B4B9}" type="datetime1">
-              <a:rPr lang="zh-CN" altLang="en-US" smtClean="0"/>
-            </a:fld>
-            <a:endParaRPr lang="zh-CN" altLang="en-US" dirty="0"/>
-          </a:p>
-        </p:txBody>
-      </p:sp>
-      <p:sp>
-        <p:nvSpPr>
-          <p:cNvPr id="5" name="灯片编号占位符 4"/>
-          <p:cNvSpPr>
-            <a:spLocks noGrp="1"/>
-          </p:cNvSpPr>
-          <p:nvPr>
-            <p:ph type="sldNum" sz="quarter" idx="11"/>
-          </p:nvPr>
-        </p:nvSpPr>
-        <p:spPr/>
-        <p:txBody>
-          <a:bodyPr/>
-          <a:lstStyle/>
-          <a:p>
-            <a:fld id="{463E1EE8-403A-4D2D-AB26-5BF439A27F60}" type="slidenum">
-              <a:rPr lang="zh-CN" altLang="en-US" smtClean="0"/>
-            </a:fld>
-            <a:endParaRPr lang="zh-CN" altLang="en-US" dirty="0"/>
-          </a:p>
-        </p:txBody>
-      </p:sp>
-      <p:sp>
-        <p:nvSpPr>
-          <p:cNvPr id="2" name="文本框 1"/>
-          <p:cNvSpPr txBox="1"/>
-          <p:nvPr/>
-        </p:nvSpPr>
-        <p:spPr>
-          <a:xfrm>
-            <a:off x="300355" y="265430"/>
-            <a:ext cx="6296660" cy="3226435"/>
-          </a:xfrm>
-          <a:prstGeom prst="rect">
-            <a:avLst/>
-          </a:prstGeom>
-          <a:noFill/>
-        </p:spPr>
-        <p:txBody>
-          <a:bodyPr wrap="square" rtlCol="0">
-            <a:spAutoFit/>
-          </a:bodyPr>
-          <a:p>
-            <a:pPr marL="285750" indent="-285750">
-              <a:buFont typeface="Wingdings" panose="05000000000000000000" charset="0"/>
-              <a:buChar char="n"/>
-            </a:pPr>
-            <a:r>
-              <a:rPr lang="zh-CN" altLang="en-US"/>
-              <a:t>总结</a:t>
-            </a:r>
-            <a:endParaRPr lang="zh-CN" altLang="en-US"/>
-          </a:p>
-          <a:p>
-            <a:pPr marL="285750" indent="-285750">
-              <a:buFont typeface="Wingdings" panose="05000000000000000000" charset="0"/>
-              <a:buChar char="n"/>
-            </a:pPr>
-            <a:endParaRPr lang="zh-CN" altLang="en-US"/>
-          </a:p>
-          <a:p>
-            <a:pPr marL="742950" lvl="1" indent="-285750">
-              <a:buFont typeface="Arial" panose="020B0604020202020204" pitchFamily="34" charset="0"/>
-              <a:buChar char="•"/>
-            </a:pPr>
-            <a:r>
-              <a:rPr lang="zh-CN" altLang="en-US"/>
-              <a:t>设计自适应</a:t>
-            </a:r>
-            <a:r>
-              <a:rPr lang="zh-CN" altLang="en-US"/>
-              <a:t>解码器和流水线解码器，兼顾全局语义建模与生成速度提升</a:t>
-            </a:r>
-            <a:endParaRPr lang="zh-CN" altLang="en-US"/>
-          </a:p>
-          <a:p>
-            <a:pPr marL="742950" lvl="1" indent="-285750">
-              <a:buFont typeface="Arial" panose="020B0604020202020204" pitchFamily="34" charset="0"/>
-              <a:buChar char="•"/>
-            </a:pPr>
-            <a:endParaRPr lang="zh-CN" altLang="en-US"/>
-          </a:p>
-          <a:p>
-            <a:pPr marL="742950" lvl="1" indent="-285750">
-              <a:buFont typeface="Arial" panose="020B0604020202020204" pitchFamily="34" charset="0"/>
-              <a:buChar char="•"/>
-            </a:pPr>
-            <a:r>
-              <a:rPr lang="zh-CN" altLang="en-US"/>
-              <a:t>在阅读理解、文本摘要、关键短语生成等任务中验证模型潜力，多任务生成能力突出</a:t>
-            </a:r>
-            <a:endParaRPr lang="zh-CN" altLang="en-US"/>
-          </a:p>
-          <a:p>
-            <a:endParaRPr lang="zh-CN" altLang="en-US"/>
-          </a:p>
-          <a:p>
-            <a:endParaRPr lang="zh-CN" altLang="en-US"/>
-          </a:p>
-          <a:p>
-            <a:pPr marL="285750" indent="-285750">
-              <a:buFont typeface="Wingdings" panose="05000000000000000000" charset="0"/>
-              <a:buChar char="n"/>
-            </a:pPr>
-            <a:endParaRPr lang="zh-CN" altLang="en-US"/>
-          </a:p>
-          <a:p>
-            <a:pPr marL="285750" indent="-285750">
-              <a:buFont typeface="Wingdings" panose="05000000000000000000" charset="0"/>
-              <a:buChar char="n"/>
-            </a:pPr>
-            <a:r>
-              <a:rPr lang="zh-CN" altLang="en-US"/>
-              <a:t>未来方向</a:t>
-            </a:r>
-            <a:endParaRPr lang="zh-CN" altLang="en-US"/>
-          </a:p>
-          <a:p>
-            <a:pPr marL="285750" indent="-285750">
-              <a:buFont typeface="Wingdings" panose="05000000000000000000" charset="0"/>
-              <a:buChar char="n"/>
-            </a:pPr>
-            <a:endParaRPr lang="zh-CN" altLang="en-US"/>
-          </a:p>
-          <a:p>
-            <a:pPr marL="742950" lvl="1" indent="-285750">
-              <a:buFont typeface="Arial" panose="020B0604020202020204" pitchFamily="34" charset="0"/>
-              <a:buChar char="•"/>
-            </a:pPr>
-            <a:r>
-              <a:rPr lang="zh-CN" altLang="en-US"/>
-              <a:t>数学问题求解等无上下文感知任务（依赖强标记时序，需改进依赖建模）</a:t>
-            </a:r>
-            <a:endParaRPr lang="zh-CN" altLang="en-US"/>
-          </a:p>
-          <a:p>
-            <a:pPr marL="742950" lvl="1" indent="-285750">
-              <a:buFont typeface="Arial" panose="020B0604020202020204" pitchFamily="34" charset="0"/>
-              <a:buChar char="•"/>
-            </a:pPr>
-            <a:endParaRPr lang="zh-CN" altLang="en-US"/>
-          </a:p>
-          <a:p>
-            <a:pPr marL="742950" lvl="1" indent="-285750">
-              <a:buFont typeface="Arial" panose="020B0604020202020204" pitchFamily="34" charset="0"/>
-              <a:buChar char="•"/>
-            </a:pPr>
-            <a:r>
-              <a:rPr lang="zh-CN" altLang="en-US"/>
-              <a:t>优化子序列生成，取消固定时间间隔，按语义动态划分子序列。</a:t>
-            </a:r>
-            <a:endParaRPr lang="zh-CN" altLang="en-US"/>
-          </a:p>
-          <a:p>
-            <a:pPr indent="457200"/>
-            <a:endParaRPr lang="zh-CN" altLang="en-US"/>
-          </a:p>
-        </p:txBody>
-      </p:sp>
-    </p:spTree>
-  </p:cSld>
-  <p:clrMapOvr>
-    <a:masterClrMapping/>
-  </p:clrMapOvr>
-</p:sld>
-</file>
-
 <file path=ppt/slides/slide27.xml><?xml version="1.0" encoding="utf-8"?>
 <p:sld xmlns:a="http://schemas.openxmlformats.org/drawingml/2006/main" xmlns:r="http://schemas.openxmlformats.org/officeDocument/2006/relationships" xmlns:p="http://schemas.openxmlformats.org/presentationml/2006/main">
   <p:cSld>
@@ -18732,169 +19194,32 @@
       </p:grpSpPr>
       <p:sp>
         <p:nvSpPr>
-          <p:cNvPr id="2" name="内容占位符 1"/>
-          <p:cNvSpPr>
-            <a:spLocks noGrp="1"/>
-          </p:cNvSpPr>
-          <p:nvPr>
-            <p:ph idx="1"/>
+          <p:cNvPr id="6" name="标题 5"/>
+          <p:cNvSpPr>
+            <a:spLocks noGrp="1"/>
+          </p:cNvSpPr>
+          <p:nvPr>
+            <p:ph type="title"/>
           </p:nvPr>
         </p:nvSpPr>
         <p:spPr>
           <a:xfrm>
-            <a:off x="471922" y="979200"/>
-            <a:ext cx="5540303" cy="3701981"/>
+            <a:off x="0" y="1282065"/>
+            <a:ext cx="6864985" cy="1292860"/>
           </a:xfrm>
         </p:spPr>
         <p:txBody>
-          <a:bodyPr>
-            <a:normAutofit/>
-          </a:bodyPr>
+          <a:bodyPr/>
           <a:lstStyle/>
           <a:p>
-            <a:pPr>
-              <a:lnSpc>
-                <a:spcPct val="100000"/>
-              </a:lnSpc>
-            </a:pPr>
-            <a:r>
-              <a:rPr lang="en-US" altLang="zh-CN" sz="1100" dirty="0">
-                <a:latin typeface="Times New Roman" panose="02020603050405020304" pitchFamily="18" charset="0"/>
-                <a:cs typeface="Times New Roman" panose="02020603050405020304" pitchFamily="18" charset="0"/>
-              </a:rPr>
-              <a:t>Xiao Li, </a:t>
-            </a:r>
-            <a:r>
-              <a:rPr lang="en-US" altLang="zh-CN" sz="1100" b="1" dirty="0">
-                <a:latin typeface="Times New Roman" panose="02020603050405020304" pitchFamily="18" charset="0"/>
-                <a:cs typeface="Times New Roman" panose="02020603050405020304" pitchFamily="18" charset="0"/>
-              </a:rPr>
-              <a:t>Bolin Zhu</a:t>
-            </a:r>
-            <a:r>
-              <a:rPr lang="en-US" altLang="zh-CN" sz="1100" dirty="0">
-                <a:latin typeface="Times New Roman" panose="02020603050405020304" pitchFamily="18" charset="0"/>
-                <a:cs typeface="Times New Roman" panose="02020603050405020304" pitchFamily="18" charset="0"/>
-              </a:rPr>
-              <a:t>, et al. FormulaReasoning: A Dataset for Formula-Based Numerical Reasoning[C/OL]//The 64th Annual Meeting of the Association for Computational Linguistics. 2026. https://openreview.net/forum?id=G87r1ICRPg. </a:t>
-            </a:r>
-            <a:endParaRPr lang="en-US" altLang="zh-CN" sz="1100" dirty="0">
-              <a:latin typeface="Times New Roman" panose="02020603050405020304" pitchFamily="18" charset="0"/>
-              <a:cs typeface="Times New Roman" panose="02020603050405020304" pitchFamily="18" charset="0"/>
-            </a:endParaRPr>
-          </a:p>
-          <a:p>
-            <a:pPr>
-              <a:lnSpc>
-                <a:spcPct val="100000"/>
-              </a:lnSpc>
-            </a:pPr>
-            <a:endParaRPr lang="en-US" altLang="zh-CN" sz="1100" dirty="0">
-              <a:latin typeface="Times New Roman" panose="02020603050405020304" pitchFamily="18" charset="0"/>
-              <a:cs typeface="Times New Roman" panose="02020603050405020304" pitchFamily="18" charset="0"/>
-            </a:endParaRPr>
-          </a:p>
-          <a:p>
-            <a:pPr>
-              <a:lnSpc>
-                <a:spcPct val="100000"/>
-              </a:lnSpc>
-            </a:pPr>
-            <a:endParaRPr lang="en-US" altLang="zh-CN" sz="1100" dirty="0">
-              <a:latin typeface="Times New Roman" panose="02020603050405020304" pitchFamily="18" charset="0"/>
-              <a:cs typeface="Times New Roman" panose="02020603050405020304" pitchFamily="18" charset="0"/>
-            </a:endParaRPr>
-          </a:p>
-          <a:p>
-            <a:pPr>
-              <a:lnSpc>
-                <a:spcPct val="100000"/>
-              </a:lnSpc>
-            </a:pPr>
-            <a:endParaRPr lang="en-US" altLang="zh-CN" sz="1100" dirty="0">
-              <a:latin typeface="Times New Roman" panose="02020603050405020304" pitchFamily="18" charset="0"/>
-              <a:cs typeface="Times New Roman" panose="02020603050405020304" pitchFamily="18" charset="0"/>
-            </a:endParaRPr>
-          </a:p>
-          <a:p>
-            <a:pPr>
-              <a:lnSpc>
-                <a:spcPct val="100000"/>
-              </a:lnSpc>
-            </a:pPr>
-            <a:endParaRPr lang="en-US" altLang="zh-CN" sz="1100" dirty="0">
-              <a:latin typeface="Times New Roman" panose="02020603050405020304" pitchFamily="18" charset="0"/>
-              <a:cs typeface="Times New Roman" panose="02020603050405020304" pitchFamily="18" charset="0"/>
-              <a:sym typeface="+mn-ea"/>
-            </a:endParaRPr>
-          </a:p>
-          <a:p>
-            <a:pPr>
-              <a:lnSpc>
-                <a:spcPct val="100000"/>
-              </a:lnSpc>
-            </a:pPr>
-            <a:endParaRPr lang="en-US" altLang="zh-CN" sz="1100" dirty="0">
-              <a:latin typeface="Times New Roman" panose="02020603050405020304" pitchFamily="18" charset="0"/>
-              <a:cs typeface="Times New Roman" panose="02020603050405020304" pitchFamily="18" charset="0"/>
-              <a:sym typeface="+mn-ea"/>
-            </a:endParaRPr>
-          </a:p>
-          <a:p>
-            <a:pPr>
-              <a:lnSpc>
-                <a:spcPct val="100000"/>
-              </a:lnSpc>
-            </a:pPr>
-            <a:endParaRPr lang="en-US" altLang="zh-CN" sz="1100" dirty="0">
-              <a:latin typeface="Times New Roman" panose="02020603050405020304" pitchFamily="18" charset="0"/>
-              <a:cs typeface="Times New Roman" panose="02020603050405020304" pitchFamily="18" charset="0"/>
-              <a:sym typeface="+mn-ea"/>
-            </a:endParaRPr>
-          </a:p>
-          <a:p>
-            <a:pPr>
-              <a:lnSpc>
-                <a:spcPct val="100000"/>
-              </a:lnSpc>
-            </a:pPr>
-            <a:endParaRPr lang="en-US" altLang="zh-CN" sz="1100" dirty="0">
-              <a:latin typeface="Times New Roman" panose="02020603050405020304" pitchFamily="18" charset="0"/>
-              <a:cs typeface="Times New Roman" panose="02020603050405020304" pitchFamily="18" charset="0"/>
-              <a:sym typeface="+mn-ea"/>
-            </a:endParaRPr>
-          </a:p>
-          <a:p>
-            <a:pPr>
-              <a:lnSpc>
-                <a:spcPct val="100000"/>
-              </a:lnSpc>
-            </a:pPr>
-            <a:r>
-              <a:rPr lang="zh-CN" altLang="en-US" sz="1100" dirty="0">
-                <a:latin typeface="Times New Roman" panose="02020603050405020304" pitchFamily="18" charset="0"/>
-                <a:cs typeface="Times New Roman" panose="02020603050405020304" pitchFamily="18" charset="0"/>
-              </a:rPr>
-              <a:t>程龚，朱博林，厉肖，一种基于公式的数值</a:t>
-            </a:r>
-            <a:r>
-              <a:rPr lang="zh-CN" altLang="en-US" sz="1100" dirty="0">
-                <a:latin typeface="Times New Roman" panose="02020603050405020304" pitchFamily="18" charset="0"/>
-                <a:cs typeface="Times New Roman" panose="02020603050405020304" pitchFamily="18" charset="0"/>
-              </a:rPr>
-              <a:t>推理问答实现方法、设备及介质</a:t>
-            </a:r>
-            <a:r>
-              <a:rPr lang="en-US" altLang="zh-CN" sz="1100" dirty="0">
-                <a:latin typeface="Times New Roman" panose="02020603050405020304" pitchFamily="18" charset="0"/>
-                <a:cs typeface="Times New Roman" panose="02020603050405020304" pitchFamily="18" charset="0"/>
-              </a:rPr>
-              <a:t>2026.4 </a:t>
-            </a:r>
-            <a:endParaRPr lang="en-US" altLang="zh-CN" sz="1100" dirty="0">
-              <a:latin typeface="Times New Roman" panose="02020603050405020304" pitchFamily="18" charset="0"/>
-              <a:cs typeface="Times New Roman" panose="02020603050405020304" pitchFamily="18" charset="0"/>
-            </a:endParaRPr>
+            <a:pPr algn="ctr"/>
+            <a:r>
+              <a:rPr lang="zh-CN" altLang="en-US" dirty="0">
+                <a:sym typeface="+mn-ea"/>
+              </a:rPr>
+              <a:t>一种基于公式的数值推理方法</a:t>
+            </a:r>
+            <a:endParaRPr lang="zh-CN" altLang="en-US" dirty="0"/>
           </a:p>
         </p:txBody>
       </p:sp>
@@ -18939,97 +19264,6 @@
               <a:rPr lang="zh-CN" altLang="en-US" smtClean="0"/>
             </a:fld>
             <a:endParaRPr lang="zh-CN" altLang="en-US" dirty="0"/>
-          </a:p>
-        </p:txBody>
-      </p:sp>
-      <p:sp>
-        <p:nvSpPr>
-          <p:cNvPr id="5" name="标题 4"/>
-          <p:cNvSpPr>
-            <a:spLocks noGrp="1"/>
-          </p:cNvSpPr>
-          <p:nvPr>
-            <p:ph type="title"/>
-          </p:nvPr>
-        </p:nvSpPr>
-        <p:spPr/>
-        <p:txBody>
-          <a:bodyPr/>
-          <a:lstStyle/>
-          <a:p>
-            <a:r>
-              <a:rPr lang="zh-CN" altLang="en-US" dirty="0">
-                <a:latin typeface="黑体" panose="02010609060101010101" charset="-122"/>
-                <a:ea typeface="黑体" panose="02010609060101010101" charset="-122"/>
-              </a:rPr>
-              <a:t>攻读硕士学位期间完成的学术成果</a:t>
-            </a:r>
-            <a:endParaRPr lang="zh-CN" altLang="en-US" dirty="0">
-              <a:latin typeface="黑体" panose="02010609060101010101" charset="-122"/>
-              <a:ea typeface="黑体" panose="02010609060101010101" charset="-122"/>
-            </a:endParaRPr>
-          </a:p>
-        </p:txBody>
-      </p:sp>
-      <p:sp>
-        <p:nvSpPr>
-          <p:cNvPr id="6" name="标题 4"/>
-          <p:cNvSpPr>
-            <a:spLocks noGrp="1"/>
-          </p:cNvSpPr>
-          <p:nvPr/>
-        </p:nvSpPr>
-        <p:spPr>
-          <a:xfrm>
-            <a:off x="598924" y="2696800"/>
-            <a:ext cx="5920502" cy="489600"/>
-          </a:xfrm>
-          <a:prstGeom prst="rect">
-            <a:avLst/>
-          </a:prstGeom>
-        </p:spPr>
-        <p:txBody>
-          <a:bodyPr vert="horz" lIns="91440" tIns="45720" rIns="91440" bIns="45720" rtlCol="0" anchor="ctr">
-            <a:normAutofit/>
-          </a:bodyPr>
-          <a:lstStyle>
-            <a:lvl1pPr algn="l" defTabSz="514985" rtl="0" eaLnBrk="1" latinLnBrk="0" hangingPunct="1">
-              <a:lnSpc>
-                <a:spcPct val="90000"/>
-              </a:lnSpc>
-              <a:spcBef>
-                <a:spcPct val="0"/>
-              </a:spcBef>
-              <a:buNone/>
-              <a:defRPr sz="2100" kern="1200" baseline="0">
-                <a:solidFill>
-                  <a:srgbClr val="63065F"/>
-                </a:solidFill>
-                <a:latin typeface="Arial" panose="020B0604020202020204" pitchFamily="34" charset="0"/>
-                <a:ea typeface="+mj-ea"/>
-                <a:cs typeface="Arial" panose="020B0604020202020204" pitchFamily="34" charset="0"/>
-              </a:defRPr>
-            </a:lvl1pPr>
-          </a:lstStyle>
-          <a:p>
-            <a:r>
-              <a:rPr lang="zh-CN" altLang="en-US" dirty="0">
-                <a:latin typeface="黑体" panose="02010609060101010101" charset="-122"/>
-                <a:ea typeface="黑体" panose="02010609060101010101" charset="-122"/>
-              </a:rPr>
-              <a:t>攻读硕士学位期间完成的</a:t>
-            </a:r>
-            <a:r>
-              <a:rPr lang="zh-CN" altLang="en-US" dirty="0">
-                <a:latin typeface="黑体" panose="02010609060101010101" charset="-122"/>
-                <a:ea typeface="黑体" panose="02010609060101010101" charset="-122"/>
-              </a:rPr>
-              <a:t>专利情况</a:t>
-            </a:r>
-            <a:endParaRPr lang="zh-CN" altLang="en-US" dirty="0">
-              <a:latin typeface="黑体" panose="02010609060101010101" charset="-122"/>
-              <a:ea typeface="黑体" panose="02010609060101010101" charset="-122"/>
-            </a:endParaRPr>
           </a:p>
         </p:txBody>
       </p:sp>
@@ -19038,6 +19272,7 @@
   <p:clrMapOvr>
     <a:masterClrMapping/>
   </p:clrMapOvr>
+  <p:transition advTm="1284"/>
 </p:sld>
 </file>
 
@@ -19060,86 +19295,40 @@
       </p:grpSpPr>
       <p:sp>
         <p:nvSpPr>
-          <p:cNvPr id="10" name="标题 9"/>
-          <p:cNvSpPr>
-            <a:spLocks noGrp="1"/>
-          </p:cNvSpPr>
-          <p:nvPr>
-            <p:ph type="ctrTitle"/>
-          </p:nvPr>
-        </p:nvSpPr>
-        <p:spPr/>
+          <p:cNvPr id="6" name="标题 5"/>
+          <p:cNvSpPr>
+            <a:spLocks noGrp="1"/>
+          </p:cNvSpPr>
+          <p:nvPr>
+            <p:ph type="title"/>
+          </p:nvPr>
+        </p:nvSpPr>
+        <p:spPr>
+          <a:xfrm>
+            <a:off x="0" y="1282065"/>
+            <a:ext cx="6864985" cy="1292860"/>
+          </a:xfrm>
+        </p:spPr>
         <p:txBody>
           <a:bodyPr/>
           <a:lstStyle/>
           <a:p>
-            <a:r>
-              <a:rPr lang="zh-CN" altLang="en-US" dirty="0"/>
-              <a:t>感谢观看</a:t>
-            </a:r>
-            <a:endParaRPr lang="zh-CN" altLang="en-US" dirty="0"/>
-          </a:p>
-        </p:txBody>
-      </p:sp>
-      <p:sp>
-        <p:nvSpPr>
-          <p:cNvPr id="11" name="副标题 10"/>
-          <p:cNvSpPr>
-            <a:spLocks noGrp="1"/>
-          </p:cNvSpPr>
-          <p:nvPr>
-            <p:ph type="subTitle" idx="1"/>
-          </p:nvPr>
-        </p:nvSpPr>
-        <p:spPr>
-          <a:xfrm>
-            <a:off x="2708617" y="2953358"/>
-            <a:ext cx="1921440" cy="666000"/>
-          </a:xfrm>
-        </p:spPr>
-        <p:txBody>
-          <a:bodyPr>
-            <a:normAutofit fontScale="92500" lnSpcReduction="20000"/>
-          </a:bodyPr>
-          <a:lstStyle/>
-          <a:p>
-            <a:pPr algn="l"/>
-            <a:r>
-              <a:rPr kumimoji="1" lang="zh-CN" altLang="en-US" dirty="0"/>
-              <a:t>汇报人：</a:t>
-            </a:r>
-            <a:r>
-              <a:rPr kumimoji="1" lang="zh-CN" altLang="en-US" dirty="0"/>
-              <a:t>朱博林  </a:t>
-            </a:r>
-            <a:endParaRPr kumimoji="1" lang="en-US" altLang="zh-CN" dirty="0"/>
-          </a:p>
-          <a:p>
-            <a:pPr algn="l"/>
-            <a:r>
-              <a:rPr kumimoji="1" lang="zh-CN" altLang="en-US" dirty="0"/>
-              <a:t>学号：</a:t>
-            </a:r>
-            <a:r>
-              <a:rPr kumimoji="1" lang="en-US" altLang="zh-CN" dirty="0"/>
-              <a:t>522023330123</a:t>
-            </a:r>
-            <a:endParaRPr kumimoji="1" lang="en-US" altLang="zh-CN" dirty="0"/>
-          </a:p>
-          <a:p>
-            <a:pPr algn="l"/>
-            <a:r>
-              <a:rPr kumimoji="1" lang="zh-CN" altLang="en-US" dirty="0"/>
-              <a:t>导师：</a:t>
-            </a:r>
-            <a:r>
-              <a:rPr kumimoji="1" lang="zh-CN" altLang="en-US" dirty="0"/>
-              <a:t>程龚</a:t>
-            </a:r>
-            <a:endParaRPr kumimoji="1" lang="zh-CN" altLang="en-US" dirty="0"/>
-          </a:p>
-          <a:p>
-            <a:endParaRPr lang="zh-CN" altLang="en-US" dirty="0"/>
+            <a:pPr algn="ctr"/>
+            <a:r>
+              <a:rPr lang="zh-CN" altLang="en-US" dirty="0">
+                <a:sym typeface="+mn-ea"/>
+              </a:rPr>
+              <a:t>总结与</a:t>
+            </a:r>
+            <a:r>
+              <a:rPr lang="zh-CN" altLang="en-US" dirty="0">
+                <a:sym typeface="+mn-ea"/>
+              </a:rPr>
+              <a:t>展望</a:t>
+            </a:r>
+            <a:endParaRPr lang="zh-CN" altLang="en-US" dirty="0">
+              <a:sym typeface="+mn-ea"/>
+            </a:endParaRPr>
           </a:p>
         </p:txBody>
       </p:sp>
@@ -19184,6 +19373,213 @@
               <a:rPr lang="zh-CN" altLang="en-US" smtClean="0"/>
             </a:fld>
             <a:endParaRPr lang="zh-CN" altLang="en-US" dirty="0"/>
+          </a:p>
+        </p:txBody>
+      </p:sp>
+    </p:spTree>
+  </p:cSld>
+  <p:clrMapOvr>
+    <a:masterClrMapping/>
+  </p:clrMapOvr>
+  <p:transition advTm="1284"/>
+</p:sld>
+</file>
+
+<file path=ppt/slides/slide29.xml><?xml version="1.0" encoding="utf-8"?>
+<p:sld xmlns:a="http://schemas.openxmlformats.org/drawingml/2006/main" xmlns:r="http://schemas.openxmlformats.org/officeDocument/2006/relationships" xmlns:p="http://schemas.openxmlformats.org/presentationml/2006/main">
+  <p:cSld>
+    <p:spTree>
+      <p:nvGrpSpPr>
+        <p:cNvPr id="1" name=""/>
+        <p:cNvGrpSpPr/>
+        <p:nvPr/>
+      </p:nvGrpSpPr>
+      <p:grpSpPr>
+        <a:xfrm>
+          <a:off x="0" y="0"/>
+          <a:ext cx="0" cy="0"/>
+          <a:chOff x="0" y="0"/>
+          <a:chExt cx="0" cy="0"/>
+        </a:xfrm>
+      </p:grpSpPr>
+      <p:sp>
+        <p:nvSpPr>
+          <p:cNvPr id="4" name="日期占位符 3"/>
+          <p:cNvSpPr>
+            <a:spLocks noGrp="1"/>
+          </p:cNvSpPr>
+          <p:nvPr>
+            <p:ph type="dt" sz="half" idx="10"/>
+          </p:nvPr>
+        </p:nvSpPr>
+        <p:spPr/>
+        <p:txBody>
+          <a:bodyPr/>
+          <a:lstStyle/>
+          <a:p>
+            <a:fld id="{22622B08-3EA3-41BF-B421-FEB4AE47B4B9}" type="datetime1">
+              <a:rPr lang="zh-CN" altLang="en-US" smtClean="0"/>
+            </a:fld>
+            <a:endParaRPr lang="zh-CN" altLang="en-US" dirty="0"/>
+          </a:p>
+        </p:txBody>
+      </p:sp>
+      <p:sp>
+        <p:nvSpPr>
+          <p:cNvPr id="5" name="灯片编号占位符 4"/>
+          <p:cNvSpPr>
+            <a:spLocks noGrp="1"/>
+          </p:cNvSpPr>
+          <p:nvPr>
+            <p:ph type="sldNum" sz="quarter" idx="11"/>
+          </p:nvPr>
+        </p:nvSpPr>
+        <p:spPr/>
+        <p:txBody>
+          <a:bodyPr/>
+          <a:lstStyle/>
+          <a:p>
+            <a:fld id="{463E1EE8-403A-4D2D-AB26-5BF439A27F60}" type="slidenum">
+              <a:rPr lang="zh-CN" altLang="en-US" smtClean="0"/>
+            </a:fld>
+            <a:endParaRPr lang="zh-CN" altLang="en-US" dirty="0"/>
+          </a:p>
+        </p:txBody>
+      </p:sp>
+      <p:sp>
+        <p:nvSpPr>
+          <p:cNvPr id="2" name="文本框 1"/>
+          <p:cNvSpPr txBox="1"/>
+          <p:nvPr/>
+        </p:nvSpPr>
+        <p:spPr>
+          <a:xfrm>
+            <a:off x="300355" y="265430"/>
+            <a:ext cx="6296660" cy="3226435"/>
+          </a:xfrm>
+          <a:prstGeom prst="rect">
+            <a:avLst/>
+          </a:prstGeom>
+          <a:noFill/>
+        </p:spPr>
+        <p:txBody>
+          <a:bodyPr wrap="square" rtlCol="0">
+            <a:spAutoFit/>
+          </a:bodyPr>
+          <a:p>
+            <a:pPr marL="285750" indent="-285750">
+              <a:buFont typeface="Wingdings" panose="05000000000000000000" charset="0"/>
+              <a:buChar char="n"/>
+            </a:pPr>
+            <a:r>
+              <a:rPr lang="zh-CN" altLang="en-US"/>
+              <a:t>总结</a:t>
+            </a:r>
+            <a:endParaRPr lang="zh-CN" altLang="en-US"/>
+          </a:p>
+          <a:p>
+            <a:pPr marL="285750" indent="-285750">
+              <a:buFont typeface="Wingdings" panose="05000000000000000000" charset="0"/>
+              <a:buChar char="n"/>
+            </a:pPr>
+            <a:endParaRPr lang="zh-CN" altLang="en-US"/>
+          </a:p>
+          <a:p>
+            <a:pPr marL="742950" lvl="1" indent="-285750">
+              <a:buFont typeface="Arial" panose="020B0604020202020204" pitchFamily="34" charset="0"/>
+              <a:buChar char="•"/>
+            </a:pPr>
+            <a:r>
+              <a:rPr lang="zh-CN" altLang="en-US"/>
+              <a:t>设计自适应</a:t>
+            </a:r>
+            <a:r>
+              <a:rPr lang="zh-CN" altLang="en-US"/>
+              <a:t>解码器和流水线解码器，兼顾全局语义建模与生成速度提升</a:t>
+            </a:r>
+            <a:endParaRPr lang="zh-CN" altLang="en-US"/>
+          </a:p>
+          <a:p>
+            <a:pPr marL="742950" lvl="1" indent="-285750">
+              <a:buFont typeface="Arial" panose="020B0604020202020204" pitchFamily="34" charset="0"/>
+              <a:buChar char="•"/>
+            </a:pPr>
+            <a:endParaRPr lang="zh-CN" altLang="en-US"/>
+          </a:p>
+          <a:p>
+            <a:pPr marL="742950" lvl="1" indent="-285750">
+              <a:buFont typeface="Arial" panose="020B0604020202020204" pitchFamily="34" charset="0"/>
+              <a:buChar char="•"/>
+            </a:pPr>
+            <a:r>
+              <a:rPr lang="zh-CN" altLang="en-US"/>
+              <a:t>在阅读理解、文本摘要、关键短语生成等任务中验证模型潜力，多任务生成能力突出</a:t>
+            </a:r>
+            <a:endParaRPr lang="zh-CN" altLang="en-US"/>
+          </a:p>
+          <a:p>
+            <a:endParaRPr lang="zh-CN" altLang="en-US"/>
+          </a:p>
+          <a:p>
+            <a:endParaRPr lang="zh-CN" altLang="en-US"/>
+          </a:p>
+          <a:p>
+            <a:pPr marL="285750" indent="-285750">
+              <a:buFont typeface="Wingdings" panose="05000000000000000000" charset="0"/>
+              <a:buChar char="n"/>
+            </a:pPr>
+            <a:endParaRPr lang="zh-CN" altLang="en-US"/>
+          </a:p>
+          <a:p>
+            <a:pPr marL="285750" indent="-285750">
+              <a:buFont typeface="Wingdings" panose="05000000000000000000" charset="0"/>
+              <a:buChar char="n"/>
+            </a:pPr>
+            <a:r>
+              <a:rPr lang="zh-CN" altLang="en-US"/>
+              <a:t>未来方向</a:t>
+            </a:r>
+            <a:endParaRPr lang="zh-CN" altLang="en-US"/>
+          </a:p>
+          <a:p>
+            <a:pPr marL="285750" indent="-285750">
+              <a:buFont typeface="Wingdings" panose="05000000000000000000" charset="0"/>
+              <a:buChar char="n"/>
+            </a:pPr>
+            <a:endParaRPr lang="zh-CN" altLang="en-US"/>
+          </a:p>
+          <a:p>
+            <a:pPr marL="742950" lvl="1" indent="-285750">
+              <a:buFont typeface="Arial" panose="020B0604020202020204" pitchFamily="34" charset="0"/>
+              <a:buChar char="•"/>
+            </a:pPr>
+            <a:r>
+              <a:rPr lang="zh-CN" altLang="en-US"/>
+              <a:t>数学问题求解等无上下文感知任务（依赖强标记时序，需改进依赖建模）</a:t>
+            </a:r>
+            <a:endParaRPr lang="zh-CN" altLang="en-US"/>
+          </a:p>
+          <a:p>
+            <a:pPr marL="742950" lvl="1" indent="-285750">
+              <a:buFont typeface="Arial" panose="020B0604020202020204" pitchFamily="34" charset="0"/>
+              <a:buChar char="•"/>
+            </a:pPr>
+            <a:endParaRPr lang="zh-CN" altLang="en-US"/>
+          </a:p>
+          <a:p>
+            <a:pPr marL="742950" lvl="1" indent="-285750">
+              <a:buFont typeface="Arial" panose="020B0604020202020204" pitchFamily="34" charset="0"/>
+              <a:buChar char="•"/>
+            </a:pPr>
+            <a:r>
+              <a:rPr lang="zh-CN" altLang="en-US"/>
+              <a:t>优化子序列生成，取消固定时间间隔，按语义动态划分子序列。</a:t>
+            </a:r>
+            <a:endParaRPr lang="zh-CN" altLang="en-US"/>
+          </a:p>
+          <a:p>
+            <a:pPr indent="457200"/>
+            <a:endParaRPr lang="zh-CN" altLang="en-US"/>
           </a:p>
         </p:txBody>
       </p:sp>
@@ -19294,6 +19690,488 @@
 </p:sld>
 </file>
 
+<file path=ppt/slides/slide30.xml><?xml version="1.0" encoding="utf-8"?>
+<p:sld xmlns:a="http://schemas.openxmlformats.org/drawingml/2006/main" xmlns:r="http://schemas.openxmlformats.org/officeDocument/2006/relationships" xmlns:p="http://schemas.openxmlformats.org/presentationml/2006/main">
+  <p:cSld>
+    <p:spTree>
+      <p:nvGrpSpPr>
+        <p:cNvPr id="1" name=""/>
+        <p:cNvGrpSpPr/>
+        <p:nvPr/>
+      </p:nvGrpSpPr>
+      <p:grpSpPr>
+        <a:xfrm>
+          <a:off x="0" y="0"/>
+          <a:ext cx="0" cy="0"/>
+          <a:chOff x="0" y="0"/>
+          <a:chExt cx="0" cy="0"/>
+        </a:xfrm>
+      </p:grpSpPr>
+      <p:sp>
+        <p:nvSpPr>
+          <p:cNvPr id="2" name="内容占位符 1"/>
+          <p:cNvSpPr>
+            <a:spLocks noGrp="1"/>
+          </p:cNvSpPr>
+          <p:nvPr>
+            <p:ph idx="1"/>
+          </p:nvPr>
+        </p:nvSpPr>
+        <p:spPr>
+          <a:xfrm>
+            <a:off x="471922" y="979200"/>
+            <a:ext cx="5540303" cy="3701981"/>
+          </a:xfrm>
+        </p:spPr>
+        <p:txBody>
+          <a:bodyPr>
+            <a:normAutofit/>
+          </a:bodyPr>
+          <a:lstStyle/>
+          <a:p>
+            <a:pPr>
+              <a:lnSpc>
+                <a:spcPct val="100000"/>
+              </a:lnSpc>
+            </a:pPr>
+            <a:r>
+              <a:rPr lang="en-US" altLang="zh-CN" sz="1100" dirty="0">
+                <a:latin typeface="Times New Roman" panose="02020603050405020304" pitchFamily="18" charset="0"/>
+                <a:cs typeface="Times New Roman" panose="02020603050405020304" pitchFamily="18" charset="0"/>
+              </a:rPr>
+              <a:t>Xiao Li, </a:t>
+            </a:r>
+            <a:r>
+              <a:rPr lang="en-US" altLang="zh-CN" sz="1100" b="1" dirty="0">
+                <a:latin typeface="Times New Roman" panose="02020603050405020304" pitchFamily="18" charset="0"/>
+                <a:cs typeface="Times New Roman" panose="02020603050405020304" pitchFamily="18" charset="0"/>
+              </a:rPr>
+              <a:t>Bolin Zhu</a:t>
+            </a:r>
+            <a:r>
+              <a:rPr lang="en-US" altLang="zh-CN" sz="1100" dirty="0">
+                <a:latin typeface="Times New Roman" panose="02020603050405020304" pitchFamily="18" charset="0"/>
+                <a:cs typeface="Times New Roman" panose="02020603050405020304" pitchFamily="18" charset="0"/>
+              </a:rPr>
+              <a:t>, et al. FormulaReasoning: A Dataset for Formula-Based Numerical Reasoning[C/OL]//The 64th Annual Meeting of the Association for Computational Linguistics. 2026. https://openreview.net/forum?id=G87r1ICRPg. </a:t>
+            </a:r>
+            <a:endParaRPr lang="en-US" altLang="zh-CN" sz="1100" dirty="0">
+              <a:latin typeface="Times New Roman" panose="02020603050405020304" pitchFamily="18" charset="0"/>
+              <a:cs typeface="Times New Roman" panose="02020603050405020304" pitchFamily="18" charset="0"/>
+            </a:endParaRPr>
+          </a:p>
+          <a:p>
+            <a:pPr>
+              <a:lnSpc>
+                <a:spcPct val="100000"/>
+              </a:lnSpc>
+            </a:pPr>
+            <a:endParaRPr lang="en-US" altLang="zh-CN" sz="1100" dirty="0">
+              <a:latin typeface="Times New Roman" panose="02020603050405020304" pitchFamily="18" charset="0"/>
+              <a:cs typeface="Times New Roman" panose="02020603050405020304" pitchFamily="18" charset="0"/>
+            </a:endParaRPr>
+          </a:p>
+          <a:p>
+            <a:pPr>
+              <a:lnSpc>
+                <a:spcPct val="100000"/>
+              </a:lnSpc>
+            </a:pPr>
+            <a:endParaRPr lang="en-US" altLang="zh-CN" sz="1100" dirty="0">
+              <a:latin typeface="Times New Roman" panose="02020603050405020304" pitchFamily="18" charset="0"/>
+              <a:cs typeface="Times New Roman" panose="02020603050405020304" pitchFamily="18" charset="0"/>
+            </a:endParaRPr>
+          </a:p>
+          <a:p>
+            <a:pPr>
+              <a:lnSpc>
+                <a:spcPct val="100000"/>
+              </a:lnSpc>
+            </a:pPr>
+            <a:endParaRPr lang="en-US" altLang="zh-CN" sz="1100" dirty="0">
+              <a:latin typeface="Times New Roman" panose="02020603050405020304" pitchFamily="18" charset="0"/>
+              <a:cs typeface="Times New Roman" panose="02020603050405020304" pitchFamily="18" charset="0"/>
+            </a:endParaRPr>
+          </a:p>
+          <a:p>
+            <a:pPr>
+              <a:lnSpc>
+                <a:spcPct val="100000"/>
+              </a:lnSpc>
+            </a:pPr>
+            <a:endParaRPr lang="en-US" altLang="zh-CN" sz="1100" dirty="0">
+              <a:latin typeface="Times New Roman" panose="02020603050405020304" pitchFamily="18" charset="0"/>
+              <a:cs typeface="Times New Roman" panose="02020603050405020304" pitchFamily="18" charset="0"/>
+              <a:sym typeface="+mn-ea"/>
+            </a:endParaRPr>
+          </a:p>
+          <a:p>
+            <a:pPr>
+              <a:lnSpc>
+                <a:spcPct val="100000"/>
+              </a:lnSpc>
+            </a:pPr>
+            <a:endParaRPr lang="en-US" altLang="zh-CN" sz="1100" dirty="0">
+              <a:latin typeface="Times New Roman" panose="02020603050405020304" pitchFamily="18" charset="0"/>
+              <a:cs typeface="Times New Roman" panose="02020603050405020304" pitchFamily="18" charset="0"/>
+              <a:sym typeface="+mn-ea"/>
+            </a:endParaRPr>
+          </a:p>
+          <a:p>
+            <a:pPr>
+              <a:lnSpc>
+                <a:spcPct val="100000"/>
+              </a:lnSpc>
+            </a:pPr>
+            <a:endParaRPr lang="en-US" altLang="zh-CN" sz="1100" dirty="0">
+              <a:latin typeface="Times New Roman" panose="02020603050405020304" pitchFamily="18" charset="0"/>
+              <a:cs typeface="Times New Roman" panose="02020603050405020304" pitchFamily="18" charset="0"/>
+              <a:sym typeface="+mn-ea"/>
+            </a:endParaRPr>
+          </a:p>
+          <a:p>
+            <a:pPr>
+              <a:lnSpc>
+                <a:spcPct val="100000"/>
+              </a:lnSpc>
+            </a:pPr>
+            <a:endParaRPr lang="en-US" altLang="zh-CN" sz="1100" dirty="0">
+              <a:latin typeface="Times New Roman" panose="02020603050405020304" pitchFamily="18" charset="0"/>
+              <a:cs typeface="Times New Roman" panose="02020603050405020304" pitchFamily="18" charset="0"/>
+              <a:sym typeface="+mn-ea"/>
+            </a:endParaRPr>
+          </a:p>
+          <a:p>
+            <a:pPr>
+              <a:lnSpc>
+                <a:spcPct val="100000"/>
+              </a:lnSpc>
+            </a:pPr>
+            <a:r>
+              <a:rPr lang="zh-CN" altLang="en-US" sz="1100" dirty="0">
+                <a:latin typeface="Times New Roman" panose="02020603050405020304" pitchFamily="18" charset="0"/>
+                <a:cs typeface="Times New Roman" panose="02020603050405020304" pitchFamily="18" charset="0"/>
+              </a:rPr>
+              <a:t>程龚，朱博林，厉肖，一种基于公式的数值</a:t>
+            </a:r>
+            <a:r>
+              <a:rPr lang="zh-CN" altLang="en-US" sz="1100" dirty="0">
+                <a:latin typeface="Times New Roman" panose="02020603050405020304" pitchFamily="18" charset="0"/>
+                <a:cs typeface="Times New Roman" panose="02020603050405020304" pitchFamily="18" charset="0"/>
+              </a:rPr>
+              <a:t>推理问答实现方法、设备及介质</a:t>
+            </a:r>
+            <a:r>
+              <a:rPr lang="en-US" altLang="zh-CN" sz="1100" dirty="0">
+                <a:latin typeface="Times New Roman" panose="02020603050405020304" pitchFamily="18" charset="0"/>
+                <a:cs typeface="Times New Roman" panose="02020603050405020304" pitchFamily="18" charset="0"/>
+              </a:rPr>
+              <a:t>2026.4 </a:t>
+            </a:r>
+            <a:endParaRPr lang="en-US" altLang="zh-CN" sz="1100" dirty="0">
+              <a:latin typeface="Times New Roman" panose="02020603050405020304" pitchFamily="18" charset="0"/>
+              <a:cs typeface="Times New Roman" panose="02020603050405020304" pitchFamily="18" charset="0"/>
+            </a:endParaRPr>
+          </a:p>
+        </p:txBody>
+      </p:sp>
+      <p:sp>
+        <p:nvSpPr>
+          <p:cNvPr id="3" name="日期占位符 2"/>
+          <p:cNvSpPr>
+            <a:spLocks noGrp="1"/>
+          </p:cNvSpPr>
+          <p:nvPr>
+            <p:ph type="dt" sz="half" idx="10"/>
+          </p:nvPr>
+        </p:nvSpPr>
+        <p:spPr/>
+        <p:txBody>
+          <a:bodyPr/>
+          <a:lstStyle/>
+          <a:p>
+            <a:fld id="{2FBB519E-D9EB-47F0-AD65-082D85248404}" type="datetime1">
+              <a:rPr lang="zh-CN" altLang="en-US" smtClean="0"/>
+            </a:fld>
+            <a:endParaRPr lang="zh-CN" altLang="en-US" dirty="0"/>
+          </a:p>
+        </p:txBody>
+      </p:sp>
+      <p:sp>
+        <p:nvSpPr>
+          <p:cNvPr id="4" name="灯片编号占位符 3"/>
+          <p:cNvSpPr>
+            <a:spLocks noGrp="1"/>
+          </p:cNvSpPr>
+          <p:nvPr>
+            <p:ph type="sldNum" sz="quarter" idx="11"/>
+          </p:nvPr>
+        </p:nvSpPr>
+        <p:spPr/>
+        <p:txBody>
+          <a:bodyPr/>
+          <a:lstStyle/>
+          <a:p>
+            <a:fld id="{463E1EE8-403A-4D2D-AB26-5BF439A27F60}" type="slidenum">
+              <a:rPr lang="zh-CN" altLang="en-US" smtClean="0"/>
+            </a:fld>
+            <a:endParaRPr lang="zh-CN" altLang="en-US" dirty="0"/>
+          </a:p>
+        </p:txBody>
+      </p:sp>
+      <p:sp>
+        <p:nvSpPr>
+          <p:cNvPr id="5" name="标题 4"/>
+          <p:cNvSpPr>
+            <a:spLocks noGrp="1"/>
+          </p:cNvSpPr>
+          <p:nvPr>
+            <p:ph type="title"/>
+          </p:nvPr>
+        </p:nvSpPr>
+        <p:spPr/>
+        <p:txBody>
+          <a:bodyPr/>
+          <a:lstStyle/>
+          <a:p>
+            <a:r>
+              <a:rPr lang="zh-CN" altLang="en-US" dirty="0">
+                <a:latin typeface="黑体" panose="02010609060101010101" charset="-122"/>
+                <a:ea typeface="黑体" panose="02010609060101010101" charset="-122"/>
+              </a:rPr>
+              <a:t>攻读硕士学位期间完成的学术成果</a:t>
+            </a:r>
+            <a:endParaRPr lang="zh-CN" altLang="en-US" dirty="0">
+              <a:latin typeface="黑体" panose="02010609060101010101" charset="-122"/>
+              <a:ea typeface="黑体" panose="02010609060101010101" charset="-122"/>
+            </a:endParaRPr>
+          </a:p>
+        </p:txBody>
+      </p:sp>
+      <p:sp>
+        <p:nvSpPr>
+          <p:cNvPr id="6" name="标题 4"/>
+          <p:cNvSpPr>
+            <a:spLocks noGrp="1"/>
+          </p:cNvSpPr>
+          <p:nvPr/>
+        </p:nvSpPr>
+        <p:spPr>
+          <a:xfrm>
+            <a:off x="598924" y="2696800"/>
+            <a:ext cx="5920502" cy="489600"/>
+          </a:xfrm>
+          <a:prstGeom prst="rect">
+            <a:avLst/>
+          </a:prstGeom>
+        </p:spPr>
+        <p:txBody>
+          <a:bodyPr vert="horz" lIns="91440" tIns="45720" rIns="91440" bIns="45720" rtlCol="0" anchor="ctr">
+            <a:normAutofit/>
+          </a:bodyPr>
+          <a:lstStyle>
+            <a:lvl1pPr algn="l" defTabSz="514985" rtl="0" eaLnBrk="1" latinLnBrk="0" hangingPunct="1">
+              <a:lnSpc>
+                <a:spcPct val="90000"/>
+              </a:lnSpc>
+              <a:spcBef>
+                <a:spcPct val="0"/>
+              </a:spcBef>
+              <a:buNone/>
+              <a:defRPr sz="2100" kern="1200" baseline="0">
+                <a:solidFill>
+                  <a:srgbClr val="63065F"/>
+                </a:solidFill>
+                <a:latin typeface="Arial" panose="020B0604020202020204" pitchFamily="34" charset="0"/>
+                <a:ea typeface="+mj-ea"/>
+                <a:cs typeface="Arial" panose="020B0604020202020204" pitchFamily="34" charset="0"/>
+              </a:defRPr>
+            </a:lvl1pPr>
+          </a:lstStyle>
+          <a:p>
+            <a:r>
+              <a:rPr lang="zh-CN" altLang="en-US" dirty="0">
+                <a:latin typeface="黑体" panose="02010609060101010101" charset="-122"/>
+                <a:ea typeface="黑体" panose="02010609060101010101" charset="-122"/>
+              </a:rPr>
+              <a:t>攻读硕士学位期间完成的</a:t>
+            </a:r>
+            <a:r>
+              <a:rPr lang="zh-CN" altLang="en-US" dirty="0">
+                <a:latin typeface="黑体" panose="02010609060101010101" charset="-122"/>
+                <a:ea typeface="黑体" panose="02010609060101010101" charset="-122"/>
+              </a:rPr>
+              <a:t>专利情况</a:t>
+            </a:r>
+            <a:endParaRPr lang="zh-CN" altLang="en-US" dirty="0">
+              <a:latin typeface="黑体" panose="02010609060101010101" charset="-122"/>
+              <a:ea typeface="黑体" panose="02010609060101010101" charset="-122"/>
+            </a:endParaRPr>
+          </a:p>
+        </p:txBody>
+      </p:sp>
+    </p:spTree>
+  </p:cSld>
+  <p:clrMapOvr>
+    <a:masterClrMapping/>
+  </p:clrMapOvr>
+</p:sld>
+</file>
+
+<file path=ppt/slides/slide31.xml><?xml version="1.0" encoding="utf-8"?>
+<p:sld xmlns:a="http://schemas.openxmlformats.org/drawingml/2006/main" xmlns:r="http://schemas.openxmlformats.org/officeDocument/2006/relationships" xmlns:p="http://schemas.openxmlformats.org/presentationml/2006/main">
+  <p:cSld>
+    <p:spTree>
+      <p:nvGrpSpPr>
+        <p:cNvPr id="1" name=""/>
+        <p:cNvGrpSpPr/>
+        <p:nvPr/>
+      </p:nvGrpSpPr>
+      <p:grpSpPr>
+        <a:xfrm>
+          <a:off x="0" y="0"/>
+          <a:ext cx="0" cy="0"/>
+          <a:chOff x="0" y="0"/>
+          <a:chExt cx="0" cy="0"/>
+        </a:xfrm>
+      </p:grpSpPr>
+      <p:sp>
+        <p:nvSpPr>
+          <p:cNvPr id="10" name="标题 9"/>
+          <p:cNvSpPr>
+            <a:spLocks noGrp="1"/>
+          </p:cNvSpPr>
+          <p:nvPr>
+            <p:ph type="ctrTitle"/>
+          </p:nvPr>
+        </p:nvSpPr>
+        <p:spPr/>
+        <p:txBody>
+          <a:bodyPr/>
+          <a:lstStyle/>
+          <a:p>
+            <a:r>
+              <a:rPr lang="zh-CN" altLang="en-US" dirty="0"/>
+              <a:t>感谢观看</a:t>
+            </a:r>
+            <a:endParaRPr lang="zh-CN" altLang="en-US" dirty="0"/>
+          </a:p>
+        </p:txBody>
+      </p:sp>
+      <p:sp>
+        <p:nvSpPr>
+          <p:cNvPr id="11" name="副标题 10"/>
+          <p:cNvSpPr>
+            <a:spLocks noGrp="1"/>
+          </p:cNvSpPr>
+          <p:nvPr>
+            <p:ph type="subTitle" idx="1"/>
+          </p:nvPr>
+        </p:nvSpPr>
+        <p:spPr>
+          <a:xfrm>
+            <a:off x="2708617" y="2953358"/>
+            <a:ext cx="1921440" cy="666000"/>
+          </a:xfrm>
+        </p:spPr>
+        <p:txBody>
+          <a:bodyPr>
+            <a:normAutofit fontScale="92500" lnSpcReduction="20000"/>
+          </a:bodyPr>
+          <a:lstStyle/>
+          <a:p>
+            <a:pPr algn="l"/>
+            <a:r>
+              <a:rPr kumimoji="1" lang="zh-CN" altLang="en-US" dirty="0"/>
+              <a:t>汇报人：</a:t>
+            </a:r>
+            <a:r>
+              <a:rPr kumimoji="1" lang="zh-CN" altLang="en-US" dirty="0"/>
+              <a:t>朱博林  </a:t>
+            </a:r>
+            <a:endParaRPr kumimoji="1" lang="en-US" altLang="zh-CN" dirty="0"/>
+          </a:p>
+          <a:p>
+            <a:pPr algn="l"/>
+            <a:r>
+              <a:rPr kumimoji="1" lang="zh-CN" altLang="en-US" dirty="0"/>
+              <a:t>学号：</a:t>
+            </a:r>
+            <a:r>
+              <a:rPr kumimoji="1" lang="en-US" altLang="zh-CN" dirty="0"/>
+              <a:t>522023330123</a:t>
+            </a:r>
+            <a:endParaRPr kumimoji="1" lang="en-US" altLang="zh-CN" dirty="0"/>
+          </a:p>
+          <a:p>
+            <a:pPr algn="l"/>
+            <a:r>
+              <a:rPr kumimoji="1" lang="zh-CN" altLang="en-US" dirty="0"/>
+              <a:t>导师：</a:t>
+            </a:r>
+            <a:r>
+              <a:rPr kumimoji="1" lang="zh-CN" altLang="en-US" dirty="0"/>
+              <a:t>程龚</a:t>
+            </a:r>
+            <a:endParaRPr kumimoji="1" lang="zh-CN" altLang="en-US" dirty="0"/>
+          </a:p>
+          <a:p>
+            <a:endParaRPr lang="zh-CN" altLang="en-US" dirty="0"/>
+          </a:p>
+        </p:txBody>
+      </p:sp>
+      <p:sp>
+        <p:nvSpPr>
+          <p:cNvPr id="3" name="日期占位符 2"/>
+          <p:cNvSpPr>
+            <a:spLocks noGrp="1"/>
+          </p:cNvSpPr>
+          <p:nvPr>
+            <p:ph type="dt" sz="half" idx="10"/>
+          </p:nvPr>
+        </p:nvSpPr>
+        <p:spPr/>
+        <p:txBody>
+          <a:bodyPr/>
+          <a:lstStyle/>
+          <a:p>
+            <a:fld id="{2FBB519E-D9EB-47F0-AD65-082D85248404}" type="datetime1">
+              <a:rPr lang="zh-CN" altLang="en-US" smtClean="0"/>
+            </a:fld>
+            <a:endParaRPr lang="zh-CN" altLang="en-US" dirty="0"/>
+          </a:p>
+        </p:txBody>
+      </p:sp>
+      <p:sp>
+        <p:nvSpPr>
+          <p:cNvPr id="4" name="灯片编号占位符 3"/>
+          <p:cNvSpPr>
+            <a:spLocks noGrp="1"/>
+          </p:cNvSpPr>
+          <p:nvPr>
+            <p:ph type="sldNum" sz="quarter" idx="11"/>
+          </p:nvPr>
+        </p:nvSpPr>
+        <p:spPr/>
+        <p:txBody>
+          <a:bodyPr/>
+          <a:lstStyle/>
+          <a:p>
+            <a:fld id="{463E1EE8-403A-4D2D-AB26-5BF439A27F60}" type="slidenum">
+              <a:rPr lang="zh-CN" altLang="en-US" smtClean="0"/>
+            </a:fld>
+            <a:endParaRPr lang="zh-CN" altLang="en-US" dirty="0"/>
+          </a:p>
+        </p:txBody>
+      </p:sp>
+    </p:spTree>
+  </p:cSld>
+  <p:clrMapOvr>
+    <a:masterClrMapping/>
+  </p:clrMapOvr>
+</p:sld>
+</file>
+
 <file path=ppt/slides/slide4.xml><?xml version="1.0" encoding="utf-8"?>
 <p:sld xmlns:a="http://schemas.openxmlformats.org/drawingml/2006/main" xmlns:r="http://schemas.openxmlformats.org/officeDocument/2006/relationships" xmlns:p="http://schemas.openxmlformats.org/presentationml/2006/main">
   <p:cSld>
@@ -19364,7 +20242,7 @@
         <p:spPr>
           <a:xfrm>
             <a:off x="471533" y="849559"/>
-            <a:ext cx="5880888" cy="2353310"/>
+            <a:ext cx="5880888" cy="1060450"/>
           </a:xfrm>
           <a:prstGeom prst="rect">
             <a:avLst/>
@@ -19386,7 +20264,11 @@
             </a:pPr>
             <a:r>
               <a:rPr lang="zh-CN" altLang="en-US" sz="1400" dirty="0"/>
-              <a:t>机器阅读理解：理解给定的自然语言文本，给出答案</a:t>
+              <a:t>理解文本中的数字信息，并在此基础上进行计算推导的能</a:t>
+            </a:r>
+            <a:r>
+              <a:rPr lang="zh-CN" altLang="en-US" sz="1400" dirty="0"/>
+              <a:t>力</a:t>
             </a:r>
             <a:endParaRPr lang="zh-CN" altLang="en-US" sz="1400" dirty="0"/>
           </a:p>
@@ -19399,24 +20281,10 @@
               <a:buChar char="n"/>
             </a:pPr>
             <a:r>
-              <a:rPr lang="zh-CN" altLang="en-US" sz="1400" dirty="0"/>
-              <a:t>生成式：重新构建答案，可能包含原文未出现的新词</a:t>
-            </a:r>
-            <a:endParaRPr lang="zh-CN" altLang="en-US" sz="1400" dirty="0"/>
-          </a:p>
-          <a:p>
-            <a:pPr marL="742950" lvl="1" indent="-285750">
-              <a:lnSpc>
-                <a:spcPct val="150000"/>
-              </a:lnSpc>
-              <a:buFont typeface="Arial" panose="020B0604020202020204" pitchFamily="34" charset="0"/>
-              <a:buChar char="•"/>
-            </a:pPr>
-            <a:r>
               <a:rPr lang="zh-CN" altLang="en-US" sz="1400" dirty="0">
                 <a:sym typeface="+mn-ea"/>
               </a:rPr>
-              <a:t>任务类型：文本摘要、问答、关键词生成</a:t>
+              <a:t>输入：蕴含数值信息的文本问题</a:t>
             </a:r>
             <a:endParaRPr lang="zh-CN" altLang="en-US" sz="1400" dirty="0"/>
           </a:p>
@@ -19429,121 +20297,17 @@
               <a:buChar char="n"/>
             </a:pPr>
             <a:r>
-              <a:rPr lang="zh-CN" altLang="en-US" sz="1400" dirty="0">
-                <a:sym typeface="+mn-ea"/>
-              </a:rPr>
-              <a:t>大规模预训练语言模型发展：</a:t>
-            </a:r>
-            <a:r>
-              <a:rPr lang="zh-CN" altLang="en-US" sz="1400" dirty="0">
-                <a:effectLst/>
-                <a:sym typeface="+mn-ea"/>
-              </a:rPr>
-              <a:t>注意力和自监督（</a:t>
-            </a:r>
-            <a:r>
-              <a:rPr lang="en-US" altLang="zh-CN" sz="1400" dirty="0">
-                <a:sym typeface="+mn-ea"/>
-              </a:rPr>
-              <a:t>T5 </a:t>
-            </a:r>
-            <a:r>
-              <a:rPr lang="zh-CN" altLang="en-US" sz="1400" dirty="0">
-                <a:sym typeface="+mn-ea"/>
-              </a:rPr>
-              <a:t>、</a:t>
-            </a:r>
-            <a:r>
-              <a:rPr lang="en-US" altLang="zh-CN" sz="1400" dirty="0">
-                <a:sym typeface="+mn-ea"/>
-              </a:rPr>
-              <a:t> GPT</a:t>
-            </a:r>
-            <a:r>
-              <a:rPr lang="zh-CN" altLang="en-US" sz="1400" dirty="0">
-                <a:sym typeface="+mn-ea"/>
-              </a:rPr>
-              <a:t>等）</a:t>
+              <a:rPr lang="zh-CN" altLang="en-US" sz="1400" dirty="0"/>
+              <a:t>输出：带有数值的</a:t>
+            </a:r>
+            <a:r>
+              <a:rPr lang="zh-CN" altLang="en-US" sz="1400" dirty="0"/>
+              <a:t>答案</a:t>
             </a:r>
             <a:endParaRPr lang="zh-CN" altLang="en-US" sz="1400" dirty="0"/>
           </a:p>
-          <a:p>
-            <a:pPr marL="285750" indent="-285750">
-              <a:lnSpc>
-                <a:spcPct val="150000"/>
-              </a:lnSpc>
-              <a:buFont typeface="Wingdings" panose="05000000000000000000" pitchFamily="2" charset="2"/>
-              <a:buChar char="n"/>
-            </a:pPr>
-            <a:r>
-              <a:rPr lang="zh-CN" altLang="en-US" sz="1400" dirty="0"/>
-              <a:t>挑战：</a:t>
-            </a:r>
-            <a:endParaRPr lang="en-US" altLang="zh-CN" sz="1400" dirty="0"/>
-          </a:p>
-          <a:p>
-            <a:pPr marL="629285" lvl="1" indent="-285750">
-              <a:lnSpc>
-                <a:spcPct val="150000"/>
-              </a:lnSpc>
-              <a:buFont typeface="Arial" panose="020B0604020202020204" pitchFamily="34" charset="0"/>
-              <a:buChar char="•"/>
-            </a:pPr>
-            <a:r>
-              <a:rPr lang="en-US" altLang="zh-CN" sz="1400" dirty="0"/>
-              <a:t> </a:t>
-            </a:r>
-            <a:r>
-              <a:rPr lang="zh-CN" altLang="en-US" sz="1400" dirty="0"/>
-              <a:t>推理能力弱，更复杂的任务，如多答案问答</a:t>
-            </a:r>
-            <a:endParaRPr lang="zh-CN" altLang="en-US" sz="1400" dirty="0"/>
-          </a:p>
-          <a:p>
-            <a:pPr marL="629285" lvl="1" indent="-285750">
-              <a:lnSpc>
-                <a:spcPct val="150000"/>
-              </a:lnSpc>
-              <a:buFont typeface="Arial" panose="020B0604020202020204" pitchFamily="34" charset="0"/>
-              <a:buChar char="•"/>
-            </a:pPr>
-            <a:r>
-              <a:rPr lang="en-US" altLang="zh-CN" sz="1400" dirty="0"/>
-              <a:t> </a:t>
-            </a:r>
-            <a:r>
-              <a:rPr lang="zh-CN" altLang="en-US" sz="1400" dirty="0"/>
-              <a:t>长文本处理与推理速度慢</a:t>
-            </a:r>
-            <a:endParaRPr lang="zh-CN" altLang="en-US" sz="1400" dirty="0"/>
-          </a:p>
-        </p:txBody>
-      </p:sp>
-      <p:pic>
-        <p:nvPicPr>
-          <p:cNvPr id="2" name="图片 1"/>
-          <p:cNvPicPr>
-            <a:picLocks noChangeAspect="1"/>
-          </p:cNvPicPr>
-          <p:nvPr/>
-        </p:nvPicPr>
-        <p:blipFill>
-          <a:blip r:embed="rId1"/>
-          <a:srcRect t="7312" b="9455"/>
-          <a:stretch>
-            <a:fillRect/>
-          </a:stretch>
-        </p:blipFill>
-        <p:spPr>
-          <a:xfrm>
-            <a:off x="854075" y="3082925"/>
-            <a:ext cx="4794885" cy="1677035"/>
-          </a:xfrm>
-          <a:prstGeom prst="rect">
-            <a:avLst/>
-          </a:prstGeom>
-        </p:spPr>
-      </p:pic>
+        </p:txBody>
+      </p:sp>
       <p:sp>
         <p:nvSpPr>
           <p:cNvPr id="12" name="标题 11"/>
@@ -19587,13 +20351,343 @@
           <a:p>
             <a:r>
               <a:rPr lang="zh-CN" altLang="en-US" dirty="0" err="1"/>
-              <a:t>数值</a:t>
-            </a:r>
-            <a:r>
-              <a:rPr lang="zh-CN" altLang="en-US" dirty="0" err="1"/>
-              <a:t>推理</a:t>
+              <a:t>数值推理</a:t>
             </a:r>
             <a:endParaRPr lang="zh-CN" altLang="en-US" dirty="0" err="1"/>
+          </a:p>
+        </p:txBody>
+      </p:sp>
+      <p:sp>
+        <p:nvSpPr>
+          <p:cNvPr id="5" name="文本框 4"/>
+          <p:cNvSpPr txBox="1"/>
+          <p:nvPr/>
+        </p:nvSpPr>
+        <p:spPr>
+          <a:xfrm>
+            <a:off x="1181735" y="2177415"/>
+            <a:ext cx="5078730" cy="1076325"/>
+          </a:xfrm>
+          <a:prstGeom prst="rect">
+            <a:avLst/>
+          </a:prstGeom>
+          <a:noFill/>
+        </p:spPr>
+        <p:txBody>
+          <a:bodyPr wrap="square" rtlCol="0">
+            <a:spAutoFit/>
+          </a:bodyPr>
+          <a:p>
+            <a:r>
+              <a:rPr lang="zh-CN" altLang="en-US" sz="1600"/>
+              <a:t>珍妮特的鸭子每天产16个蛋。她每天早上吃3个做早餐，还用4个做给朋友们的松饼。她每天把剩下的鸡蛋以每个2美元的价格卖给农贸市场。那么，她每天在农贸市场赚多少钱？</a:t>
+            </a:r>
+            <a:endParaRPr lang="zh-CN" altLang="en-US" sz="1600"/>
+          </a:p>
+        </p:txBody>
+      </p:sp>
+      <p:sp>
+        <p:nvSpPr>
+          <p:cNvPr id="6" name="圆角矩形 5"/>
+          <p:cNvSpPr/>
+          <p:nvPr/>
+        </p:nvSpPr>
+        <p:spPr>
+          <a:xfrm>
+            <a:off x="520700" y="2131060"/>
+            <a:ext cx="5969635" cy="2349500"/>
+          </a:xfrm>
+          <a:prstGeom prst="roundRect">
+            <a:avLst/>
+          </a:prstGeom>
+          <a:noFill/>
+          <a:ln>
+            <a:solidFill>
+              <a:schemeClr val="accent6"/>
+            </a:solidFill>
+          </a:ln>
+        </p:spPr>
+        <p:style>
+          <a:lnRef idx="2">
+            <a:schemeClr val="accent1">
+              <a:lumMod val="75000"/>
+            </a:schemeClr>
+          </a:lnRef>
+          <a:fillRef idx="1">
+            <a:schemeClr val="accent1"/>
+          </a:fillRef>
+          <a:effectRef idx="0">
+            <a:srgbClr val="FFFFFF"/>
+          </a:effectRef>
+          <a:fontRef idx="minor">
+            <a:schemeClr val="lt1"/>
+          </a:fontRef>
+        </p:style>
+        <p:txBody>
+          <a:bodyPr rtlCol="0" anchor="ctr"/>
+          <a:p>
+            <a:pPr algn="ctr"/>
+            <a:endParaRPr lang="zh-CN" altLang="en-US"/>
+          </a:p>
+        </p:txBody>
+      </p:sp>
+      <p:cxnSp>
+        <p:nvCxnSpPr>
+          <p:cNvPr id="8" name="直接连接符 7"/>
+          <p:cNvCxnSpPr/>
+          <p:nvPr/>
+        </p:nvCxnSpPr>
+        <p:spPr>
+          <a:xfrm>
+            <a:off x="1109980" y="2131060"/>
+            <a:ext cx="0" cy="2357120"/>
+          </a:xfrm>
+          <a:prstGeom prst="line">
+            <a:avLst/>
+          </a:prstGeom>
+          <a:ln>
+            <a:solidFill>
+              <a:schemeClr val="accent6"/>
+            </a:solidFill>
+          </a:ln>
+        </p:spPr>
+        <p:style>
+          <a:lnRef idx="2">
+            <a:schemeClr val="accent1"/>
+          </a:lnRef>
+          <a:fillRef idx="0">
+            <a:srgbClr val="FFFFFF"/>
+          </a:fillRef>
+          <a:effectRef idx="0">
+            <a:srgbClr val="FFFFFF"/>
+          </a:effectRef>
+          <a:fontRef idx="minor">
+            <a:schemeClr val="tx1"/>
+          </a:fontRef>
+        </p:style>
+      </p:cxnSp>
+      <p:sp>
+        <p:nvSpPr>
+          <p:cNvPr id="9" name="文本框 8"/>
+          <p:cNvSpPr txBox="1"/>
+          <p:nvPr/>
+        </p:nvSpPr>
+        <p:spPr>
+          <a:xfrm>
+            <a:off x="1181735" y="3422015"/>
+            <a:ext cx="5079365" cy="829945"/>
+          </a:xfrm>
+          <a:prstGeom prst="rect">
+            <a:avLst/>
+          </a:prstGeom>
+        </p:spPr>
+        <p:txBody>
+          <a:bodyPr wrap="square">
+            <a:spAutoFit/>
+          </a:bodyPr>
+          <a:p>
+            <a:r>
+              <a:rPr lang="zh-CN" altLang="en-US" sz="1600">
+                <a:solidFill>
+                  <a:srgbClr val="000000"/>
+                </a:solidFill>
+                <a:latin typeface="微软雅黑" panose="020B0503020204020204" charset="-122"/>
+                <a:ea typeface="微软雅黑" panose="020B0503020204020204" charset="-122"/>
+              </a:rPr>
+              <a:t>珍妮特每天卖</a:t>
+            </a:r>
+            <a:r>
+              <a:rPr lang="en-US" altLang="zh-CN" sz="1600">
+                <a:solidFill>
+                  <a:srgbClr val="000000"/>
+                </a:solidFill>
+                <a:latin typeface="Arial" panose="020B0604020202020204"/>
+                <a:ea typeface="Arial" panose="020B0604020202020204"/>
+              </a:rPr>
+              <a:t>16 - 3 - 4 = &lt;&lt;16-3-4=9&gt;&gt;9</a:t>
+            </a:r>
+            <a:r>
+              <a:rPr lang="zh-CN" altLang="en-US" sz="1600">
+                <a:solidFill>
+                  <a:srgbClr val="000000"/>
+                </a:solidFill>
+                <a:latin typeface="微软雅黑" panose="020B0503020204020204" charset="-122"/>
+                <a:ea typeface="微软雅黑" panose="020B0503020204020204" charset="-122"/>
+              </a:rPr>
+              <a:t>个鸭蛋。 </a:t>
+            </a:r>
+            <a:endParaRPr lang="zh-CN" altLang="en-US" sz="1600">
+              <a:solidFill>
+                <a:srgbClr val="000000"/>
+              </a:solidFill>
+              <a:latin typeface="微软雅黑" panose="020B0503020204020204" charset="-122"/>
+              <a:ea typeface="微软雅黑" panose="020B0503020204020204" charset="-122"/>
+            </a:endParaRPr>
+          </a:p>
+          <a:p>
+            <a:r>
+              <a:rPr lang="zh-CN" altLang="en-US" sz="1600">
+                <a:solidFill>
+                  <a:srgbClr val="000000"/>
+                </a:solidFill>
+                <a:latin typeface="微软雅黑" panose="020B0503020204020204" charset="-122"/>
+                <a:ea typeface="微软雅黑" panose="020B0503020204020204" charset="-122"/>
+              </a:rPr>
+              <a:t>她每天在农贸市场赚</a:t>
+            </a:r>
+            <a:r>
+              <a:rPr lang="en-US" altLang="zh-CN" sz="1600">
+                <a:solidFill>
+                  <a:srgbClr val="000000"/>
+                </a:solidFill>
+                <a:latin typeface="Arial" panose="020B0604020202020204"/>
+                <a:ea typeface="Arial" panose="020B0604020202020204"/>
+              </a:rPr>
+              <a:t>9 * 2 = $&lt;&lt;9*2=18&gt;&gt;18</a:t>
+            </a:r>
+            <a:r>
+              <a:rPr lang="zh-CN" altLang="en-US" sz="1600">
+                <a:solidFill>
+                  <a:srgbClr val="000000"/>
+                </a:solidFill>
+                <a:latin typeface="微软雅黑" panose="020B0503020204020204" charset="-122"/>
+                <a:ea typeface="微软雅黑" panose="020B0503020204020204" charset="-122"/>
+              </a:rPr>
+              <a:t>。 </a:t>
+            </a:r>
+            <a:endParaRPr lang="zh-CN" altLang="en-US" sz="1600">
+              <a:solidFill>
+                <a:srgbClr val="000000"/>
+              </a:solidFill>
+              <a:latin typeface="微软雅黑" panose="020B0503020204020204" charset="-122"/>
+              <a:ea typeface="微软雅黑" panose="020B0503020204020204" charset="-122"/>
+            </a:endParaRPr>
+          </a:p>
+          <a:p>
+            <a:r>
+              <a:rPr lang="en-US" altLang="zh-CN" sz="1600">
+                <a:solidFill>
+                  <a:srgbClr val="000000"/>
+                </a:solidFill>
+                <a:latin typeface="Arial" panose="020B0604020202020204"/>
+                <a:ea typeface="Arial" panose="020B0604020202020204"/>
+              </a:rPr>
+              <a:t>#### </a:t>
+            </a:r>
+            <a:r>
+              <a:rPr lang="en-US" altLang="zh-CN" sz="1600" b="1">
+                <a:solidFill>
+                  <a:srgbClr val="000000"/>
+                </a:solidFill>
+                <a:latin typeface="Arial" panose="020B0604020202020204"/>
+                <a:ea typeface="Arial" panose="020B0604020202020204"/>
+              </a:rPr>
+              <a:t>18</a:t>
+            </a:r>
+            <a:endParaRPr lang="en-US" altLang="zh-CN" sz="1600" b="1">
+              <a:solidFill>
+                <a:srgbClr val="000000"/>
+              </a:solidFill>
+              <a:latin typeface="Arial" panose="020B0604020202020204"/>
+              <a:ea typeface="Arial" panose="020B0604020202020204"/>
+            </a:endParaRPr>
+          </a:p>
+        </p:txBody>
+      </p:sp>
+      <p:cxnSp>
+        <p:nvCxnSpPr>
+          <p:cNvPr id="10" name="直接连接符 9"/>
+          <p:cNvCxnSpPr/>
+          <p:nvPr/>
+        </p:nvCxnSpPr>
+        <p:spPr>
+          <a:xfrm>
+            <a:off x="520700" y="3329305"/>
+            <a:ext cx="5969635" cy="0"/>
+          </a:xfrm>
+          <a:prstGeom prst="line">
+            <a:avLst/>
+          </a:prstGeom>
+          <a:ln cap="sq">
+            <a:solidFill>
+              <a:schemeClr val="accent6"/>
+            </a:solidFill>
+          </a:ln>
+        </p:spPr>
+        <p:style>
+          <a:lnRef idx="2">
+            <a:schemeClr val="accent1"/>
+          </a:lnRef>
+          <a:fillRef idx="0">
+            <a:srgbClr val="FFFFFF"/>
+          </a:fillRef>
+          <a:effectRef idx="0">
+            <a:srgbClr val="FFFFFF"/>
+          </a:effectRef>
+          <a:fontRef idx="minor">
+            <a:schemeClr val="tx1"/>
+          </a:fontRef>
+        </p:style>
+      </p:cxnSp>
+      <p:sp>
+        <p:nvSpPr>
+          <p:cNvPr id="11" name="文本框 10"/>
+          <p:cNvSpPr txBox="1"/>
+          <p:nvPr/>
+        </p:nvSpPr>
+        <p:spPr>
+          <a:xfrm>
+            <a:off x="520700" y="2656840"/>
+            <a:ext cx="709930" cy="337185"/>
+          </a:xfrm>
+          <a:prstGeom prst="rect">
+            <a:avLst/>
+          </a:prstGeom>
+          <a:noFill/>
+        </p:spPr>
+        <p:txBody>
+          <a:bodyPr wrap="square" rtlCol="0">
+            <a:spAutoFit/>
+          </a:bodyPr>
+          <a:p>
+            <a:r>
+              <a:rPr lang="zh-CN" altLang="en-US" sz="1600"/>
+              <a:t>输入</a:t>
+            </a:r>
+            <a:endParaRPr lang="zh-CN" altLang="en-US" sz="1600"/>
+          </a:p>
+        </p:txBody>
+      </p:sp>
+      <p:sp>
+        <p:nvSpPr>
+          <p:cNvPr id="13" name="文本框 12"/>
+          <p:cNvSpPr txBox="1"/>
+          <p:nvPr/>
+        </p:nvSpPr>
+        <p:spPr>
+          <a:xfrm>
+            <a:off x="520700" y="3594735"/>
+            <a:ext cx="709930" cy="337185"/>
+          </a:xfrm>
+          <a:prstGeom prst="rect">
+            <a:avLst/>
+          </a:prstGeom>
+          <a:noFill/>
+        </p:spPr>
+        <p:txBody>
+          <a:bodyPr wrap="square" rtlCol="0">
+            <a:spAutoFit/>
+          </a:bodyPr>
+          <a:p>
+            <a:r>
+              <a:rPr lang="zh-CN" altLang="en-US" sz="1600"/>
+              <a:t>输</a:t>
+            </a:r>
+            <a:r>
+              <a:rPr lang="zh-CN" altLang="en-US" sz="1600"/>
+              <a:t>出</a:t>
+            </a:r>
+            <a:endParaRPr lang="zh-CN" altLang="en-US" sz="1600"/>
           </a:p>
         </p:txBody>
       </p:sp>
@@ -19625,6 +20719,1109 @@
       </p:grpSpPr>
       <p:sp>
         <p:nvSpPr>
+          <p:cNvPr id="3" name="日期占位符 2"/>
+          <p:cNvSpPr>
+            <a:spLocks noGrp="1"/>
+          </p:cNvSpPr>
+          <p:nvPr>
+            <p:ph type="dt" sz="half" idx="10"/>
+          </p:nvPr>
+        </p:nvSpPr>
+        <p:spPr/>
+        <p:txBody>
+          <a:bodyPr/>
+          <a:lstStyle/>
+          <a:p>
+            <a:fld id="{2FBB519E-D9EB-47F0-AD65-082D85248404}" type="datetime1">
+              <a:rPr lang="zh-CN" altLang="en-US" smtClean="0"/>
+            </a:fld>
+            <a:endParaRPr lang="zh-CN" altLang="en-US" dirty="0"/>
+          </a:p>
+        </p:txBody>
+      </p:sp>
+      <p:sp>
+        <p:nvSpPr>
+          <p:cNvPr id="4" name="灯片编号占位符 3"/>
+          <p:cNvSpPr>
+            <a:spLocks noGrp="1"/>
+          </p:cNvSpPr>
+          <p:nvPr>
+            <p:ph type="sldNum" sz="quarter" idx="11"/>
+          </p:nvPr>
+        </p:nvSpPr>
+        <p:spPr/>
+        <p:txBody>
+          <a:bodyPr/>
+          <a:lstStyle/>
+          <a:p>
+            <a:fld id="{463E1EE8-403A-4D2D-AB26-5BF439A27F60}" type="slidenum">
+              <a:rPr lang="zh-CN" altLang="en-US" smtClean="0"/>
+            </a:fld>
+            <a:endParaRPr lang="zh-CN" altLang="en-US" dirty="0"/>
+          </a:p>
+        </p:txBody>
+      </p:sp>
+      <p:sp>
+        <p:nvSpPr>
+          <p:cNvPr id="7" name="文本框 6"/>
+          <p:cNvSpPr txBox="1"/>
+          <p:nvPr/>
+        </p:nvSpPr>
+        <p:spPr>
+          <a:xfrm>
+            <a:off x="471533" y="849559"/>
+            <a:ext cx="5880888" cy="414020"/>
+          </a:xfrm>
+          <a:prstGeom prst="rect">
+            <a:avLst/>
+          </a:prstGeom>
+          <a:noFill/>
+        </p:spPr>
+        <p:txBody>
+          <a:bodyPr wrap="square" rtlCol="0">
+            <a:spAutoFit/>
+          </a:bodyPr>
+          <a:lstStyle/>
+          <a:p>
+            <a:pPr marL="285750" indent="-285750">
+              <a:lnSpc>
+                <a:spcPct val="150000"/>
+              </a:lnSpc>
+              <a:buFont typeface="Wingdings" panose="05000000000000000000" pitchFamily="2" charset="2"/>
+              <a:buChar char="n"/>
+            </a:pPr>
+            <a:r>
+              <a:rPr lang="zh-CN" altLang="en-US" sz="1400" dirty="0"/>
+              <a:t>数据集：缺乏领域知识、</a:t>
+            </a:r>
+            <a:r>
+              <a:rPr lang="zh-CN" altLang="en-US" sz="1400" dirty="0"/>
+              <a:t>缺乏详细的知识</a:t>
+            </a:r>
+            <a:r>
+              <a:rPr lang="zh-CN" altLang="en-US" sz="1400" dirty="0"/>
+              <a:t>标注</a:t>
+            </a:r>
+            <a:endParaRPr lang="zh-CN" altLang="en-US" sz="1400" dirty="0"/>
+          </a:p>
+        </p:txBody>
+      </p:sp>
+      <p:sp>
+        <p:nvSpPr>
+          <p:cNvPr id="12" name="标题 11"/>
+          <p:cNvSpPr>
+            <a:spLocks noGrp="1"/>
+          </p:cNvSpPr>
+          <p:nvPr/>
+        </p:nvSpPr>
+        <p:spPr>
+          <a:xfrm>
+            <a:off x="471924" y="360000"/>
+            <a:ext cx="5920502" cy="489600"/>
+          </a:xfrm>
+          <a:prstGeom prst="rect">
+            <a:avLst/>
+          </a:prstGeom>
+        </p:spPr>
+        <p:txBody>
+          <a:bodyPr vert="horz" lIns="91440" tIns="45720" rIns="91440" bIns="45720" rtlCol="0" anchor="ctr">
+            <a:normAutofit/>
+          </a:bodyPr>
+          <a:lstStyle>
+            <a:lvl1pPr algn="l" defTabSz="514985" rtl="0" eaLnBrk="1" latinLnBrk="0" hangingPunct="1">
+              <a:lnSpc>
+                <a:spcPct val="90000"/>
+              </a:lnSpc>
+              <a:spcBef>
+                <a:spcPct val="0"/>
+              </a:spcBef>
+              <a:buNone/>
+              <a:defRPr sz="2100" kern="1200" baseline="0">
+                <a:solidFill>
+                  <a:srgbClr val="63065F"/>
+                </a:solidFill>
+                <a:latin typeface="Arial" panose="020B0604020202020204" pitchFamily="34" charset="0"/>
+                <a:ea typeface="+mj-ea"/>
+                <a:cs typeface="Arial" panose="020B0604020202020204" pitchFamily="34" charset="0"/>
+              </a:defRPr>
+            </a:lvl1pPr>
+          </a:lstStyle>
+          <a:p>
+            <a:r>
+              <a:rPr lang="zh-CN" altLang="en-US" dirty="0" err="1"/>
+              <a:t>数据集与</a:t>
+            </a:r>
+            <a:r>
+              <a:rPr lang="zh-CN" altLang="en-US" dirty="0" err="1"/>
+              <a:t>方法</a:t>
+            </a:r>
+            <a:endParaRPr lang="zh-CN" altLang="en-US" dirty="0" err="1"/>
+          </a:p>
+        </p:txBody>
+      </p:sp>
+      <p:sp>
+        <p:nvSpPr>
+          <p:cNvPr id="5" name="文本框 4"/>
+          <p:cNvSpPr txBox="1"/>
+          <p:nvPr/>
+        </p:nvSpPr>
+        <p:spPr>
+          <a:xfrm>
+            <a:off x="1181735" y="1301115"/>
+            <a:ext cx="5078730" cy="737235"/>
+          </a:xfrm>
+          <a:prstGeom prst="rect">
+            <a:avLst/>
+          </a:prstGeom>
+          <a:noFill/>
+        </p:spPr>
+        <p:txBody>
+          <a:bodyPr wrap="square" rtlCol="0">
+            <a:spAutoFit/>
+          </a:bodyPr>
+          <a:p>
+            <a:r>
+              <a:rPr lang="zh-CN" altLang="en-US" sz="1400">
+                <a:solidFill>
+                  <a:srgbClr val="000000"/>
+                </a:solidFill>
+                <a:latin typeface="Arial" panose="020B0604020202020204" pitchFamily="34" charset="0"/>
+                <a:ea typeface="微软雅黑" panose="020B0503020204020204" charset="-122"/>
+                <a:cs typeface="Arial" panose="020B0604020202020204" pitchFamily="34" charset="0"/>
+                <a:sym typeface="+mn-ea"/>
+              </a:rPr>
+              <a:t>珍妮特每天卖</a:t>
+            </a:r>
+            <a:r>
+              <a:rPr lang="en-US" altLang="zh-CN" sz="1400">
+                <a:solidFill>
+                  <a:srgbClr val="000000"/>
+                </a:solidFill>
+                <a:latin typeface="Arial" panose="020B0604020202020204" pitchFamily="34" charset="0"/>
+                <a:ea typeface="Arial" panose="020B0604020202020204"/>
+                <a:cs typeface="Arial" panose="020B0604020202020204" pitchFamily="34" charset="0"/>
+                <a:sym typeface="+mn-ea"/>
+              </a:rPr>
+              <a:t>16 - 3 - 4 = &lt;&lt;16-3-4=9&gt;&gt;9</a:t>
+            </a:r>
+            <a:r>
+              <a:rPr lang="zh-CN" altLang="en-US" sz="1400">
+                <a:solidFill>
+                  <a:srgbClr val="000000"/>
+                </a:solidFill>
+                <a:latin typeface="Arial" panose="020B0604020202020204" pitchFamily="34" charset="0"/>
+                <a:ea typeface="微软雅黑" panose="020B0503020204020204" charset="-122"/>
+                <a:cs typeface="Arial" panose="020B0604020202020204" pitchFamily="34" charset="0"/>
+                <a:sym typeface="+mn-ea"/>
+              </a:rPr>
+              <a:t>个鸭蛋。 </a:t>
+            </a:r>
+            <a:endParaRPr lang="zh-CN" altLang="en-US" sz="1400">
+              <a:solidFill>
+                <a:srgbClr val="000000"/>
+              </a:solidFill>
+              <a:latin typeface="Arial" panose="020B0604020202020204" pitchFamily="34" charset="0"/>
+              <a:ea typeface="微软雅黑" panose="020B0503020204020204" charset="-122"/>
+              <a:cs typeface="Arial" panose="020B0604020202020204" pitchFamily="34" charset="0"/>
+            </a:endParaRPr>
+          </a:p>
+          <a:p>
+            <a:r>
+              <a:rPr lang="zh-CN" altLang="en-US" sz="1400">
+                <a:solidFill>
+                  <a:srgbClr val="000000"/>
+                </a:solidFill>
+                <a:latin typeface="Arial" panose="020B0604020202020204" pitchFamily="34" charset="0"/>
+                <a:ea typeface="微软雅黑" panose="020B0503020204020204" charset="-122"/>
+                <a:cs typeface="Arial" panose="020B0604020202020204" pitchFamily="34" charset="0"/>
+                <a:sym typeface="+mn-ea"/>
+              </a:rPr>
+              <a:t>她每天在农贸市场赚</a:t>
+            </a:r>
+            <a:r>
+              <a:rPr lang="en-US" altLang="zh-CN" sz="1400">
+                <a:solidFill>
+                  <a:srgbClr val="000000"/>
+                </a:solidFill>
+                <a:latin typeface="Arial" panose="020B0604020202020204" pitchFamily="34" charset="0"/>
+                <a:ea typeface="Arial" panose="020B0604020202020204"/>
+                <a:cs typeface="Arial" panose="020B0604020202020204" pitchFamily="34" charset="0"/>
+                <a:sym typeface="+mn-ea"/>
+              </a:rPr>
+              <a:t>9 * 2 = $&lt;&lt;9*2=18&gt;&gt;18</a:t>
+            </a:r>
+            <a:r>
+              <a:rPr lang="zh-CN" altLang="en-US" sz="1400">
+                <a:solidFill>
+                  <a:srgbClr val="000000"/>
+                </a:solidFill>
+                <a:latin typeface="Arial" panose="020B0604020202020204" pitchFamily="34" charset="0"/>
+                <a:ea typeface="微软雅黑" panose="020B0503020204020204" charset="-122"/>
+                <a:cs typeface="Arial" panose="020B0604020202020204" pitchFamily="34" charset="0"/>
+                <a:sym typeface="+mn-ea"/>
+              </a:rPr>
+              <a:t>。 </a:t>
+            </a:r>
+            <a:endParaRPr lang="zh-CN" altLang="en-US" sz="1400">
+              <a:solidFill>
+                <a:srgbClr val="000000"/>
+              </a:solidFill>
+              <a:latin typeface="Arial" panose="020B0604020202020204" pitchFamily="34" charset="0"/>
+              <a:ea typeface="微软雅黑" panose="020B0503020204020204" charset="-122"/>
+              <a:cs typeface="Arial" panose="020B0604020202020204" pitchFamily="34" charset="0"/>
+            </a:endParaRPr>
+          </a:p>
+          <a:p>
+            <a:r>
+              <a:rPr lang="en-US" altLang="zh-CN" sz="1400">
+                <a:solidFill>
+                  <a:srgbClr val="000000"/>
+                </a:solidFill>
+                <a:latin typeface="Arial" panose="020B0604020202020204" pitchFamily="34" charset="0"/>
+                <a:ea typeface="Arial" panose="020B0604020202020204"/>
+                <a:cs typeface="Arial" panose="020B0604020202020204" pitchFamily="34" charset="0"/>
+                <a:sym typeface="+mn-ea"/>
+              </a:rPr>
+              <a:t>#### 18</a:t>
+            </a:r>
+            <a:endParaRPr lang="zh-CN" altLang="en-US" sz="1400">
+              <a:latin typeface="Arial" panose="020B0604020202020204" pitchFamily="34" charset="0"/>
+              <a:cs typeface="Arial" panose="020B0604020202020204" pitchFamily="34" charset="0"/>
+            </a:endParaRPr>
+          </a:p>
+        </p:txBody>
+      </p:sp>
+      <p:sp>
+        <p:nvSpPr>
+          <p:cNvPr id="6" name="圆角矩形 5"/>
+          <p:cNvSpPr/>
+          <p:nvPr/>
+        </p:nvSpPr>
+        <p:spPr>
+          <a:xfrm>
+            <a:off x="520700" y="1254760"/>
+            <a:ext cx="5969635" cy="1406525"/>
+          </a:xfrm>
+          <a:prstGeom prst="roundRect">
+            <a:avLst/>
+          </a:prstGeom>
+          <a:noFill/>
+          <a:ln>
+            <a:solidFill>
+              <a:schemeClr val="accent6"/>
+            </a:solidFill>
+          </a:ln>
+        </p:spPr>
+        <p:style>
+          <a:lnRef idx="2">
+            <a:schemeClr val="accent1">
+              <a:lumMod val="75000"/>
+            </a:schemeClr>
+          </a:lnRef>
+          <a:fillRef idx="1">
+            <a:schemeClr val="accent1"/>
+          </a:fillRef>
+          <a:effectRef idx="0">
+            <a:srgbClr val="FFFFFF"/>
+          </a:effectRef>
+          <a:fontRef idx="minor">
+            <a:schemeClr val="lt1"/>
+          </a:fontRef>
+        </p:style>
+        <p:txBody>
+          <a:bodyPr rtlCol="0" anchor="ctr"/>
+          <a:p>
+            <a:pPr algn="ctr"/>
+            <a:endParaRPr lang="zh-CN" altLang="en-US"/>
+          </a:p>
+        </p:txBody>
+      </p:sp>
+      <p:cxnSp>
+        <p:nvCxnSpPr>
+          <p:cNvPr id="8" name="直接连接符 7"/>
+          <p:cNvCxnSpPr/>
+          <p:nvPr/>
+        </p:nvCxnSpPr>
+        <p:spPr>
+          <a:xfrm flipH="1">
+            <a:off x="1100455" y="1254760"/>
+            <a:ext cx="9525" cy="1406525"/>
+          </a:xfrm>
+          <a:prstGeom prst="line">
+            <a:avLst/>
+          </a:prstGeom>
+          <a:ln>
+            <a:solidFill>
+              <a:schemeClr val="accent6"/>
+            </a:solidFill>
+          </a:ln>
+        </p:spPr>
+        <p:style>
+          <a:lnRef idx="2">
+            <a:schemeClr val="accent1"/>
+          </a:lnRef>
+          <a:fillRef idx="0">
+            <a:srgbClr val="FFFFFF"/>
+          </a:fillRef>
+          <a:effectRef idx="0">
+            <a:srgbClr val="FFFFFF"/>
+          </a:effectRef>
+          <a:fontRef idx="minor">
+            <a:schemeClr val="tx1"/>
+          </a:fontRef>
+        </p:style>
+      </p:cxnSp>
+      <p:sp>
+        <p:nvSpPr>
+          <p:cNvPr id="9" name="文本框 8"/>
+          <p:cNvSpPr txBox="1"/>
+          <p:nvPr/>
+        </p:nvSpPr>
+        <p:spPr>
+          <a:xfrm>
+            <a:off x="1181735" y="2075815"/>
+            <a:ext cx="5079365" cy="521970"/>
+          </a:xfrm>
+          <a:prstGeom prst="rect">
+            <a:avLst/>
+          </a:prstGeom>
+        </p:spPr>
+        <p:txBody>
+          <a:bodyPr wrap="square">
+            <a:spAutoFit/>
+          </a:bodyPr>
+          <a:p>
+            <a:r>
+              <a:rPr lang="zh-CN" altLang="en-US" sz="1400">
+                <a:solidFill>
+                  <a:srgbClr val="000000"/>
+                </a:solidFill>
+                <a:latin typeface="微软雅黑" panose="020B0503020204020204" charset="-122"/>
+                <a:ea typeface="微软雅黑" panose="020B0503020204020204" charset="-122"/>
+                <a:cs typeface="微软雅黑" panose="020B0503020204020204" charset="-122"/>
+              </a:rPr>
+              <a:t>[总量] - [消耗数量] = [剩余数量]</a:t>
+            </a:r>
+            <a:endParaRPr lang="zh-CN" altLang="en-US" sz="1400">
+              <a:solidFill>
+                <a:srgbClr val="000000"/>
+              </a:solidFill>
+              <a:latin typeface="微软雅黑" panose="020B0503020204020204" charset="-122"/>
+              <a:ea typeface="微软雅黑" panose="020B0503020204020204" charset="-122"/>
+              <a:cs typeface="微软雅黑" panose="020B0503020204020204" charset="-122"/>
+            </a:endParaRPr>
+          </a:p>
+          <a:p>
+            <a:r>
+              <a:rPr lang="zh-CN" altLang="en-US" sz="1400">
+                <a:solidFill>
+                  <a:srgbClr val="000000"/>
+                </a:solidFill>
+                <a:latin typeface="微软雅黑" panose="020B0503020204020204" charset="-122"/>
+                <a:ea typeface="微软雅黑" panose="020B0503020204020204" charset="-122"/>
+                <a:cs typeface="微软雅黑" panose="020B0503020204020204" charset="-122"/>
+              </a:rPr>
+              <a:t>[单价] * [数量] = [总价]</a:t>
+            </a:r>
+            <a:endParaRPr lang="zh-CN" altLang="en-US" sz="1400">
+              <a:solidFill>
+                <a:srgbClr val="000000"/>
+              </a:solidFill>
+              <a:latin typeface="微软雅黑" panose="020B0503020204020204" charset="-122"/>
+              <a:ea typeface="微软雅黑" panose="020B0503020204020204" charset="-122"/>
+              <a:cs typeface="微软雅黑" panose="020B0503020204020204" charset="-122"/>
+            </a:endParaRPr>
+          </a:p>
+        </p:txBody>
+      </p:sp>
+      <p:cxnSp>
+        <p:nvCxnSpPr>
+          <p:cNvPr id="10" name="直接连接符 9"/>
+          <p:cNvCxnSpPr/>
+          <p:nvPr/>
+        </p:nvCxnSpPr>
+        <p:spPr>
+          <a:xfrm>
+            <a:off x="520700" y="2007870"/>
+            <a:ext cx="5969635" cy="0"/>
+          </a:xfrm>
+          <a:prstGeom prst="line">
+            <a:avLst/>
+          </a:prstGeom>
+          <a:ln cap="sq">
+            <a:solidFill>
+              <a:schemeClr val="accent6"/>
+            </a:solidFill>
+          </a:ln>
+        </p:spPr>
+        <p:style>
+          <a:lnRef idx="2">
+            <a:schemeClr val="accent1"/>
+          </a:lnRef>
+          <a:fillRef idx="0">
+            <a:srgbClr val="FFFFFF"/>
+          </a:fillRef>
+          <a:effectRef idx="0">
+            <a:srgbClr val="FFFFFF"/>
+          </a:effectRef>
+          <a:fontRef idx="minor">
+            <a:schemeClr val="tx1"/>
+          </a:fontRef>
+        </p:style>
+      </p:cxnSp>
+      <p:sp>
+        <p:nvSpPr>
+          <p:cNvPr id="11" name="文本框 10"/>
+          <p:cNvSpPr txBox="1"/>
+          <p:nvPr/>
+        </p:nvSpPr>
+        <p:spPr>
+          <a:xfrm>
+            <a:off x="520700" y="1374775"/>
+            <a:ext cx="709930" cy="521970"/>
+          </a:xfrm>
+          <a:prstGeom prst="rect">
+            <a:avLst/>
+          </a:prstGeom>
+          <a:noFill/>
+        </p:spPr>
+        <p:txBody>
+          <a:bodyPr wrap="square" rtlCol="0">
+            <a:spAutoFit/>
+          </a:bodyPr>
+          <a:p>
+            <a:r>
+              <a:rPr lang="zh-CN" altLang="en-US" sz="1400"/>
+              <a:t>文本标注</a:t>
+            </a:r>
+            <a:endParaRPr lang="zh-CN" altLang="en-US" sz="1400"/>
+          </a:p>
+        </p:txBody>
+      </p:sp>
+      <p:sp>
+        <p:nvSpPr>
+          <p:cNvPr id="13" name="文本框 12"/>
+          <p:cNvSpPr txBox="1"/>
+          <p:nvPr/>
+        </p:nvSpPr>
+        <p:spPr>
+          <a:xfrm>
+            <a:off x="520700" y="2106930"/>
+            <a:ext cx="709930" cy="521970"/>
+          </a:xfrm>
+          <a:prstGeom prst="rect">
+            <a:avLst/>
+          </a:prstGeom>
+          <a:noFill/>
+        </p:spPr>
+        <p:txBody>
+          <a:bodyPr wrap="square" rtlCol="0">
+            <a:spAutoFit/>
+          </a:bodyPr>
+          <a:p>
+            <a:r>
+              <a:rPr lang="zh-CN" altLang="en-US" sz="1400"/>
+              <a:t>公式知识</a:t>
+            </a:r>
+            <a:endParaRPr lang="zh-CN" altLang="en-US" sz="1400"/>
+          </a:p>
+        </p:txBody>
+      </p:sp>
+      <p:sp>
+        <p:nvSpPr>
+          <p:cNvPr id="2" name="文本框 1"/>
+          <p:cNvSpPr txBox="1"/>
+          <p:nvPr/>
+        </p:nvSpPr>
+        <p:spPr>
+          <a:xfrm>
+            <a:off x="471533" y="2733604"/>
+            <a:ext cx="5880888" cy="414020"/>
+          </a:xfrm>
+          <a:prstGeom prst="rect">
+            <a:avLst/>
+          </a:prstGeom>
+          <a:noFill/>
+        </p:spPr>
+        <p:txBody>
+          <a:bodyPr wrap="square" rtlCol="0">
+            <a:spAutoFit/>
+          </a:bodyPr>
+          <a:lstStyle/>
+          <a:p>
+            <a:pPr marL="285750" indent="-285750">
+              <a:lnSpc>
+                <a:spcPct val="150000"/>
+              </a:lnSpc>
+              <a:buFont typeface="Wingdings" panose="05000000000000000000" pitchFamily="2" charset="2"/>
+              <a:buChar char="n"/>
+            </a:pPr>
+            <a:r>
+              <a:rPr lang="zh-CN" altLang="en-US" sz="1400" dirty="0"/>
+              <a:t>大语言模型推理：对模型综合能力要求高，</a:t>
+            </a:r>
+            <a:r>
+              <a:rPr lang="zh-CN" altLang="en-US" sz="1400" dirty="0">
+                <a:sym typeface="+mn-ea"/>
+              </a:rPr>
+              <a:t>缺乏公式知识指导</a:t>
+            </a:r>
+            <a:endParaRPr lang="zh-CN" altLang="en-US" sz="1400" dirty="0"/>
+          </a:p>
+        </p:txBody>
+      </p:sp>
+      <p:sp>
+        <p:nvSpPr>
+          <p:cNvPr id="14" name="圆角矩形 13"/>
+          <p:cNvSpPr/>
+          <p:nvPr/>
+        </p:nvSpPr>
+        <p:spPr>
+          <a:xfrm>
+            <a:off x="520700" y="3162935"/>
+            <a:ext cx="3333115" cy="1301750"/>
+          </a:xfrm>
+          <a:prstGeom prst="roundRect">
+            <a:avLst/>
+          </a:prstGeom>
+          <a:noFill/>
+          <a:ln>
+            <a:solidFill>
+              <a:schemeClr val="accent6"/>
+            </a:solidFill>
+          </a:ln>
+        </p:spPr>
+        <p:style>
+          <a:lnRef idx="2">
+            <a:schemeClr val="accent1">
+              <a:lumMod val="75000"/>
+            </a:schemeClr>
+          </a:lnRef>
+          <a:fillRef idx="1">
+            <a:schemeClr val="accent1"/>
+          </a:fillRef>
+          <a:effectRef idx="0">
+            <a:srgbClr val="FFFFFF"/>
+          </a:effectRef>
+          <a:fontRef idx="minor">
+            <a:schemeClr val="lt1"/>
+          </a:fontRef>
+        </p:style>
+        <p:txBody>
+          <a:bodyPr rtlCol="0" anchor="ctr"/>
+          <a:p>
+            <a:pPr algn="ctr"/>
+            <a:endParaRPr lang="zh-CN" altLang="en-US"/>
+          </a:p>
+        </p:txBody>
+      </p:sp>
+      <p:sp>
+        <p:nvSpPr>
+          <p:cNvPr id="15" name="文本框 14"/>
+          <p:cNvSpPr txBox="1"/>
+          <p:nvPr/>
+        </p:nvSpPr>
+        <p:spPr>
+          <a:xfrm>
+            <a:off x="1289685" y="3204210"/>
+            <a:ext cx="2225040" cy="1168400"/>
+          </a:xfrm>
+          <a:prstGeom prst="rect">
+            <a:avLst/>
+          </a:prstGeom>
+          <a:noFill/>
+        </p:spPr>
+        <p:txBody>
+          <a:bodyPr wrap="square" rtlCol="0">
+            <a:spAutoFit/>
+          </a:bodyPr>
+          <a:p>
+            <a:r>
+              <a:rPr lang="zh-CN" altLang="en-US" sz="1400">
+                <a:solidFill>
+                  <a:srgbClr val="000000"/>
+                </a:solidFill>
+                <a:latin typeface="Arial" panose="020B0604020202020204" pitchFamily="34" charset="0"/>
+                <a:ea typeface="微软雅黑" panose="020B0503020204020204" charset="-122"/>
+                <a:cs typeface="Arial" panose="020B0604020202020204" pitchFamily="34" charset="0"/>
+                <a:sym typeface="+mn-ea"/>
+              </a:rPr>
+              <a:t>珍妮特每天卖</a:t>
+            </a:r>
+            <a:r>
+              <a:rPr lang="en-US" altLang="zh-CN" sz="1400">
+                <a:solidFill>
+                  <a:srgbClr val="000000"/>
+                </a:solidFill>
+                <a:latin typeface="Arial" panose="020B0604020202020204" pitchFamily="34" charset="0"/>
+                <a:ea typeface="Arial" panose="020B0604020202020204"/>
+                <a:cs typeface="Arial" panose="020B0604020202020204" pitchFamily="34" charset="0"/>
+                <a:sym typeface="+mn-ea"/>
+              </a:rPr>
+              <a:t>16 - 3 - 4 = &lt;&lt;16-3-4=9&gt;&gt;9</a:t>
+            </a:r>
+            <a:r>
+              <a:rPr lang="zh-CN" altLang="en-US" sz="1400">
+                <a:solidFill>
+                  <a:srgbClr val="000000"/>
+                </a:solidFill>
+                <a:latin typeface="Arial" panose="020B0604020202020204" pitchFamily="34" charset="0"/>
+                <a:ea typeface="微软雅黑" panose="020B0503020204020204" charset="-122"/>
+                <a:cs typeface="Arial" panose="020B0604020202020204" pitchFamily="34" charset="0"/>
+                <a:sym typeface="+mn-ea"/>
+              </a:rPr>
+              <a:t>个鸭蛋。 </a:t>
+            </a:r>
+            <a:endParaRPr lang="zh-CN" altLang="en-US" sz="1400">
+              <a:solidFill>
+                <a:srgbClr val="000000"/>
+              </a:solidFill>
+              <a:latin typeface="Arial" panose="020B0604020202020204" pitchFamily="34" charset="0"/>
+              <a:ea typeface="微软雅黑" panose="020B0503020204020204" charset="-122"/>
+              <a:cs typeface="Arial" panose="020B0604020202020204" pitchFamily="34" charset="0"/>
+            </a:endParaRPr>
+          </a:p>
+          <a:p>
+            <a:r>
+              <a:rPr lang="zh-CN" altLang="en-US" sz="1400">
+                <a:solidFill>
+                  <a:srgbClr val="000000"/>
+                </a:solidFill>
+                <a:latin typeface="Arial" panose="020B0604020202020204" pitchFamily="34" charset="0"/>
+                <a:ea typeface="微软雅黑" panose="020B0503020204020204" charset="-122"/>
+                <a:cs typeface="Arial" panose="020B0604020202020204" pitchFamily="34" charset="0"/>
+                <a:sym typeface="+mn-ea"/>
+              </a:rPr>
+              <a:t>她每天在农贸市场赚</a:t>
+            </a:r>
+            <a:r>
+              <a:rPr lang="en-US" altLang="zh-CN" sz="1400">
+                <a:solidFill>
+                  <a:srgbClr val="000000"/>
+                </a:solidFill>
+                <a:latin typeface="Arial" panose="020B0604020202020204" pitchFamily="34" charset="0"/>
+                <a:ea typeface="Arial" panose="020B0604020202020204"/>
+                <a:cs typeface="Arial" panose="020B0604020202020204" pitchFamily="34" charset="0"/>
+                <a:sym typeface="+mn-ea"/>
+              </a:rPr>
+              <a:t>9 * 2 = $&lt;&lt;9*2=18&gt;&gt;18</a:t>
+            </a:r>
+            <a:r>
+              <a:rPr lang="zh-CN" altLang="en-US" sz="1400">
+                <a:solidFill>
+                  <a:srgbClr val="000000"/>
+                </a:solidFill>
+                <a:latin typeface="Arial" panose="020B0604020202020204" pitchFamily="34" charset="0"/>
+                <a:ea typeface="微软雅黑" panose="020B0503020204020204" charset="-122"/>
+                <a:cs typeface="Arial" panose="020B0604020202020204" pitchFamily="34" charset="0"/>
+                <a:sym typeface="+mn-ea"/>
+              </a:rPr>
+              <a:t>。 </a:t>
+            </a:r>
+            <a:endParaRPr lang="zh-CN" altLang="en-US" sz="1400">
+              <a:solidFill>
+                <a:srgbClr val="000000"/>
+              </a:solidFill>
+              <a:latin typeface="Arial" panose="020B0604020202020204" pitchFamily="34" charset="0"/>
+              <a:ea typeface="微软雅黑" panose="020B0503020204020204" charset="-122"/>
+              <a:cs typeface="Arial" panose="020B0604020202020204" pitchFamily="34" charset="0"/>
+            </a:endParaRPr>
+          </a:p>
+          <a:p>
+            <a:r>
+              <a:rPr lang="en-US" altLang="zh-CN" sz="1400">
+                <a:solidFill>
+                  <a:srgbClr val="000000"/>
+                </a:solidFill>
+                <a:latin typeface="Arial" panose="020B0604020202020204" pitchFamily="34" charset="0"/>
+                <a:ea typeface="Arial" panose="020B0604020202020204"/>
+                <a:cs typeface="Arial" panose="020B0604020202020204" pitchFamily="34" charset="0"/>
+                <a:sym typeface="+mn-ea"/>
+              </a:rPr>
+              <a:t>#### 18</a:t>
+            </a:r>
+            <a:endParaRPr lang="zh-CN" altLang="en-US" sz="1400">
+              <a:latin typeface="Arial" panose="020B0604020202020204" pitchFamily="34" charset="0"/>
+              <a:cs typeface="Arial" panose="020B0604020202020204" pitchFamily="34" charset="0"/>
+            </a:endParaRPr>
+          </a:p>
+        </p:txBody>
+      </p:sp>
+      <p:pic>
+        <p:nvPicPr>
+          <p:cNvPr id="16" name="图片 15" descr="大模型-copy"/>
+          <p:cNvPicPr>
+            <a:picLocks noChangeAspect="1"/>
+          </p:cNvPicPr>
+          <p:nvPr/>
+        </p:nvPicPr>
+        <p:blipFill>
+          <a:blip r:embed="rId1"/>
+          <a:stretch>
+            <a:fillRect/>
+          </a:stretch>
+        </p:blipFill>
+        <p:spPr>
+          <a:xfrm>
+            <a:off x="654050" y="3283585"/>
+            <a:ext cx="338455" cy="338455"/>
+          </a:xfrm>
+          <a:prstGeom prst="rect">
+            <a:avLst/>
+          </a:prstGeom>
+        </p:spPr>
+      </p:pic>
+      <p:sp>
+        <p:nvSpPr>
+          <p:cNvPr id="17" name="圆角矩形 16"/>
+          <p:cNvSpPr/>
+          <p:nvPr/>
+        </p:nvSpPr>
+        <p:spPr>
+          <a:xfrm>
+            <a:off x="2449195" y="3252470"/>
+            <a:ext cx="752475" cy="240665"/>
+          </a:xfrm>
+          <a:prstGeom prst="roundRect">
+            <a:avLst/>
+          </a:prstGeom>
+          <a:noFill/>
+          <a:ln>
+            <a:solidFill>
+              <a:srgbClr val="FF4343"/>
+            </a:solidFill>
+          </a:ln>
+        </p:spPr>
+        <p:style>
+          <a:lnRef idx="2">
+            <a:schemeClr val="accent1">
+              <a:lumMod val="75000"/>
+            </a:schemeClr>
+          </a:lnRef>
+          <a:fillRef idx="1">
+            <a:schemeClr val="accent1"/>
+          </a:fillRef>
+          <a:effectRef idx="0">
+            <a:srgbClr val="FFFFFF"/>
+          </a:effectRef>
+          <a:fontRef idx="minor">
+            <a:schemeClr val="lt1"/>
+          </a:fontRef>
+        </p:style>
+        <p:txBody>
+          <a:bodyPr rtlCol="0" anchor="ctr"/>
+          <a:p>
+            <a:pPr algn="ctr"/>
+            <a:endParaRPr lang="zh-CN" altLang="en-US"/>
+          </a:p>
+        </p:txBody>
+      </p:sp>
+      <p:sp>
+        <p:nvSpPr>
+          <p:cNvPr id="18" name="圆角矩形 17"/>
+          <p:cNvSpPr/>
+          <p:nvPr/>
+        </p:nvSpPr>
+        <p:spPr>
+          <a:xfrm>
+            <a:off x="1100455" y="3206750"/>
+            <a:ext cx="2603500" cy="1122045"/>
+          </a:xfrm>
+          <a:prstGeom prst="roundRect">
+            <a:avLst/>
+          </a:prstGeom>
+          <a:noFill/>
+          <a:ln>
+            <a:solidFill>
+              <a:schemeClr val="accent1"/>
+            </a:solidFill>
+          </a:ln>
+        </p:spPr>
+        <p:style>
+          <a:lnRef idx="2">
+            <a:schemeClr val="accent1">
+              <a:lumMod val="75000"/>
+            </a:schemeClr>
+          </a:lnRef>
+          <a:fillRef idx="1">
+            <a:schemeClr val="accent1"/>
+          </a:fillRef>
+          <a:effectRef idx="0">
+            <a:srgbClr val="FFFFFF"/>
+          </a:effectRef>
+          <a:fontRef idx="minor">
+            <a:schemeClr val="lt1"/>
+          </a:fontRef>
+        </p:style>
+        <p:txBody>
+          <a:bodyPr rtlCol="0" anchor="ctr"/>
+          <a:p>
+            <a:pPr algn="ctr"/>
+            <a:endParaRPr lang="zh-CN" altLang="en-US"/>
+          </a:p>
+        </p:txBody>
+      </p:sp>
+      <p:cxnSp>
+        <p:nvCxnSpPr>
+          <p:cNvPr id="19" name="直接连接符 18"/>
+          <p:cNvCxnSpPr>
+            <a:stCxn id="17" idx="3"/>
+          </p:cNvCxnSpPr>
+          <p:nvPr/>
+        </p:nvCxnSpPr>
+        <p:spPr>
+          <a:xfrm>
+            <a:off x="3201670" y="3373120"/>
+            <a:ext cx="1433830" cy="76200"/>
+          </a:xfrm>
+          <a:prstGeom prst="line">
+            <a:avLst/>
+          </a:prstGeom>
+          <a:ln>
+            <a:solidFill>
+              <a:srgbClr val="FF4343"/>
+            </a:solidFill>
+          </a:ln>
+        </p:spPr>
+        <p:style>
+          <a:lnRef idx="2">
+            <a:schemeClr val="accent1"/>
+          </a:lnRef>
+          <a:fillRef idx="0">
+            <a:srgbClr val="FFFFFF"/>
+          </a:fillRef>
+          <a:effectRef idx="0">
+            <a:srgbClr val="FFFFFF"/>
+          </a:effectRef>
+          <a:fontRef idx="minor">
+            <a:schemeClr val="tx1"/>
+          </a:fontRef>
+        </p:style>
+      </p:cxnSp>
+      <p:cxnSp>
+        <p:nvCxnSpPr>
+          <p:cNvPr id="20" name="直接连接符 19"/>
+          <p:cNvCxnSpPr/>
+          <p:nvPr/>
+        </p:nvCxnSpPr>
+        <p:spPr>
+          <a:xfrm>
+            <a:off x="3713480" y="3999865"/>
+            <a:ext cx="922020" cy="107950"/>
+          </a:xfrm>
+          <a:prstGeom prst="line">
+            <a:avLst/>
+          </a:prstGeom>
+        </p:spPr>
+        <p:style>
+          <a:lnRef idx="2">
+            <a:schemeClr val="accent1"/>
+          </a:lnRef>
+          <a:fillRef idx="0">
+            <a:srgbClr val="FFFFFF"/>
+          </a:fillRef>
+          <a:effectRef idx="0">
+            <a:srgbClr val="FFFFFF"/>
+          </a:effectRef>
+          <a:fontRef idx="minor">
+            <a:schemeClr val="tx1"/>
+          </a:fontRef>
+        </p:style>
+      </p:cxnSp>
+      <p:sp>
+        <p:nvSpPr>
+          <p:cNvPr id="21" name="矩形 20"/>
+          <p:cNvSpPr/>
+          <p:nvPr/>
+        </p:nvSpPr>
+        <p:spPr>
+          <a:xfrm>
+            <a:off x="4635500" y="3263265"/>
+            <a:ext cx="1528445" cy="302260"/>
+          </a:xfrm>
+          <a:prstGeom prst="rect">
+            <a:avLst/>
+          </a:prstGeom>
+          <a:noFill/>
+          <a:ln>
+            <a:solidFill>
+              <a:srgbClr val="FF4343"/>
+            </a:solidFill>
+          </a:ln>
+        </p:spPr>
+        <p:style>
+          <a:lnRef idx="2">
+            <a:schemeClr val="accent1">
+              <a:lumMod val="75000"/>
+            </a:schemeClr>
+          </a:lnRef>
+          <a:fillRef idx="1">
+            <a:schemeClr val="accent1"/>
+          </a:fillRef>
+          <a:effectRef idx="0">
+            <a:srgbClr val="FFFFFF"/>
+          </a:effectRef>
+          <a:fontRef idx="minor">
+            <a:schemeClr val="lt1"/>
+          </a:fontRef>
+        </p:style>
+        <p:txBody>
+          <a:bodyPr rtlCol="0" anchor="ctr"/>
+          <a:p>
+            <a:pPr algn="ctr"/>
+            <a:r>
+              <a:rPr lang="zh-CN" altLang="en-US">
+                <a:solidFill>
+                  <a:srgbClr val="FF0000"/>
+                </a:solidFill>
+              </a:rPr>
+              <a:t>代数列</a:t>
+            </a:r>
+            <a:r>
+              <a:rPr lang="zh-CN" altLang="en-US">
+                <a:solidFill>
+                  <a:srgbClr val="FF0000"/>
+                </a:solidFill>
+              </a:rPr>
+              <a:t>式</a:t>
+            </a:r>
+            <a:endParaRPr lang="zh-CN" altLang="en-US">
+              <a:solidFill>
+                <a:srgbClr val="FF0000"/>
+              </a:solidFill>
+            </a:endParaRPr>
+          </a:p>
+        </p:txBody>
+      </p:sp>
+      <p:sp>
+        <p:nvSpPr>
+          <p:cNvPr id="22" name="矩形 21"/>
+          <p:cNvSpPr/>
+          <p:nvPr/>
+        </p:nvSpPr>
+        <p:spPr>
+          <a:xfrm>
+            <a:off x="4635500" y="3911600"/>
+            <a:ext cx="1527810" cy="302260"/>
+          </a:xfrm>
+          <a:prstGeom prst="rect">
+            <a:avLst/>
+          </a:prstGeom>
+          <a:noFill/>
+        </p:spPr>
+        <p:style>
+          <a:lnRef idx="2">
+            <a:schemeClr val="accent1">
+              <a:lumMod val="75000"/>
+            </a:schemeClr>
+          </a:lnRef>
+          <a:fillRef idx="1">
+            <a:schemeClr val="accent1"/>
+          </a:fillRef>
+          <a:effectRef idx="0">
+            <a:srgbClr val="FFFFFF"/>
+          </a:effectRef>
+          <a:fontRef idx="minor">
+            <a:schemeClr val="lt1"/>
+          </a:fontRef>
+        </p:style>
+        <p:txBody>
+          <a:bodyPr rtlCol="0" anchor="ctr"/>
+          <a:p>
+            <a:pPr algn="ctr"/>
+            <a:r>
+              <a:rPr lang="zh-CN" altLang="en-US">
+                <a:solidFill>
+                  <a:schemeClr val="tx1"/>
+                </a:solidFill>
+              </a:rPr>
+              <a:t>文本推理</a:t>
+            </a:r>
+            <a:endParaRPr lang="zh-CN" altLang="en-US">
+              <a:solidFill>
+                <a:schemeClr val="tx1"/>
+              </a:solidFill>
+            </a:endParaRPr>
+          </a:p>
+        </p:txBody>
+      </p:sp>
+      <p:sp>
+        <p:nvSpPr>
+          <p:cNvPr id="24" name="圆角右箭头 23"/>
+          <p:cNvSpPr/>
+          <p:nvPr/>
+        </p:nvSpPr>
+        <p:spPr>
+          <a:xfrm rot="10800000" flipH="1">
+            <a:off x="736600" y="3712210"/>
+            <a:ext cx="309245" cy="395605"/>
+          </a:xfrm>
+          <a:prstGeom prst="bentArrow">
+            <a:avLst>
+              <a:gd name="adj1" fmla="val 25000"/>
+              <a:gd name="adj2" fmla="val 25045"/>
+              <a:gd name="adj3" fmla="val 25000"/>
+              <a:gd name="adj4" fmla="val 43750"/>
+            </a:avLst>
+          </a:prstGeom>
+          <a:noFill/>
+        </p:spPr>
+        <p:style>
+          <a:lnRef idx="2">
+            <a:schemeClr val="accent1">
+              <a:lumMod val="75000"/>
+            </a:schemeClr>
+          </a:lnRef>
+          <a:fillRef idx="1">
+            <a:schemeClr val="accent1"/>
+          </a:fillRef>
+          <a:effectRef idx="0">
+            <a:srgbClr val="FFFFFF"/>
+          </a:effectRef>
+          <a:fontRef idx="minor">
+            <a:schemeClr val="lt1"/>
+          </a:fontRef>
+        </p:style>
+        <p:txBody>
+          <a:bodyPr rtlCol="0" anchor="ctr"/>
+          <a:p>
+            <a:pPr algn="ctr"/>
+            <a:endParaRPr lang="zh-CN" altLang="en-US">
+              <a:solidFill>
+                <a:schemeClr val="tx1"/>
+              </a:solidFill>
+            </a:endParaRPr>
+          </a:p>
+        </p:txBody>
+      </p:sp>
+    </p:spTree>
+  </p:cSld>
+  <p:clrMapOvr>
+    <a:masterClrMapping/>
+  </p:clrMapOvr>
+  <p:transition advTm="4106"/>
+</p:sld>
+</file>
+
+<file path=ppt/slides/slide6.xml><?xml version="1.0" encoding="utf-8"?>
+<p:sld xmlns:a="http://schemas.openxmlformats.org/drawingml/2006/main" xmlns:r="http://schemas.openxmlformats.org/officeDocument/2006/relationships" xmlns:p="http://schemas.openxmlformats.org/presentationml/2006/main">
+  <p:cSld>
+    <p:spTree>
+      <p:nvGrpSpPr>
+        <p:cNvPr id="1" name=""/>
+        <p:cNvGrpSpPr/>
+        <p:nvPr/>
+      </p:nvGrpSpPr>
+      <p:grpSpPr>
+        <a:xfrm>
+          <a:off x="0" y="0"/>
+          <a:ext cx="0" cy="0"/>
+          <a:chOff x="0" y="0"/>
+          <a:chExt cx="0" cy="0"/>
+        </a:xfrm>
+      </p:grpSpPr>
+      <p:sp>
+        <p:nvSpPr>
           <p:cNvPr id="6" name="标题 5"/>
           <p:cNvSpPr>
             <a:spLocks noGrp="1"/>
@@ -19705,7 +21902,1682 @@
 </p:sld>
 </file>
 
-<file path=ppt/slides/slide6.xml><?xml version="1.0" encoding="utf-8"?>
+<file path=ppt/slides/slide7.xml><?xml version="1.0" encoding="utf-8"?>
+<p:sld xmlns:a="http://schemas.openxmlformats.org/drawingml/2006/main" xmlns:r="http://schemas.openxmlformats.org/officeDocument/2006/relationships" xmlns:p="http://schemas.openxmlformats.org/presentationml/2006/main">
+  <p:cSld>
+    <p:spTree>
+      <p:nvGrpSpPr>
+        <p:cNvPr id="1" name=""/>
+        <p:cNvGrpSpPr/>
+        <p:nvPr/>
+      </p:nvGrpSpPr>
+      <p:grpSpPr>
+        <a:xfrm>
+          <a:off x="0" y="0"/>
+          <a:ext cx="0" cy="0"/>
+          <a:chOff x="0" y="0"/>
+          <a:chExt cx="0" cy="0"/>
+        </a:xfrm>
+      </p:grpSpPr>
+      <p:sp>
+        <p:nvSpPr>
+          <p:cNvPr id="3" name="日期占位符 2"/>
+          <p:cNvSpPr>
+            <a:spLocks noGrp="1"/>
+          </p:cNvSpPr>
+          <p:nvPr>
+            <p:ph type="dt" sz="half" idx="10"/>
+          </p:nvPr>
+        </p:nvSpPr>
+        <p:spPr/>
+        <p:txBody>
+          <a:bodyPr/>
+          <a:lstStyle/>
+          <a:p>
+            <a:fld id="{2FBB519E-D9EB-47F0-AD65-082D85248404}" type="datetime1">
+              <a:rPr lang="zh-CN" altLang="en-US" smtClean="0"/>
+            </a:fld>
+            <a:endParaRPr lang="zh-CN" altLang="en-US" dirty="0"/>
+          </a:p>
+        </p:txBody>
+      </p:sp>
+      <p:sp>
+        <p:nvSpPr>
+          <p:cNvPr id="4" name="灯片编号占位符 3"/>
+          <p:cNvSpPr>
+            <a:spLocks noGrp="1"/>
+          </p:cNvSpPr>
+          <p:nvPr>
+            <p:ph type="sldNum" sz="quarter" idx="11"/>
+          </p:nvPr>
+        </p:nvSpPr>
+        <p:spPr/>
+        <p:txBody>
+          <a:bodyPr/>
+          <a:lstStyle/>
+          <a:p>
+            <a:fld id="{463E1EE8-403A-4D2D-AB26-5BF439A27F60}" type="slidenum">
+              <a:rPr lang="zh-CN" altLang="en-US" smtClean="0"/>
+            </a:fld>
+            <a:endParaRPr lang="zh-CN" altLang="en-US" dirty="0"/>
+          </a:p>
+        </p:txBody>
+      </p:sp>
+      <p:sp>
+        <p:nvSpPr>
+          <p:cNvPr id="7" name="文本框 6"/>
+          <p:cNvSpPr txBox="1"/>
+          <p:nvPr/>
+        </p:nvSpPr>
+        <p:spPr>
+          <a:xfrm>
+            <a:off x="288925" y="915035"/>
+            <a:ext cx="732155" cy="414020"/>
+          </a:xfrm>
+          <a:prstGeom prst="rect">
+            <a:avLst/>
+          </a:prstGeom>
+          <a:noFill/>
+        </p:spPr>
+        <p:txBody>
+          <a:bodyPr wrap="square" rtlCol="0">
+            <a:spAutoFit/>
+          </a:bodyPr>
+          <a:lstStyle/>
+          <a:p>
+            <a:pPr indent="0">
+              <a:lnSpc>
+                <a:spcPct val="150000"/>
+              </a:lnSpc>
+              <a:buFont typeface="Wingdings" panose="05000000000000000000" pitchFamily="2" charset="2"/>
+              <a:buNone/>
+            </a:pPr>
+            <a:r>
+              <a:rPr lang="zh-CN" altLang="en-US" sz="1400" dirty="0"/>
+              <a:t>数据集</a:t>
+            </a:r>
+            <a:endParaRPr lang="zh-CN" altLang="en-US" sz="1400" dirty="0"/>
+          </a:p>
+        </p:txBody>
+      </p:sp>
+      <p:sp>
+        <p:nvSpPr>
+          <p:cNvPr id="12" name="标题 11"/>
+          <p:cNvSpPr>
+            <a:spLocks noGrp="1"/>
+          </p:cNvSpPr>
+          <p:nvPr/>
+        </p:nvSpPr>
+        <p:spPr>
+          <a:xfrm>
+            <a:off x="471924" y="360000"/>
+            <a:ext cx="5920502" cy="489600"/>
+          </a:xfrm>
+          <a:prstGeom prst="rect">
+            <a:avLst/>
+          </a:prstGeom>
+        </p:spPr>
+        <p:txBody>
+          <a:bodyPr vert="horz" lIns="91440" tIns="45720" rIns="91440" bIns="45720" rtlCol="0" anchor="ctr">
+            <a:normAutofit/>
+          </a:bodyPr>
+          <a:lstStyle>
+            <a:lvl1pPr algn="l" defTabSz="514985" rtl="0" eaLnBrk="1" latinLnBrk="0" hangingPunct="1">
+              <a:lnSpc>
+                <a:spcPct val="90000"/>
+              </a:lnSpc>
+              <a:spcBef>
+                <a:spcPct val="0"/>
+              </a:spcBef>
+              <a:buNone/>
+              <a:defRPr sz="2100" kern="1200" baseline="0">
+                <a:solidFill>
+                  <a:srgbClr val="63065F"/>
+                </a:solidFill>
+                <a:latin typeface="Arial" panose="020B0604020202020204" pitchFamily="34" charset="0"/>
+                <a:ea typeface="+mj-ea"/>
+                <a:cs typeface="Arial" panose="020B0604020202020204" pitchFamily="34" charset="0"/>
+              </a:defRPr>
+            </a:lvl1pPr>
+          </a:lstStyle>
+          <a:p>
+            <a:r>
+              <a:rPr lang="zh-CN" altLang="en-US" dirty="0" err="1"/>
+              <a:t>数据集</a:t>
+            </a:r>
+            <a:r>
+              <a:rPr lang="zh-CN" altLang="en-US" dirty="0" err="1"/>
+              <a:t>内容</a:t>
+            </a:r>
+            <a:endParaRPr lang="zh-CN" altLang="en-US" dirty="0" err="1"/>
+          </a:p>
+        </p:txBody>
+      </p:sp>
+      <p:cxnSp>
+        <p:nvCxnSpPr>
+          <p:cNvPr id="27" name="直接连接符 26"/>
+          <p:cNvCxnSpPr/>
+          <p:nvPr/>
+        </p:nvCxnSpPr>
+        <p:spPr>
+          <a:xfrm>
+            <a:off x="342265" y="1394460"/>
+            <a:ext cx="5923280" cy="0"/>
+          </a:xfrm>
+          <a:prstGeom prst="line">
+            <a:avLst/>
+          </a:prstGeom>
+          <a:ln>
+            <a:solidFill>
+              <a:schemeClr val="tx1"/>
+            </a:solidFill>
+          </a:ln>
+        </p:spPr>
+        <p:style>
+          <a:lnRef idx="2">
+            <a:schemeClr val="accent1"/>
+          </a:lnRef>
+          <a:fillRef idx="0">
+            <a:srgbClr val="FFFFFF"/>
+          </a:fillRef>
+          <a:effectRef idx="0">
+            <a:srgbClr val="FFFFFF"/>
+          </a:effectRef>
+          <a:fontRef idx="minor">
+            <a:schemeClr val="tx1"/>
+          </a:fontRef>
+        </p:style>
+      </p:cxnSp>
+      <p:cxnSp>
+        <p:nvCxnSpPr>
+          <p:cNvPr id="29" name="直接连接符 28"/>
+          <p:cNvCxnSpPr/>
+          <p:nvPr/>
+        </p:nvCxnSpPr>
+        <p:spPr>
+          <a:xfrm>
+            <a:off x="342265" y="3194050"/>
+            <a:ext cx="5923280" cy="0"/>
+          </a:xfrm>
+          <a:prstGeom prst="line">
+            <a:avLst/>
+          </a:prstGeom>
+          <a:ln>
+            <a:solidFill>
+              <a:schemeClr val="tx1"/>
+            </a:solidFill>
+          </a:ln>
+        </p:spPr>
+        <p:style>
+          <a:lnRef idx="2">
+            <a:schemeClr val="accent1"/>
+          </a:lnRef>
+          <a:fillRef idx="0">
+            <a:srgbClr val="FFFFFF"/>
+          </a:fillRef>
+          <a:effectRef idx="0">
+            <a:srgbClr val="FFFFFF"/>
+          </a:effectRef>
+          <a:fontRef idx="minor">
+            <a:schemeClr val="tx1"/>
+          </a:fontRef>
+        </p:style>
+      </p:cxnSp>
+      <p:cxnSp>
+        <p:nvCxnSpPr>
+          <p:cNvPr id="30" name="直接连接符 29"/>
+          <p:cNvCxnSpPr/>
+          <p:nvPr/>
+        </p:nvCxnSpPr>
+        <p:spPr>
+          <a:xfrm>
+            <a:off x="342265" y="3956050"/>
+            <a:ext cx="5923280" cy="0"/>
+          </a:xfrm>
+          <a:prstGeom prst="line">
+            <a:avLst/>
+          </a:prstGeom>
+          <a:ln>
+            <a:solidFill>
+              <a:schemeClr val="tx1"/>
+            </a:solidFill>
+          </a:ln>
+        </p:spPr>
+        <p:style>
+          <a:lnRef idx="2">
+            <a:schemeClr val="accent1"/>
+          </a:lnRef>
+          <a:fillRef idx="0">
+            <a:srgbClr val="FFFFFF"/>
+          </a:fillRef>
+          <a:effectRef idx="0">
+            <a:srgbClr val="FFFFFF"/>
+          </a:effectRef>
+          <a:fontRef idx="minor">
+            <a:schemeClr val="tx1"/>
+          </a:fontRef>
+        </p:style>
+      </p:cxnSp>
+      <p:cxnSp>
+        <p:nvCxnSpPr>
+          <p:cNvPr id="32" name="直接连接符 31"/>
+          <p:cNvCxnSpPr/>
+          <p:nvPr/>
+        </p:nvCxnSpPr>
+        <p:spPr>
+          <a:xfrm flipH="1">
+            <a:off x="2656840" y="940435"/>
+            <a:ext cx="635" cy="3411220"/>
+          </a:xfrm>
+          <a:prstGeom prst="line">
+            <a:avLst/>
+          </a:prstGeom>
+          <a:ln>
+            <a:solidFill>
+              <a:schemeClr val="tx1"/>
+            </a:solidFill>
+          </a:ln>
+        </p:spPr>
+        <p:style>
+          <a:lnRef idx="2">
+            <a:schemeClr val="accent1"/>
+          </a:lnRef>
+          <a:fillRef idx="0">
+            <a:srgbClr val="FFFFFF"/>
+          </a:fillRef>
+          <a:effectRef idx="0">
+            <a:srgbClr val="FFFFFF"/>
+          </a:effectRef>
+          <a:fontRef idx="minor">
+            <a:schemeClr val="tx1"/>
+          </a:fontRef>
+        </p:style>
+      </p:cxnSp>
+      <p:cxnSp>
+        <p:nvCxnSpPr>
+          <p:cNvPr id="33" name="直接连接符 32"/>
+          <p:cNvCxnSpPr/>
+          <p:nvPr/>
+        </p:nvCxnSpPr>
+        <p:spPr>
+          <a:xfrm flipH="1">
+            <a:off x="4551680" y="940435"/>
+            <a:ext cx="635" cy="3411220"/>
+          </a:xfrm>
+          <a:prstGeom prst="line">
+            <a:avLst/>
+          </a:prstGeom>
+          <a:ln>
+            <a:solidFill>
+              <a:schemeClr val="tx1"/>
+            </a:solidFill>
+          </a:ln>
+        </p:spPr>
+        <p:style>
+          <a:lnRef idx="2">
+            <a:schemeClr val="accent1"/>
+          </a:lnRef>
+          <a:fillRef idx="0">
+            <a:srgbClr val="FFFFFF"/>
+          </a:fillRef>
+          <a:effectRef idx="0">
+            <a:srgbClr val="FFFFFF"/>
+          </a:effectRef>
+          <a:fontRef idx="minor">
+            <a:schemeClr val="tx1"/>
+          </a:fontRef>
+        </p:style>
+      </p:cxnSp>
+      <p:cxnSp>
+        <p:nvCxnSpPr>
+          <p:cNvPr id="34" name="直接连接符 33"/>
+          <p:cNvCxnSpPr/>
+          <p:nvPr/>
+        </p:nvCxnSpPr>
+        <p:spPr>
+          <a:xfrm flipH="1">
+            <a:off x="989330" y="940435"/>
+            <a:ext cx="635" cy="3411220"/>
+          </a:xfrm>
+          <a:prstGeom prst="line">
+            <a:avLst/>
+          </a:prstGeom>
+          <a:ln>
+            <a:solidFill>
+              <a:schemeClr val="tx1"/>
+            </a:solidFill>
+          </a:ln>
+        </p:spPr>
+        <p:style>
+          <a:lnRef idx="2">
+            <a:schemeClr val="accent1"/>
+          </a:lnRef>
+          <a:fillRef idx="0">
+            <a:srgbClr val="FFFFFF"/>
+          </a:fillRef>
+          <a:effectRef idx="0">
+            <a:srgbClr val="FFFFFF"/>
+          </a:effectRef>
+          <a:fontRef idx="minor">
+            <a:schemeClr val="tx1"/>
+          </a:fontRef>
+        </p:style>
+      </p:cxnSp>
+      <p:sp>
+        <p:nvSpPr>
+          <p:cNvPr id="35" name="文本框 34"/>
+          <p:cNvSpPr txBox="1"/>
+          <p:nvPr/>
+        </p:nvSpPr>
+        <p:spPr>
+          <a:xfrm>
+            <a:off x="1284605" y="915035"/>
+            <a:ext cx="732155" cy="414020"/>
+          </a:xfrm>
+          <a:prstGeom prst="rect">
+            <a:avLst/>
+          </a:prstGeom>
+          <a:noFill/>
+        </p:spPr>
+        <p:txBody>
+          <a:bodyPr wrap="square" rtlCol="0">
+            <a:spAutoFit/>
+          </a:bodyPr>
+          <a:lstStyle/>
+          <a:p>
+            <a:pPr indent="0">
+              <a:lnSpc>
+                <a:spcPct val="150000"/>
+              </a:lnSpc>
+              <a:buFont typeface="Wingdings" panose="05000000000000000000" pitchFamily="2" charset="2"/>
+              <a:buNone/>
+            </a:pPr>
+            <a:r>
+              <a:rPr lang="zh-CN" altLang="en-US" sz="1400" dirty="0"/>
+              <a:t>数据集</a:t>
+            </a:r>
+            <a:endParaRPr lang="zh-CN" altLang="en-US" sz="1400" dirty="0"/>
+          </a:p>
+        </p:txBody>
+      </p:sp>
+      <p:sp>
+        <p:nvSpPr>
+          <p:cNvPr id="36" name="文本框 35"/>
+          <p:cNvSpPr txBox="1"/>
+          <p:nvPr/>
+        </p:nvSpPr>
+        <p:spPr>
+          <a:xfrm>
+            <a:off x="2938145" y="915035"/>
+            <a:ext cx="732155" cy="414020"/>
+          </a:xfrm>
+          <a:prstGeom prst="rect">
+            <a:avLst/>
+          </a:prstGeom>
+          <a:noFill/>
+        </p:spPr>
+        <p:txBody>
+          <a:bodyPr wrap="square" rtlCol="0">
+            <a:spAutoFit/>
+          </a:bodyPr>
+          <a:lstStyle/>
+          <a:p>
+            <a:pPr indent="0">
+              <a:lnSpc>
+                <a:spcPct val="150000"/>
+              </a:lnSpc>
+              <a:buFont typeface="Wingdings" panose="05000000000000000000" pitchFamily="2" charset="2"/>
+              <a:buNone/>
+            </a:pPr>
+            <a:r>
+              <a:rPr lang="zh-CN" altLang="en-US" sz="1400" dirty="0"/>
+              <a:t>数据集</a:t>
+            </a:r>
+            <a:endParaRPr lang="zh-CN" altLang="en-US" sz="1400" dirty="0"/>
+          </a:p>
+        </p:txBody>
+      </p:sp>
+      <p:sp>
+        <p:nvSpPr>
+          <p:cNvPr id="37" name="文本框 36"/>
+          <p:cNvSpPr txBox="1"/>
+          <p:nvPr/>
+        </p:nvSpPr>
+        <p:spPr>
+          <a:xfrm>
+            <a:off x="5175250" y="915035"/>
+            <a:ext cx="732155" cy="414020"/>
+          </a:xfrm>
+          <a:prstGeom prst="rect">
+            <a:avLst/>
+          </a:prstGeom>
+          <a:noFill/>
+        </p:spPr>
+        <p:txBody>
+          <a:bodyPr wrap="square" rtlCol="0">
+            <a:spAutoFit/>
+          </a:bodyPr>
+          <a:lstStyle/>
+          <a:p>
+            <a:pPr indent="0">
+              <a:lnSpc>
+                <a:spcPct val="150000"/>
+              </a:lnSpc>
+              <a:buFont typeface="Wingdings" panose="05000000000000000000" pitchFamily="2" charset="2"/>
+              <a:buNone/>
+            </a:pPr>
+            <a:r>
+              <a:rPr lang="zh-CN" altLang="en-US" sz="1400" dirty="0"/>
+              <a:t>数据集</a:t>
+            </a:r>
+            <a:endParaRPr lang="zh-CN" altLang="en-US" sz="1400" dirty="0"/>
+          </a:p>
+        </p:txBody>
+      </p:sp>
+      <p:sp>
+        <p:nvSpPr>
+          <p:cNvPr id="38" name="文本框 37"/>
+          <p:cNvSpPr txBox="1"/>
+          <p:nvPr/>
+        </p:nvSpPr>
+        <p:spPr>
+          <a:xfrm>
+            <a:off x="349885" y="2123440"/>
+            <a:ext cx="623570" cy="509270"/>
+          </a:xfrm>
+          <a:prstGeom prst="rect">
+            <a:avLst/>
+          </a:prstGeom>
+          <a:noFill/>
+        </p:spPr>
+        <p:txBody>
+          <a:bodyPr wrap="square" rtlCol="0">
+            <a:spAutoFit/>
+          </a:bodyPr>
+          <a:p>
+            <a:r>
+              <a:rPr lang="zh-CN" altLang="en-US"/>
+              <a:t>问题</a:t>
+            </a:r>
+            <a:r>
+              <a:rPr lang="zh-CN" altLang="en-US"/>
+              <a:t>文本</a:t>
+            </a:r>
+            <a:endParaRPr lang="zh-CN" altLang="en-US"/>
+          </a:p>
+        </p:txBody>
+      </p:sp>
+      <p:sp>
+        <p:nvSpPr>
+          <p:cNvPr id="39" name="文本框 38"/>
+          <p:cNvSpPr txBox="1"/>
+          <p:nvPr/>
+        </p:nvSpPr>
+        <p:spPr>
+          <a:xfrm>
+            <a:off x="351790" y="3424555"/>
+            <a:ext cx="623570" cy="300355"/>
+          </a:xfrm>
+          <a:prstGeom prst="rect">
+            <a:avLst/>
+          </a:prstGeom>
+          <a:noFill/>
+        </p:spPr>
+        <p:txBody>
+          <a:bodyPr wrap="square" rtlCol="0">
+            <a:spAutoFit/>
+          </a:bodyPr>
+          <a:p>
+            <a:r>
+              <a:rPr lang="zh-CN" altLang="en-US"/>
+              <a:t>标注</a:t>
+            </a:r>
+            <a:endParaRPr lang="zh-CN" altLang="en-US"/>
+          </a:p>
+        </p:txBody>
+      </p:sp>
+      <p:sp>
+        <p:nvSpPr>
+          <p:cNvPr id="41" name="文本框 40"/>
+          <p:cNvSpPr txBox="1"/>
+          <p:nvPr/>
+        </p:nvSpPr>
+        <p:spPr>
+          <a:xfrm>
+            <a:off x="349885" y="4036060"/>
+            <a:ext cx="623570" cy="300355"/>
+          </a:xfrm>
+          <a:prstGeom prst="rect">
+            <a:avLst/>
+          </a:prstGeom>
+          <a:noFill/>
+        </p:spPr>
+        <p:txBody>
+          <a:bodyPr wrap="square" rtlCol="0">
+            <a:spAutoFit/>
+          </a:bodyPr>
+          <a:p>
+            <a:r>
+              <a:rPr lang="zh-CN" altLang="en-US"/>
+              <a:t>不足</a:t>
+            </a:r>
+            <a:endParaRPr lang="zh-CN" altLang="en-US"/>
+          </a:p>
+        </p:txBody>
+      </p:sp>
+    </p:spTree>
+  </p:cSld>
+  <p:clrMapOvr>
+    <a:masterClrMapping/>
+  </p:clrMapOvr>
+  <p:transition advTm="4106"/>
+</p:sld>
+</file>
+
+<file path=ppt/slides/slide8.xml><?xml version="1.0" encoding="utf-8"?>
+<p:sld xmlns:a="http://schemas.openxmlformats.org/drawingml/2006/main" xmlns:r="http://schemas.openxmlformats.org/officeDocument/2006/relationships" xmlns:p="http://schemas.openxmlformats.org/presentationml/2006/main">
+  <p:cSld>
+    <p:spTree>
+      <p:nvGrpSpPr>
+        <p:cNvPr id="1" name=""/>
+        <p:cNvGrpSpPr/>
+        <p:nvPr/>
+      </p:nvGrpSpPr>
+      <p:grpSpPr>
+        <a:xfrm>
+          <a:off x="0" y="0"/>
+          <a:ext cx="0" cy="0"/>
+          <a:chOff x="0" y="0"/>
+          <a:chExt cx="0" cy="0"/>
+        </a:xfrm>
+      </p:grpSpPr>
+      <p:sp>
+        <p:nvSpPr>
+          <p:cNvPr id="3" name="日期占位符 2"/>
+          <p:cNvSpPr>
+            <a:spLocks noGrp="1"/>
+          </p:cNvSpPr>
+          <p:nvPr>
+            <p:ph type="dt" sz="half" idx="10"/>
+          </p:nvPr>
+        </p:nvSpPr>
+        <p:spPr/>
+        <p:txBody>
+          <a:bodyPr/>
+          <a:lstStyle/>
+          <a:p>
+            <a:fld id="{2FBB519E-D9EB-47F0-AD65-082D85248404}" type="datetime1">
+              <a:rPr lang="zh-CN" altLang="en-US" smtClean="0"/>
+            </a:fld>
+            <a:endParaRPr lang="zh-CN" altLang="en-US" dirty="0"/>
+          </a:p>
+        </p:txBody>
+      </p:sp>
+      <p:sp>
+        <p:nvSpPr>
+          <p:cNvPr id="4" name="灯片编号占位符 3"/>
+          <p:cNvSpPr>
+            <a:spLocks noGrp="1"/>
+          </p:cNvSpPr>
+          <p:nvPr>
+            <p:ph type="sldNum" sz="quarter" idx="11"/>
+          </p:nvPr>
+        </p:nvSpPr>
+        <p:spPr/>
+        <p:txBody>
+          <a:bodyPr/>
+          <a:lstStyle/>
+          <a:p>
+            <a:fld id="{463E1EE8-403A-4D2D-AB26-5BF439A27F60}" type="slidenum">
+              <a:rPr lang="zh-CN" altLang="en-US" smtClean="0"/>
+            </a:fld>
+            <a:endParaRPr lang="zh-CN" altLang="en-US" dirty="0"/>
+          </a:p>
+        </p:txBody>
+      </p:sp>
+      <p:sp>
+        <p:nvSpPr>
+          <p:cNvPr id="7" name="文本框 6"/>
+          <p:cNvSpPr txBox="1"/>
+          <p:nvPr/>
+        </p:nvSpPr>
+        <p:spPr>
+          <a:xfrm>
+            <a:off x="471533" y="849559"/>
+            <a:ext cx="5880888" cy="414020"/>
+          </a:xfrm>
+          <a:prstGeom prst="rect">
+            <a:avLst/>
+          </a:prstGeom>
+          <a:noFill/>
+        </p:spPr>
+        <p:txBody>
+          <a:bodyPr wrap="square" rtlCol="0">
+            <a:spAutoFit/>
+          </a:bodyPr>
+          <a:lstStyle/>
+          <a:p>
+            <a:pPr marL="285750" indent="-285750">
+              <a:lnSpc>
+                <a:spcPct val="150000"/>
+              </a:lnSpc>
+              <a:buFont typeface="Wingdings" panose="05000000000000000000" pitchFamily="2" charset="2"/>
+              <a:buChar char="n"/>
+            </a:pPr>
+            <a:r>
+              <a:rPr lang="zh-CN" altLang="en-US" sz="1400" dirty="0"/>
+              <a:t>数据集：缺乏领域知识、</a:t>
+            </a:r>
+            <a:r>
+              <a:rPr lang="zh-CN" altLang="en-US" sz="1400" dirty="0"/>
+              <a:t>缺乏详细的知识</a:t>
+            </a:r>
+            <a:r>
+              <a:rPr lang="zh-CN" altLang="en-US" sz="1400" dirty="0"/>
+              <a:t>标注</a:t>
+            </a:r>
+            <a:endParaRPr lang="zh-CN" altLang="en-US" sz="1400" dirty="0"/>
+          </a:p>
+        </p:txBody>
+      </p:sp>
+      <p:sp>
+        <p:nvSpPr>
+          <p:cNvPr id="12" name="标题 11"/>
+          <p:cNvSpPr>
+            <a:spLocks noGrp="1"/>
+          </p:cNvSpPr>
+          <p:nvPr/>
+        </p:nvSpPr>
+        <p:spPr>
+          <a:xfrm>
+            <a:off x="471924" y="360000"/>
+            <a:ext cx="5920502" cy="489600"/>
+          </a:xfrm>
+          <a:prstGeom prst="rect">
+            <a:avLst/>
+          </a:prstGeom>
+        </p:spPr>
+        <p:txBody>
+          <a:bodyPr vert="horz" lIns="91440" tIns="45720" rIns="91440" bIns="45720" rtlCol="0" anchor="ctr">
+            <a:normAutofit/>
+          </a:bodyPr>
+          <a:lstStyle>
+            <a:lvl1pPr algn="l" defTabSz="514985" rtl="0" eaLnBrk="1" latinLnBrk="0" hangingPunct="1">
+              <a:lnSpc>
+                <a:spcPct val="90000"/>
+              </a:lnSpc>
+              <a:spcBef>
+                <a:spcPct val="0"/>
+              </a:spcBef>
+              <a:buNone/>
+              <a:defRPr sz="2100" kern="1200" baseline="0">
+                <a:solidFill>
+                  <a:srgbClr val="63065F"/>
+                </a:solidFill>
+                <a:latin typeface="Arial" panose="020B0604020202020204" pitchFamily="34" charset="0"/>
+                <a:ea typeface="+mj-ea"/>
+                <a:cs typeface="Arial" panose="020B0604020202020204" pitchFamily="34" charset="0"/>
+              </a:defRPr>
+            </a:lvl1pPr>
+          </a:lstStyle>
+          <a:p>
+            <a:r>
+              <a:rPr lang="zh-CN" altLang="en-US" dirty="0" err="1"/>
+              <a:t>数据集</a:t>
+            </a:r>
+            <a:r>
+              <a:rPr lang="zh-CN" altLang="en-US" dirty="0" err="1"/>
+              <a:t>构建</a:t>
+            </a:r>
+            <a:endParaRPr lang="zh-CN" altLang="en-US" dirty="0" err="1"/>
+          </a:p>
+        </p:txBody>
+      </p:sp>
+      <p:sp>
+        <p:nvSpPr>
+          <p:cNvPr id="5" name="文本框 4"/>
+          <p:cNvSpPr txBox="1"/>
+          <p:nvPr/>
+        </p:nvSpPr>
+        <p:spPr>
+          <a:xfrm>
+            <a:off x="1181735" y="1301115"/>
+            <a:ext cx="5078730" cy="737235"/>
+          </a:xfrm>
+          <a:prstGeom prst="rect">
+            <a:avLst/>
+          </a:prstGeom>
+          <a:noFill/>
+        </p:spPr>
+        <p:txBody>
+          <a:bodyPr wrap="square" rtlCol="0">
+            <a:spAutoFit/>
+          </a:bodyPr>
+          <a:p>
+            <a:r>
+              <a:rPr lang="zh-CN" altLang="en-US" sz="1400">
+                <a:solidFill>
+                  <a:srgbClr val="000000"/>
+                </a:solidFill>
+                <a:latin typeface="Arial" panose="020B0604020202020204" pitchFamily="34" charset="0"/>
+                <a:ea typeface="微软雅黑" panose="020B0503020204020204" charset="-122"/>
+                <a:cs typeface="Arial" panose="020B0604020202020204" pitchFamily="34" charset="0"/>
+                <a:sym typeface="+mn-ea"/>
+              </a:rPr>
+              <a:t>珍妮特每天卖</a:t>
+            </a:r>
+            <a:r>
+              <a:rPr lang="en-US" altLang="zh-CN" sz="1400">
+                <a:solidFill>
+                  <a:srgbClr val="000000"/>
+                </a:solidFill>
+                <a:latin typeface="Arial" panose="020B0604020202020204" pitchFamily="34" charset="0"/>
+                <a:ea typeface="Arial" panose="020B0604020202020204"/>
+                <a:cs typeface="Arial" panose="020B0604020202020204" pitchFamily="34" charset="0"/>
+                <a:sym typeface="+mn-ea"/>
+              </a:rPr>
+              <a:t>16 - 3 - 4 = &lt;&lt;16-3-4=9&gt;&gt;9</a:t>
+            </a:r>
+            <a:r>
+              <a:rPr lang="zh-CN" altLang="en-US" sz="1400">
+                <a:solidFill>
+                  <a:srgbClr val="000000"/>
+                </a:solidFill>
+                <a:latin typeface="Arial" panose="020B0604020202020204" pitchFamily="34" charset="0"/>
+                <a:ea typeface="微软雅黑" panose="020B0503020204020204" charset="-122"/>
+                <a:cs typeface="Arial" panose="020B0604020202020204" pitchFamily="34" charset="0"/>
+                <a:sym typeface="+mn-ea"/>
+              </a:rPr>
+              <a:t>个鸭蛋。 </a:t>
+            </a:r>
+            <a:endParaRPr lang="zh-CN" altLang="en-US" sz="1400">
+              <a:solidFill>
+                <a:srgbClr val="000000"/>
+              </a:solidFill>
+              <a:latin typeface="Arial" panose="020B0604020202020204" pitchFamily="34" charset="0"/>
+              <a:ea typeface="微软雅黑" panose="020B0503020204020204" charset="-122"/>
+              <a:cs typeface="Arial" panose="020B0604020202020204" pitchFamily="34" charset="0"/>
+            </a:endParaRPr>
+          </a:p>
+          <a:p>
+            <a:r>
+              <a:rPr lang="zh-CN" altLang="en-US" sz="1400">
+                <a:solidFill>
+                  <a:srgbClr val="000000"/>
+                </a:solidFill>
+                <a:latin typeface="Arial" panose="020B0604020202020204" pitchFamily="34" charset="0"/>
+                <a:ea typeface="微软雅黑" panose="020B0503020204020204" charset="-122"/>
+                <a:cs typeface="Arial" panose="020B0604020202020204" pitchFamily="34" charset="0"/>
+                <a:sym typeface="+mn-ea"/>
+              </a:rPr>
+              <a:t>她每天在农贸市场赚</a:t>
+            </a:r>
+            <a:r>
+              <a:rPr lang="en-US" altLang="zh-CN" sz="1400">
+                <a:solidFill>
+                  <a:srgbClr val="000000"/>
+                </a:solidFill>
+                <a:latin typeface="Arial" panose="020B0604020202020204" pitchFamily="34" charset="0"/>
+                <a:ea typeface="Arial" panose="020B0604020202020204"/>
+                <a:cs typeface="Arial" panose="020B0604020202020204" pitchFamily="34" charset="0"/>
+                <a:sym typeface="+mn-ea"/>
+              </a:rPr>
+              <a:t>9 * 2 = $&lt;&lt;9*2=18&gt;&gt;18</a:t>
+            </a:r>
+            <a:r>
+              <a:rPr lang="zh-CN" altLang="en-US" sz="1400">
+                <a:solidFill>
+                  <a:srgbClr val="000000"/>
+                </a:solidFill>
+                <a:latin typeface="Arial" panose="020B0604020202020204" pitchFamily="34" charset="0"/>
+                <a:ea typeface="微软雅黑" panose="020B0503020204020204" charset="-122"/>
+                <a:cs typeface="Arial" panose="020B0604020202020204" pitchFamily="34" charset="0"/>
+                <a:sym typeface="+mn-ea"/>
+              </a:rPr>
+              <a:t>。 </a:t>
+            </a:r>
+            <a:endParaRPr lang="zh-CN" altLang="en-US" sz="1400">
+              <a:solidFill>
+                <a:srgbClr val="000000"/>
+              </a:solidFill>
+              <a:latin typeface="Arial" panose="020B0604020202020204" pitchFamily="34" charset="0"/>
+              <a:ea typeface="微软雅黑" panose="020B0503020204020204" charset="-122"/>
+              <a:cs typeface="Arial" panose="020B0604020202020204" pitchFamily="34" charset="0"/>
+            </a:endParaRPr>
+          </a:p>
+          <a:p>
+            <a:r>
+              <a:rPr lang="en-US" altLang="zh-CN" sz="1400">
+                <a:solidFill>
+                  <a:srgbClr val="000000"/>
+                </a:solidFill>
+                <a:latin typeface="Arial" panose="020B0604020202020204" pitchFamily="34" charset="0"/>
+                <a:ea typeface="Arial" panose="020B0604020202020204"/>
+                <a:cs typeface="Arial" panose="020B0604020202020204" pitchFamily="34" charset="0"/>
+                <a:sym typeface="+mn-ea"/>
+              </a:rPr>
+              <a:t>#### 18</a:t>
+            </a:r>
+            <a:endParaRPr lang="zh-CN" altLang="en-US" sz="1400">
+              <a:latin typeface="Arial" panose="020B0604020202020204" pitchFamily="34" charset="0"/>
+              <a:cs typeface="Arial" panose="020B0604020202020204" pitchFamily="34" charset="0"/>
+            </a:endParaRPr>
+          </a:p>
+        </p:txBody>
+      </p:sp>
+      <p:sp>
+        <p:nvSpPr>
+          <p:cNvPr id="6" name="圆角矩形 5"/>
+          <p:cNvSpPr/>
+          <p:nvPr/>
+        </p:nvSpPr>
+        <p:spPr>
+          <a:xfrm>
+            <a:off x="520700" y="1254760"/>
+            <a:ext cx="5969635" cy="1406525"/>
+          </a:xfrm>
+          <a:prstGeom prst="roundRect">
+            <a:avLst/>
+          </a:prstGeom>
+          <a:noFill/>
+          <a:ln>
+            <a:solidFill>
+              <a:schemeClr val="accent6"/>
+            </a:solidFill>
+          </a:ln>
+        </p:spPr>
+        <p:style>
+          <a:lnRef idx="2">
+            <a:schemeClr val="accent1">
+              <a:lumMod val="75000"/>
+            </a:schemeClr>
+          </a:lnRef>
+          <a:fillRef idx="1">
+            <a:schemeClr val="accent1"/>
+          </a:fillRef>
+          <a:effectRef idx="0">
+            <a:srgbClr val="FFFFFF"/>
+          </a:effectRef>
+          <a:fontRef idx="minor">
+            <a:schemeClr val="lt1"/>
+          </a:fontRef>
+        </p:style>
+        <p:txBody>
+          <a:bodyPr rtlCol="0" anchor="ctr"/>
+          <a:p>
+            <a:pPr algn="ctr"/>
+            <a:endParaRPr lang="zh-CN" altLang="en-US"/>
+          </a:p>
+        </p:txBody>
+      </p:sp>
+      <p:cxnSp>
+        <p:nvCxnSpPr>
+          <p:cNvPr id="8" name="直接连接符 7"/>
+          <p:cNvCxnSpPr/>
+          <p:nvPr/>
+        </p:nvCxnSpPr>
+        <p:spPr>
+          <a:xfrm flipH="1">
+            <a:off x="1100455" y="1254760"/>
+            <a:ext cx="9525" cy="1406525"/>
+          </a:xfrm>
+          <a:prstGeom prst="line">
+            <a:avLst/>
+          </a:prstGeom>
+          <a:ln>
+            <a:solidFill>
+              <a:schemeClr val="accent6"/>
+            </a:solidFill>
+          </a:ln>
+        </p:spPr>
+        <p:style>
+          <a:lnRef idx="2">
+            <a:schemeClr val="accent1"/>
+          </a:lnRef>
+          <a:fillRef idx="0">
+            <a:srgbClr val="FFFFFF"/>
+          </a:fillRef>
+          <a:effectRef idx="0">
+            <a:srgbClr val="FFFFFF"/>
+          </a:effectRef>
+          <a:fontRef idx="minor">
+            <a:schemeClr val="tx1"/>
+          </a:fontRef>
+        </p:style>
+      </p:cxnSp>
+      <p:sp>
+        <p:nvSpPr>
+          <p:cNvPr id="9" name="文本框 8"/>
+          <p:cNvSpPr txBox="1"/>
+          <p:nvPr/>
+        </p:nvSpPr>
+        <p:spPr>
+          <a:xfrm>
+            <a:off x="1181735" y="2075815"/>
+            <a:ext cx="5079365" cy="521970"/>
+          </a:xfrm>
+          <a:prstGeom prst="rect">
+            <a:avLst/>
+          </a:prstGeom>
+        </p:spPr>
+        <p:txBody>
+          <a:bodyPr wrap="square">
+            <a:spAutoFit/>
+          </a:bodyPr>
+          <a:p>
+            <a:r>
+              <a:rPr lang="zh-CN" altLang="en-US" sz="1400">
+                <a:solidFill>
+                  <a:srgbClr val="000000"/>
+                </a:solidFill>
+                <a:latin typeface="微软雅黑" panose="020B0503020204020204" charset="-122"/>
+                <a:ea typeface="微软雅黑" panose="020B0503020204020204" charset="-122"/>
+                <a:cs typeface="微软雅黑" panose="020B0503020204020204" charset="-122"/>
+              </a:rPr>
+              <a:t>[总量] - [消耗数量] = [剩余数量]</a:t>
+            </a:r>
+            <a:endParaRPr lang="zh-CN" altLang="en-US" sz="1400">
+              <a:solidFill>
+                <a:srgbClr val="000000"/>
+              </a:solidFill>
+              <a:latin typeface="微软雅黑" panose="020B0503020204020204" charset="-122"/>
+              <a:ea typeface="微软雅黑" panose="020B0503020204020204" charset="-122"/>
+              <a:cs typeface="微软雅黑" panose="020B0503020204020204" charset="-122"/>
+            </a:endParaRPr>
+          </a:p>
+          <a:p>
+            <a:r>
+              <a:rPr lang="zh-CN" altLang="en-US" sz="1400">
+                <a:solidFill>
+                  <a:srgbClr val="000000"/>
+                </a:solidFill>
+                <a:latin typeface="微软雅黑" panose="020B0503020204020204" charset="-122"/>
+                <a:ea typeface="微软雅黑" panose="020B0503020204020204" charset="-122"/>
+                <a:cs typeface="微软雅黑" panose="020B0503020204020204" charset="-122"/>
+              </a:rPr>
+              <a:t>[单价] * [数量] = [总价]</a:t>
+            </a:r>
+            <a:endParaRPr lang="zh-CN" altLang="en-US" sz="1400">
+              <a:solidFill>
+                <a:srgbClr val="000000"/>
+              </a:solidFill>
+              <a:latin typeface="微软雅黑" panose="020B0503020204020204" charset="-122"/>
+              <a:ea typeface="微软雅黑" panose="020B0503020204020204" charset="-122"/>
+              <a:cs typeface="微软雅黑" panose="020B0503020204020204" charset="-122"/>
+            </a:endParaRPr>
+          </a:p>
+        </p:txBody>
+      </p:sp>
+      <p:cxnSp>
+        <p:nvCxnSpPr>
+          <p:cNvPr id="10" name="直接连接符 9"/>
+          <p:cNvCxnSpPr/>
+          <p:nvPr/>
+        </p:nvCxnSpPr>
+        <p:spPr>
+          <a:xfrm>
+            <a:off x="520700" y="2007870"/>
+            <a:ext cx="5969635" cy="0"/>
+          </a:xfrm>
+          <a:prstGeom prst="line">
+            <a:avLst/>
+          </a:prstGeom>
+          <a:ln cap="sq">
+            <a:solidFill>
+              <a:schemeClr val="accent6"/>
+            </a:solidFill>
+          </a:ln>
+        </p:spPr>
+        <p:style>
+          <a:lnRef idx="2">
+            <a:schemeClr val="accent1"/>
+          </a:lnRef>
+          <a:fillRef idx="0">
+            <a:srgbClr val="FFFFFF"/>
+          </a:fillRef>
+          <a:effectRef idx="0">
+            <a:srgbClr val="FFFFFF"/>
+          </a:effectRef>
+          <a:fontRef idx="minor">
+            <a:schemeClr val="tx1"/>
+          </a:fontRef>
+        </p:style>
+      </p:cxnSp>
+      <p:sp>
+        <p:nvSpPr>
+          <p:cNvPr id="11" name="文本框 10"/>
+          <p:cNvSpPr txBox="1"/>
+          <p:nvPr/>
+        </p:nvSpPr>
+        <p:spPr>
+          <a:xfrm>
+            <a:off x="520700" y="1374775"/>
+            <a:ext cx="709930" cy="521970"/>
+          </a:xfrm>
+          <a:prstGeom prst="rect">
+            <a:avLst/>
+          </a:prstGeom>
+          <a:noFill/>
+        </p:spPr>
+        <p:txBody>
+          <a:bodyPr wrap="square" rtlCol="0">
+            <a:spAutoFit/>
+          </a:bodyPr>
+          <a:p>
+            <a:r>
+              <a:rPr lang="zh-CN" altLang="en-US" sz="1400"/>
+              <a:t>文本标注</a:t>
+            </a:r>
+            <a:endParaRPr lang="zh-CN" altLang="en-US" sz="1400"/>
+          </a:p>
+        </p:txBody>
+      </p:sp>
+      <p:sp>
+        <p:nvSpPr>
+          <p:cNvPr id="13" name="文本框 12"/>
+          <p:cNvSpPr txBox="1"/>
+          <p:nvPr/>
+        </p:nvSpPr>
+        <p:spPr>
+          <a:xfrm>
+            <a:off x="520700" y="2106930"/>
+            <a:ext cx="709930" cy="521970"/>
+          </a:xfrm>
+          <a:prstGeom prst="rect">
+            <a:avLst/>
+          </a:prstGeom>
+          <a:noFill/>
+        </p:spPr>
+        <p:txBody>
+          <a:bodyPr wrap="square" rtlCol="0">
+            <a:spAutoFit/>
+          </a:bodyPr>
+          <a:p>
+            <a:r>
+              <a:rPr lang="zh-CN" altLang="en-US" sz="1400"/>
+              <a:t>公式知识</a:t>
+            </a:r>
+            <a:endParaRPr lang="zh-CN" altLang="en-US" sz="1400"/>
+          </a:p>
+        </p:txBody>
+      </p:sp>
+      <p:sp>
+        <p:nvSpPr>
+          <p:cNvPr id="2" name="文本框 1"/>
+          <p:cNvSpPr txBox="1"/>
+          <p:nvPr/>
+        </p:nvSpPr>
+        <p:spPr>
+          <a:xfrm>
+            <a:off x="471533" y="2733604"/>
+            <a:ext cx="5880888" cy="414020"/>
+          </a:xfrm>
+          <a:prstGeom prst="rect">
+            <a:avLst/>
+          </a:prstGeom>
+          <a:noFill/>
+        </p:spPr>
+        <p:txBody>
+          <a:bodyPr wrap="square" rtlCol="0">
+            <a:spAutoFit/>
+          </a:bodyPr>
+          <a:lstStyle/>
+          <a:p>
+            <a:pPr marL="285750" indent="-285750">
+              <a:lnSpc>
+                <a:spcPct val="150000"/>
+              </a:lnSpc>
+              <a:buFont typeface="Wingdings" panose="05000000000000000000" pitchFamily="2" charset="2"/>
+              <a:buChar char="n"/>
+            </a:pPr>
+            <a:r>
+              <a:rPr lang="zh-CN" altLang="en-US" sz="1400" dirty="0"/>
+              <a:t>大语言模型推理：对模型综合能力要求高，</a:t>
+            </a:r>
+            <a:r>
+              <a:rPr lang="zh-CN" altLang="en-US" sz="1400" dirty="0">
+                <a:sym typeface="+mn-ea"/>
+              </a:rPr>
+              <a:t>缺乏公式知识指导</a:t>
+            </a:r>
+            <a:endParaRPr lang="zh-CN" altLang="en-US" sz="1400" dirty="0"/>
+          </a:p>
+        </p:txBody>
+      </p:sp>
+      <p:sp>
+        <p:nvSpPr>
+          <p:cNvPr id="14" name="圆角矩形 13"/>
+          <p:cNvSpPr/>
+          <p:nvPr/>
+        </p:nvSpPr>
+        <p:spPr>
+          <a:xfrm>
+            <a:off x="520700" y="3162935"/>
+            <a:ext cx="3333115" cy="1301750"/>
+          </a:xfrm>
+          <a:prstGeom prst="roundRect">
+            <a:avLst/>
+          </a:prstGeom>
+          <a:noFill/>
+          <a:ln>
+            <a:solidFill>
+              <a:schemeClr val="accent6"/>
+            </a:solidFill>
+          </a:ln>
+        </p:spPr>
+        <p:style>
+          <a:lnRef idx="2">
+            <a:schemeClr val="accent1">
+              <a:lumMod val="75000"/>
+            </a:schemeClr>
+          </a:lnRef>
+          <a:fillRef idx="1">
+            <a:schemeClr val="accent1"/>
+          </a:fillRef>
+          <a:effectRef idx="0">
+            <a:srgbClr val="FFFFFF"/>
+          </a:effectRef>
+          <a:fontRef idx="minor">
+            <a:schemeClr val="lt1"/>
+          </a:fontRef>
+        </p:style>
+        <p:txBody>
+          <a:bodyPr rtlCol="0" anchor="ctr"/>
+          <a:p>
+            <a:pPr algn="ctr"/>
+            <a:endParaRPr lang="zh-CN" altLang="en-US"/>
+          </a:p>
+        </p:txBody>
+      </p:sp>
+      <p:sp>
+        <p:nvSpPr>
+          <p:cNvPr id="15" name="文本框 14"/>
+          <p:cNvSpPr txBox="1"/>
+          <p:nvPr/>
+        </p:nvSpPr>
+        <p:spPr>
+          <a:xfrm>
+            <a:off x="1289685" y="3204210"/>
+            <a:ext cx="2225040" cy="1168400"/>
+          </a:xfrm>
+          <a:prstGeom prst="rect">
+            <a:avLst/>
+          </a:prstGeom>
+          <a:noFill/>
+        </p:spPr>
+        <p:txBody>
+          <a:bodyPr wrap="square" rtlCol="0">
+            <a:spAutoFit/>
+          </a:bodyPr>
+          <a:p>
+            <a:r>
+              <a:rPr lang="zh-CN" altLang="en-US" sz="1400">
+                <a:solidFill>
+                  <a:srgbClr val="000000"/>
+                </a:solidFill>
+                <a:latin typeface="Arial" panose="020B0604020202020204" pitchFamily="34" charset="0"/>
+                <a:ea typeface="微软雅黑" panose="020B0503020204020204" charset="-122"/>
+                <a:cs typeface="Arial" panose="020B0604020202020204" pitchFamily="34" charset="0"/>
+                <a:sym typeface="+mn-ea"/>
+              </a:rPr>
+              <a:t>珍妮特每天卖</a:t>
+            </a:r>
+            <a:r>
+              <a:rPr lang="en-US" altLang="zh-CN" sz="1400">
+                <a:solidFill>
+                  <a:srgbClr val="000000"/>
+                </a:solidFill>
+                <a:latin typeface="Arial" panose="020B0604020202020204" pitchFamily="34" charset="0"/>
+                <a:ea typeface="Arial" panose="020B0604020202020204"/>
+                <a:cs typeface="Arial" panose="020B0604020202020204" pitchFamily="34" charset="0"/>
+                <a:sym typeface="+mn-ea"/>
+              </a:rPr>
+              <a:t>16 - 3 - 4 = &lt;&lt;16-3-4=9&gt;&gt;9</a:t>
+            </a:r>
+            <a:r>
+              <a:rPr lang="zh-CN" altLang="en-US" sz="1400">
+                <a:solidFill>
+                  <a:srgbClr val="000000"/>
+                </a:solidFill>
+                <a:latin typeface="Arial" panose="020B0604020202020204" pitchFamily="34" charset="0"/>
+                <a:ea typeface="微软雅黑" panose="020B0503020204020204" charset="-122"/>
+                <a:cs typeface="Arial" panose="020B0604020202020204" pitchFamily="34" charset="0"/>
+                <a:sym typeface="+mn-ea"/>
+              </a:rPr>
+              <a:t>个鸭蛋。 </a:t>
+            </a:r>
+            <a:endParaRPr lang="zh-CN" altLang="en-US" sz="1400">
+              <a:solidFill>
+                <a:srgbClr val="000000"/>
+              </a:solidFill>
+              <a:latin typeface="Arial" panose="020B0604020202020204" pitchFamily="34" charset="0"/>
+              <a:ea typeface="微软雅黑" panose="020B0503020204020204" charset="-122"/>
+              <a:cs typeface="Arial" panose="020B0604020202020204" pitchFamily="34" charset="0"/>
+            </a:endParaRPr>
+          </a:p>
+          <a:p>
+            <a:r>
+              <a:rPr lang="zh-CN" altLang="en-US" sz="1400">
+                <a:solidFill>
+                  <a:srgbClr val="000000"/>
+                </a:solidFill>
+                <a:latin typeface="Arial" panose="020B0604020202020204" pitchFamily="34" charset="0"/>
+                <a:ea typeface="微软雅黑" panose="020B0503020204020204" charset="-122"/>
+                <a:cs typeface="Arial" panose="020B0604020202020204" pitchFamily="34" charset="0"/>
+                <a:sym typeface="+mn-ea"/>
+              </a:rPr>
+              <a:t>她每天在农贸市场赚</a:t>
+            </a:r>
+            <a:r>
+              <a:rPr lang="en-US" altLang="zh-CN" sz="1400">
+                <a:solidFill>
+                  <a:srgbClr val="000000"/>
+                </a:solidFill>
+                <a:latin typeface="Arial" panose="020B0604020202020204" pitchFamily="34" charset="0"/>
+                <a:ea typeface="Arial" panose="020B0604020202020204"/>
+                <a:cs typeface="Arial" panose="020B0604020202020204" pitchFamily="34" charset="0"/>
+                <a:sym typeface="+mn-ea"/>
+              </a:rPr>
+              <a:t>9 * 2 = $&lt;&lt;9*2=18&gt;&gt;18</a:t>
+            </a:r>
+            <a:r>
+              <a:rPr lang="zh-CN" altLang="en-US" sz="1400">
+                <a:solidFill>
+                  <a:srgbClr val="000000"/>
+                </a:solidFill>
+                <a:latin typeface="Arial" panose="020B0604020202020204" pitchFamily="34" charset="0"/>
+                <a:ea typeface="微软雅黑" panose="020B0503020204020204" charset="-122"/>
+                <a:cs typeface="Arial" panose="020B0604020202020204" pitchFamily="34" charset="0"/>
+                <a:sym typeface="+mn-ea"/>
+              </a:rPr>
+              <a:t>。 </a:t>
+            </a:r>
+            <a:endParaRPr lang="zh-CN" altLang="en-US" sz="1400">
+              <a:solidFill>
+                <a:srgbClr val="000000"/>
+              </a:solidFill>
+              <a:latin typeface="Arial" panose="020B0604020202020204" pitchFamily="34" charset="0"/>
+              <a:ea typeface="微软雅黑" panose="020B0503020204020204" charset="-122"/>
+              <a:cs typeface="Arial" panose="020B0604020202020204" pitchFamily="34" charset="0"/>
+            </a:endParaRPr>
+          </a:p>
+          <a:p>
+            <a:r>
+              <a:rPr lang="en-US" altLang="zh-CN" sz="1400">
+                <a:solidFill>
+                  <a:srgbClr val="000000"/>
+                </a:solidFill>
+                <a:latin typeface="Arial" panose="020B0604020202020204" pitchFamily="34" charset="0"/>
+                <a:ea typeface="Arial" panose="020B0604020202020204"/>
+                <a:cs typeface="Arial" panose="020B0604020202020204" pitchFamily="34" charset="0"/>
+                <a:sym typeface="+mn-ea"/>
+              </a:rPr>
+              <a:t>#### 18</a:t>
+            </a:r>
+            <a:endParaRPr lang="zh-CN" altLang="en-US" sz="1400">
+              <a:latin typeface="Arial" panose="020B0604020202020204" pitchFamily="34" charset="0"/>
+              <a:cs typeface="Arial" panose="020B0604020202020204" pitchFamily="34" charset="0"/>
+            </a:endParaRPr>
+          </a:p>
+        </p:txBody>
+      </p:sp>
+      <p:pic>
+        <p:nvPicPr>
+          <p:cNvPr id="16" name="图片 15" descr="大模型-copy"/>
+          <p:cNvPicPr>
+            <a:picLocks noChangeAspect="1"/>
+          </p:cNvPicPr>
+          <p:nvPr/>
+        </p:nvPicPr>
+        <p:blipFill>
+          <a:blip r:embed="rId1"/>
+          <a:stretch>
+            <a:fillRect/>
+          </a:stretch>
+        </p:blipFill>
+        <p:spPr>
+          <a:xfrm>
+            <a:off x="654050" y="3283585"/>
+            <a:ext cx="338455" cy="338455"/>
+          </a:xfrm>
+          <a:prstGeom prst="rect">
+            <a:avLst/>
+          </a:prstGeom>
+        </p:spPr>
+      </p:pic>
+      <p:sp>
+        <p:nvSpPr>
+          <p:cNvPr id="17" name="圆角矩形 16"/>
+          <p:cNvSpPr/>
+          <p:nvPr/>
+        </p:nvSpPr>
+        <p:spPr>
+          <a:xfrm>
+            <a:off x="2449195" y="3252470"/>
+            <a:ext cx="752475" cy="240665"/>
+          </a:xfrm>
+          <a:prstGeom prst="roundRect">
+            <a:avLst/>
+          </a:prstGeom>
+          <a:noFill/>
+          <a:ln>
+            <a:solidFill>
+              <a:srgbClr val="FF4343"/>
+            </a:solidFill>
+          </a:ln>
+        </p:spPr>
+        <p:style>
+          <a:lnRef idx="2">
+            <a:schemeClr val="accent1">
+              <a:lumMod val="75000"/>
+            </a:schemeClr>
+          </a:lnRef>
+          <a:fillRef idx="1">
+            <a:schemeClr val="accent1"/>
+          </a:fillRef>
+          <a:effectRef idx="0">
+            <a:srgbClr val="FFFFFF"/>
+          </a:effectRef>
+          <a:fontRef idx="minor">
+            <a:schemeClr val="lt1"/>
+          </a:fontRef>
+        </p:style>
+        <p:txBody>
+          <a:bodyPr rtlCol="0" anchor="ctr"/>
+          <a:p>
+            <a:pPr algn="ctr"/>
+            <a:endParaRPr lang="zh-CN" altLang="en-US"/>
+          </a:p>
+        </p:txBody>
+      </p:sp>
+      <p:sp>
+        <p:nvSpPr>
+          <p:cNvPr id="18" name="圆角矩形 17"/>
+          <p:cNvSpPr/>
+          <p:nvPr/>
+        </p:nvSpPr>
+        <p:spPr>
+          <a:xfrm>
+            <a:off x="1100455" y="3206750"/>
+            <a:ext cx="2603500" cy="1122045"/>
+          </a:xfrm>
+          <a:prstGeom prst="roundRect">
+            <a:avLst/>
+          </a:prstGeom>
+          <a:noFill/>
+          <a:ln>
+            <a:solidFill>
+              <a:schemeClr val="accent1"/>
+            </a:solidFill>
+          </a:ln>
+        </p:spPr>
+        <p:style>
+          <a:lnRef idx="2">
+            <a:schemeClr val="accent1">
+              <a:lumMod val="75000"/>
+            </a:schemeClr>
+          </a:lnRef>
+          <a:fillRef idx="1">
+            <a:schemeClr val="accent1"/>
+          </a:fillRef>
+          <a:effectRef idx="0">
+            <a:srgbClr val="FFFFFF"/>
+          </a:effectRef>
+          <a:fontRef idx="minor">
+            <a:schemeClr val="lt1"/>
+          </a:fontRef>
+        </p:style>
+        <p:txBody>
+          <a:bodyPr rtlCol="0" anchor="ctr"/>
+          <a:p>
+            <a:pPr algn="ctr"/>
+            <a:endParaRPr lang="zh-CN" altLang="en-US"/>
+          </a:p>
+        </p:txBody>
+      </p:sp>
+      <p:cxnSp>
+        <p:nvCxnSpPr>
+          <p:cNvPr id="19" name="直接连接符 18"/>
+          <p:cNvCxnSpPr>
+            <a:stCxn id="17" idx="3"/>
+          </p:cNvCxnSpPr>
+          <p:nvPr/>
+        </p:nvCxnSpPr>
+        <p:spPr>
+          <a:xfrm>
+            <a:off x="3201670" y="3373120"/>
+            <a:ext cx="1433830" cy="76200"/>
+          </a:xfrm>
+          <a:prstGeom prst="line">
+            <a:avLst/>
+          </a:prstGeom>
+          <a:ln>
+            <a:solidFill>
+              <a:srgbClr val="FF4343"/>
+            </a:solidFill>
+          </a:ln>
+        </p:spPr>
+        <p:style>
+          <a:lnRef idx="2">
+            <a:schemeClr val="accent1"/>
+          </a:lnRef>
+          <a:fillRef idx="0">
+            <a:srgbClr val="FFFFFF"/>
+          </a:fillRef>
+          <a:effectRef idx="0">
+            <a:srgbClr val="FFFFFF"/>
+          </a:effectRef>
+          <a:fontRef idx="minor">
+            <a:schemeClr val="tx1"/>
+          </a:fontRef>
+        </p:style>
+      </p:cxnSp>
+      <p:cxnSp>
+        <p:nvCxnSpPr>
+          <p:cNvPr id="20" name="直接连接符 19"/>
+          <p:cNvCxnSpPr/>
+          <p:nvPr/>
+        </p:nvCxnSpPr>
+        <p:spPr>
+          <a:xfrm>
+            <a:off x="3713480" y="3999865"/>
+            <a:ext cx="922020" cy="107950"/>
+          </a:xfrm>
+          <a:prstGeom prst="line">
+            <a:avLst/>
+          </a:prstGeom>
+        </p:spPr>
+        <p:style>
+          <a:lnRef idx="2">
+            <a:schemeClr val="accent1"/>
+          </a:lnRef>
+          <a:fillRef idx="0">
+            <a:srgbClr val="FFFFFF"/>
+          </a:fillRef>
+          <a:effectRef idx="0">
+            <a:srgbClr val="FFFFFF"/>
+          </a:effectRef>
+          <a:fontRef idx="minor">
+            <a:schemeClr val="tx1"/>
+          </a:fontRef>
+        </p:style>
+      </p:cxnSp>
+      <p:sp>
+        <p:nvSpPr>
+          <p:cNvPr id="21" name="矩形 20"/>
+          <p:cNvSpPr/>
+          <p:nvPr/>
+        </p:nvSpPr>
+        <p:spPr>
+          <a:xfrm>
+            <a:off x="4635500" y="3263265"/>
+            <a:ext cx="1528445" cy="302260"/>
+          </a:xfrm>
+          <a:prstGeom prst="rect">
+            <a:avLst/>
+          </a:prstGeom>
+          <a:noFill/>
+          <a:ln>
+            <a:solidFill>
+              <a:srgbClr val="FF4343"/>
+            </a:solidFill>
+          </a:ln>
+        </p:spPr>
+        <p:style>
+          <a:lnRef idx="2">
+            <a:schemeClr val="accent1">
+              <a:lumMod val="75000"/>
+            </a:schemeClr>
+          </a:lnRef>
+          <a:fillRef idx="1">
+            <a:schemeClr val="accent1"/>
+          </a:fillRef>
+          <a:effectRef idx="0">
+            <a:srgbClr val="FFFFFF"/>
+          </a:effectRef>
+          <a:fontRef idx="minor">
+            <a:schemeClr val="lt1"/>
+          </a:fontRef>
+        </p:style>
+        <p:txBody>
+          <a:bodyPr rtlCol="0" anchor="ctr"/>
+          <a:p>
+            <a:pPr algn="ctr"/>
+            <a:r>
+              <a:rPr lang="zh-CN" altLang="en-US">
+                <a:solidFill>
+                  <a:srgbClr val="FF0000"/>
+                </a:solidFill>
+              </a:rPr>
+              <a:t>代数列</a:t>
+            </a:r>
+            <a:r>
+              <a:rPr lang="zh-CN" altLang="en-US">
+                <a:solidFill>
+                  <a:srgbClr val="FF0000"/>
+                </a:solidFill>
+              </a:rPr>
+              <a:t>式</a:t>
+            </a:r>
+            <a:endParaRPr lang="zh-CN" altLang="en-US">
+              <a:solidFill>
+                <a:srgbClr val="FF0000"/>
+              </a:solidFill>
+            </a:endParaRPr>
+          </a:p>
+        </p:txBody>
+      </p:sp>
+      <p:sp>
+        <p:nvSpPr>
+          <p:cNvPr id="22" name="矩形 21"/>
+          <p:cNvSpPr/>
+          <p:nvPr/>
+        </p:nvSpPr>
+        <p:spPr>
+          <a:xfrm>
+            <a:off x="4635500" y="3911600"/>
+            <a:ext cx="1527810" cy="302260"/>
+          </a:xfrm>
+          <a:prstGeom prst="rect">
+            <a:avLst/>
+          </a:prstGeom>
+          <a:noFill/>
+        </p:spPr>
+        <p:style>
+          <a:lnRef idx="2">
+            <a:schemeClr val="accent1">
+              <a:lumMod val="75000"/>
+            </a:schemeClr>
+          </a:lnRef>
+          <a:fillRef idx="1">
+            <a:schemeClr val="accent1"/>
+          </a:fillRef>
+          <a:effectRef idx="0">
+            <a:srgbClr val="FFFFFF"/>
+          </a:effectRef>
+          <a:fontRef idx="minor">
+            <a:schemeClr val="lt1"/>
+          </a:fontRef>
+        </p:style>
+        <p:txBody>
+          <a:bodyPr rtlCol="0" anchor="ctr"/>
+          <a:p>
+            <a:pPr algn="ctr"/>
+            <a:r>
+              <a:rPr lang="zh-CN" altLang="en-US">
+                <a:solidFill>
+                  <a:schemeClr val="tx1"/>
+                </a:solidFill>
+              </a:rPr>
+              <a:t>文本推理</a:t>
+            </a:r>
+            <a:endParaRPr lang="zh-CN" altLang="en-US">
+              <a:solidFill>
+                <a:schemeClr val="tx1"/>
+              </a:solidFill>
+            </a:endParaRPr>
+          </a:p>
+        </p:txBody>
+      </p:sp>
+      <p:sp>
+        <p:nvSpPr>
+          <p:cNvPr id="24" name="圆角右箭头 23"/>
+          <p:cNvSpPr/>
+          <p:nvPr/>
+        </p:nvSpPr>
+        <p:spPr>
+          <a:xfrm rot="10800000" flipH="1">
+            <a:off x="736600" y="3712210"/>
+            <a:ext cx="309245" cy="395605"/>
+          </a:xfrm>
+          <a:prstGeom prst="bentArrow">
+            <a:avLst>
+              <a:gd name="adj1" fmla="val 25000"/>
+              <a:gd name="adj2" fmla="val 25045"/>
+              <a:gd name="adj3" fmla="val 25000"/>
+              <a:gd name="adj4" fmla="val 43750"/>
+            </a:avLst>
+          </a:prstGeom>
+          <a:noFill/>
+        </p:spPr>
+        <p:style>
+          <a:lnRef idx="2">
+            <a:schemeClr val="accent1">
+              <a:lumMod val="75000"/>
+            </a:schemeClr>
+          </a:lnRef>
+          <a:fillRef idx="1">
+            <a:schemeClr val="accent1"/>
+          </a:fillRef>
+          <a:effectRef idx="0">
+            <a:srgbClr val="FFFFFF"/>
+          </a:effectRef>
+          <a:fontRef idx="minor">
+            <a:schemeClr val="lt1"/>
+          </a:fontRef>
+        </p:style>
+        <p:txBody>
+          <a:bodyPr rtlCol="0" anchor="ctr"/>
+          <a:p>
+            <a:pPr algn="ctr"/>
+            <a:endParaRPr lang="zh-CN" altLang="en-US">
+              <a:solidFill>
+                <a:schemeClr val="tx1"/>
+              </a:solidFill>
+            </a:endParaRPr>
+          </a:p>
+        </p:txBody>
+      </p:sp>
+    </p:spTree>
+  </p:cSld>
+  <p:clrMapOvr>
+    <a:masterClrMapping/>
+  </p:clrMapOvr>
+  <p:transition advTm="4106"/>
+</p:sld>
+</file>
+
+<file path=ppt/slides/slide9.xml><?xml version="1.0" encoding="utf-8"?>
 <p:sld xmlns:a="http://schemas.openxmlformats.org/drawingml/2006/main" xmlns:r="http://schemas.openxmlformats.org/officeDocument/2006/relationships" xmlns:p="http://schemas.openxmlformats.org/presentationml/2006/main">
   <p:cSld>
     <p:spTree>
@@ -19963,590 +23835,6 @@
   <p:clrMapOvr>
     <a:masterClrMapping/>
   </p:clrMapOvr>
-</p:sld>
-</file>
-
-<file path=ppt/slides/slide7.xml><?xml version="1.0" encoding="utf-8"?>
-<p:sld xmlns:a="http://schemas.openxmlformats.org/drawingml/2006/main" xmlns:r="http://schemas.openxmlformats.org/officeDocument/2006/relationships" xmlns:p="http://schemas.openxmlformats.org/presentationml/2006/main">
-  <p:cSld>
-    <p:spTree>
-      <p:nvGrpSpPr>
-        <p:cNvPr id="1" name=""/>
-        <p:cNvGrpSpPr/>
-        <p:nvPr/>
-      </p:nvGrpSpPr>
-      <p:grpSpPr>
-        <a:xfrm>
-          <a:off x="0" y="0"/>
-          <a:ext cx="0" cy="0"/>
-          <a:chOff x="0" y="0"/>
-          <a:chExt cx="0" cy="0"/>
-        </a:xfrm>
-      </p:grpSpPr>
-      <p:sp>
-        <p:nvSpPr>
-          <p:cNvPr id="3" name="日期占位符 2"/>
-          <p:cNvSpPr>
-            <a:spLocks noGrp="1"/>
-          </p:cNvSpPr>
-          <p:nvPr>
-            <p:ph type="dt" sz="half" idx="10"/>
-          </p:nvPr>
-        </p:nvSpPr>
-        <p:spPr/>
-        <p:txBody>
-          <a:bodyPr/>
-          <a:lstStyle/>
-          <a:p>
-            <a:fld id="{137329C2-3C36-4069-9E85-5BF3A0DCB578}" type="datetime1">
-              <a:rPr lang="zh-CN" altLang="en-US" smtClean="0"/>
-            </a:fld>
-            <a:endParaRPr lang="zh-CN" altLang="en-US" dirty="0"/>
-          </a:p>
-        </p:txBody>
-      </p:sp>
-      <p:sp>
-        <p:nvSpPr>
-          <p:cNvPr id="4" name="灯片编号占位符 3"/>
-          <p:cNvSpPr>
-            <a:spLocks noGrp="1"/>
-          </p:cNvSpPr>
-          <p:nvPr>
-            <p:ph type="sldNum" sz="quarter" idx="11"/>
-          </p:nvPr>
-        </p:nvSpPr>
-        <p:spPr/>
-        <p:txBody>
-          <a:bodyPr/>
-          <a:lstStyle/>
-          <a:p>
-            <a:fld id="{463E1EE8-403A-4D2D-AB26-5BF439A27F60}" type="slidenum">
-              <a:rPr lang="zh-CN" altLang="en-US" smtClean="0"/>
-            </a:fld>
-            <a:endParaRPr lang="zh-CN" altLang="en-US" dirty="0"/>
-          </a:p>
-        </p:txBody>
-      </p:sp>
-      <p:sp>
-        <p:nvSpPr>
-          <p:cNvPr id="7" name="文本框 6"/>
-          <p:cNvSpPr txBox="1"/>
-          <p:nvPr/>
-        </p:nvSpPr>
-        <p:spPr>
-          <a:xfrm>
-            <a:off x="351155" y="616585"/>
-            <a:ext cx="5965825" cy="1658620"/>
-          </a:xfrm>
-          <a:prstGeom prst="rect">
-            <a:avLst/>
-          </a:prstGeom>
-          <a:noFill/>
-        </p:spPr>
-        <p:txBody>
-          <a:bodyPr wrap="square" rtlCol="0">
-            <a:spAutoFit/>
-          </a:bodyPr>
-          <a:lstStyle/>
-          <a:p>
-            <a:pPr marL="285750" indent="-285750">
-              <a:buFont typeface="Wingdings" panose="05000000000000000000" charset="0"/>
-              <a:buChar char="n"/>
-            </a:pPr>
-            <a:r>
-              <a:rPr lang="zh-CN" altLang="en-US"/>
-              <a:t>常见技术路线</a:t>
-            </a:r>
-            <a:r>
-              <a:rPr lang="en-US" altLang="zh-CN"/>
-              <a:t>-Medusa</a:t>
-            </a:r>
-            <a:r>
-              <a:rPr lang="zh-CN" altLang="en-US"/>
-              <a:t>框架</a:t>
-            </a:r>
-            <a:endParaRPr lang="zh-CN" altLang="en-US"/>
-          </a:p>
-          <a:p>
-            <a:pPr marL="285750" indent="-285750">
-              <a:buFont typeface="Wingdings" panose="05000000000000000000" charset="0"/>
-              <a:buChar char="n"/>
-            </a:pPr>
-            <a:endParaRPr lang="zh-CN" altLang="en-US"/>
-          </a:p>
-          <a:p>
-            <a:pPr marL="742950" lvl="1" indent="-285750">
-              <a:lnSpc>
-                <a:spcPct val="150000"/>
-              </a:lnSpc>
-              <a:buFont typeface="Arial" panose="020B0604020202020204" pitchFamily="34" charset="0"/>
-              <a:buChar char="•"/>
-            </a:pPr>
-            <a:r>
-              <a:rPr lang="zh-CN" altLang="en-US" dirty="0">
-                <a:sym typeface="+mn-ea"/>
-              </a:rPr>
-              <a:t>多个解码头：每个解码头负责预测下一个或后续若干个</a:t>
-            </a:r>
-            <a:r>
-              <a:rPr lang="en-US" altLang="zh-CN" dirty="0">
-                <a:sym typeface="+mn-ea"/>
-              </a:rPr>
-              <a:t> Token</a:t>
-            </a:r>
-            <a:endParaRPr lang="en-US" altLang="zh-CN" dirty="0">
-              <a:sym typeface="+mn-ea"/>
-            </a:endParaRPr>
-          </a:p>
-          <a:p>
-            <a:pPr marL="285750" indent="-285750">
-              <a:lnSpc>
-                <a:spcPct val="150000"/>
-              </a:lnSpc>
-              <a:buFont typeface="Arial" panose="020B0604020202020204" pitchFamily="34" charset="0"/>
-              <a:buChar char="•"/>
-            </a:pPr>
-            <a:endParaRPr lang="en-US" altLang="zh-CN" dirty="0">
-              <a:sym typeface="+mn-ea"/>
-            </a:endParaRPr>
-          </a:p>
-          <a:p>
-            <a:pPr marL="742950" lvl="1" indent="-285750">
-              <a:lnSpc>
-                <a:spcPct val="150000"/>
-              </a:lnSpc>
-              <a:buFont typeface="Arial" panose="020B0604020202020204" pitchFamily="34" charset="0"/>
-              <a:buChar char="•"/>
-            </a:pPr>
-            <a:r>
-              <a:rPr lang="zh-CN" altLang="en-US" dirty="0">
-                <a:sym typeface="+mn-ea"/>
-              </a:rPr>
-              <a:t>树型注意力：关注各自前驱</a:t>
-            </a:r>
-            <a:endParaRPr lang="en-US" altLang="zh-CN" dirty="0">
-              <a:sym typeface="+mn-ea"/>
-            </a:endParaRPr>
-          </a:p>
-          <a:p>
-            <a:pPr marL="285750" indent="-285750">
-              <a:buFont typeface="Wingdings" panose="05000000000000000000" charset="0"/>
-              <a:buChar char="n"/>
-            </a:pPr>
-            <a:endParaRPr lang="zh-CN" altLang="en-US"/>
-          </a:p>
-        </p:txBody>
-      </p:sp>
-      <p:pic>
-        <p:nvPicPr>
-          <p:cNvPr id="2" name="图片 1"/>
-          <p:cNvPicPr>
-            <a:picLocks noChangeAspect="1"/>
-          </p:cNvPicPr>
-          <p:nvPr/>
-        </p:nvPicPr>
-        <p:blipFill>
-          <a:blip r:embed="rId1"/>
-          <a:stretch>
-            <a:fillRect/>
-          </a:stretch>
-        </p:blipFill>
-        <p:spPr>
-          <a:xfrm>
-            <a:off x="0" y="2472690"/>
-            <a:ext cx="3281045" cy="2287270"/>
-          </a:xfrm>
-          <a:prstGeom prst="rect">
-            <a:avLst/>
-          </a:prstGeom>
-        </p:spPr>
-      </p:pic>
-      <p:pic>
-        <p:nvPicPr>
-          <p:cNvPr id="5" name="图片 4"/>
-          <p:cNvPicPr>
-            <a:picLocks noChangeAspect="1"/>
-          </p:cNvPicPr>
-          <p:nvPr/>
-        </p:nvPicPr>
-        <p:blipFill>
-          <a:blip r:embed="rId2"/>
-          <a:stretch>
-            <a:fillRect/>
-          </a:stretch>
-        </p:blipFill>
-        <p:spPr>
-          <a:xfrm>
-            <a:off x="3432175" y="2680335"/>
-            <a:ext cx="3288665" cy="2028190"/>
-          </a:xfrm>
-          <a:prstGeom prst="rect">
-            <a:avLst/>
-          </a:prstGeom>
-        </p:spPr>
-      </p:pic>
-    </p:spTree>
-  </p:cSld>
-  <p:clrMapOvr>
-    <a:masterClrMapping/>
-  </p:clrMapOvr>
-</p:sld>
-</file>
-
-<file path=ppt/slides/slide8.xml><?xml version="1.0" encoding="utf-8"?>
-<p:sld xmlns:a="http://schemas.openxmlformats.org/drawingml/2006/main" xmlns:r="http://schemas.openxmlformats.org/officeDocument/2006/relationships" xmlns:p="http://schemas.openxmlformats.org/presentationml/2006/main">
-  <p:cSld>
-    <p:spTree>
-      <p:nvGrpSpPr>
-        <p:cNvPr id="1" name=""/>
-        <p:cNvGrpSpPr/>
-        <p:nvPr/>
-      </p:nvGrpSpPr>
-      <p:grpSpPr>
-        <a:xfrm>
-          <a:off x="0" y="0"/>
-          <a:ext cx="0" cy="0"/>
-          <a:chOff x="0" y="0"/>
-          <a:chExt cx="0" cy="0"/>
-        </a:xfrm>
-      </p:grpSpPr>
-      <p:sp>
-        <p:nvSpPr>
-          <p:cNvPr id="3" name="日期占位符 2"/>
-          <p:cNvSpPr>
-            <a:spLocks noGrp="1"/>
-          </p:cNvSpPr>
-          <p:nvPr>
-            <p:ph type="dt" sz="half" idx="10"/>
-          </p:nvPr>
-        </p:nvSpPr>
-        <p:spPr/>
-        <p:txBody>
-          <a:bodyPr/>
-          <a:lstStyle/>
-          <a:p>
-            <a:fld id="{137329C2-3C36-4069-9E85-5BF3A0DCB578}" type="datetime1">
-              <a:rPr lang="zh-CN" altLang="en-US" smtClean="0"/>
-            </a:fld>
-            <a:endParaRPr lang="zh-CN" altLang="en-US" dirty="0"/>
-          </a:p>
-        </p:txBody>
-      </p:sp>
-      <p:sp>
-        <p:nvSpPr>
-          <p:cNvPr id="4" name="灯片编号占位符 3"/>
-          <p:cNvSpPr>
-            <a:spLocks noGrp="1"/>
-          </p:cNvSpPr>
-          <p:nvPr>
-            <p:ph type="sldNum" sz="quarter" idx="11"/>
-          </p:nvPr>
-        </p:nvSpPr>
-        <p:spPr/>
-        <p:txBody>
-          <a:bodyPr/>
-          <a:lstStyle/>
-          <a:p>
-            <a:fld id="{463E1EE8-403A-4D2D-AB26-5BF439A27F60}" type="slidenum">
-              <a:rPr lang="zh-CN" altLang="en-US" smtClean="0"/>
-            </a:fld>
-            <a:endParaRPr lang="zh-CN" altLang="en-US" dirty="0"/>
-          </a:p>
-        </p:txBody>
-      </p:sp>
-      <p:sp>
-        <p:nvSpPr>
-          <p:cNvPr id="7" name="文本框 6"/>
-          <p:cNvSpPr txBox="1"/>
-          <p:nvPr/>
-        </p:nvSpPr>
-        <p:spPr>
-          <a:xfrm>
-            <a:off x="432435" y="415290"/>
-            <a:ext cx="6909435" cy="2599690"/>
-          </a:xfrm>
-          <a:prstGeom prst="rect">
-            <a:avLst/>
-          </a:prstGeom>
-          <a:noFill/>
-        </p:spPr>
-        <p:txBody>
-          <a:bodyPr wrap="square" rtlCol="0">
-            <a:spAutoFit/>
-          </a:bodyPr>
-          <a:lstStyle/>
-          <a:p>
-            <a:pPr marL="285750" indent="-285750">
-              <a:buFont typeface="Wingdings" panose="05000000000000000000" charset="0"/>
-              <a:buChar char="n"/>
-            </a:pPr>
-            <a:r>
-              <a:rPr lang="zh-CN" altLang="en-US" dirty="0"/>
-              <a:t>常见技术路线</a:t>
-            </a:r>
-            <a:r>
-              <a:rPr lang="en-US" altLang="zh-CN" dirty="0"/>
-              <a:t>-</a:t>
-            </a:r>
-            <a:r>
-              <a:rPr lang="zh-CN" altLang="en-US" dirty="0"/>
-              <a:t>投机解码</a:t>
-            </a:r>
-            <a:endParaRPr lang="zh-CN" altLang="en-US" dirty="0"/>
-          </a:p>
-          <a:p>
-            <a:pPr marL="285750" indent="-285750">
-              <a:buFont typeface="Wingdings" panose="05000000000000000000" charset="0"/>
-              <a:buChar char="n"/>
-            </a:pPr>
-            <a:endParaRPr lang="zh-CN" altLang="en-US" dirty="0"/>
-          </a:p>
-          <a:p>
-            <a:pPr marL="742950" lvl="1" indent="-285750">
-              <a:lnSpc>
-                <a:spcPct val="150000"/>
-              </a:lnSpc>
-              <a:buFont typeface="Arial" panose="020B0604020202020204" pitchFamily="34" charset="0"/>
-              <a:buChar char="•"/>
-            </a:pPr>
-            <a:r>
-              <a:rPr lang="zh-CN" altLang="en-US" dirty="0">
-                <a:sym typeface="+mn-ea"/>
-              </a:rPr>
-              <a:t>草稿模型生成候选</a:t>
-            </a:r>
-            <a:r>
-              <a:rPr lang="en-US" altLang="zh-CN" dirty="0">
-                <a:sym typeface="+mn-ea"/>
-              </a:rPr>
-              <a:t>token</a:t>
-            </a:r>
-            <a:r>
-              <a:rPr lang="zh-CN" altLang="en-US" dirty="0">
-                <a:sym typeface="+mn-ea"/>
-              </a:rPr>
-              <a:t>，大模型验证</a:t>
-            </a:r>
-            <a:endParaRPr lang="zh-CN" altLang="en-US" dirty="0">
-              <a:sym typeface="+mn-ea"/>
-            </a:endParaRPr>
-          </a:p>
-          <a:p>
-            <a:pPr marL="742950" lvl="1" indent="-285750">
-              <a:lnSpc>
-                <a:spcPct val="150000"/>
-              </a:lnSpc>
-              <a:buFont typeface="Arial" panose="020B0604020202020204" pitchFamily="34" charset="0"/>
-              <a:buChar char="•"/>
-            </a:pPr>
-            <a:r>
-              <a:rPr lang="zh-CN" altLang="en-US" dirty="0">
-                <a:sym typeface="+mn-ea"/>
-              </a:rPr>
-              <a:t>缺点：高度依赖草稿模型、难以集成</a:t>
-            </a:r>
-            <a:endParaRPr lang="zh-CN" altLang="en-US" dirty="0">
-              <a:sym typeface="+mn-ea"/>
-            </a:endParaRPr>
-          </a:p>
-          <a:p>
-            <a:pPr marL="742950" lvl="1" indent="-285750">
-              <a:lnSpc>
-                <a:spcPct val="150000"/>
-              </a:lnSpc>
-              <a:buFont typeface="Arial" panose="020B0604020202020204" pitchFamily="34" charset="0"/>
-              <a:buChar char="•"/>
-            </a:pPr>
-            <a:endParaRPr lang="zh-CN" altLang="en-US" dirty="0">
-              <a:sym typeface="+mn-ea"/>
-            </a:endParaRPr>
-          </a:p>
-          <a:p>
-            <a:pPr marL="0" lvl="1" indent="-285750">
-              <a:lnSpc>
-                <a:spcPct val="150000"/>
-              </a:lnSpc>
-              <a:buFont typeface="Wingdings" panose="05000000000000000000" charset="0"/>
-              <a:buChar char="n"/>
-            </a:pPr>
-            <a:r>
-              <a:rPr lang="zh-CN" altLang="en-US">
-                <a:sym typeface="+mn-ea"/>
-              </a:rPr>
-              <a:t>优化局限性：现有方法聚焦步骤数压缩，但未解决自注意力机制的高计算</a:t>
-            </a:r>
-            <a:endParaRPr lang="zh-CN" altLang="en-US">
-              <a:sym typeface="+mn-ea"/>
-            </a:endParaRPr>
-          </a:p>
-          <a:p>
-            <a:pPr marL="0" lvl="1" indent="0">
-              <a:lnSpc>
-                <a:spcPct val="150000"/>
-              </a:lnSpc>
-              <a:buFont typeface="Wingdings" panose="05000000000000000000" charset="0"/>
-              <a:buNone/>
-            </a:pPr>
-            <a:r>
-              <a:rPr lang="zh-CN" altLang="en-US">
-                <a:sym typeface="+mn-ea"/>
-              </a:rPr>
-              <a:t>复杂度问题（单步耗时未减少）</a:t>
-            </a:r>
-            <a:endParaRPr lang="zh-CN" altLang="en-US"/>
-          </a:p>
-          <a:p>
-            <a:pPr marL="742950" lvl="1" indent="-285750">
-              <a:lnSpc>
-                <a:spcPct val="150000"/>
-              </a:lnSpc>
-              <a:buFont typeface="Arial" panose="020B0604020202020204" pitchFamily="34" charset="0"/>
-              <a:buChar char="•"/>
-            </a:pPr>
-            <a:endParaRPr lang="zh-CN" altLang="en-US" dirty="0">
-              <a:sym typeface="+mn-ea"/>
-            </a:endParaRPr>
-          </a:p>
-          <a:p>
-            <a:pPr marL="285750" indent="-285750">
-              <a:buFont typeface="Wingdings" panose="05000000000000000000" charset="0"/>
-              <a:buChar char="n"/>
-            </a:pPr>
-            <a:endParaRPr lang="zh-CN" altLang="en-US" dirty="0"/>
-          </a:p>
-        </p:txBody>
-      </p:sp>
-      <p:pic>
-        <p:nvPicPr>
-          <p:cNvPr id="2" name="图片 1"/>
-          <p:cNvPicPr>
-            <a:picLocks noChangeAspect="1"/>
-          </p:cNvPicPr>
-          <p:nvPr/>
-        </p:nvPicPr>
-        <p:blipFill>
-          <a:blip r:embed="rId1"/>
-          <a:srcRect b="2775"/>
-          <a:stretch>
-            <a:fillRect/>
-          </a:stretch>
-        </p:blipFill>
-        <p:spPr>
-          <a:xfrm>
-            <a:off x="86995" y="2670810"/>
-            <a:ext cx="6689725" cy="2113915"/>
-          </a:xfrm>
-          <a:prstGeom prst="rect">
-            <a:avLst/>
-          </a:prstGeom>
-        </p:spPr>
-      </p:pic>
-    </p:spTree>
-  </p:cSld>
-  <p:clrMapOvr>
-    <a:masterClrMapping/>
-  </p:clrMapOvr>
-</p:sld>
-</file>
-
-<file path=ppt/slides/slide9.xml><?xml version="1.0" encoding="utf-8"?>
-<p:sld xmlns:a="http://schemas.openxmlformats.org/drawingml/2006/main" xmlns:r="http://schemas.openxmlformats.org/officeDocument/2006/relationships" xmlns:p="http://schemas.openxmlformats.org/presentationml/2006/main">
-  <p:cSld>
-    <p:spTree>
-      <p:nvGrpSpPr>
-        <p:cNvPr id="1" name=""/>
-        <p:cNvGrpSpPr/>
-        <p:nvPr/>
-      </p:nvGrpSpPr>
-      <p:grpSpPr>
-        <a:xfrm>
-          <a:off x="0" y="0"/>
-          <a:ext cx="0" cy="0"/>
-          <a:chOff x="0" y="0"/>
-          <a:chExt cx="0" cy="0"/>
-        </a:xfrm>
-      </p:grpSpPr>
-      <p:sp>
-        <p:nvSpPr>
-          <p:cNvPr id="6" name="标题 5"/>
-          <p:cNvSpPr>
-            <a:spLocks noGrp="1"/>
-          </p:cNvSpPr>
-          <p:nvPr>
-            <p:ph type="title"/>
-          </p:nvPr>
-        </p:nvSpPr>
-        <p:spPr>
-          <a:xfrm>
-            <a:off x="0" y="1282065"/>
-            <a:ext cx="6864985" cy="1292860"/>
-          </a:xfrm>
-        </p:spPr>
-        <p:txBody>
-          <a:bodyPr/>
-          <a:lstStyle/>
-          <a:p>
-            <a:pPr algn="ctr"/>
-            <a:r>
-              <a:rPr lang="zh-CN" altLang="en-US" dirty="0">
-                <a:sym typeface="+mn-ea"/>
-              </a:rPr>
-              <a:t>基于公式的数值推理数据集构建</a:t>
-            </a:r>
-            <a:endParaRPr lang="zh-CN" altLang="en-US" dirty="0"/>
-          </a:p>
-        </p:txBody>
-      </p:sp>
-      <p:sp>
-        <p:nvSpPr>
-          <p:cNvPr id="3" name="日期占位符 2"/>
-          <p:cNvSpPr>
-            <a:spLocks noGrp="1"/>
-          </p:cNvSpPr>
-          <p:nvPr>
-            <p:ph type="dt" sz="half" idx="10"/>
-          </p:nvPr>
-        </p:nvSpPr>
-        <p:spPr/>
-        <p:txBody>
-          <a:bodyPr/>
-          <a:lstStyle/>
-          <a:p>
-            <a:fld id="{2FBB519E-D9EB-47F0-AD65-082D85248404}" type="datetime1">
-              <a:rPr lang="zh-CN" altLang="en-US" smtClean="0"/>
-            </a:fld>
-            <a:endParaRPr lang="zh-CN" altLang="en-US" dirty="0"/>
-          </a:p>
-        </p:txBody>
-      </p:sp>
-      <p:sp>
-        <p:nvSpPr>
-          <p:cNvPr id="4" name="灯片编号占位符 3"/>
-          <p:cNvSpPr>
-            <a:spLocks noGrp="1"/>
-          </p:cNvSpPr>
-          <p:nvPr>
-            <p:ph type="sldNum" sz="quarter" idx="11"/>
-          </p:nvPr>
-        </p:nvSpPr>
-        <p:spPr/>
-        <p:txBody>
-          <a:bodyPr/>
-          <a:lstStyle/>
-          <a:p>
-            <a:fld id="{463E1EE8-403A-4D2D-AB26-5BF439A27F60}" type="slidenum">
-              <a:rPr lang="zh-CN" altLang="en-US" smtClean="0"/>
-            </a:fld>
-            <a:endParaRPr lang="zh-CN" altLang="en-US" dirty="0"/>
-          </a:p>
-        </p:txBody>
-      </p:sp>
-    </p:spTree>
-  </p:cSld>
-  <p:clrMapOvr>
-    <a:masterClrMapping/>
-  </p:clrMapOvr>
-  <p:transition advTm="1284"/>
 </p:sld>
 </file>
 

--- a/毕业答辩/论文答辩_朱博林.pptx
+++ b/毕业答辩/论文答辩_朱博林.pptx
@@ -13790,7 +13790,7 @@
   <p:clrMapOvr>
     <a:masterClrMapping/>
   </p:clrMapOvr>
-  <p:transition advTm="5626"/>
+  <p:transition/>
 </p:sld>
 </file>
 
@@ -13891,7 +13891,7 @@
   <p:clrMapOvr>
     <a:masterClrMapping/>
   </p:clrMapOvr>
-  <p:transition advTm="1284"/>
+  <p:transition/>
 </p:sld>
 </file>
 
@@ -14174,6 +14174,7 @@
   <p:clrMapOvr>
     <a:masterClrMapping/>
   </p:clrMapOvr>
+  <p:transition/>
 </p:sld>
 </file>
 
@@ -15933,6 +15934,7 @@
   <p:clrMapOvr>
     <a:masterClrMapping/>
   </p:clrMapOvr>
+  <p:transition/>
 </p:sld>
 </file>
 
@@ -16505,6 +16507,7 @@
   <p:clrMapOvr>
     <a:masterClrMapping/>
   </p:clrMapOvr>
+  <p:transition/>
 </p:sld>
 </file>
 
@@ -17849,6 +17852,7 @@
   <p:clrMapOvr>
     <a:masterClrMapping/>
   </p:clrMapOvr>
+  <p:transition/>
 </p:sld>
 </file>
 
@@ -19011,6 +19015,7 @@
   <p:clrMapOvr>
     <a:masterClrMapping/>
   </p:clrMapOvr>
+  <p:transition/>
 </p:sld>
 </file>
 
@@ -19338,6 +19343,7 @@
   <p:clrMapOvr>
     <a:masterClrMapping/>
   </p:clrMapOvr>
+  <p:transition/>
 </p:sld>
 </file>
 
@@ -19444,7 +19450,7 @@
   <p:clrMapOvr>
     <a:masterClrMapping/>
   </p:clrMapOvr>
-  <p:transition advTm="1284"/>
+  <p:transition/>
 </p:sld>
 </file>
 
@@ -19760,6 +19766,7 @@
   <p:clrMapOvr>
     <a:masterClrMapping/>
   </p:clrMapOvr>
+  <p:transition/>
 </p:sld>
 </file>
 
@@ -20068,6 +20075,7 @@
   <p:clrMapOvr>
     <a:masterClrMapping/>
   </p:clrMapOvr>
+  <p:transition/>
 </p:sld>
 </file>
 
@@ -20292,7 +20300,7 @@
   <p:clrMapOvr>
     <a:masterClrMapping/>
   </p:clrMapOvr>
-  <p:transition advTm="6799"/>
+  <p:transition/>
 </p:sld>
 </file>
 
@@ -20551,6 +20559,7 @@
   <p:clrMapOvr>
     <a:masterClrMapping/>
   </p:clrMapOvr>
+  <p:transition/>
 </p:sld>
 </file>
 
@@ -20651,7 +20660,7 @@
   <p:clrMapOvr>
     <a:masterClrMapping/>
   </p:clrMapOvr>
-  <p:transition advTm="1284"/>
+  <p:transition/>
 </p:sld>
 </file>
 
@@ -20902,6 +20911,7 @@
   <p:clrMapOvr>
     <a:masterClrMapping/>
   </p:clrMapOvr>
+  <p:transition/>
 </p:sld>
 </file>
 
@@ -21201,6 +21211,7 @@
   <p:clrMapOvr>
     <a:masterClrMapping/>
   </p:clrMapOvr>
+  <p:transition/>
 </p:sld>
 </file>
 
@@ -21487,6 +21498,7 @@
   <p:clrMapOvr>
     <a:masterClrMapping/>
   </p:clrMapOvr>
+  <p:transition/>
 </p:sld>
 </file>
 
@@ -21782,6 +21794,7 @@
   <p:clrMapOvr>
     <a:masterClrMapping/>
   </p:clrMapOvr>
+  <p:transition/>
 </p:sld>
 </file>
 
@@ -21890,7 +21903,7 @@
   <p:clrMapOvr>
     <a:masterClrMapping/>
   </p:clrMapOvr>
-  <p:transition advTm="1284"/>
+  <p:transition/>
 </p:sld>
 </file>
 
@@ -22212,6 +22225,7 @@
   <p:clrMapOvr>
     <a:masterClrMapping/>
   </p:clrMapOvr>
+  <p:transition/>
 </p:sld>
 </file>
 
@@ -22540,6 +22554,7 @@
   <p:clrMapOvr>
     <a:masterClrMapping/>
   </p:clrMapOvr>
+  <p:transition/>
 </p:sld>
 </file>
 
@@ -22694,6 +22709,7 @@
   <p:clrMapOvr>
     <a:masterClrMapping/>
   </p:clrMapOvr>
+  <p:transition/>
 </p:sld>
 </file>
 
@@ -22792,7 +22808,7 @@
   <p:clrMapOvr>
     <a:masterClrMapping/>
   </p:clrMapOvr>
-  <p:transition advTm="1284"/>
+  <p:transition/>
 </p:sld>
 </file>
 
@@ -23332,7 +23348,7 @@
   <p:clrMapOvr>
     <a:masterClrMapping/>
   </p:clrMapOvr>
-  <p:transition advTm="4106"/>
+  <p:transition/>
 </p:sld>
 </file>
 
@@ -24447,7 +24463,7 @@
   <p:clrMapOvr>
     <a:masterClrMapping/>
   </p:clrMapOvr>
-  <p:transition advTm="4106"/>
+  <p:transition/>
 </p:sld>
 </file>
 
@@ -24546,7 +24562,7 @@
   <p:clrMapOvr>
     <a:masterClrMapping/>
   </p:clrMapOvr>
-  <p:transition advTm="1284"/>
+  <p:transition/>
 </p:sld>
 </file>
 
@@ -25471,7 +25487,7 @@
   <p:clrMapOvr>
     <a:masterClrMapping/>
   </p:clrMapOvr>
-  <p:transition advTm="4106"/>
+  <p:transition/>
 </p:sld>
 </file>
 
@@ -26247,6 +26263,7 @@
   <p:clrMapOvr>
     <a:masterClrMapping/>
   </p:clrMapOvr>
+  <p:transition/>
 </p:sld>
 </file>
 
@@ -26927,6 +26944,7 @@
   <p:clrMapOvr>
     <a:masterClrMapping/>
   </p:clrMapOvr>
+  <p:transition/>
 </p:sld>
 </file>
 

--- a/毕业答辩/论文答辩_朱博林.pptx
+++ b/毕业答辩/论文答辩_朱博林.pptx
@@ -19160,7 +19160,7 @@
         <p:spPr>
           <a:xfrm>
             <a:off x="471805" y="815340"/>
-            <a:ext cx="6179185" cy="3969385"/>
+            <a:ext cx="6179185" cy="3646170"/>
           </a:xfrm>
           <a:prstGeom prst="rect">
             <a:avLst/>
@@ -19258,21 +19258,6 @@
               <a:rPr lang="zh-CN" altLang="en-US" sz="1400" dirty="0"/>
               <a:t>使用过程监督模型与规则进行评分</a:t>
             </a:r>
-            <a:br>
-              <a:rPr lang="zh-CN" altLang="en-US" sz="1400" dirty="0"/>
-            </a:br>
-            <a:r>
-              <a:rPr lang="en-US" altLang="zh-CN" sz="1400" dirty="0"/>
-              <a:t>- </a:t>
-            </a:r>
-            <a:r>
-              <a:rPr lang="zh-CN" altLang="en-US" sz="1400" dirty="0"/>
-              <a:t>构造偏好对</a:t>
-            </a:r>
-            <a:r>
-              <a:rPr lang="zh-CN" altLang="en-US" sz="1400" dirty="0"/>
-              <a:t>数据</a:t>
-            </a:r>
             <a:endParaRPr lang="zh-CN" altLang="en-US" sz="1400" dirty="0"/>
           </a:p>
           <a:p>
@@ -19335,6 +19320,158 @@
               <a:t>通过大语言模型进行翻译</a:t>
             </a:r>
             <a:endParaRPr lang="zh-CN" altLang="en-US" sz="1400" dirty="0"/>
+          </a:p>
+        </p:txBody>
+      </p:sp>
+      <p:pic>
+        <p:nvPicPr>
+          <p:cNvPr id="2" name="图片 1"/>
+          <p:cNvPicPr>
+            <a:picLocks noChangeAspect="1"/>
+          </p:cNvPicPr>
+          <p:nvPr/>
+        </p:nvPicPr>
+        <p:blipFill>
+          <a:blip r:embed="rId1"/>
+          <a:stretch>
+            <a:fillRect/>
+          </a:stretch>
+        </p:blipFill>
+        <p:spPr>
+          <a:xfrm>
+            <a:off x="4232910" y="3451225"/>
+            <a:ext cx="2537460" cy="880110"/>
+          </a:xfrm>
+          <a:prstGeom prst="rect">
+            <a:avLst/>
+          </a:prstGeom>
+        </p:spPr>
+      </p:pic>
+      <p:pic>
+        <p:nvPicPr>
+          <p:cNvPr id="5" name="图片 4"/>
+          <p:cNvPicPr>
+            <a:picLocks noChangeAspect="1"/>
+          </p:cNvPicPr>
+          <p:nvPr/>
+        </p:nvPicPr>
+        <p:blipFill>
+          <a:blip r:embed="rId2"/>
+          <a:stretch>
+            <a:fillRect/>
+          </a:stretch>
+        </p:blipFill>
+        <p:spPr>
+          <a:xfrm>
+            <a:off x="4232910" y="2087880"/>
+            <a:ext cx="2159635" cy="623570"/>
+          </a:xfrm>
+          <a:prstGeom prst="rect">
+            <a:avLst/>
+          </a:prstGeom>
+        </p:spPr>
+      </p:pic>
+      <p:pic>
+        <p:nvPicPr>
+          <p:cNvPr id="6" name="图片 5"/>
+          <p:cNvPicPr>
+            <a:picLocks noChangeAspect="1"/>
+          </p:cNvPicPr>
+          <p:nvPr/>
+        </p:nvPicPr>
+        <p:blipFill>
+          <a:blip r:embed="rId3"/>
+          <a:stretch>
+            <a:fillRect/>
+          </a:stretch>
+        </p:blipFill>
+        <p:spPr>
+          <a:xfrm>
+            <a:off x="4232910" y="2713355"/>
+            <a:ext cx="2306320" cy="737870"/>
+          </a:xfrm>
+          <a:prstGeom prst="rect">
+            <a:avLst/>
+          </a:prstGeom>
+        </p:spPr>
+      </p:pic>
+      <p:cxnSp>
+        <p:nvCxnSpPr>
+          <p:cNvPr id="11" name="直接箭头连接符 10"/>
+          <p:cNvCxnSpPr/>
+          <p:nvPr/>
+        </p:nvCxnSpPr>
+        <p:spPr>
+          <a:xfrm>
+            <a:off x="4062095" y="1425575"/>
+            <a:ext cx="473710" cy="448945"/>
+          </a:xfrm>
+          <a:prstGeom prst="straightConnector1">
+            <a:avLst/>
+          </a:prstGeom>
+          <a:ln w="12700" cmpd="sng">
+            <a:solidFill>
+              <a:schemeClr val="bg2">
+                <a:lumMod val="90000"/>
+              </a:schemeClr>
+            </a:solidFill>
+            <a:prstDash val="sysDot"/>
+            <a:tailEnd type="arrow"/>
+          </a:ln>
+        </p:spPr>
+        <p:style>
+          <a:lnRef idx="2">
+            <a:schemeClr val="accent1"/>
+          </a:lnRef>
+          <a:fillRef idx="0">
+            <a:srgbClr val="FFFFFF"/>
+          </a:fillRef>
+          <a:effectRef idx="0">
+            <a:srgbClr val="FFFFFF"/>
+          </a:effectRef>
+          <a:fontRef idx="minor">
+            <a:schemeClr val="tx1"/>
+          </a:fontRef>
+        </p:style>
+      </p:cxnSp>
+      <p:sp>
+        <p:nvSpPr>
+          <p:cNvPr id="7" name="文本框 6"/>
+          <p:cNvSpPr txBox="1"/>
+          <p:nvPr/>
+        </p:nvSpPr>
+        <p:spPr>
+          <a:xfrm>
+            <a:off x="4039235" y="1951990"/>
+            <a:ext cx="2731135" cy="2508885"/>
+          </a:xfrm>
+          <a:prstGeom prst="rect">
+            <a:avLst/>
+          </a:prstGeom>
+          <a:noFill/>
+          <a:ln w="12700" cmpd="sng">
+            <a:solidFill>
+              <a:schemeClr val="bg1">
+                <a:lumMod val="85000"/>
+              </a:schemeClr>
+            </a:solidFill>
+            <a:prstDash val="sysDash"/>
+          </a:ln>
+        </p:spPr>
+        <p:txBody>
+          <a:bodyPr wrap="square" rtlCol="0">
+            <a:noAutofit/>
+          </a:bodyPr>
+          <a:p>
+            <a:endParaRPr lang="en-US" altLang="zh-CN" sz="1200">
+              <a:solidFill>
+                <a:schemeClr val="tx1"/>
+              </a:solidFill>
+              <a:uFillTx/>
+              <a:latin typeface="Times New Roman" panose="02020603050405020304" pitchFamily="18" charset="0"/>
+              <a:ea typeface="微软雅黑" panose="020B0503020204020204" charset="-122"/>
+              <a:cs typeface="微软雅黑" panose="020B0503020204020204" charset="-122"/>
+            </a:endParaRPr>
           </a:p>
         </p:txBody>
       </p:sp>
@@ -19761,6 +19898,309 @@
           </a:p>
         </p:txBody>
       </p:sp>
+      <p:pic>
+        <p:nvPicPr>
+          <p:cNvPr id="2" name="图片 1" descr="117"/>
+          <p:cNvPicPr>
+            <a:picLocks noChangeAspect="1"/>
+          </p:cNvPicPr>
+          <p:nvPr/>
+        </p:nvPicPr>
+        <p:blipFill>
+          <a:blip r:embed="rId1"/>
+          <a:stretch>
+            <a:fillRect/>
+          </a:stretch>
+        </p:blipFill>
+        <p:spPr>
+          <a:xfrm>
+            <a:off x="3295015" y="977900"/>
+            <a:ext cx="533400" cy="533400"/>
+          </a:xfrm>
+          <a:prstGeom prst="rect">
+            <a:avLst/>
+          </a:prstGeom>
+          <a:noFill/>
+        </p:spPr>
+      </p:pic>
+      <p:pic>
+        <p:nvPicPr>
+          <p:cNvPr id="6" name="图片 5" descr="任务检查点 (1)"/>
+          <p:cNvPicPr>
+            <a:picLocks noChangeAspect="1"/>
+          </p:cNvPicPr>
+          <p:nvPr/>
+        </p:nvPicPr>
+        <p:blipFill>
+          <a:blip r:embed="rId2"/>
+          <a:stretch>
+            <a:fillRect/>
+          </a:stretch>
+        </p:blipFill>
+        <p:spPr>
+          <a:xfrm>
+            <a:off x="3295015" y="1906270"/>
+            <a:ext cx="563880" cy="563880"/>
+          </a:xfrm>
+          <a:prstGeom prst="rect">
+            <a:avLst/>
+          </a:prstGeom>
+        </p:spPr>
+      </p:pic>
+      <p:sp>
+        <p:nvSpPr>
+          <p:cNvPr id="7" name="文本框 6"/>
+          <p:cNvSpPr txBox="1"/>
+          <p:nvPr/>
+        </p:nvSpPr>
+        <p:spPr>
+          <a:xfrm>
+            <a:off x="4090670" y="1002030"/>
+            <a:ext cx="979805" cy="509270"/>
+          </a:xfrm>
+          <a:prstGeom prst="rect">
+            <a:avLst/>
+          </a:prstGeom>
+          <a:noFill/>
+        </p:spPr>
+        <p:txBody>
+          <a:bodyPr wrap="square" rtlCol="0">
+            <a:spAutoFit/>
+          </a:bodyPr>
+          <a:p>
+            <a:r>
+              <a:rPr lang="zh-CN" altLang="en-US"/>
+              <a:t>检索公式</a:t>
+            </a:r>
+            <a:endParaRPr lang="zh-CN" altLang="en-US"/>
+          </a:p>
+          <a:p>
+            <a:r>
+              <a:rPr lang="zh-CN" altLang="en-US"/>
+              <a:t>辅助</a:t>
+            </a:r>
+            <a:r>
+              <a:rPr lang="zh-CN" altLang="en-US"/>
+              <a:t>生成</a:t>
+            </a:r>
+            <a:endParaRPr lang="zh-CN" altLang="en-US"/>
+          </a:p>
+        </p:txBody>
+      </p:sp>
+      <p:sp>
+        <p:nvSpPr>
+          <p:cNvPr id="8" name="文本框 7"/>
+          <p:cNvSpPr txBox="1"/>
+          <p:nvPr/>
+        </p:nvSpPr>
+        <p:spPr>
+          <a:xfrm>
+            <a:off x="4090670" y="1906270"/>
+            <a:ext cx="1016000" cy="509270"/>
+          </a:xfrm>
+          <a:prstGeom prst="rect">
+            <a:avLst/>
+          </a:prstGeom>
+          <a:noFill/>
+        </p:spPr>
+        <p:txBody>
+          <a:bodyPr wrap="square" rtlCol="0">
+            <a:spAutoFit/>
+          </a:bodyPr>
+          <a:p>
+            <a:r>
+              <a:rPr lang="zh-CN" altLang="en-US"/>
+              <a:t>文本</a:t>
+            </a:r>
+            <a:r>
+              <a:rPr lang="zh-CN" altLang="en-US"/>
+              <a:t>对比</a:t>
+            </a:r>
+            <a:endParaRPr lang="zh-CN" altLang="en-US"/>
+          </a:p>
+          <a:p>
+            <a:r>
+              <a:rPr lang="zh-CN" altLang="en-US"/>
+              <a:t>偏好优化</a:t>
+            </a:r>
+            <a:endParaRPr lang="zh-CN" altLang="en-US"/>
+          </a:p>
+        </p:txBody>
+      </p:sp>
+      <p:sp>
+        <p:nvSpPr>
+          <p:cNvPr id="9" name="矩形 8"/>
+          <p:cNvSpPr/>
+          <p:nvPr/>
+        </p:nvSpPr>
+        <p:spPr>
+          <a:xfrm>
+            <a:off x="3171190" y="889000"/>
+            <a:ext cx="1855470" cy="718185"/>
+          </a:xfrm>
+          <a:prstGeom prst="rect">
+            <a:avLst/>
+          </a:prstGeom>
+          <a:noFill/>
+          <a:ln w="12700" cmpd="sng">
+            <a:solidFill>
+              <a:schemeClr val="bg2">
+                <a:lumMod val="90000"/>
+              </a:schemeClr>
+            </a:solidFill>
+            <a:prstDash val="sysDot"/>
+          </a:ln>
+        </p:spPr>
+        <p:style>
+          <a:lnRef idx="2">
+            <a:schemeClr val="accent1">
+              <a:lumMod val="75000"/>
+            </a:schemeClr>
+          </a:lnRef>
+          <a:fillRef idx="1">
+            <a:schemeClr val="accent1"/>
+          </a:fillRef>
+          <a:effectRef idx="0">
+            <a:srgbClr val="FFFFFF"/>
+          </a:effectRef>
+          <a:fontRef idx="minor">
+            <a:schemeClr val="lt1"/>
+          </a:fontRef>
+        </p:style>
+        <p:txBody>
+          <a:bodyPr rtlCol="0" anchor="ctr"/>
+          <a:p>
+            <a:pPr algn="ctr"/>
+            <a:endParaRPr lang="zh-CN" altLang="en-US"/>
+          </a:p>
+        </p:txBody>
+      </p:sp>
+      <p:sp>
+        <p:nvSpPr>
+          <p:cNvPr id="11" name="矩形 10"/>
+          <p:cNvSpPr/>
+          <p:nvPr/>
+        </p:nvSpPr>
+        <p:spPr>
+          <a:xfrm>
+            <a:off x="3171190" y="1801495"/>
+            <a:ext cx="1855470" cy="718185"/>
+          </a:xfrm>
+          <a:prstGeom prst="rect">
+            <a:avLst/>
+          </a:prstGeom>
+          <a:noFill/>
+          <a:ln w="12700" cmpd="sng">
+            <a:solidFill>
+              <a:schemeClr val="bg2">
+                <a:lumMod val="90000"/>
+              </a:schemeClr>
+            </a:solidFill>
+            <a:prstDash val="sysDot"/>
+          </a:ln>
+        </p:spPr>
+        <p:style>
+          <a:lnRef idx="2">
+            <a:schemeClr val="accent1">
+              <a:lumMod val="75000"/>
+            </a:schemeClr>
+          </a:lnRef>
+          <a:fillRef idx="1">
+            <a:schemeClr val="accent1"/>
+          </a:fillRef>
+          <a:effectRef idx="0">
+            <a:srgbClr val="FFFFFF"/>
+          </a:effectRef>
+          <a:fontRef idx="minor">
+            <a:schemeClr val="lt1"/>
+          </a:fontRef>
+        </p:style>
+        <p:txBody>
+          <a:bodyPr rtlCol="0" anchor="ctr"/>
+          <a:p>
+            <a:pPr algn="ctr"/>
+            <a:endParaRPr lang="zh-CN" altLang="en-US"/>
+          </a:p>
+        </p:txBody>
+      </p:sp>
+      <p:cxnSp>
+        <p:nvCxnSpPr>
+          <p:cNvPr id="12" name="直接箭头连接符 11"/>
+          <p:cNvCxnSpPr/>
+          <p:nvPr/>
+        </p:nvCxnSpPr>
+        <p:spPr>
+          <a:xfrm flipV="1">
+            <a:off x="2075180" y="1343660"/>
+            <a:ext cx="1027430" cy="325120"/>
+          </a:xfrm>
+          <a:prstGeom prst="straightConnector1">
+            <a:avLst/>
+          </a:prstGeom>
+          <a:ln w="12700" cmpd="sng">
+            <a:solidFill>
+              <a:schemeClr val="bg2">
+                <a:lumMod val="90000"/>
+              </a:schemeClr>
+            </a:solidFill>
+            <a:prstDash val="sysDot"/>
+            <a:tailEnd type="arrow"/>
+          </a:ln>
+        </p:spPr>
+        <p:style>
+          <a:lnRef idx="2">
+            <a:schemeClr val="accent1"/>
+          </a:lnRef>
+          <a:fillRef idx="0">
+            <a:srgbClr val="FFFFFF"/>
+          </a:fillRef>
+          <a:effectRef idx="0">
+            <a:srgbClr val="FFFFFF"/>
+          </a:effectRef>
+          <a:fontRef idx="minor">
+            <a:schemeClr val="tx1"/>
+          </a:fontRef>
+        </p:style>
+      </p:cxnSp>
+      <p:cxnSp>
+        <p:nvCxnSpPr>
+          <p:cNvPr id="13" name="直接箭头连接符 12"/>
+          <p:cNvCxnSpPr/>
+          <p:nvPr/>
+        </p:nvCxnSpPr>
+        <p:spPr>
+          <a:xfrm flipV="1">
+            <a:off x="2093595" y="2327910"/>
+            <a:ext cx="982980" cy="17780"/>
+          </a:xfrm>
+          <a:prstGeom prst="straightConnector1">
+            <a:avLst/>
+          </a:prstGeom>
+          <a:ln w="12700" cmpd="sng">
+            <a:solidFill>
+              <a:schemeClr val="bg2">
+                <a:lumMod val="90000"/>
+              </a:schemeClr>
+            </a:solidFill>
+            <a:prstDash val="sysDot"/>
+            <a:tailEnd type="arrow"/>
+          </a:ln>
+        </p:spPr>
+        <p:style>
+          <a:lnRef idx="2">
+            <a:schemeClr val="accent1"/>
+          </a:lnRef>
+          <a:fillRef idx="0">
+            <a:srgbClr val="FFFFFF"/>
+          </a:fillRef>
+          <a:effectRef idx="0">
+            <a:srgbClr val="FFFFFF"/>
+          </a:effectRef>
+          <a:fontRef idx="minor">
+            <a:schemeClr val="tx1"/>
+          </a:fontRef>
+        </p:style>
+      </p:cxnSp>
     </p:spTree>
   </p:cSld>
   <p:clrMapOvr>
@@ -20540,11 +20980,15 @@
             </a:r>
             <a:r>
               <a:rPr lang="zh-CN" altLang="en-US" sz="1400" dirty="0"/>
-              <a:t>对应的偏好数据上进行优化后，在其他数据集上仍然保留较好的泛化性，对其他数据集在多数情况</a:t>
+              <a:t>对应的偏好数据上进行优化后，在其他数据集上仍然保留较好的泛化性，在其他数据集表现</a:t>
             </a:r>
             <a:r>
               <a:rPr lang="zh-CN" altLang="en-US" sz="1400" dirty="0"/>
-              <a:t>下也有性能</a:t>
+              <a:t>上多数情况</a:t>
+            </a:r>
+            <a:r>
+              <a:rPr lang="zh-CN" altLang="en-US" sz="1400" dirty="0"/>
+              <a:t>也有性能</a:t>
             </a:r>
             <a:r>
               <a:rPr lang="zh-CN" altLang="en-US" sz="1400" dirty="0"/>
@@ -22904,11 +23348,7 @@
             </a:pPr>
             <a:r>
               <a:rPr lang="zh-CN" altLang="en-US" sz="1400" dirty="0"/>
-              <a:t>理解文本中的数字信息，并在此基础上进行计算推导的能</a:t>
-            </a:r>
-            <a:r>
-              <a:rPr lang="zh-CN" altLang="en-US" sz="1400" dirty="0"/>
-              <a:t>力</a:t>
+              <a:t>理解文本中的数字信息，并在此基础上进行计算推导</a:t>
             </a:r>
             <a:endParaRPr lang="zh-CN" altLang="en-US" sz="1400" dirty="0"/>
           </a:p>
@@ -24947,7 +25387,7 @@
         </p:nvSpPr>
         <p:spPr>
           <a:xfrm>
-            <a:off x="1576070" y="941070"/>
+            <a:off x="1560195" y="898525"/>
             <a:ext cx="732155" cy="414020"/>
           </a:xfrm>
           <a:prstGeom prst="rect">
@@ -25362,7 +25802,7 @@
         </p:nvSpPr>
         <p:spPr>
           <a:xfrm>
-            <a:off x="1005840" y="3267710"/>
+            <a:off x="1637665" y="3465195"/>
             <a:ext cx="1143000" cy="454660"/>
           </a:xfrm>
           <a:prstGeom prst="rect">
@@ -25472,11 +25912,11 @@
           <a:p>
             <a:r>
               <a:rPr lang="zh-CN" altLang="en-US"/>
-              <a:t>无知识</a:t>
+              <a:t>无</a:t>
             </a:r>
             <a:r>
               <a:rPr lang="zh-CN" altLang="en-US"/>
-              <a:t>标注</a:t>
+              <a:t>公式知识</a:t>
             </a:r>
             <a:endParaRPr lang="zh-CN" altLang="en-US"/>
           </a:p>
@@ -25597,7 +26037,11 @@
             </a:pPr>
             <a:r>
               <a:rPr lang="zh-CN" altLang="en-US" dirty="0"/>
-              <a:t>标注者的答案一致性</a:t>
+              <a:t>标注者答案一致性</a:t>
+            </a:r>
+            <a:r>
+              <a:rPr lang="zh-CN" altLang="en-US" dirty="0"/>
+              <a:t>检验</a:t>
             </a:r>
             <a:endParaRPr lang="zh-CN" altLang="en-US" dirty="0"/>
           </a:p>
@@ -25611,11 +26055,7 @@
             </a:pPr>
             <a:r>
               <a:rPr lang="zh-CN" altLang="en-US" dirty="0"/>
-              <a:t>保持问题</a:t>
-            </a:r>
-            <a:r>
-              <a:rPr lang="zh-CN" altLang="en-US" dirty="0"/>
-              <a:t>的高多样性</a:t>
+              <a:t>丰富灵活的需求</a:t>
             </a:r>
             <a:endParaRPr lang="en-US" altLang="zh-CN" dirty="0"/>
           </a:p>
@@ -25833,7 +26273,7 @@
         </p:nvCxnSpPr>
         <p:spPr>
           <a:xfrm>
-            <a:off x="0" y="2362835"/>
+            <a:off x="0" y="2408555"/>
             <a:ext cx="6900545" cy="0"/>
           </a:xfrm>
           <a:prstGeom prst="line">
@@ -26191,15 +26631,11 @@
           <a:p>
             <a:r>
               <a:rPr lang="zh-CN" altLang="en-US"/>
-              <a:t>标注时间</a:t>
+              <a:t>标注成本</a:t>
             </a:r>
             <a:r>
               <a:rPr lang="zh-CN" altLang="en-US"/>
-              <a:t>及成本</a:t>
-            </a:r>
-            <a:r>
-              <a:rPr lang="zh-CN" altLang="en-US"/>
-              <a:t>高</a:t>
+              <a:t>较高</a:t>
             </a:r>
             <a:endParaRPr lang="zh-CN" altLang="en-US"/>
           </a:p>
@@ -26397,11 +26833,15 @@
         <p:nvSpPr>
           <p:cNvPr id="5" name="AutoShape 5"/>
           <p:cNvSpPr/>
-          <p:nvPr/>
+          <p:nvPr>
+            <p:custDataLst>
+              <p:tags r:id="rId1"/>
+            </p:custDataLst>
+          </p:nvPr>
         </p:nvSpPr>
         <p:spPr>
           <a:xfrm>
-            <a:off x="892810" y="2703830"/>
+            <a:off x="1830705" y="2684145"/>
             <a:ext cx="1821815" cy="463550"/>
           </a:xfrm>
           <a:prstGeom prst="roundRect">
@@ -26445,11 +26885,15 @@
         <p:nvSpPr>
           <p:cNvPr id="20" name="AutoShape 7"/>
           <p:cNvSpPr/>
-          <p:nvPr/>
+          <p:nvPr>
+            <p:custDataLst>
+              <p:tags r:id="rId2"/>
+            </p:custDataLst>
+          </p:nvPr>
         </p:nvSpPr>
         <p:spPr>
           <a:xfrm>
-            <a:off x="892810" y="2703830"/>
+            <a:off x="1830705" y="2684145"/>
             <a:ext cx="1821180" cy="464185"/>
           </a:xfrm>
           <a:prstGeom prst="rect">
@@ -26500,11 +26944,15 @@
         <p:nvSpPr>
           <p:cNvPr id="21" name="AutoShape 8"/>
           <p:cNvSpPr/>
-          <p:nvPr/>
+          <p:nvPr>
+            <p:custDataLst>
+              <p:tags r:id="rId3"/>
+            </p:custDataLst>
+          </p:nvPr>
         </p:nvSpPr>
         <p:spPr>
           <a:xfrm>
-            <a:off x="891540" y="1214120"/>
+            <a:off x="1812290" y="1411605"/>
             <a:ext cx="1821815" cy="447675"/>
           </a:xfrm>
           <a:prstGeom prst="roundRect">
@@ -26548,11 +26996,15 @@
         <p:nvSpPr>
           <p:cNvPr id="23" name="AutoShape 10"/>
           <p:cNvSpPr/>
-          <p:nvPr/>
+          <p:nvPr>
+            <p:custDataLst>
+              <p:tags r:id="rId4"/>
+            </p:custDataLst>
+          </p:nvPr>
         </p:nvSpPr>
         <p:spPr>
           <a:xfrm>
-            <a:off x="891540" y="1223645"/>
+            <a:off x="1812290" y="1421130"/>
             <a:ext cx="1821815" cy="447040"/>
           </a:xfrm>
           <a:prstGeom prst="rect">
@@ -26603,11 +27055,15 @@
         <p:nvSpPr>
           <p:cNvPr id="24" name="AutoShape 11"/>
           <p:cNvSpPr/>
-          <p:nvPr/>
+          <p:nvPr>
+            <p:custDataLst>
+              <p:tags r:id="rId5"/>
+            </p:custDataLst>
+          </p:nvPr>
         </p:nvSpPr>
         <p:spPr>
           <a:xfrm>
-            <a:off x="891540" y="1973580"/>
+            <a:off x="1829435" y="2115185"/>
             <a:ext cx="1821815" cy="418465"/>
           </a:xfrm>
           <a:prstGeom prst="roundRect">
@@ -26651,11 +27107,15 @@
         <p:nvSpPr>
           <p:cNvPr id="26" name="AutoShape 13"/>
           <p:cNvSpPr/>
-          <p:nvPr/>
+          <p:nvPr>
+            <p:custDataLst>
+              <p:tags r:id="rId6"/>
+            </p:custDataLst>
+          </p:nvPr>
         </p:nvSpPr>
         <p:spPr>
           <a:xfrm>
-            <a:off x="891540" y="1973580"/>
+            <a:off x="1829435" y="2115185"/>
             <a:ext cx="1822450" cy="418465"/>
           </a:xfrm>
           <a:prstGeom prst="rect">
@@ -26706,11 +27166,15 @@
         <p:nvSpPr>
           <p:cNvPr id="27" name="AutoShape 11"/>
           <p:cNvSpPr/>
-          <p:nvPr/>
+          <p:nvPr>
+            <p:custDataLst>
+              <p:tags r:id="rId7"/>
+            </p:custDataLst>
+          </p:nvPr>
         </p:nvSpPr>
         <p:spPr>
           <a:xfrm>
-            <a:off x="889635" y="3444875"/>
+            <a:off x="1824990" y="3298190"/>
             <a:ext cx="1821815" cy="418465"/>
           </a:xfrm>
           <a:prstGeom prst="roundRect">
@@ -26754,11 +27218,15 @@
         <p:nvSpPr>
           <p:cNvPr id="28" name="AutoShape 13"/>
           <p:cNvSpPr/>
-          <p:nvPr/>
+          <p:nvPr>
+            <p:custDataLst>
+              <p:tags r:id="rId8"/>
+            </p:custDataLst>
+          </p:nvPr>
         </p:nvSpPr>
         <p:spPr>
           <a:xfrm>
-            <a:off x="889635" y="3444875"/>
+            <a:off x="1824990" y="3298190"/>
             <a:ext cx="1822450" cy="418465"/>
           </a:xfrm>
           <a:prstGeom prst="rect">
@@ -26825,7 +27293,7 @@
         </p:nvSpPr>
         <p:spPr>
           <a:xfrm>
-            <a:off x="3993515" y="1661795"/>
+            <a:off x="4311650" y="1661795"/>
             <a:ext cx="2287905" cy="1675130"/>
           </a:xfrm>
           <a:prstGeom prst="rect">
@@ -26908,7 +27376,7 @@
         </p:nvSpPr>
         <p:spPr>
           <a:xfrm>
-            <a:off x="3281045" y="2199005"/>
+            <a:off x="3760470" y="2324100"/>
             <a:ext cx="495935" cy="307975"/>
           </a:xfrm>
           <a:prstGeom prst="rightArrow">
@@ -26939,6 +27407,230 @@
           </a:p>
         </p:txBody>
       </p:sp>
+      <p:pic>
+        <p:nvPicPr>
+          <p:cNvPr id="16" name="图片 15" descr="大模型-copy"/>
+          <p:cNvPicPr>
+            <a:picLocks noChangeAspect="1"/>
+          </p:cNvPicPr>
+          <p:nvPr/>
+        </p:nvPicPr>
+        <p:blipFill>
+          <a:blip r:embed="rId9"/>
+          <a:stretch>
+            <a:fillRect/>
+          </a:stretch>
+        </p:blipFill>
+        <p:spPr>
+          <a:xfrm>
+            <a:off x="435610" y="2392045"/>
+            <a:ext cx="338455" cy="338455"/>
+          </a:xfrm>
+          <a:prstGeom prst="rect">
+            <a:avLst/>
+          </a:prstGeom>
+        </p:spPr>
+      </p:pic>
+      <p:sp>
+        <p:nvSpPr>
+          <p:cNvPr id="2" name="右箭头 1"/>
+          <p:cNvSpPr/>
+          <p:nvPr/>
+        </p:nvSpPr>
+        <p:spPr>
+          <a:xfrm rot="19860000">
+            <a:off x="758190" y="1947545"/>
+            <a:ext cx="1068705" cy="267970"/>
+          </a:xfrm>
+          <a:prstGeom prst="rightArrow">
+            <a:avLst/>
+          </a:prstGeom>
+          <a:solidFill>
+            <a:schemeClr val="bg2">
+              <a:lumMod val="90000"/>
+              <a:alpha val="97000"/>
+            </a:schemeClr>
+          </a:solidFill>
+          <a:ln>
+            <a:solidFill>
+              <a:schemeClr val="bg2"/>
+            </a:solidFill>
+          </a:ln>
+        </p:spPr>
+        <p:style>
+          <a:lnRef idx="2">
+            <a:schemeClr val="accent1">
+              <a:lumMod val="75000"/>
+            </a:schemeClr>
+          </a:lnRef>
+          <a:fillRef idx="1">
+            <a:schemeClr val="accent1"/>
+          </a:fillRef>
+          <a:effectRef idx="0">
+            <a:srgbClr val="FFFFFF"/>
+          </a:effectRef>
+          <a:fontRef idx="minor">
+            <a:schemeClr val="lt1"/>
+          </a:fontRef>
+        </p:style>
+        <p:txBody>
+          <a:bodyPr rtlCol="0" anchor="ctr"/>
+          <a:p>
+            <a:pPr algn="ctr"/>
+            <a:endParaRPr lang="zh-CN" altLang="en-US"/>
+          </a:p>
+        </p:txBody>
+      </p:sp>
+      <p:sp>
+        <p:nvSpPr>
+          <p:cNvPr id="6" name="右箭头 5"/>
+          <p:cNvSpPr/>
+          <p:nvPr/>
+        </p:nvSpPr>
+        <p:spPr>
+          <a:xfrm rot="20880000">
+            <a:off x="873125" y="2281555"/>
+            <a:ext cx="975360" cy="267970"/>
+          </a:xfrm>
+          <a:prstGeom prst="rightArrow">
+            <a:avLst/>
+          </a:prstGeom>
+          <a:solidFill>
+            <a:schemeClr val="bg2">
+              <a:lumMod val="90000"/>
+              <a:alpha val="97000"/>
+            </a:schemeClr>
+          </a:solidFill>
+          <a:ln>
+            <a:solidFill>
+              <a:schemeClr val="bg2"/>
+            </a:solidFill>
+          </a:ln>
+        </p:spPr>
+        <p:style>
+          <a:lnRef idx="2">
+            <a:schemeClr val="accent1">
+              <a:lumMod val="75000"/>
+            </a:schemeClr>
+          </a:lnRef>
+          <a:fillRef idx="1">
+            <a:schemeClr val="accent1"/>
+          </a:fillRef>
+          <a:effectRef idx="0">
+            <a:srgbClr val="FFFFFF"/>
+          </a:effectRef>
+          <a:fontRef idx="minor">
+            <a:schemeClr val="lt1"/>
+          </a:fontRef>
+        </p:style>
+        <p:txBody>
+          <a:bodyPr rtlCol="0" anchor="ctr"/>
+          <a:p>
+            <a:pPr algn="ctr"/>
+            <a:endParaRPr lang="zh-CN" altLang="en-US"/>
+          </a:p>
+        </p:txBody>
+      </p:sp>
+      <p:sp>
+        <p:nvSpPr>
+          <p:cNvPr id="7" name="右箭头 6"/>
+          <p:cNvSpPr/>
+          <p:nvPr/>
+        </p:nvSpPr>
+        <p:spPr>
+          <a:xfrm rot="600000">
+            <a:off x="866775" y="2616200"/>
+            <a:ext cx="975360" cy="267970"/>
+          </a:xfrm>
+          <a:prstGeom prst="rightArrow">
+            <a:avLst/>
+          </a:prstGeom>
+          <a:solidFill>
+            <a:schemeClr val="bg2">
+              <a:lumMod val="90000"/>
+              <a:alpha val="97000"/>
+            </a:schemeClr>
+          </a:solidFill>
+          <a:ln>
+            <a:solidFill>
+              <a:schemeClr val="bg2"/>
+            </a:solidFill>
+          </a:ln>
+        </p:spPr>
+        <p:style>
+          <a:lnRef idx="2">
+            <a:schemeClr val="accent1">
+              <a:lumMod val="75000"/>
+            </a:schemeClr>
+          </a:lnRef>
+          <a:fillRef idx="1">
+            <a:schemeClr val="accent1"/>
+          </a:fillRef>
+          <a:effectRef idx="0">
+            <a:srgbClr val="FFFFFF"/>
+          </a:effectRef>
+          <a:fontRef idx="minor">
+            <a:schemeClr val="lt1"/>
+          </a:fontRef>
+        </p:style>
+        <p:txBody>
+          <a:bodyPr rtlCol="0" anchor="ctr"/>
+          <a:p>
+            <a:pPr algn="ctr"/>
+            <a:endParaRPr lang="zh-CN" altLang="en-US"/>
+          </a:p>
+        </p:txBody>
+      </p:sp>
+      <p:sp>
+        <p:nvSpPr>
+          <p:cNvPr id="8" name="右箭头 7"/>
+          <p:cNvSpPr/>
+          <p:nvPr/>
+        </p:nvSpPr>
+        <p:spPr>
+          <a:xfrm rot="1980000">
+            <a:off x="708025" y="3014345"/>
+            <a:ext cx="1122045" cy="267970"/>
+          </a:xfrm>
+          <a:prstGeom prst="rightArrow">
+            <a:avLst/>
+          </a:prstGeom>
+          <a:solidFill>
+            <a:schemeClr val="bg2">
+              <a:lumMod val="90000"/>
+              <a:alpha val="97000"/>
+            </a:schemeClr>
+          </a:solidFill>
+          <a:ln>
+            <a:solidFill>
+              <a:schemeClr val="bg2"/>
+            </a:solidFill>
+          </a:ln>
+        </p:spPr>
+        <p:style>
+          <a:lnRef idx="2">
+            <a:schemeClr val="accent1">
+              <a:lumMod val="75000"/>
+            </a:schemeClr>
+          </a:lnRef>
+          <a:fillRef idx="1">
+            <a:schemeClr val="accent1"/>
+          </a:fillRef>
+          <a:effectRef idx="0">
+            <a:srgbClr val="FFFFFF"/>
+          </a:effectRef>
+          <a:fontRef idx="minor">
+            <a:schemeClr val="lt1"/>
+          </a:fontRef>
+        </p:style>
+        <p:txBody>
+          <a:bodyPr rtlCol="0" anchor="ctr"/>
+          <a:p>
+            <a:pPr algn="ctr"/>
+            <a:endParaRPr lang="zh-CN" altLang="en-US"/>
+          </a:p>
+        </p:txBody>
+      </p:sp>
     </p:spTree>
   </p:cSld>
   <p:clrMapOvr>
@@ -26950,14 +27642,62 @@
 
 <file path=ppt/tags/tag1.xml><?xml version="1.0" encoding="utf-8"?>
 <p:tagLst xmlns:p="http://schemas.openxmlformats.org/presentationml/2006/main">
-  <p:tag name="TABLE_ENDDRAG_ORIGIN_RECT" val="355*117"/>
-  <p:tag name="TABLE_ENDDRAG_RECT" val="99*210*355*117"/>
+  <p:tag name="KSO_WM_DIAGRAM_VIRTUALLY_FRAME" val="{&quot;height&quot;:212.6,&quot;left&quot;:61.5,&quot;top&quot;:91.6,&quot;width&quot;:238.9}"/>
+</p:tagLst>
+</file>
+
+<file path=ppt/tags/tag11.xml><?xml version="1.0" encoding="utf-8"?>
+<p:tagLst xmlns:p="http://schemas.openxmlformats.org/presentationml/2006/main">
+  <p:tag name="COMMONDATA" val="eyJoZGlkIjoiZmFhOTViNmIzMjg3YjNiOWUyNWVkYjNjNDNiZjUwMzUifQ=="/>
+</p:tagLst>
+</file>
+
+<file path=ppt/tags/tag2.xml><?xml version="1.0" encoding="utf-8"?>
+<p:tagLst xmlns:p="http://schemas.openxmlformats.org/presentationml/2006/main">
+  <p:tag name="KSO_WM_DIAGRAM_VIRTUALLY_FRAME" val="{&quot;height&quot;:212.6,&quot;left&quot;:61.5,&quot;top&quot;:91.6,&quot;width&quot;:238.9}"/>
 </p:tagLst>
 </file>
 
 <file path=ppt/tags/tag3.xml><?xml version="1.0" encoding="utf-8"?>
 <p:tagLst xmlns:p="http://schemas.openxmlformats.org/presentationml/2006/main">
-  <p:tag name="COMMONDATA" val="eyJoZGlkIjoiZmFhOTViNmIzMjg3YjNiOWUyNWVkYjNjNDNiZjUwMzUifQ=="/>
+  <p:tag name="KSO_WM_DIAGRAM_VIRTUALLY_FRAME" val="{&quot;height&quot;:212.6,&quot;left&quot;:61.5,&quot;top&quot;:91.6,&quot;width&quot;:238.9}"/>
+</p:tagLst>
+</file>
+
+<file path=ppt/tags/tag4.xml><?xml version="1.0" encoding="utf-8"?>
+<p:tagLst xmlns:p="http://schemas.openxmlformats.org/presentationml/2006/main">
+  <p:tag name="KSO_WM_DIAGRAM_VIRTUALLY_FRAME" val="{&quot;height&quot;:212.6,&quot;left&quot;:61.5,&quot;top&quot;:91.6,&quot;width&quot;:238.9}"/>
+</p:tagLst>
+</file>
+
+<file path=ppt/tags/tag5.xml><?xml version="1.0" encoding="utf-8"?>
+<p:tagLst xmlns:p="http://schemas.openxmlformats.org/presentationml/2006/main">
+  <p:tag name="KSO_WM_DIAGRAM_VIRTUALLY_FRAME" val="{&quot;height&quot;:212.6,&quot;left&quot;:61.5,&quot;top&quot;:91.6,&quot;width&quot;:238.9}"/>
+</p:tagLst>
+</file>
+
+<file path=ppt/tags/tag6.xml><?xml version="1.0" encoding="utf-8"?>
+<p:tagLst xmlns:p="http://schemas.openxmlformats.org/presentationml/2006/main">
+  <p:tag name="KSO_WM_DIAGRAM_VIRTUALLY_FRAME" val="{&quot;height&quot;:212.6,&quot;left&quot;:61.5,&quot;top&quot;:91.6,&quot;width&quot;:238.9}"/>
+</p:tagLst>
+</file>
+
+<file path=ppt/tags/tag7.xml><?xml version="1.0" encoding="utf-8"?>
+<p:tagLst xmlns:p="http://schemas.openxmlformats.org/presentationml/2006/main">
+  <p:tag name="KSO_WM_DIAGRAM_VIRTUALLY_FRAME" val="{&quot;height&quot;:212.6,&quot;left&quot;:61.5,&quot;top&quot;:91.6,&quot;width&quot;:238.9}"/>
+</p:tagLst>
+</file>
+
+<file path=ppt/tags/tag8.xml><?xml version="1.0" encoding="utf-8"?>
+<p:tagLst xmlns:p="http://schemas.openxmlformats.org/presentationml/2006/main">
+  <p:tag name="KSO_WM_DIAGRAM_VIRTUALLY_FRAME" val="{&quot;height&quot;:212.6,&quot;left&quot;:61.5,&quot;top&quot;:91.6,&quot;width&quot;:238.9}"/>
+</p:tagLst>
+</file>
+
+<file path=ppt/tags/tag9.xml><?xml version="1.0" encoding="utf-8"?>
+<p:tagLst xmlns:p="http://schemas.openxmlformats.org/presentationml/2006/main">
+  <p:tag name="TABLE_ENDDRAG_ORIGIN_RECT" val="355*117"/>
+  <p:tag name="TABLE_ENDDRAG_RECT" val="99*210*355*117"/>
 </p:tagLst>
 </file>
 
@@ -27748,7 +28488,7 @@
 </s:customData>
 </file>
 
-<file path=customXml/itemProps2.xml><?xml version="1.0" encoding="utf-8"?>
+<file path=customXml/itemProps10.xml><?xml version="1.0" encoding="utf-8"?>
 <ds:datastoreItem xmlns:ds="http://schemas.openxmlformats.org/officeDocument/2006/customXml" ds:itemID="s:customData">
   <ds:schemaRefs>
     <ds:schemaRef ds:uri="http://www.wps.cn/officeDocument/2013/wpsCustomData"/>

--- a/毕业答辩/论文答辩_朱博林.pptx
+++ b/毕业答辩/论文答辩_朱博林.pptx
@@ -16,21 +16,21 @@
     <p:sldId id="368" r:id="rId9"/>
     <p:sldId id="362" r:id="rId10"/>
     <p:sldId id="370" r:id="rId11"/>
-    <p:sldId id="371" r:id="rId12"/>
-    <p:sldId id="372" r:id="rId13"/>
-    <p:sldId id="363" r:id="rId14"/>
-    <p:sldId id="373" r:id="rId15"/>
-    <p:sldId id="375" r:id="rId16"/>
-    <p:sldId id="374" r:id="rId17"/>
-    <p:sldId id="378" r:id="rId18"/>
-    <p:sldId id="376" r:id="rId19"/>
-    <p:sldId id="377" r:id="rId20"/>
-    <p:sldId id="364" r:id="rId21"/>
-    <p:sldId id="384" r:id="rId22"/>
-    <p:sldId id="386" r:id="rId23"/>
-    <p:sldId id="387" r:id="rId24"/>
-    <p:sldId id="365" r:id="rId25"/>
-    <p:sldId id="379" r:id="rId26"/>
+    <p:sldId id="372" r:id="rId12"/>
+    <p:sldId id="363" r:id="rId13"/>
+    <p:sldId id="373" r:id="rId14"/>
+    <p:sldId id="375" r:id="rId15"/>
+    <p:sldId id="374" r:id="rId16"/>
+    <p:sldId id="378" r:id="rId17"/>
+    <p:sldId id="376" r:id="rId18"/>
+    <p:sldId id="377" r:id="rId19"/>
+    <p:sldId id="364" r:id="rId20"/>
+    <p:sldId id="384" r:id="rId21"/>
+    <p:sldId id="386" r:id="rId22"/>
+    <p:sldId id="387" r:id="rId23"/>
+    <p:sldId id="365" r:id="rId24"/>
+    <p:sldId id="379" r:id="rId25"/>
+    <p:sldId id="388" r:id="rId26"/>
     <p:sldId id="381" r:id="rId27"/>
     <p:sldId id="382" r:id="rId28"/>
     <p:sldId id="383" r:id="rId29"/>
@@ -151,7 +151,6 @@
             <p14:sldId id="368"/>
             <p14:sldId id="362"/>
             <p14:sldId id="370"/>
-            <p14:sldId id="371"/>
             <p14:sldId id="372"/>
             <p14:sldId id="363"/>
             <p14:sldId id="373"/>
@@ -166,6 +165,7 @@
             <p14:sldId id="387"/>
             <p14:sldId id="365"/>
             <p14:sldId id="379"/>
+            <p14:sldId id="388"/>
             <p14:sldId id="381"/>
             <p14:sldId id="382"/>
             <p14:sldId id="383"/>
@@ -593,33 +593,63 @@
         <p:cNvGrpSpPr/>
         <p:nvPr/>
       </p:nvGrpSpPr>
-      <p:grpSpPr/>
+      <p:grpSpPr>
+        <a:xfrm>
+          <a:off x="0" y="0"/>
+          <a:ext cx="0" cy="0"/>
+          <a:chOff x="0" y="0"/>
+          <a:chExt cx="0" cy="0"/>
+        </a:xfrm>
+      </p:grpSpPr>
       <p:sp>
         <p:nvSpPr>
           <p:cNvPr id="2" name="幻灯片图像占位符 1"/>
+          <p:cNvSpPr>
+            <a:spLocks noGrp="1" noRot="1" noChangeAspect="1"/>
+          </p:cNvSpPr>
+          <p:nvPr>
+            <p:ph type="sldImg"/>
+          </p:nvPr>
+        </p:nvSpPr>
+        <p:spPr/>
+      </p:sp>
+      <p:sp>
+        <p:nvSpPr>
+          <p:cNvPr id="3" name="备注占位符 2"/>
           <p:cNvSpPr>
             <a:spLocks noGrp="1"/>
           </p:cNvSpPr>
           <p:nvPr>
-            <p:ph type="sldImg" idx="2"/>
+            <p:ph type="body" idx="1"/>
           </p:nvPr>
         </p:nvSpPr>
         <p:spPr/>
-      </p:sp>
-      <p:sp>
-        <p:nvSpPr>
-          <p:cNvPr id="3" name="文本占位符 2"/>
+        <p:txBody>
+          <a:bodyPr/>
+          <a:lstStyle/>
+          <a:p>
+            <a:endParaRPr lang="zh-CN" altLang="en-US" dirty="0"/>
+          </a:p>
+        </p:txBody>
+      </p:sp>
+      <p:sp>
+        <p:nvSpPr>
+          <p:cNvPr id="4" name="灯片编号占位符 3"/>
           <p:cNvSpPr>
             <a:spLocks noGrp="1"/>
           </p:cNvSpPr>
           <p:nvPr>
-            <p:ph type="body" idx="3"/>
+            <p:ph type="sldNum" sz="quarter" idx="10"/>
           </p:nvPr>
         </p:nvSpPr>
         <p:spPr/>
         <p:txBody>
           <a:bodyPr/>
-          <a:p>
+          <a:lstStyle/>
+          <a:p>
+            <a:fld id="{6D665937-FCC7-47CE-8B46-06F747D53510}" type="slidenum">
+              <a:rPr lang="zh-CN" altLang="en-US" smtClean="0"/>
+            </a:fld>
             <a:endParaRPr lang="zh-CN" altLang="en-US"/>
           </a:p>
         </p:txBody>
@@ -1031,63 +1061,33 @@
         <p:cNvGrpSpPr/>
         <p:nvPr/>
       </p:nvGrpSpPr>
-      <p:grpSpPr>
-        <a:xfrm>
-          <a:off x="0" y="0"/>
-          <a:ext cx="0" cy="0"/>
-          <a:chOff x="0" y="0"/>
-          <a:chExt cx="0" cy="0"/>
-        </a:xfrm>
-      </p:grpSpPr>
+      <p:grpSpPr/>
       <p:sp>
         <p:nvSpPr>
           <p:cNvPr id="2" name="幻灯片图像占位符 1"/>
-          <p:cNvSpPr>
-            <a:spLocks noGrp="1" noRot="1" noChangeAspect="1"/>
-          </p:cNvSpPr>
-          <p:nvPr>
-            <p:ph type="sldImg"/>
-          </p:nvPr>
-        </p:nvSpPr>
-        <p:spPr/>
-      </p:sp>
-      <p:sp>
-        <p:nvSpPr>
-          <p:cNvPr id="3" name="备注占位符 2"/>
           <p:cNvSpPr>
             <a:spLocks noGrp="1"/>
           </p:cNvSpPr>
           <p:nvPr>
-            <p:ph type="body" idx="1"/>
+            <p:ph type="sldImg" idx="2"/>
           </p:nvPr>
         </p:nvSpPr>
         <p:spPr/>
-        <p:txBody>
-          <a:bodyPr/>
-          <a:lstStyle/>
-          <a:p>
-            <a:endParaRPr lang="zh-CN" altLang="en-US" dirty="0"/>
-          </a:p>
-        </p:txBody>
-      </p:sp>
-      <p:sp>
-        <p:nvSpPr>
-          <p:cNvPr id="4" name="灯片编号占位符 3"/>
+      </p:sp>
+      <p:sp>
+        <p:nvSpPr>
+          <p:cNvPr id="3" name="文本占位符 2"/>
           <p:cNvSpPr>
             <a:spLocks noGrp="1"/>
           </p:cNvSpPr>
           <p:nvPr>
-            <p:ph type="sldNum" sz="quarter" idx="10"/>
+            <p:ph type="body" idx="3"/>
           </p:nvPr>
         </p:nvSpPr>
         <p:spPr/>
         <p:txBody>
           <a:bodyPr/>
-          <a:lstStyle/>
-          <a:p>
-            <a:fld id="{6D665937-FCC7-47CE-8B46-06F747D53510}" type="slidenum">
-              <a:rPr lang="zh-CN" altLang="en-US" smtClean="0"/>
-            </a:fld>
+          <a:p>
             <a:endParaRPr lang="zh-CN" altLang="en-US"/>
           </a:p>
         </p:txBody>
@@ -1109,33 +1109,63 @@
         <p:cNvGrpSpPr/>
         <p:nvPr/>
       </p:nvGrpSpPr>
-      <p:grpSpPr/>
+      <p:grpSpPr>
+        <a:xfrm>
+          <a:off x="0" y="0"/>
+          <a:ext cx="0" cy="0"/>
+          <a:chOff x="0" y="0"/>
+          <a:chExt cx="0" cy="0"/>
+        </a:xfrm>
+      </p:grpSpPr>
       <p:sp>
         <p:nvSpPr>
           <p:cNvPr id="2" name="幻灯片图像占位符 1"/>
+          <p:cNvSpPr>
+            <a:spLocks noGrp="1" noRot="1" noChangeAspect="1"/>
+          </p:cNvSpPr>
+          <p:nvPr>
+            <p:ph type="sldImg"/>
+          </p:nvPr>
+        </p:nvSpPr>
+        <p:spPr/>
+      </p:sp>
+      <p:sp>
+        <p:nvSpPr>
+          <p:cNvPr id="3" name="备注占位符 2"/>
           <p:cNvSpPr>
             <a:spLocks noGrp="1"/>
           </p:cNvSpPr>
           <p:nvPr>
-            <p:ph type="sldImg" idx="2"/>
+            <p:ph type="body" idx="1"/>
           </p:nvPr>
         </p:nvSpPr>
         <p:spPr/>
-      </p:sp>
-      <p:sp>
-        <p:nvSpPr>
-          <p:cNvPr id="3" name="文本占位符 2"/>
+        <p:txBody>
+          <a:bodyPr/>
+          <a:lstStyle/>
+          <a:p>
+            <a:endParaRPr lang="zh-CN" altLang="en-US" dirty="0"/>
+          </a:p>
+        </p:txBody>
+      </p:sp>
+      <p:sp>
+        <p:nvSpPr>
+          <p:cNvPr id="4" name="灯片编号占位符 3"/>
           <p:cNvSpPr>
             <a:spLocks noGrp="1"/>
           </p:cNvSpPr>
           <p:nvPr>
-            <p:ph type="body" idx="3"/>
+            <p:ph type="sldNum" sz="quarter" idx="10"/>
           </p:nvPr>
         </p:nvSpPr>
         <p:spPr/>
         <p:txBody>
           <a:bodyPr/>
-          <a:p>
+          <a:lstStyle/>
+          <a:p>
+            <a:fld id="{6D665937-FCC7-47CE-8B46-06F747D53510}" type="slidenum">
+              <a:rPr lang="zh-CN" altLang="en-US" smtClean="0"/>
+            </a:fld>
             <a:endParaRPr lang="zh-CN" altLang="en-US"/>
           </a:p>
         </p:txBody>
@@ -1361,63 +1391,33 @@
         <p:cNvGrpSpPr/>
         <p:nvPr/>
       </p:nvGrpSpPr>
-      <p:grpSpPr>
-        <a:xfrm>
-          <a:off x="0" y="0"/>
-          <a:ext cx="0" cy="0"/>
-          <a:chOff x="0" y="0"/>
-          <a:chExt cx="0" cy="0"/>
-        </a:xfrm>
-      </p:grpSpPr>
+      <p:grpSpPr/>
       <p:sp>
         <p:nvSpPr>
           <p:cNvPr id="2" name="幻灯片图像占位符 1"/>
-          <p:cNvSpPr>
-            <a:spLocks noGrp="1" noRot="1" noChangeAspect="1"/>
-          </p:cNvSpPr>
-          <p:nvPr>
-            <p:ph type="sldImg"/>
-          </p:nvPr>
-        </p:nvSpPr>
-        <p:spPr/>
-      </p:sp>
-      <p:sp>
-        <p:nvSpPr>
-          <p:cNvPr id="3" name="备注占位符 2"/>
           <p:cNvSpPr>
             <a:spLocks noGrp="1"/>
           </p:cNvSpPr>
           <p:nvPr>
-            <p:ph type="body" idx="1"/>
+            <p:ph type="sldImg" idx="2"/>
           </p:nvPr>
         </p:nvSpPr>
         <p:spPr/>
-        <p:txBody>
-          <a:bodyPr/>
-          <a:lstStyle/>
-          <a:p>
-            <a:endParaRPr lang="zh-CN" altLang="en-US" dirty="0"/>
-          </a:p>
-        </p:txBody>
-      </p:sp>
-      <p:sp>
-        <p:nvSpPr>
-          <p:cNvPr id="4" name="灯片编号占位符 3"/>
+      </p:sp>
+      <p:sp>
+        <p:nvSpPr>
+          <p:cNvPr id="3" name="文本占位符 2"/>
           <p:cNvSpPr>
             <a:spLocks noGrp="1"/>
           </p:cNvSpPr>
           <p:nvPr>
-            <p:ph type="sldNum" sz="quarter" idx="10"/>
+            <p:ph type="body" idx="3"/>
           </p:nvPr>
         </p:nvSpPr>
         <p:spPr/>
         <p:txBody>
           <a:bodyPr/>
-          <a:lstStyle/>
-          <a:p>
-            <a:fld id="{6D665937-FCC7-47CE-8B46-06F747D53510}" type="slidenum">
-              <a:rPr lang="zh-CN" altLang="en-US" smtClean="0"/>
-            </a:fld>
+          <a:p>
             <a:endParaRPr lang="zh-CN" altLang="en-US"/>
           </a:p>
         </p:txBody>
@@ -1439,33 +1439,63 @@
         <p:cNvGrpSpPr/>
         <p:nvPr/>
       </p:nvGrpSpPr>
-      <p:grpSpPr/>
+      <p:grpSpPr>
+        <a:xfrm>
+          <a:off x="0" y="0"/>
+          <a:ext cx="0" cy="0"/>
+          <a:chOff x="0" y="0"/>
+          <a:chExt cx="0" cy="0"/>
+        </a:xfrm>
+      </p:grpSpPr>
       <p:sp>
         <p:nvSpPr>
           <p:cNvPr id="2" name="幻灯片图像占位符 1"/>
+          <p:cNvSpPr>
+            <a:spLocks noGrp="1" noRot="1" noChangeAspect="1"/>
+          </p:cNvSpPr>
+          <p:nvPr>
+            <p:ph type="sldImg"/>
+          </p:nvPr>
+        </p:nvSpPr>
+        <p:spPr/>
+      </p:sp>
+      <p:sp>
+        <p:nvSpPr>
+          <p:cNvPr id="3" name="备注占位符 2"/>
           <p:cNvSpPr>
             <a:spLocks noGrp="1"/>
           </p:cNvSpPr>
           <p:nvPr>
-            <p:ph type="sldImg" idx="2"/>
+            <p:ph type="body" idx="1"/>
           </p:nvPr>
         </p:nvSpPr>
         <p:spPr/>
-      </p:sp>
-      <p:sp>
-        <p:nvSpPr>
-          <p:cNvPr id="3" name="文本占位符 2"/>
+        <p:txBody>
+          <a:bodyPr/>
+          <a:lstStyle/>
+          <a:p>
+            <a:endParaRPr lang="zh-CN" altLang="en-US" dirty="0"/>
+          </a:p>
+        </p:txBody>
+      </p:sp>
+      <p:sp>
+        <p:nvSpPr>
+          <p:cNvPr id="4" name="灯片编号占位符 3"/>
           <p:cNvSpPr>
             <a:spLocks noGrp="1"/>
           </p:cNvSpPr>
           <p:nvPr>
-            <p:ph type="body" idx="3"/>
+            <p:ph type="sldNum" sz="quarter" idx="10"/>
           </p:nvPr>
         </p:nvSpPr>
         <p:spPr/>
         <p:txBody>
           <a:bodyPr/>
-          <a:p>
+          <a:lstStyle/>
+          <a:p>
+            <a:fld id="{6D665937-FCC7-47CE-8B46-06F747D53510}" type="slidenum">
+              <a:rPr lang="zh-CN" altLang="en-US" smtClean="0"/>
+            </a:fld>
             <a:endParaRPr lang="zh-CN" altLang="en-US"/>
           </a:p>
         </p:txBody>
@@ -2483,63 +2513,33 @@
         <p:cNvGrpSpPr/>
         <p:nvPr/>
       </p:nvGrpSpPr>
-      <p:grpSpPr>
-        <a:xfrm>
-          <a:off x="0" y="0"/>
-          <a:ext cx="0" cy="0"/>
-          <a:chOff x="0" y="0"/>
-          <a:chExt cx="0" cy="0"/>
-        </a:xfrm>
-      </p:grpSpPr>
+      <p:grpSpPr/>
       <p:sp>
         <p:nvSpPr>
           <p:cNvPr id="2" name="幻灯片图像占位符 1"/>
-          <p:cNvSpPr>
-            <a:spLocks noGrp="1" noRot="1" noChangeAspect="1"/>
-          </p:cNvSpPr>
-          <p:nvPr>
-            <p:ph type="sldImg"/>
-          </p:nvPr>
-        </p:nvSpPr>
-        <p:spPr/>
-      </p:sp>
-      <p:sp>
-        <p:nvSpPr>
-          <p:cNvPr id="3" name="备注占位符 2"/>
           <p:cNvSpPr>
             <a:spLocks noGrp="1"/>
           </p:cNvSpPr>
           <p:nvPr>
-            <p:ph type="body" idx="1"/>
+            <p:ph type="sldImg" idx="2"/>
           </p:nvPr>
         </p:nvSpPr>
         <p:spPr/>
-        <p:txBody>
-          <a:bodyPr/>
-          <a:lstStyle/>
-          <a:p>
-            <a:endParaRPr lang="zh-CN" altLang="en-US" dirty="0"/>
-          </a:p>
-        </p:txBody>
-      </p:sp>
-      <p:sp>
-        <p:nvSpPr>
-          <p:cNvPr id="4" name="灯片编号占位符 3"/>
+      </p:sp>
+      <p:sp>
+        <p:nvSpPr>
+          <p:cNvPr id="3" name="文本占位符 2"/>
           <p:cNvSpPr>
             <a:spLocks noGrp="1"/>
           </p:cNvSpPr>
           <p:nvPr>
-            <p:ph type="sldNum" sz="quarter" idx="10"/>
+            <p:ph type="body" idx="3"/>
           </p:nvPr>
         </p:nvSpPr>
         <p:spPr/>
         <p:txBody>
           <a:bodyPr/>
-          <a:lstStyle/>
-          <a:p>
-            <a:fld id="{6D665937-FCC7-47CE-8B46-06F747D53510}" type="slidenum">
-              <a:rPr lang="zh-CN" altLang="en-US" smtClean="0"/>
-            </a:fld>
+          <a:p>
             <a:endParaRPr lang="zh-CN" altLang="en-US"/>
           </a:p>
         </p:txBody>
@@ -13813,107 +13813,6 @@
       </p:grpSpPr>
       <p:sp>
         <p:nvSpPr>
-          <p:cNvPr id="6" name="标题 5"/>
-          <p:cNvSpPr>
-            <a:spLocks noGrp="1"/>
-          </p:cNvSpPr>
-          <p:nvPr>
-            <p:ph type="title"/>
-          </p:nvPr>
-        </p:nvSpPr>
-        <p:spPr>
-          <a:xfrm>
-            <a:off x="0" y="1282065"/>
-            <a:ext cx="6864985" cy="1292860"/>
-          </a:xfrm>
-        </p:spPr>
-        <p:txBody>
-          <a:bodyPr/>
-          <a:lstStyle/>
-          <a:p>
-            <a:pPr algn="ctr"/>
-            <a:r>
-              <a:rPr lang="zh-CN" altLang="en-US" dirty="0">
-                <a:sym typeface="+mn-ea"/>
-              </a:rPr>
-              <a:t>基于公式的数值推理数据集构建</a:t>
-            </a:r>
-            <a:endParaRPr lang="zh-CN" altLang="en-US" dirty="0"/>
-          </a:p>
-        </p:txBody>
-      </p:sp>
-      <p:sp>
-        <p:nvSpPr>
-          <p:cNvPr id="3" name="日期占位符 2"/>
-          <p:cNvSpPr>
-            <a:spLocks noGrp="1"/>
-          </p:cNvSpPr>
-          <p:nvPr>
-            <p:ph type="dt" sz="half" idx="10"/>
-          </p:nvPr>
-        </p:nvSpPr>
-        <p:spPr/>
-        <p:txBody>
-          <a:bodyPr/>
-          <a:lstStyle/>
-          <a:p>
-            <a:fld id="{2FBB519E-D9EB-47F0-AD65-082D85248404}" type="datetime1">
-              <a:rPr lang="zh-CN" altLang="en-US" smtClean="0"/>
-            </a:fld>
-            <a:endParaRPr lang="zh-CN" altLang="en-US" dirty="0"/>
-          </a:p>
-        </p:txBody>
-      </p:sp>
-      <p:sp>
-        <p:nvSpPr>
-          <p:cNvPr id="4" name="灯片编号占位符 3"/>
-          <p:cNvSpPr>
-            <a:spLocks noGrp="1"/>
-          </p:cNvSpPr>
-          <p:nvPr>
-            <p:ph type="sldNum" sz="quarter" idx="11"/>
-          </p:nvPr>
-        </p:nvSpPr>
-        <p:spPr/>
-        <p:txBody>
-          <a:bodyPr/>
-          <a:lstStyle/>
-          <a:p>
-            <a:fld id="{463E1EE8-403A-4D2D-AB26-5BF439A27F60}" type="slidenum">
-              <a:rPr lang="zh-CN" altLang="en-US" smtClean="0"/>
-            </a:fld>
-            <a:endParaRPr lang="zh-CN" altLang="en-US" dirty="0"/>
-          </a:p>
-        </p:txBody>
-      </p:sp>
-    </p:spTree>
-  </p:cSld>
-  <p:clrMapOvr>
-    <a:masterClrMapping/>
-  </p:clrMapOvr>
-  <p:transition/>
-</p:sld>
-</file>
-
-<file path=ppt/slides/slide11.xml><?xml version="1.0" encoding="utf-8"?>
-<p:sld xmlns:a="http://schemas.openxmlformats.org/drawingml/2006/main" xmlns:r="http://schemas.openxmlformats.org/officeDocument/2006/relationships" xmlns:p="http://schemas.openxmlformats.org/presentationml/2006/main">
-  <p:cSld>
-    <p:spTree>
-      <p:nvGrpSpPr>
-        <p:cNvPr id="1" name=""/>
-        <p:cNvGrpSpPr/>
-        <p:nvPr/>
-      </p:nvGrpSpPr>
-      <p:grpSpPr>
-        <a:xfrm>
-          <a:off x="0" y="0"/>
-          <a:ext cx="0" cy="0"/>
-          <a:chOff x="0" y="0"/>
-          <a:chExt cx="0" cy="0"/>
-        </a:xfrm>
-      </p:grpSpPr>
-      <p:sp>
-        <p:nvSpPr>
           <p:cNvPr id="3" name="日期占位符 2"/>
           <p:cNvSpPr>
             <a:spLocks noGrp="1"/>
@@ -14178,7 +14077,7 @@
 </p:sld>
 </file>
 
-<file path=ppt/slides/slide12.xml><?xml version="1.0" encoding="utf-8"?>
+<file path=ppt/slides/slide11.xml><?xml version="1.0" encoding="utf-8"?>
 <p:sld xmlns:a="http://schemas.openxmlformats.org/drawingml/2006/main" xmlns:r="http://schemas.openxmlformats.org/officeDocument/2006/relationships" xmlns:p="http://schemas.openxmlformats.org/presentationml/2006/main">
   <p:cSld>
     <p:spTree>
@@ -15938,7 +15837,7 @@
 </p:sld>
 </file>
 
-<file path=ppt/slides/slide13.xml><?xml version="1.0" encoding="utf-8"?>
+<file path=ppt/slides/slide12.xml><?xml version="1.0" encoding="utf-8"?>
 <p:sld xmlns:a="http://schemas.openxmlformats.org/drawingml/2006/main" xmlns:r="http://schemas.openxmlformats.org/officeDocument/2006/relationships" xmlns:p="http://schemas.openxmlformats.org/presentationml/2006/main">
   <p:cSld>
     <p:spTree>
@@ -16511,7 +16410,7 @@
 </p:sld>
 </file>
 
-<file path=ppt/slides/slide14.xml><?xml version="1.0" encoding="utf-8"?>
+<file path=ppt/slides/slide13.xml><?xml version="1.0" encoding="utf-8"?>
 <p:sld xmlns:a="http://schemas.openxmlformats.org/drawingml/2006/main" xmlns:r="http://schemas.openxmlformats.org/officeDocument/2006/relationships" xmlns:p="http://schemas.openxmlformats.org/presentationml/2006/main">
   <p:cSld>
     <p:spTree>
@@ -17856,7 +17755,7 @@
 </p:sld>
 </file>
 
-<file path=ppt/slides/slide15.xml><?xml version="1.0" encoding="utf-8"?>
+<file path=ppt/slides/slide14.xml><?xml version="1.0" encoding="utf-8"?>
 <p:sld xmlns:a="http://schemas.openxmlformats.org/drawingml/2006/main" xmlns:r="http://schemas.openxmlformats.org/officeDocument/2006/relationships" xmlns:p="http://schemas.openxmlformats.org/presentationml/2006/main">
   <p:cSld>
     <p:spTree>
@@ -19019,7 +18918,7 @@
 </p:sld>
 </file>
 
-<file path=ppt/slides/slide16.xml><?xml version="1.0" encoding="utf-8"?>
+<file path=ppt/slides/slide15.xml><?xml version="1.0" encoding="utf-8"?>
 <p:sld xmlns:a="http://schemas.openxmlformats.org/drawingml/2006/main" xmlns:r="http://schemas.openxmlformats.org/officeDocument/2006/relationships" xmlns:p="http://schemas.openxmlformats.org/presentationml/2006/main">
   <p:cSld>
     <p:spTree>
@@ -19484,7 +19383,7 @@
 </p:sld>
 </file>
 
-<file path=ppt/slides/slide17.xml><?xml version="1.0" encoding="utf-8"?>
+<file path=ppt/slides/slide16.xml><?xml version="1.0" encoding="utf-8"?>
 <p:sld xmlns:a="http://schemas.openxmlformats.org/drawingml/2006/main" xmlns:r="http://schemas.openxmlformats.org/officeDocument/2006/relationships" xmlns:p="http://schemas.openxmlformats.org/presentationml/2006/main">
   <p:cSld>
     <p:spTree>
@@ -19591,7 +19490,7 @@
 </p:sld>
 </file>
 
-<file path=ppt/slides/slide18.xml><?xml version="1.0" encoding="utf-8"?>
+<file path=ppt/slides/slide17.xml><?xml version="1.0" encoding="utf-8"?>
 <p:sld xmlns:a="http://schemas.openxmlformats.org/drawingml/2006/main" xmlns:r="http://schemas.openxmlformats.org/officeDocument/2006/relationships" xmlns:p="http://schemas.openxmlformats.org/presentationml/2006/main">
   <p:cSld>
     <p:spTree>
@@ -20210,7 +20109,7 @@
 </p:sld>
 </file>
 
-<file path=ppt/slides/slide19.xml><?xml version="1.0" encoding="utf-8"?>
+<file path=ppt/slides/slide18.xml><?xml version="1.0" encoding="utf-8"?>
 <p:sld xmlns:a="http://schemas.openxmlformats.org/drawingml/2006/main" xmlns:r="http://schemas.openxmlformats.org/officeDocument/2006/relationships" xmlns:p="http://schemas.openxmlformats.org/presentationml/2006/main">
   <p:cSld>
     <p:spTree>
@@ -20505,6 +20404,269 @@
             <a:r>
               <a:rPr lang="zh-CN" altLang="en-US" sz="1400" dirty="0"/>
               <a:t>优化</a:t>
+            </a:r>
+            <a:endParaRPr lang="zh-CN" altLang="en-US" sz="1400" dirty="0"/>
+          </a:p>
+        </p:txBody>
+      </p:sp>
+    </p:spTree>
+  </p:cSld>
+  <p:clrMapOvr>
+    <a:masterClrMapping/>
+  </p:clrMapOvr>
+  <p:transition/>
+</p:sld>
+</file>
+
+<file path=ppt/slides/slide19.xml><?xml version="1.0" encoding="utf-8"?>
+<p:sld xmlns:a="http://schemas.openxmlformats.org/drawingml/2006/main" xmlns:r="http://schemas.openxmlformats.org/officeDocument/2006/relationships" xmlns:p="http://schemas.openxmlformats.org/presentationml/2006/main">
+  <p:cSld>
+    <p:spTree>
+      <p:nvGrpSpPr>
+        <p:cNvPr id="1" name=""/>
+        <p:cNvGrpSpPr/>
+        <p:nvPr/>
+      </p:nvGrpSpPr>
+      <p:grpSpPr>
+        <a:xfrm>
+          <a:off x="0" y="0"/>
+          <a:ext cx="0" cy="0"/>
+          <a:chOff x="0" y="0"/>
+          <a:chExt cx="0" cy="0"/>
+        </a:xfrm>
+      </p:grpSpPr>
+      <p:sp>
+        <p:nvSpPr>
+          <p:cNvPr id="3" name="日期占位符 2"/>
+          <p:cNvSpPr>
+            <a:spLocks noGrp="1"/>
+          </p:cNvSpPr>
+          <p:nvPr>
+            <p:ph type="dt" sz="half" idx="10"/>
+          </p:nvPr>
+        </p:nvSpPr>
+        <p:spPr/>
+        <p:txBody>
+          <a:bodyPr/>
+          <a:lstStyle/>
+          <a:p>
+            <a:fld id="{137329C2-3C36-4069-9E85-5BF3A0DCB578}" type="datetime1">
+              <a:rPr lang="zh-CN" altLang="en-US" smtClean="0"/>
+            </a:fld>
+            <a:endParaRPr lang="zh-CN" altLang="en-US" dirty="0"/>
+          </a:p>
+        </p:txBody>
+      </p:sp>
+      <p:sp>
+        <p:nvSpPr>
+          <p:cNvPr id="4" name="灯片编号占位符 3"/>
+          <p:cNvSpPr>
+            <a:spLocks noGrp="1"/>
+          </p:cNvSpPr>
+          <p:nvPr>
+            <p:ph type="sldNum" sz="quarter" idx="11"/>
+          </p:nvPr>
+        </p:nvSpPr>
+        <p:spPr/>
+        <p:txBody>
+          <a:bodyPr/>
+          <a:lstStyle/>
+          <a:p>
+            <a:fld id="{463E1EE8-403A-4D2D-AB26-5BF439A27F60}" type="slidenum">
+              <a:rPr lang="zh-CN" altLang="en-US" smtClean="0"/>
+            </a:fld>
+            <a:endParaRPr lang="zh-CN" altLang="en-US" dirty="0"/>
+          </a:p>
+        </p:txBody>
+      </p:sp>
+      <p:sp>
+        <p:nvSpPr>
+          <p:cNvPr id="10" name="标题 11"/>
+          <p:cNvSpPr>
+            <a:spLocks noGrp="1"/>
+          </p:cNvSpPr>
+          <p:nvPr/>
+        </p:nvSpPr>
+        <p:spPr>
+          <a:xfrm>
+            <a:off x="471924" y="360000"/>
+            <a:ext cx="5920502" cy="489600"/>
+          </a:xfrm>
+          <a:prstGeom prst="rect">
+            <a:avLst/>
+          </a:prstGeom>
+        </p:spPr>
+        <p:txBody>
+          <a:bodyPr vert="horz" lIns="91440" tIns="45720" rIns="91440" bIns="45720" rtlCol="0" anchor="ctr">
+            <a:normAutofit/>
+          </a:bodyPr>
+          <a:lstStyle>
+            <a:lvl1pPr algn="l" defTabSz="514985" rtl="0" eaLnBrk="1" latinLnBrk="0" hangingPunct="1">
+              <a:lnSpc>
+                <a:spcPct val="90000"/>
+              </a:lnSpc>
+              <a:spcBef>
+                <a:spcPct val="0"/>
+              </a:spcBef>
+              <a:buNone/>
+              <a:defRPr sz="2100" kern="1200" baseline="0">
+                <a:solidFill>
+                  <a:srgbClr val="63065F"/>
+                </a:solidFill>
+                <a:latin typeface="Arial" panose="020B0604020202020204" pitchFamily="34" charset="0"/>
+                <a:ea typeface="+mj-ea"/>
+                <a:cs typeface="Arial" panose="020B0604020202020204" pitchFamily="34" charset="0"/>
+              </a:defRPr>
+            </a:lvl1pPr>
+          </a:lstStyle>
+          <a:p>
+            <a:r>
+              <a:rPr lang="zh-CN" altLang="en-US" dirty="0">
+                <a:sym typeface="+mn-ea"/>
+              </a:rPr>
+              <a:t>基于公式的数值推理方法评测</a:t>
+            </a:r>
+            <a:r>
+              <a:rPr lang="en-US" altLang="zh-CN" dirty="0">
+                <a:sym typeface="+mn-ea"/>
+              </a:rPr>
+              <a:t>-</a:t>
+            </a:r>
+            <a:r>
+              <a:rPr lang="zh-CN" altLang="en-US" dirty="0">
+                <a:sym typeface="+mn-ea"/>
+              </a:rPr>
+              <a:t>评测</a:t>
+            </a:r>
+            <a:r>
+              <a:rPr lang="zh-CN" altLang="en-US" dirty="0">
+                <a:sym typeface="+mn-ea"/>
+              </a:rPr>
+              <a:t>结果</a:t>
+            </a:r>
+            <a:endParaRPr lang="zh-CN" altLang="en-US" dirty="0">
+              <a:sym typeface="+mn-ea"/>
+            </a:endParaRPr>
+          </a:p>
+        </p:txBody>
+      </p:sp>
+      <p:sp>
+        <p:nvSpPr>
+          <p:cNvPr id="29" name="文本框 28"/>
+          <p:cNvSpPr txBox="1"/>
+          <p:nvPr/>
+        </p:nvSpPr>
+        <p:spPr>
+          <a:xfrm>
+            <a:off x="471805" y="815340"/>
+            <a:ext cx="6179185" cy="414020"/>
+          </a:xfrm>
+          <a:prstGeom prst="rect">
+            <a:avLst/>
+          </a:prstGeom>
+          <a:noFill/>
+        </p:spPr>
+        <p:txBody>
+          <a:bodyPr wrap="square" rtlCol="0">
+            <a:spAutoFit/>
+          </a:bodyPr>
+          <a:lstStyle/>
+          <a:p>
+            <a:pPr marL="285750" indent="-285750">
+              <a:lnSpc>
+                <a:spcPct val="150000"/>
+              </a:lnSpc>
+              <a:buFont typeface="Wingdings" panose="05000000000000000000" pitchFamily="2" charset="2"/>
+              <a:buChar char="n"/>
+            </a:pPr>
+            <a:r>
+              <a:rPr lang="zh-CN" altLang="en-US" sz="1400" dirty="0"/>
+              <a:t>下面为直接偏好优化方法的评测</a:t>
+            </a:r>
+            <a:r>
+              <a:rPr lang="zh-CN" altLang="en-US" sz="1400" dirty="0"/>
+              <a:t>结果</a:t>
+            </a:r>
+            <a:endParaRPr lang="zh-CN" altLang="en-US" sz="1400" dirty="0"/>
+          </a:p>
+        </p:txBody>
+      </p:sp>
+      <p:pic>
+        <p:nvPicPr>
+          <p:cNvPr id="5" name="图片 4"/>
+          <p:cNvPicPr>
+            <a:picLocks noChangeAspect="1"/>
+          </p:cNvPicPr>
+          <p:nvPr/>
+        </p:nvPicPr>
+        <p:blipFill>
+          <a:blip r:embed="rId1"/>
+          <a:stretch>
+            <a:fillRect/>
+          </a:stretch>
+        </p:blipFill>
+        <p:spPr>
+          <a:xfrm>
+            <a:off x="471805" y="1338580"/>
+            <a:ext cx="6419850" cy="2063750"/>
+          </a:xfrm>
+          <a:prstGeom prst="rect">
+            <a:avLst/>
+          </a:prstGeom>
+        </p:spPr>
+      </p:pic>
+      <p:sp>
+        <p:nvSpPr>
+          <p:cNvPr id="6" name="文本框 5"/>
+          <p:cNvSpPr txBox="1"/>
+          <p:nvPr/>
+        </p:nvSpPr>
+        <p:spPr>
+          <a:xfrm>
+            <a:off x="471805" y="3616325"/>
+            <a:ext cx="6179185" cy="737235"/>
+          </a:xfrm>
+          <a:prstGeom prst="rect">
+            <a:avLst/>
+          </a:prstGeom>
+          <a:noFill/>
+        </p:spPr>
+        <p:txBody>
+          <a:bodyPr wrap="square" rtlCol="0">
+            <a:spAutoFit/>
+          </a:bodyPr>
+          <a:lstStyle/>
+          <a:p>
+            <a:pPr indent="0">
+              <a:lnSpc>
+                <a:spcPct val="150000"/>
+              </a:lnSpc>
+              <a:buFont typeface="Wingdings" panose="05000000000000000000" pitchFamily="2" charset="2"/>
+              <a:buNone/>
+            </a:pPr>
+            <a:r>
+              <a:rPr lang="zh-CN" altLang="en-US" sz="1400" dirty="0"/>
+              <a:t>在</a:t>
+            </a:r>
+            <a:r>
+              <a:rPr lang="en-US" altLang="zh-CN" sz="1400" dirty="0"/>
+              <a:t>FormulaReasoning</a:t>
+            </a:r>
+            <a:r>
+              <a:rPr lang="zh-CN" altLang="en-US" sz="1400" dirty="0"/>
+              <a:t>对应的偏好数据上进行优化后，在其他数据集上仍然保留较好的泛化性，在其他数据集表现</a:t>
+            </a:r>
+            <a:r>
+              <a:rPr lang="zh-CN" altLang="en-US" sz="1400" dirty="0"/>
+              <a:t>上多数情况</a:t>
+            </a:r>
+            <a:r>
+              <a:rPr lang="zh-CN" altLang="en-US" sz="1400" dirty="0"/>
+              <a:t>也有性能</a:t>
+            </a:r>
+            <a:r>
+              <a:rPr lang="zh-CN" altLang="en-US" sz="1400" dirty="0"/>
+              <a:t>提升</a:t>
             </a:r>
             <a:endParaRPr lang="zh-CN" altLang="en-US" sz="1400" dirty="0"/>
           </a:p>
@@ -20763,6 +20925,37 @@
       </p:grpSpPr>
       <p:sp>
         <p:nvSpPr>
+          <p:cNvPr id="6" name="标题 5"/>
+          <p:cNvSpPr>
+            <a:spLocks noGrp="1"/>
+          </p:cNvSpPr>
+          <p:nvPr>
+            <p:ph type="title"/>
+          </p:nvPr>
+        </p:nvSpPr>
+        <p:spPr>
+          <a:xfrm>
+            <a:off x="0" y="1282065"/>
+            <a:ext cx="6864985" cy="1292860"/>
+          </a:xfrm>
+        </p:spPr>
+        <p:txBody>
+          <a:bodyPr/>
+          <a:lstStyle/>
+          <a:p>
+            <a:pPr algn="ctr"/>
+            <a:r>
+              <a:rPr lang="zh-CN" altLang="en-US" dirty="0">
+                <a:sym typeface="+mn-ea"/>
+              </a:rPr>
+              <a:t>一种基于公式的数值推理方法</a:t>
+            </a:r>
+            <a:endParaRPr lang="zh-CN" altLang="en-US" dirty="0"/>
+          </a:p>
+        </p:txBody>
+      </p:sp>
+      <p:sp>
+        <p:nvSpPr>
           <p:cNvPr id="3" name="日期占位符 2"/>
           <p:cNvSpPr>
             <a:spLocks noGrp="1"/>
@@ -20776,7 +20969,7 @@
           <a:bodyPr/>
           <a:lstStyle/>
           <a:p>
-            <a:fld id="{137329C2-3C36-4069-9E85-5BF3A0DCB578}" type="datetime1">
+            <a:fld id="{2FBB519E-D9EB-47F0-AD65-082D85248404}" type="datetime1">
               <a:rPr lang="zh-CN" altLang="en-US" smtClean="0"/>
             </a:fld>
             <a:endParaRPr lang="zh-CN" altLang="en-US" dirty="0"/>
@@ -20802,199 +20995,6 @@
               <a:rPr lang="zh-CN" altLang="en-US" smtClean="0"/>
             </a:fld>
             <a:endParaRPr lang="zh-CN" altLang="en-US" dirty="0"/>
-          </a:p>
-        </p:txBody>
-      </p:sp>
-      <p:sp>
-        <p:nvSpPr>
-          <p:cNvPr id="10" name="标题 11"/>
-          <p:cNvSpPr>
-            <a:spLocks noGrp="1"/>
-          </p:cNvSpPr>
-          <p:nvPr/>
-        </p:nvSpPr>
-        <p:spPr>
-          <a:xfrm>
-            <a:off x="471924" y="360000"/>
-            <a:ext cx="5920502" cy="489600"/>
-          </a:xfrm>
-          <a:prstGeom prst="rect">
-            <a:avLst/>
-          </a:prstGeom>
-        </p:spPr>
-        <p:txBody>
-          <a:bodyPr vert="horz" lIns="91440" tIns="45720" rIns="91440" bIns="45720" rtlCol="0" anchor="ctr">
-            <a:normAutofit/>
-          </a:bodyPr>
-          <a:lstStyle>
-            <a:lvl1pPr algn="l" defTabSz="514985" rtl="0" eaLnBrk="1" latinLnBrk="0" hangingPunct="1">
-              <a:lnSpc>
-                <a:spcPct val="90000"/>
-              </a:lnSpc>
-              <a:spcBef>
-                <a:spcPct val="0"/>
-              </a:spcBef>
-              <a:buNone/>
-              <a:defRPr sz="2100" kern="1200" baseline="0">
-                <a:solidFill>
-                  <a:srgbClr val="63065F"/>
-                </a:solidFill>
-                <a:latin typeface="Arial" panose="020B0604020202020204" pitchFamily="34" charset="0"/>
-                <a:ea typeface="+mj-ea"/>
-                <a:cs typeface="Arial" panose="020B0604020202020204" pitchFamily="34" charset="0"/>
-              </a:defRPr>
-            </a:lvl1pPr>
-          </a:lstStyle>
-          <a:p>
-            <a:r>
-              <a:rPr lang="zh-CN" altLang="en-US" dirty="0">
-                <a:sym typeface="+mn-ea"/>
-              </a:rPr>
-              <a:t>基于公式的数值推理方法评测</a:t>
-            </a:r>
-            <a:r>
-              <a:rPr lang="en-US" altLang="zh-CN" dirty="0">
-                <a:sym typeface="+mn-ea"/>
-              </a:rPr>
-              <a:t>-</a:t>
-            </a:r>
-            <a:r>
-              <a:rPr lang="zh-CN" altLang="en-US" dirty="0">
-                <a:sym typeface="+mn-ea"/>
-              </a:rPr>
-              <a:t>评测</a:t>
-            </a:r>
-            <a:r>
-              <a:rPr lang="zh-CN" altLang="en-US" dirty="0">
-                <a:sym typeface="+mn-ea"/>
-              </a:rPr>
-              <a:t>结果</a:t>
-            </a:r>
-            <a:endParaRPr lang="zh-CN" altLang="en-US" dirty="0">
-              <a:sym typeface="+mn-ea"/>
-            </a:endParaRPr>
-          </a:p>
-        </p:txBody>
-      </p:sp>
-      <p:sp>
-        <p:nvSpPr>
-          <p:cNvPr id="29" name="文本框 28"/>
-          <p:cNvSpPr txBox="1"/>
-          <p:nvPr/>
-        </p:nvSpPr>
-        <p:spPr>
-          <a:xfrm>
-            <a:off x="471805" y="815340"/>
-            <a:ext cx="6179185" cy="414020"/>
-          </a:xfrm>
-          <a:prstGeom prst="rect">
-            <a:avLst/>
-          </a:prstGeom>
-          <a:noFill/>
-        </p:spPr>
-        <p:txBody>
-          <a:bodyPr wrap="square" rtlCol="0">
-            <a:spAutoFit/>
-          </a:bodyPr>
-          <a:lstStyle/>
-          <a:p>
-            <a:pPr marL="285750" indent="-285750">
-              <a:lnSpc>
-                <a:spcPct val="150000"/>
-              </a:lnSpc>
-              <a:buFont typeface="Wingdings" panose="05000000000000000000" pitchFamily="2" charset="2"/>
-              <a:buChar char="n"/>
-            </a:pPr>
-            <a:r>
-              <a:rPr lang="zh-CN" altLang="en-US" sz="1400" dirty="0"/>
-              <a:t>下面为直接偏好优化方法的评测</a:t>
-            </a:r>
-            <a:r>
-              <a:rPr lang="zh-CN" altLang="en-US" sz="1400" dirty="0"/>
-              <a:t>结果</a:t>
-            </a:r>
-            <a:endParaRPr lang="zh-CN" altLang="en-US" sz="1400" dirty="0"/>
-          </a:p>
-        </p:txBody>
-      </p:sp>
-      <p:pic>
-        <p:nvPicPr>
-          <p:cNvPr id="5" name="图片 4"/>
-          <p:cNvPicPr>
-            <a:picLocks noChangeAspect="1"/>
-          </p:cNvPicPr>
-          <p:nvPr/>
-        </p:nvPicPr>
-        <p:blipFill>
-          <a:blip r:embed="rId1"/>
-          <a:stretch>
-            <a:fillRect/>
-          </a:stretch>
-        </p:blipFill>
-        <p:spPr>
-          <a:xfrm>
-            <a:off x="471805" y="1338580"/>
-            <a:ext cx="6419850" cy="2063750"/>
-          </a:xfrm>
-          <a:prstGeom prst="rect">
-            <a:avLst/>
-          </a:prstGeom>
-        </p:spPr>
-      </p:pic>
-      <p:sp>
-        <p:nvSpPr>
-          <p:cNvPr id="6" name="文本框 5"/>
-          <p:cNvSpPr txBox="1"/>
-          <p:nvPr/>
-        </p:nvSpPr>
-        <p:spPr>
-          <a:xfrm>
-            <a:off x="471805" y="3616325"/>
-            <a:ext cx="6179185" cy="737235"/>
-          </a:xfrm>
-          <a:prstGeom prst="rect">
-            <a:avLst/>
-          </a:prstGeom>
-          <a:noFill/>
-        </p:spPr>
-        <p:txBody>
-          <a:bodyPr wrap="square" rtlCol="0">
-            <a:spAutoFit/>
-          </a:bodyPr>
-          <a:lstStyle/>
-          <a:p>
-            <a:pPr indent="0">
-              <a:lnSpc>
-                <a:spcPct val="150000"/>
-              </a:lnSpc>
-              <a:buFont typeface="Wingdings" panose="05000000000000000000" pitchFamily="2" charset="2"/>
-              <a:buNone/>
-            </a:pPr>
-            <a:r>
-              <a:rPr lang="zh-CN" altLang="en-US" sz="1400" dirty="0"/>
-              <a:t>在</a:t>
-            </a:r>
-            <a:r>
-              <a:rPr lang="en-US" altLang="zh-CN" sz="1400" dirty="0"/>
-              <a:t>FormulaReasoning</a:t>
-            </a:r>
-            <a:r>
-              <a:rPr lang="zh-CN" altLang="en-US" sz="1400" dirty="0"/>
-              <a:t>对应的偏好数据上进行优化后，在其他数据集上仍然保留较好的泛化性，在其他数据集表现</a:t>
-            </a:r>
-            <a:r>
-              <a:rPr lang="zh-CN" altLang="en-US" sz="1400" dirty="0"/>
-              <a:t>上多数情况</a:t>
-            </a:r>
-            <a:r>
-              <a:rPr lang="zh-CN" altLang="en-US" sz="1400" dirty="0"/>
-              <a:t>也有性能</a:t>
-            </a:r>
-            <a:r>
-              <a:rPr lang="zh-CN" altLang="en-US" sz="1400" dirty="0"/>
-              <a:t>提升</a:t>
-            </a:r>
-            <a:endParaRPr lang="zh-CN" altLang="en-US" sz="1400" dirty="0"/>
           </a:p>
         </p:txBody>
       </p:sp>
@@ -21026,37 +21026,6 @@
       </p:grpSpPr>
       <p:sp>
         <p:nvSpPr>
-          <p:cNvPr id="6" name="标题 5"/>
-          <p:cNvSpPr>
-            <a:spLocks noGrp="1"/>
-          </p:cNvSpPr>
-          <p:nvPr>
-            <p:ph type="title"/>
-          </p:nvPr>
-        </p:nvSpPr>
-        <p:spPr>
-          <a:xfrm>
-            <a:off x="0" y="1282065"/>
-            <a:ext cx="6864985" cy="1292860"/>
-          </a:xfrm>
-        </p:spPr>
-        <p:txBody>
-          <a:bodyPr/>
-          <a:lstStyle/>
-          <a:p>
-            <a:pPr algn="ctr"/>
-            <a:r>
-              <a:rPr lang="zh-CN" altLang="en-US" dirty="0">
-                <a:sym typeface="+mn-ea"/>
-              </a:rPr>
-              <a:t>一种基于公式的数值推理方法</a:t>
-            </a:r>
-            <a:endParaRPr lang="zh-CN" altLang="en-US" dirty="0"/>
-          </a:p>
-        </p:txBody>
-      </p:sp>
-      <p:sp>
-        <p:nvSpPr>
           <p:cNvPr id="3" name="日期占位符 2"/>
           <p:cNvSpPr>
             <a:spLocks noGrp="1"/>
@@ -21070,7 +21039,7 @@
           <a:bodyPr/>
           <a:lstStyle/>
           <a:p>
-            <a:fld id="{2FBB519E-D9EB-47F0-AD65-082D85248404}" type="datetime1">
+            <a:fld id="{137329C2-3C36-4069-9E85-5BF3A0DCB578}" type="datetime1">
               <a:rPr lang="zh-CN" altLang="en-US" smtClean="0"/>
             </a:fld>
             <a:endParaRPr lang="zh-CN" altLang="en-US" dirty="0"/>
@@ -21099,6 +21068,187 @@
           </a:p>
         </p:txBody>
       </p:sp>
+      <p:sp>
+        <p:nvSpPr>
+          <p:cNvPr id="10" name="标题 11"/>
+          <p:cNvSpPr>
+            <a:spLocks noGrp="1"/>
+          </p:cNvSpPr>
+          <p:nvPr/>
+        </p:nvSpPr>
+        <p:spPr>
+          <a:xfrm>
+            <a:off x="471924" y="360000"/>
+            <a:ext cx="5920502" cy="489600"/>
+          </a:xfrm>
+          <a:prstGeom prst="rect">
+            <a:avLst/>
+          </a:prstGeom>
+        </p:spPr>
+        <p:txBody>
+          <a:bodyPr vert="horz" lIns="91440" tIns="45720" rIns="91440" bIns="45720" rtlCol="0" anchor="ctr">
+            <a:normAutofit/>
+          </a:bodyPr>
+          <a:lstStyle>
+            <a:lvl1pPr algn="l" defTabSz="514985" rtl="0" eaLnBrk="1" latinLnBrk="0" hangingPunct="1">
+              <a:lnSpc>
+                <a:spcPct val="90000"/>
+              </a:lnSpc>
+              <a:spcBef>
+                <a:spcPct val="0"/>
+              </a:spcBef>
+              <a:buNone/>
+              <a:defRPr sz="2100" kern="1200" baseline="0">
+                <a:solidFill>
+                  <a:srgbClr val="63065F"/>
+                </a:solidFill>
+                <a:latin typeface="Arial" panose="020B0604020202020204" pitchFamily="34" charset="0"/>
+                <a:ea typeface="+mj-ea"/>
+                <a:cs typeface="Arial" panose="020B0604020202020204" pitchFamily="34" charset="0"/>
+              </a:defRPr>
+            </a:lvl1pPr>
+          </a:lstStyle>
+          <a:p>
+            <a:r>
+              <a:rPr lang="zh-CN" altLang="en-US" dirty="0">
+                <a:sym typeface="+mn-ea"/>
+              </a:rPr>
+              <a:t>一种基于公式的数值推理方法</a:t>
+            </a:r>
+            <a:r>
+              <a:rPr lang="en-US" altLang="zh-CN" dirty="0">
+                <a:sym typeface="+mn-ea"/>
+              </a:rPr>
+              <a:t>-</a:t>
+            </a:r>
+            <a:r>
+              <a:rPr lang="zh-CN" altLang="en-US" dirty="0">
+                <a:sym typeface="+mn-ea"/>
+              </a:rPr>
+              <a:t>方法图</a:t>
+            </a:r>
+            <a:endParaRPr lang="zh-CN" altLang="en-US" dirty="0">
+              <a:sym typeface="+mn-ea"/>
+            </a:endParaRPr>
+          </a:p>
+        </p:txBody>
+      </p:sp>
+      <p:sp>
+        <p:nvSpPr>
+          <p:cNvPr id="29" name="文本框 28"/>
+          <p:cNvSpPr txBox="1"/>
+          <p:nvPr/>
+        </p:nvSpPr>
+        <p:spPr>
+          <a:xfrm>
+            <a:off x="3959225" y="1094105"/>
+            <a:ext cx="2700020" cy="3013710"/>
+          </a:xfrm>
+          <a:prstGeom prst="rect">
+            <a:avLst/>
+          </a:prstGeom>
+          <a:noFill/>
+        </p:spPr>
+        <p:txBody>
+          <a:bodyPr wrap="square" rtlCol="0">
+            <a:noAutofit/>
+          </a:bodyPr>
+          <a:lstStyle/>
+          <a:p>
+            <a:pPr marL="285750" indent="-285750">
+              <a:lnSpc>
+                <a:spcPct val="150000"/>
+              </a:lnSpc>
+              <a:buFont typeface="Wingdings" panose="05000000000000000000" pitchFamily="2" charset="2"/>
+              <a:buChar char="n"/>
+            </a:pPr>
+            <a:r>
+              <a:rPr lang="zh-CN" altLang="en-US" sz="1400" dirty="0"/>
+              <a:t>数据集</a:t>
+            </a:r>
+            <a:br>
+              <a:rPr lang="zh-CN" altLang="en-US" sz="1400" dirty="0"/>
+            </a:br>
+            <a:r>
+              <a:rPr lang="en-US" altLang="zh-CN" sz="1400" dirty="0"/>
+              <a:t>- </a:t>
+            </a:r>
+            <a:r>
+              <a:rPr lang="zh-CN" altLang="en-US" sz="1400" dirty="0"/>
+              <a:t>使用前文构建方法得到的公式以及参数信息作为训练</a:t>
+            </a:r>
+            <a:r>
+              <a:rPr lang="zh-CN" altLang="en-US" sz="1400" dirty="0"/>
+              <a:t>数据</a:t>
+            </a:r>
+            <a:endParaRPr lang="zh-CN" altLang="en-US" sz="1400" dirty="0"/>
+          </a:p>
+          <a:p>
+            <a:pPr marL="285750" indent="-285750">
+              <a:lnSpc>
+                <a:spcPct val="150000"/>
+              </a:lnSpc>
+              <a:buFont typeface="Wingdings" panose="05000000000000000000" pitchFamily="2" charset="2"/>
+              <a:buChar char="n"/>
+            </a:pPr>
+            <a:r>
+              <a:rPr lang="zh-CN" altLang="en-US" sz="1400" dirty="0"/>
+              <a:t>三模块流程解题</a:t>
+            </a:r>
+            <a:br>
+              <a:rPr lang="zh-CN" altLang="en-US" sz="1400" dirty="0"/>
+            </a:br>
+            <a:r>
+              <a:rPr lang="en-US" altLang="zh-CN" sz="1400" dirty="0"/>
+              <a:t>- </a:t>
+            </a:r>
+            <a:r>
+              <a:rPr lang="zh-CN" altLang="en-US" sz="1400" dirty="0"/>
+              <a:t>公式生成、参数识别模块使用大模型实现</a:t>
+            </a:r>
+            <a:br>
+              <a:rPr lang="zh-CN" altLang="en-US" sz="1400" dirty="0"/>
+            </a:br>
+            <a:r>
+              <a:rPr lang="en-US" altLang="zh-CN" sz="1400" dirty="0"/>
+              <a:t>- </a:t>
+            </a:r>
+            <a:r>
+              <a:rPr lang="zh-CN" altLang="en-US" sz="1400" dirty="0"/>
+              <a:t>数值计算模块使用公式计算器</a:t>
+            </a:r>
+            <a:r>
+              <a:rPr lang="zh-CN" altLang="en-US" sz="1400" dirty="0"/>
+              <a:t>实现</a:t>
+            </a:r>
+            <a:endParaRPr lang="zh-CN" altLang="en-US" sz="1400" dirty="0"/>
+          </a:p>
+        </p:txBody>
+      </p:sp>
+      <p:pic>
+        <p:nvPicPr>
+          <p:cNvPr id="2" name="图片 1"/>
+          <p:cNvPicPr>
+            <a:picLocks noChangeAspect="1"/>
+          </p:cNvPicPr>
+          <p:nvPr/>
+        </p:nvPicPr>
+        <p:blipFill>
+          <a:blip r:embed="rId1"/>
+          <a:stretch>
+            <a:fillRect/>
+          </a:stretch>
+        </p:blipFill>
+        <p:spPr>
+          <a:xfrm>
+            <a:off x="165735" y="969010"/>
+            <a:ext cx="3793490" cy="3480435"/>
+          </a:xfrm>
+          <a:prstGeom prst="rect">
+            <a:avLst/>
+          </a:prstGeom>
+        </p:spPr>
+      </p:pic>
     </p:spTree>
   </p:cSld>
   <p:clrMapOvr>
@@ -21226,7 +21376,13 @@
               <a:rPr lang="zh-CN" altLang="en-US" dirty="0">
                 <a:sym typeface="+mn-ea"/>
               </a:rPr>
-              <a:t>方法图</a:t>
+              <a:t>推理</a:t>
+            </a:r>
+            <a:r>
+              <a:rPr lang="zh-CN" altLang="en-US" dirty="0">
+                <a:sym typeface="+mn-ea"/>
+              </a:rPr>
+              <a:t>过程</a:t>
             </a:r>
             <a:endParaRPr lang="zh-CN" altLang="en-US" dirty="0">
               <a:sym typeface="+mn-ea"/>
@@ -21236,14 +21392,1745 @@
       </p:sp>
       <p:sp>
         <p:nvSpPr>
-          <p:cNvPr id="29" name="文本框 28"/>
+          <p:cNvPr id="6" name="圆角矩形 5"/>
+          <p:cNvSpPr/>
+          <p:nvPr/>
+        </p:nvSpPr>
+        <p:spPr>
+          <a:xfrm>
+            <a:off x="208915" y="849630"/>
+            <a:ext cx="6548120" cy="946150"/>
+          </a:xfrm>
+          <a:prstGeom prst="roundRect">
+            <a:avLst/>
+          </a:prstGeom>
+          <a:solidFill>
+            <a:schemeClr val="accent6">
+              <a:lumMod val="60000"/>
+              <a:lumOff val="40000"/>
+            </a:schemeClr>
+          </a:solidFill>
+        </p:spPr>
+        <p:style>
+          <a:lnRef idx="2">
+            <a:schemeClr val="accent1">
+              <a:lumMod val="75000"/>
+            </a:schemeClr>
+          </a:lnRef>
+          <a:fillRef idx="1">
+            <a:schemeClr val="accent1"/>
+          </a:fillRef>
+          <a:effectRef idx="0">
+            <a:srgbClr val="FFFFFF"/>
+          </a:effectRef>
+          <a:fontRef idx="minor">
+            <a:schemeClr val="lt1"/>
+          </a:fontRef>
+        </p:style>
+        <p:txBody>
+          <a:bodyPr rtlCol="0" anchor="ctr"/>
+          <a:p>
+            <a:pPr algn="l"/>
+            <a:r>
+              <a:rPr lang="zh-CN" altLang="en-US">
+                <a:solidFill>
+                  <a:schemeClr val="tx1"/>
+                </a:solidFill>
+              </a:rPr>
+              <a:t>有一台电热水器，在其水箱中加入了50</a:t>
+            </a:r>
+            <a:r>
+              <a:rPr lang="en-US" altLang="zh-CN">
+                <a:solidFill>
+                  <a:schemeClr val="tx1"/>
+                </a:solidFill>
+              </a:rPr>
+              <a:t>kg</a:t>
+            </a:r>
+            <a:r>
+              <a:rPr lang="zh-CN" altLang="en-US">
+                <a:solidFill>
+                  <a:schemeClr val="tx1"/>
+                </a:solidFill>
+              </a:rPr>
+              <a:t>的水，水被电加热从20℃加热到</a:t>
+            </a:r>
+            <a:r>
+              <a:rPr lang="zh-CN" altLang="en-US">
+                <a:solidFill>
+                  <a:schemeClr val="tx1"/>
+                </a:solidFill>
+                <a:highlight>
+                  <a:srgbClr val="FFFF00"/>
+                </a:highlight>
+              </a:rPr>
+              <a:t>[</a:t>
+            </a:r>
+            <a:r>
+              <a:rPr lang="en-US" altLang="zh-CN">
+                <a:solidFill>
+                  <a:schemeClr val="tx1"/>
+                </a:solidFill>
+                <a:highlight>
+                  <a:srgbClr val="FFFF00"/>
+                </a:highlight>
+              </a:rPr>
+              <a:t>X]</a:t>
+            </a:r>
+            <a:r>
+              <a:rPr lang="en-US" altLang="zh-CN">
+                <a:solidFill>
+                  <a:schemeClr val="tx1"/>
+                </a:solidFill>
+              </a:rPr>
+              <a:t>。</a:t>
+            </a:r>
+            <a:r>
+              <a:rPr lang="zh-CN" altLang="en-US">
+                <a:solidFill>
+                  <a:schemeClr val="tx1"/>
+                </a:solidFill>
+              </a:rPr>
+              <a:t>已知水的比热容为 </a:t>
+            </a:r>
+            <a:r>
+              <a:rPr lang="en-US" altLang="zh-CN">
+                <a:solidFill>
+                  <a:schemeClr val="tx1"/>
+                </a:solidFill>
+              </a:rPr>
+              <a:t>C_</a:t>
+            </a:r>
+            <a:r>
+              <a:rPr lang="zh-CN" altLang="en-US">
+                <a:solidFill>
+                  <a:schemeClr val="tx1"/>
+                </a:solidFill>
+              </a:rPr>
+              <a:t>水</a:t>
+            </a:r>
+            <a:r>
+              <a:rPr lang="en-US" altLang="zh-CN">
+                <a:solidFill>
+                  <a:schemeClr val="tx1"/>
+                </a:solidFill>
+              </a:rPr>
+              <a:t> = 4.2×10^3 J/(kg·℃)。</a:t>
+            </a:r>
+            <a:r>
+              <a:rPr lang="zh-CN" altLang="en-US">
+                <a:solidFill>
+                  <a:schemeClr val="tx1"/>
+                </a:solidFill>
+              </a:rPr>
+              <a:t>如果加热过程中消耗的总电能为 1×10^7 </a:t>
+            </a:r>
+            <a:r>
+              <a:rPr lang="en-US" altLang="zh-CN">
+                <a:solidFill>
+                  <a:schemeClr val="tx1"/>
+                </a:solidFill>
+              </a:rPr>
+              <a:t>J，</a:t>
+            </a:r>
+            <a:r>
+              <a:rPr lang="zh-CN" altLang="en-US">
+                <a:solidFill>
+                  <a:schemeClr val="tx1"/>
+                </a:solidFill>
+              </a:rPr>
+              <a:t>那么水加热器的热效率是多少？</a:t>
+            </a:r>
+            <a:endParaRPr lang="zh-CN" altLang="en-US">
+              <a:solidFill>
+                <a:schemeClr val="tx1"/>
+              </a:solidFill>
+            </a:endParaRPr>
+          </a:p>
+          <a:p>
+            <a:pPr algn="l"/>
+            <a:r>
+              <a:rPr lang="zh-CN" altLang="en-US">
+                <a:solidFill>
+                  <a:schemeClr val="tx1"/>
+                </a:solidFill>
+                <a:highlight>
+                  <a:srgbClr val="FFFF00"/>
+                </a:highlight>
+              </a:rPr>
+              <a:t>如果我们已经知道上面问题的答案是 84%，那么问题中 [</a:t>
+            </a:r>
+            <a:r>
+              <a:rPr lang="en-US" altLang="zh-CN">
+                <a:solidFill>
+                  <a:schemeClr val="tx1"/>
+                </a:solidFill>
+                <a:highlight>
+                  <a:srgbClr val="FFFF00"/>
+                </a:highlight>
+              </a:rPr>
+              <a:t>X] </a:t>
+            </a:r>
+            <a:r>
+              <a:rPr lang="zh-CN" altLang="en-US">
+                <a:solidFill>
+                  <a:schemeClr val="tx1"/>
+                </a:solidFill>
+                <a:highlight>
+                  <a:srgbClr val="FFFF00"/>
+                </a:highlight>
+              </a:rPr>
+              <a:t>对应的内容应该是多少？</a:t>
+            </a:r>
+            <a:endParaRPr lang="zh-CN" altLang="en-US">
+              <a:solidFill>
+                <a:schemeClr val="tx1"/>
+              </a:solidFill>
+              <a:highlight>
+                <a:srgbClr val="FFFF00"/>
+              </a:highlight>
+            </a:endParaRPr>
+          </a:p>
+        </p:txBody>
+      </p:sp>
+      <p:sp>
+        <p:nvSpPr>
+          <p:cNvPr id="5" name="圆角矩形 4"/>
+          <p:cNvSpPr/>
+          <p:nvPr/>
+        </p:nvSpPr>
+        <p:spPr>
+          <a:xfrm>
+            <a:off x="208915" y="2272030"/>
+            <a:ext cx="3528695" cy="749935"/>
+          </a:xfrm>
+          <a:prstGeom prst="roundRect">
+            <a:avLst/>
+          </a:prstGeom>
+          <a:solidFill>
+            <a:schemeClr val="accent4">
+              <a:lumMod val="60000"/>
+              <a:lumOff val="40000"/>
+            </a:schemeClr>
+          </a:solidFill>
+        </p:spPr>
+        <p:style>
+          <a:lnRef idx="2">
+            <a:schemeClr val="accent1">
+              <a:lumMod val="75000"/>
+            </a:schemeClr>
+          </a:lnRef>
+          <a:fillRef idx="1">
+            <a:schemeClr val="accent1"/>
+          </a:fillRef>
+          <a:effectRef idx="0">
+            <a:srgbClr val="FFFFFF"/>
+          </a:effectRef>
+          <a:fontRef idx="minor">
+            <a:schemeClr val="lt1"/>
+          </a:fontRef>
+        </p:style>
+        <p:txBody>
+          <a:bodyPr rtlCol="0" anchor="ctr"/>
+          <a:p>
+            <a:pPr algn="l"/>
+            <a:r>
+              <a:rPr lang="en-US" altLang="zh-CN">
+                <a:solidFill>
+                  <a:schemeClr val="tx1"/>
+                </a:solidFill>
+              </a:rPr>
+              <a:t>[</a:t>
+            </a:r>
+            <a:r>
+              <a:rPr lang="zh-CN" altLang="en-US">
+                <a:solidFill>
+                  <a:schemeClr val="tx1"/>
+                </a:solidFill>
+              </a:rPr>
+              <a:t>吸收热量</a:t>
+            </a:r>
+            <a:r>
+              <a:rPr lang="en-US" altLang="zh-CN">
+                <a:solidFill>
+                  <a:schemeClr val="tx1"/>
+                </a:solidFill>
+              </a:rPr>
+              <a:t>] = [</a:t>
+            </a:r>
+            <a:r>
+              <a:rPr lang="zh-CN" altLang="en-US">
+                <a:solidFill>
+                  <a:schemeClr val="tx1"/>
+                </a:solidFill>
+              </a:rPr>
+              <a:t>热效率</a:t>
+            </a:r>
+            <a:r>
+              <a:rPr lang="en-US" altLang="zh-CN">
+                <a:solidFill>
+                  <a:schemeClr val="tx1"/>
+                </a:solidFill>
+              </a:rPr>
+              <a:t>] * [</a:t>
+            </a:r>
+            <a:r>
+              <a:rPr lang="zh-CN" altLang="en-US">
+                <a:solidFill>
+                  <a:schemeClr val="tx1"/>
+                </a:solidFill>
+              </a:rPr>
+              <a:t>总电能</a:t>
+            </a:r>
+            <a:r>
+              <a:rPr lang="en-US" altLang="zh-CN">
+                <a:solidFill>
+                  <a:schemeClr val="tx1"/>
+                </a:solidFill>
+              </a:rPr>
+              <a:t>]</a:t>
+            </a:r>
+            <a:endParaRPr lang="en-US" altLang="zh-CN">
+              <a:solidFill>
+                <a:schemeClr val="tx1"/>
+              </a:solidFill>
+            </a:endParaRPr>
+          </a:p>
+          <a:p>
+            <a:pPr algn="l"/>
+            <a:r>
+              <a:rPr lang="en-US" altLang="zh-CN">
+                <a:solidFill>
+                  <a:schemeClr val="tx1"/>
+                </a:solidFill>
+              </a:rPr>
+              <a:t>[</a:t>
+            </a:r>
+            <a:r>
+              <a:rPr lang="zh-CN" altLang="en-US">
+                <a:solidFill>
+                  <a:schemeClr val="tx1"/>
+                </a:solidFill>
+              </a:rPr>
+              <a:t>升高温度</a:t>
+            </a:r>
+            <a:r>
+              <a:rPr lang="en-US" altLang="zh-CN">
+                <a:solidFill>
+                  <a:schemeClr val="tx1"/>
+                </a:solidFill>
+              </a:rPr>
+              <a:t>] = [</a:t>
+            </a:r>
+            <a:r>
+              <a:rPr lang="zh-CN" altLang="en-US">
+                <a:solidFill>
+                  <a:schemeClr val="tx1"/>
+                </a:solidFill>
+              </a:rPr>
+              <a:t>吸收热量</a:t>
+            </a:r>
+            <a:r>
+              <a:rPr lang="en-US" altLang="zh-CN">
+                <a:solidFill>
+                  <a:schemeClr val="tx1"/>
+                </a:solidFill>
+              </a:rPr>
+              <a:t>] / ([</a:t>
+            </a:r>
+            <a:r>
+              <a:rPr lang="zh-CN" altLang="en-US">
+                <a:solidFill>
+                  <a:schemeClr val="tx1"/>
+                </a:solidFill>
+              </a:rPr>
+              <a:t>比热容</a:t>
+            </a:r>
+            <a:r>
+              <a:rPr lang="en-US" altLang="zh-CN">
+                <a:solidFill>
+                  <a:schemeClr val="tx1"/>
+                </a:solidFill>
+              </a:rPr>
+              <a:t>] * [</a:t>
+            </a:r>
+            <a:r>
+              <a:rPr lang="zh-CN" altLang="en-US">
+                <a:solidFill>
+                  <a:schemeClr val="tx1"/>
+                </a:solidFill>
+              </a:rPr>
+              <a:t>质量</a:t>
+            </a:r>
+            <a:r>
+              <a:rPr lang="en-US" altLang="zh-CN">
+                <a:solidFill>
+                  <a:schemeClr val="tx1"/>
+                </a:solidFill>
+              </a:rPr>
+              <a:t>])</a:t>
+            </a:r>
+            <a:endParaRPr lang="en-US" altLang="zh-CN">
+              <a:solidFill>
+                <a:schemeClr val="tx1"/>
+              </a:solidFill>
+            </a:endParaRPr>
+          </a:p>
+          <a:p>
+            <a:pPr algn="l"/>
+            <a:r>
+              <a:rPr lang="en-US" altLang="zh-CN">
+                <a:solidFill>
+                  <a:schemeClr val="tx1"/>
+                </a:solidFill>
+              </a:rPr>
+              <a:t>[</a:t>
+            </a:r>
+            <a:r>
+              <a:rPr lang="zh-CN" altLang="en-US">
+                <a:solidFill>
+                  <a:schemeClr val="tx1"/>
+                </a:solidFill>
+              </a:rPr>
+              <a:t>最终温度</a:t>
+            </a:r>
+            <a:r>
+              <a:rPr lang="en-US" altLang="zh-CN">
+                <a:solidFill>
+                  <a:schemeClr val="tx1"/>
+                </a:solidFill>
+              </a:rPr>
+              <a:t>] = [</a:t>
+            </a:r>
+            <a:r>
+              <a:rPr lang="zh-CN" altLang="en-US">
+                <a:solidFill>
+                  <a:schemeClr val="tx1"/>
+                </a:solidFill>
+              </a:rPr>
+              <a:t>初始温度</a:t>
+            </a:r>
+            <a:r>
+              <a:rPr lang="en-US" altLang="zh-CN">
+                <a:solidFill>
+                  <a:schemeClr val="tx1"/>
+                </a:solidFill>
+              </a:rPr>
+              <a:t>] + [</a:t>
+            </a:r>
+            <a:r>
+              <a:rPr lang="zh-CN" altLang="en-US">
+                <a:solidFill>
+                  <a:schemeClr val="tx1"/>
+                </a:solidFill>
+              </a:rPr>
+              <a:t>升高温度</a:t>
+            </a:r>
+            <a:r>
+              <a:rPr lang="en-US" altLang="zh-CN">
+                <a:solidFill>
+                  <a:schemeClr val="tx1"/>
+                </a:solidFill>
+              </a:rPr>
+              <a:t>]</a:t>
+            </a:r>
+            <a:endParaRPr lang="en-US" altLang="zh-CN">
+              <a:solidFill>
+                <a:schemeClr val="tx1"/>
+              </a:solidFill>
+            </a:endParaRPr>
+          </a:p>
+        </p:txBody>
+      </p:sp>
+      <p:graphicFrame>
+        <p:nvGraphicFramePr>
+          <p:cNvPr id="8" name="表格 7"/>
+          <p:cNvGraphicFramePr/>
+          <p:nvPr>
+            <p:custDataLst>
+              <p:tags r:id="rId1"/>
+            </p:custDataLst>
+          </p:nvPr>
+        </p:nvGraphicFramePr>
+        <p:xfrm>
+          <a:off x="3982085" y="2272030"/>
+          <a:ext cx="2882265" cy="1645920"/>
+        </p:xfrm>
+        <a:graphic>
+          <a:graphicData uri="http://schemas.openxmlformats.org/drawingml/2006/table">
+            <a:tbl>
+              <a:tblPr firstRow="1" bandRow="1">
+                <a:tableStyleId>{5C22544A-7EE6-4342-B048-85BDC9FD1C3A}</a:tableStyleId>
+              </a:tblPr>
+              <a:tblGrid>
+                <a:gridCol w="960755"/>
+                <a:gridCol w="960755"/>
+                <a:gridCol w="960755"/>
+              </a:tblGrid>
+              <a:tr h="274320">
+                <a:tc>
+                  <a:txBody>
+                    <a:bodyPr/>
+                    <a:p>
+                      <a:pPr>
+                        <a:buNone/>
+                      </a:pPr>
+                      <a:r>
+                        <a:rPr lang="zh-CN" altLang="en-US" sz="1200">
+                          <a:solidFill>
+                            <a:schemeClr val="tx1"/>
+                          </a:solidFill>
+                          <a:latin typeface="宋体" panose="02010600030101010101" pitchFamily="2" charset="-122"/>
+                          <a:ea typeface="宋体" panose="02010600030101010101" pitchFamily="2" charset="-122"/>
+                        </a:rPr>
+                        <a:t>名称</a:t>
+                      </a:r>
+                      <a:endParaRPr lang="zh-CN" altLang="en-US" sz="1200">
+                        <a:solidFill>
+                          <a:schemeClr val="tx1"/>
+                        </a:solidFill>
+                        <a:latin typeface="宋体" panose="02010600030101010101" pitchFamily="2" charset="-122"/>
+                        <a:ea typeface="宋体" panose="02010600030101010101" pitchFamily="2" charset="-122"/>
+                      </a:endParaRPr>
+                    </a:p>
+                  </a:txBody>
+                  <a:tcPr>
+                    <a:lnL w="12700">
+                      <a:solidFill>
+                        <a:schemeClr val="tx1"/>
+                      </a:solidFill>
+                      <a:prstDash val="solid"/>
+                    </a:lnL>
+                    <a:lnR w="12700">
+                      <a:solidFill>
+                        <a:schemeClr val="tx1"/>
+                      </a:solidFill>
+                      <a:prstDash val="solid"/>
+                    </a:lnR>
+                    <a:lnT w="12700">
+                      <a:solidFill>
+                        <a:schemeClr val="tx1"/>
+                      </a:solidFill>
+                      <a:prstDash val="solid"/>
+                    </a:lnT>
+                    <a:lnB w="12700">
+                      <a:solidFill>
+                        <a:schemeClr val="tx1"/>
+                      </a:solidFill>
+                      <a:prstDash val="solid"/>
+                    </a:lnB>
+                    <a:lnTlToBr>
+                      <a:noFill/>
+                    </a:lnTlToBr>
+                    <a:lnBlToTr>
+                      <a:noFill/>
+                    </a:lnBlToTr>
+                    <a:noFill/>
+                  </a:tcPr>
+                </a:tc>
+                <a:tc>
+                  <a:txBody>
+                    <a:bodyPr/>
+                    <a:p>
+                      <a:pPr>
+                        <a:buNone/>
+                      </a:pPr>
+                      <a:r>
+                        <a:rPr lang="zh-CN" altLang="en-US" sz="1200">
+                          <a:solidFill>
+                            <a:schemeClr val="tx1"/>
+                          </a:solidFill>
+                          <a:latin typeface="宋体" panose="02010600030101010101" pitchFamily="2" charset="-122"/>
+                          <a:ea typeface="宋体" panose="02010600030101010101" pitchFamily="2" charset="-122"/>
+                        </a:rPr>
+                        <a:t>数值</a:t>
+                      </a:r>
+                      <a:endParaRPr lang="zh-CN" altLang="en-US" sz="1200">
+                        <a:solidFill>
+                          <a:schemeClr val="tx1"/>
+                        </a:solidFill>
+                        <a:latin typeface="宋体" panose="02010600030101010101" pitchFamily="2" charset="-122"/>
+                        <a:ea typeface="宋体" panose="02010600030101010101" pitchFamily="2" charset="-122"/>
+                      </a:endParaRPr>
+                    </a:p>
+                  </a:txBody>
+                  <a:tcPr>
+                    <a:lnL w="12700">
+                      <a:solidFill>
+                        <a:schemeClr val="tx1"/>
+                      </a:solidFill>
+                      <a:prstDash val="solid"/>
+                    </a:lnL>
+                    <a:lnR w="12700">
+                      <a:solidFill>
+                        <a:schemeClr val="tx1"/>
+                      </a:solidFill>
+                      <a:prstDash val="solid"/>
+                    </a:lnR>
+                    <a:lnT w="12700">
+                      <a:solidFill>
+                        <a:schemeClr val="tx1"/>
+                      </a:solidFill>
+                      <a:prstDash val="solid"/>
+                    </a:lnT>
+                    <a:lnB w="12700">
+                      <a:solidFill>
+                        <a:schemeClr val="tx1"/>
+                      </a:solidFill>
+                      <a:prstDash val="solid"/>
+                    </a:lnB>
+                    <a:lnTlToBr>
+                      <a:noFill/>
+                    </a:lnTlToBr>
+                    <a:lnBlToTr>
+                      <a:noFill/>
+                    </a:lnBlToTr>
+                    <a:noFill/>
+                  </a:tcPr>
+                </a:tc>
+                <a:tc>
+                  <a:txBody>
+                    <a:bodyPr/>
+                    <a:p>
+                      <a:pPr>
+                        <a:buNone/>
+                      </a:pPr>
+                      <a:r>
+                        <a:rPr lang="zh-CN" altLang="en-US" sz="1200">
+                          <a:solidFill>
+                            <a:schemeClr val="tx1"/>
+                          </a:solidFill>
+                          <a:latin typeface="宋体" panose="02010600030101010101" pitchFamily="2" charset="-122"/>
+                          <a:ea typeface="宋体" panose="02010600030101010101" pitchFamily="2" charset="-122"/>
+                        </a:rPr>
+                        <a:t>单位</a:t>
+                      </a:r>
+                      <a:endParaRPr lang="zh-CN" altLang="en-US" sz="1200">
+                        <a:solidFill>
+                          <a:schemeClr val="tx1"/>
+                        </a:solidFill>
+                        <a:latin typeface="宋体" panose="02010600030101010101" pitchFamily="2" charset="-122"/>
+                        <a:ea typeface="宋体" panose="02010600030101010101" pitchFamily="2" charset="-122"/>
+                      </a:endParaRPr>
+                    </a:p>
+                  </a:txBody>
+                  <a:tcPr>
+                    <a:lnL w="12700">
+                      <a:solidFill>
+                        <a:schemeClr val="tx1"/>
+                      </a:solidFill>
+                      <a:prstDash val="solid"/>
+                    </a:lnL>
+                    <a:lnR w="12700">
+                      <a:solidFill>
+                        <a:schemeClr val="tx1"/>
+                      </a:solidFill>
+                      <a:prstDash val="solid"/>
+                    </a:lnR>
+                    <a:lnT w="12700">
+                      <a:solidFill>
+                        <a:schemeClr val="tx1"/>
+                      </a:solidFill>
+                      <a:prstDash val="solid"/>
+                    </a:lnT>
+                    <a:lnB w="12700">
+                      <a:solidFill>
+                        <a:schemeClr val="tx1"/>
+                      </a:solidFill>
+                      <a:prstDash val="solid"/>
+                    </a:lnB>
+                    <a:lnTlToBr>
+                      <a:noFill/>
+                    </a:lnTlToBr>
+                    <a:lnBlToTr>
+                      <a:noFill/>
+                    </a:lnBlToTr>
+                    <a:noFill/>
+                  </a:tcPr>
+                </a:tc>
+              </a:tr>
+              <a:tr h="274320">
+                <a:tc>
+                  <a:txBody>
+                    <a:bodyPr/>
+                    <a:p>
+                      <a:pPr>
+                        <a:buNone/>
+                      </a:pPr>
+                      <a:r>
+                        <a:rPr lang="zh-CN" altLang="en-US" sz="1200">
+                          <a:solidFill>
+                            <a:schemeClr val="tx1"/>
+                          </a:solidFill>
+                          <a:latin typeface="宋体" panose="02010600030101010101" pitchFamily="2" charset="-122"/>
+                          <a:ea typeface="宋体" panose="02010600030101010101" pitchFamily="2" charset="-122"/>
+                          <a:sym typeface="+mn-ea"/>
+                        </a:rPr>
+                        <a:t>总电能</a:t>
+                      </a:r>
+                      <a:endParaRPr lang="zh-CN" altLang="en-US" sz="1200">
+                        <a:solidFill>
+                          <a:schemeClr val="tx1"/>
+                        </a:solidFill>
+                        <a:latin typeface="宋体" panose="02010600030101010101" pitchFamily="2" charset="-122"/>
+                        <a:ea typeface="宋体" panose="02010600030101010101" pitchFamily="2" charset="-122"/>
+                        <a:sym typeface="+mn-ea"/>
+                      </a:endParaRPr>
+                    </a:p>
+                  </a:txBody>
+                  <a:tcPr>
+                    <a:lnL w="12700">
+                      <a:solidFill>
+                        <a:schemeClr val="tx1"/>
+                      </a:solidFill>
+                      <a:prstDash val="solid"/>
+                    </a:lnL>
+                    <a:lnR w="12700">
+                      <a:solidFill>
+                        <a:schemeClr val="tx1"/>
+                      </a:solidFill>
+                      <a:prstDash val="solid"/>
+                    </a:lnR>
+                    <a:lnT w="12700">
+                      <a:solidFill>
+                        <a:schemeClr val="tx1"/>
+                      </a:solidFill>
+                      <a:prstDash val="solid"/>
+                    </a:lnT>
+                    <a:lnB w="12700">
+                      <a:solidFill>
+                        <a:schemeClr val="tx1"/>
+                      </a:solidFill>
+                      <a:prstDash val="solid"/>
+                    </a:lnB>
+                    <a:lnTlToBr>
+                      <a:noFill/>
+                    </a:lnTlToBr>
+                    <a:lnBlToTr>
+                      <a:noFill/>
+                    </a:lnBlToTr>
+                    <a:noFill/>
+                  </a:tcPr>
+                </a:tc>
+                <a:tc>
+                  <a:txBody>
+                    <a:bodyPr/>
+                    <a:p>
+                      <a:pPr>
+                        <a:buNone/>
+                      </a:pPr>
+                      <a:r>
+                        <a:rPr lang="en-US" altLang="zh-CN" sz="1200">
+                          <a:solidFill>
+                            <a:schemeClr val="tx1"/>
+                          </a:solidFill>
+                          <a:latin typeface="宋体" panose="02010600030101010101" pitchFamily="2" charset="-122"/>
+                          <a:ea typeface="宋体" panose="02010600030101010101" pitchFamily="2" charset="-122"/>
+                        </a:rPr>
+                        <a:t>1*10^7</a:t>
+                      </a:r>
+                      <a:endParaRPr lang="en-US" altLang="zh-CN" sz="1200">
+                        <a:solidFill>
+                          <a:schemeClr val="tx1"/>
+                        </a:solidFill>
+                        <a:latin typeface="宋体" panose="02010600030101010101" pitchFamily="2" charset="-122"/>
+                        <a:ea typeface="宋体" panose="02010600030101010101" pitchFamily="2" charset="-122"/>
+                      </a:endParaRPr>
+                    </a:p>
+                  </a:txBody>
+                  <a:tcPr>
+                    <a:lnL w="12700">
+                      <a:solidFill>
+                        <a:schemeClr val="tx1"/>
+                      </a:solidFill>
+                      <a:prstDash val="solid"/>
+                    </a:lnL>
+                    <a:lnR w="12700">
+                      <a:solidFill>
+                        <a:schemeClr val="tx1"/>
+                      </a:solidFill>
+                      <a:prstDash val="solid"/>
+                    </a:lnR>
+                    <a:lnT w="12700">
+                      <a:solidFill>
+                        <a:schemeClr val="tx1"/>
+                      </a:solidFill>
+                      <a:prstDash val="solid"/>
+                    </a:lnT>
+                    <a:lnB w="12700">
+                      <a:solidFill>
+                        <a:schemeClr val="tx1"/>
+                      </a:solidFill>
+                      <a:prstDash val="solid"/>
+                    </a:lnB>
+                    <a:lnTlToBr>
+                      <a:noFill/>
+                    </a:lnTlToBr>
+                    <a:lnBlToTr>
+                      <a:noFill/>
+                    </a:lnBlToTr>
+                    <a:noFill/>
+                  </a:tcPr>
+                </a:tc>
+                <a:tc>
+                  <a:txBody>
+                    <a:bodyPr/>
+                    <a:p>
+                      <a:pPr>
+                        <a:buNone/>
+                      </a:pPr>
+                      <a:r>
+                        <a:rPr lang="en-US" altLang="zh-CN" sz="1200">
+                          <a:solidFill>
+                            <a:schemeClr val="tx1"/>
+                          </a:solidFill>
+                          <a:latin typeface="宋体" panose="02010600030101010101" pitchFamily="2" charset="-122"/>
+                          <a:ea typeface="宋体" panose="02010600030101010101" pitchFamily="2" charset="-122"/>
+                        </a:rPr>
+                        <a:t>J</a:t>
+                      </a:r>
+                      <a:endParaRPr lang="en-US" altLang="zh-CN" sz="1200">
+                        <a:solidFill>
+                          <a:schemeClr val="tx1"/>
+                        </a:solidFill>
+                        <a:latin typeface="宋体" panose="02010600030101010101" pitchFamily="2" charset="-122"/>
+                        <a:ea typeface="宋体" panose="02010600030101010101" pitchFamily="2" charset="-122"/>
+                      </a:endParaRPr>
+                    </a:p>
+                  </a:txBody>
+                  <a:tcPr>
+                    <a:lnL w="12700">
+                      <a:solidFill>
+                        <a:schemeClr val="tx1"/>
+                      </a:solidFill>
+                      <a:prstDash val="solid"/>
+                    </a:lnL>
+                    <a:lnR w="12700">
+                      <a:solidFill>
+                        <a:schemeClr val="tx1"/>
+                      </a:solidFill>
+                      <a:prstDash val="solid"/>
+                    </a:lnR>
+                    <a:lnT w="12700">
+                      <a:solidFill>
+                        <a:schemeClr val="tx1"/>
+                      </a:solidFill>
+                      <a:prstDash val="solid"/>
+                    </a:lnT>
+                    <a:lnB w="12700">
+                      <a:solidFill>
+                        <a:schemeClr val="tx1"/>
+                      </a:solidFill>
+                      <a:prstDash val="solid"/>
+                    </a:lnB>
+                    <a:lnTlToBr>
+                      <a:noFill/>
+                    </a:lnTlToBr>
+                    <a:lnBlToTr>
+                      <a:noFill/>
+                    </a:lnBlToTr>
+                    <a:noFill/>
+                  </a:tcPr>
+                </a:tc>
+              </a:tr>
+              <a:tr h="274320">
+                <a:tc>
+                  <a:txBody>
+                    <a:bodyPr/>
+                    <a:p>
+                      <a:pPr>
+                        <a:buNone/>
+                      </a:pPr>
+                      <a:r>
+                        <a:rPr lang="zh-CN" altLang="en-US" sz="1200">
+                          <a:solidFill>
+                            <a:schemeClr val="tx1"/>
+                          </a:solidFill>
+                          <a:latin typeface="宋体" panose="02010600030101010101" pitchFamily="2" charset="-122"/>
+                          <a:ea typeface="宋体" panose="02010600030101010101" pitchFamily="2" charset="-122"/>
+                          <a:sym typeface="+mn-ea"/>
+                        </a:rPr>
+                        <a:t>热效率</a:t>
+                      </a:r>
+                      <a:endParaRPr lang="zh-CN" altLang="en-US" sz="1200">
+                        <a:solidFill>
+                          <a:schemeClr val="tx1"/>
+                        </a:solidFill>
+                        <a:latin typeface="宋体" panose="02010600030101010101" pitchFamily="2" charset="-122"/>
+                        <a:ea typeface="宋体" panose="02010600030101010101" pitchFamily="2" charset="-122"/>
+                        <a:sym typeface="+mn-ea"/>
+                      </a:endParaRPr>
+                    </a:p>
+                  </a:txBody>
+                  <a:tcPr>
+                    <a:lnL w="12700">
+                      <a:solidFill>
+                        <a:schemeClr val="tx1"/>
+                      </a:solidFill>
+                      <a:prstDash val="solid"/>
+                    </a:lnL>
+                    <a:lnR w="12700">
+                      <a:solidFill>
+                        <a:schemeClr val="tx1"/>
+                      </a:solidFill>
+                      <a:prstDash val="solid"/>
+                    </a:lnR>
+                    <a:lnT w="12700">
+                      <a:solidFill>
+                        <a:schemeClr val="tx1"/>
+                      </a:solidFill>
+                      <a:prstDash val="solid"/>
+                    </a:lnT>
+                    <a:lnB w="12700">
+                      <a:solidFill>
+                        <a:schemeClr val="tx1"/>
+                      </a:solidFill>
+                      <a:prstDash val="solid"/>
+                    </a:lnB>
+                    <a:lnTlToBr>
+                      <a:noFill/>
+                    </a:lnTlToBr>
+                    <a:lnBlToTr>
+                      <a:noFill/>
+                    </a:lnBlToTr>
+                    <a:noFill/>
+                  </a:tcPr>
+                </a:tc>
+                <a:tc>
+                  <a:txBody>
+                    <a:bodyPr/>
+                    <a:p>
+                      <a:pPr>
+                        <a:buNone/>
+                      </a:pPr>
+                      <a:r>
+                        <a:rPr lang="en-US" altLang="zh-CN" sz="1200">
+                          <a:solidFill>
+                            <a:schemeClr val="tx1"/>
+                          </a:solidFill>
+                          <a:latin typeface="宋体" panose="02010600030101010101" pitchFamily="2" charset="-122"/>
+                          <a:ea typeface="宋体" panose="02010600030101010101" pitchFamily="2" charset="-122"/>
+                        </a:rPr>
+                        <a:t>84%</a:t>
+                      </a:r>
+                      <a:endParaRPr lang="en-US" altLang="zh-CN" sz="1200">
+                        <a:solidFill>
+                          <a:schemeClr val="tx1"/>
+                        </a:solidFill>
+                        <a:latin typeface="宋体" panose="02010600030101010101" pitchFamily="2" charset="-122"/>
+                        <a:ea typeface="宋体" panose="02010600030101010101" pitchFamily="2" charset="-122"/>
+                      </a:endParaRPr>
+                    </a:p>
+                  </a:txBody>
+                  <a:tcPr>
+                    <a:lnL w="12700">
+                      <a:solidFill>
+                        <a:schemeClr val="tx1"/>
+                      </a:solidFill>
+                      <a:prstDash val="solid"/>
+                    </a:lnL>
+                    <a:lnR w="12700">
+                      <a:solidFill>
+                        <a:schemeClr val="tx1"/>
+                      </a:solidFill>
+                      <a:prstDash val="solid"/>
+                    </a:lnR>
+                    <a:lnT w="12700">
+                      <a:solidFill>
+                        <a:schemeClr val="tx1"/>
+                      </a:solidFill>
+                      <a:prstDash val="solid"/>
+                    </a:lnT>
+                    <a:lnB w="12700">
+                      <a:solidFill>
+                        <a:schemeClr val="tx1"/>
+                      </a:solidFill>
+                      <a:prstDash val="solid"/>
+                    </a:lnB>
+                    <a:lnTlToBr>
+                      <a:noFill/>
+                    </a:lnTlToBr>
+                    <a:lnBlToTr>
+                      <a:noFill/>
+                    </a:lnBlToTr>
+                    <a:noFill/>
+                  </a:tcPr>
+                </a:tc>
+                <a:tc>
+                  <a:txBody>
+                    <a:bodyPr/>
+                    <a:p>
+                      <a:pPr>
+                        <a:buNone/>
+                      </a:pPr>
+                      <a:r>
+                        <a:rPr lang="en-US" altLang="zh-CN" sz="1200">
+                          <a:solidFill>
+                            <a:schemeClr val="tx1"/>
+                          </a:solidFill>
+                          <a:latin typeface="宋体" panose="02010600030101010101" pitchFamily="2" charset="-122"/>
+                          <a:ea typeface="宋体" panose="02010600030101010101" pitchFamily="2" charset="-122"/>
+                        </a:rPr>
+                        <a:t>-</a:t>
+                      </a:r>
+                      <a:endParaRPr lang="en-US" altLang="zh-CN" sz="1200">
+                        <a:solidFill>
+                          <a:schemeClr val="tx1"/>
+                        </a:solidFill>
+                        <a:latin typeface="宋体" panose="02010600030101010101" pitchFamily="2" charset="-122"/>
+                        <a:ea typeface="宋体" panose="02010600030101010101" pitchFamily="2" charset="-122"/>
+                      </a:endParaRPr>
+                    </a:p>
+                  </a:txBody>
+                  <a:tcPr>
+                    <a:lnL w="12700">
+                      <a:solidFill>
+                        <a:schemeClr val="tx1"/>
+                      </a:solidFill>
+                      <a:prstDash val="solid"/>
+                    </a:lnL>
+                    <a:lnR w="12700">
+                      <a:solidFill>
+                        <a:schemeClr val="tx1"/>
+                      </a:solidFill>
+                      <a:prstDash val="solid"/>
+                    </a:lnR>
+                    <a:lnT w="12700">
+                      <a:solidFill>
+                        <a:schemeClr val="tx1"/>
+                      </a:solidFill>
+                      <a:prstDash val="solid"/>
+                    </a:lnT>
+                    <a:lnB w="12700">
+                      <a:solidFill>
+                        <a:schemeClr val="tx1"/>
+                      </a:solidFill>
+                      <a:prstDash val="solid"/>
+                    </a:lnB>
+                    <a:lnTlToBr>
+                      <a:noFill/>
+                    </a:lnTlToBr>
+                    <a:lnBlToTr>
+                      <a:noFill/>
+                    </a:lnBlToTr>
+                    <a:noFill/>
+                  </a:tcPr>
+                </a:tc>
+              </a:tr>
+              <a:tr h="274320">
+                <a:tc>
+                  <a:txBody>
+                    <a:bodyPr/>
+                    <a:p>
+                      <a:pPr>
+                        <a:buNone/>
+                      </a:pPr>
+                      <a:r>
+                        <a:rPr lang="zh-CN" altLang="en-US" sz="1200">
+                          <a:solidFill>
+                            <a:schemeClr val="tx1"/>
+                          </a:solidFill>
+                          <a:latin typeface="宋体" panose="02010600030101010101" pitchFamily="2" charset="-122"/>
+                          <a:ea typeface="宋体" panose="02010600030101010101" pitchFamily="2" charset="-122"/>
+                          <a:sym typeface="+mn-ea"/>
+                        </a:rPr>
+                        <a:t>质量</a:t>
+                      </a:r>
+                      <a:endParaRPr lang="zh-CN" altLang="en-US" sz="1200">
+                        <a:solidFill>
+                          <a:schemeClr val="tx1"/>
+                        </a:solidFill>
+                        <a:latin typeface="宋体" panose="02010600030101010101" pitchFamily="2" charset="-122"/>
+                        <a:ea typeface="宋体" panose="02010600030101010101" pitchFamily="2" charset="-122"/>
+                        <a:sym typeface="+mn-ea"/>
+                      </a:endParaRPr>
+                    </a:p>
+                  </a:txBody>
+                  <a:tcPr>
+                    <a:lnL w="12700">
+                      <a:solidFill>
+                        <a:schemeClr val="tx1"/>
+                      </a:solidFill>
+                      <a:prstDash val="solid"/>
+                    </a:lnL>
+                    <a:lnR w="12700">
+                      <a:solidFill>
+                        <a:schemeClr val="tx1"/>
+                      </a:solidFill>
+                      <a:prstDash val="solid"/>
+                    </a:lnR>
+                    <a:lnT w="12700">
+                      <a:solidFill>
+                        <a:schemeClr val="tx1"/>
+                      </a:solidFill>
+                      <a:prstDash val="solid"/>
+                    </a:lnT>
+                    <a:lnB w="12700">
+                      <a:solidFill>
+                        <a:schemeClr val="tx1"/>
+                      </a:solidFill>
+                      <a:prstDash val="solid"/>
+                    </a:lnB>
+                    <a:lnTlToBr>
+                      <a:noFill/>
+                    </a:lnTlToBr>
+                    <a:lnBlToTr>
+                      <a:noFill/>
+                    </a:lnBlToTr>
+                    <a:noFill/>
+                  </a:tcPr>
+                </a:tc>
+                <a:tc>
+                  <a:txBody>
+                    <a:bodyPr/>
+                    <a:p>
+                      <a:pPr>
+                        <a:buNone/>
+                      </a:pPr>
+                      <a:r>
+                        <a:rPr lang="en-US" altLang="zh-CN" sz="1200">
+                          <a:solidFill>
+                            <a:schemeClr val="tx1"/>
+                          </a:solidFill>
+                          <a:latin typeface="宋体" panose="02010600030101010101" pitchFamily="2" charset="-122"/>
+                          <a:ea typeface="宋体" panose="02010600030101010101" pitchFamily="2" charset="-122"/>
+                        </a:rPr>
+                        <a:t>50</a:t>
+                      </a:r>
+                      <a:endParaRPr lang="en-US" altLang="zh-CN" sz="1200">
+                        <a:solidFill>
+                          <a:schemeClr val="tx1"/>
+                        </a:solidFill>
+                        <a:latin typeface="宋体" panose="02010600030101010101" pitchFamily="2" charset="-122"/>
+                        <a:ea typeface="宋体" panose="02010600030101010101" pitchFamily="2" charset="-122"/>
+                      </a:endParaRPr>
+                    </a:p>
+                  </a:txBody>
+                  <a:tcPr>
+                    <a:lnL w="12700">
+                      <a:solidFill>
+                        <a:schemeClr val="tx1"/>
+                      </a:solidFill>
+                      <a:prstDash val="solid"/>
+                    </a:lnL>
+                    <a:lnR w="12700">
+                      <a:solidFill>
+                        <a:schemeClr val="tx1"/>
+                      </a:solidFill>
+                      <a:prstDash val="solid"/>
+                    </a:lnR>
+                    <a:lnT w="12700">
+                      <a:solidFill>
+                        <a:schemeClr val="tx1"/>
+                      </a:solidFill>
+                      <a:prstDash val="solid"/>
+                    </a:lnT>
+                    <a:lnB w="12700">
+                      <a:solidFill>
+                        <a:schemeClr val="tx1"/>
+                      </a:solidFill>
+                      <a:prstDash val="solid"/>
+                    </a:lnB>
+                    <a:lnTlToBr>
+                      <a:noFill/>
+                    </a:lnTlToBr>
+                    <a:lnBlToTr>
+                      <a:noFill/>
+                    </a:lnBlToTr>
+                    <a:noFill/>
+                  </a:tcPr>
+                </a:tc>
+                <a:tc>
+                  <a:txBody>
+                    <a:bodyPr/>
+                    <a:p>
+                      <a:pPr>
+                        <a:buNone/>
+                      </a:pPr>
+                      <a:r>
+                        <a:rPr lang="en-US" altLang="zh-CN" sz="1200">
+                          <a:solidFill>
+                            <a:schemeClr val="tx1"/>
+                          </a:solidFill>
+                          <a:latin typeface="宋体" panose="02010600030101010101" pitchFamily="2" charset="-122"/>
+                          <a:ea typeface="宋体" panose="02010600030101010101" pitchFamily="2" charset="-122"/>
+                        </a:rPr>
+                        <a:t>kg</a:t>
+                      </a:r>
+                      <a:endParaRPr lang="en-US" altLang="zh-CN" sz="1200">
+                        <a:solidFill>
+                          <a:schemeClr val="tx1"/>
+                        </a:solidFill>
+                        <a:latin typeface="宋体" panose="02010600030101010101" pitchFamily="2" charset="-122"/>
+                        <a:ea typeface="宋体" panose="02010600030101010101" pitchFamily="2" charset="-122"/>
+                      </a:endParaRPr>
+                    </a:p>
+                  </a:txBody>
+                  <a:tcPr>
+                    <a:lnL w="12700">
+                      <a:solidFill>
+                        <a:schemeClr val="tx1"/>
+                      </a:solidFill>
+                      <a:prstDash val="solid"/>
+                    </a:lnL>
+                    <a:lnR w="12700">
+                      <a:solidFill>
+                        <a:schemeClr val="tx1"/>
+                      </a:solidFill>
+                      <a:prstDash val="solid"/>
+                    </a:lnR>
+                    <a:lnT w="12700">
+                      <a:solidFill>
+                        <a:schemeClr val="tx1"/>
+                      </a:solidFill>
+                      <a:prstDash val="solid"/>
+                    </a:lnT>
+                    <a:lnB w="12700">
+                      <a:solidFill>
+                        <a:schemeClr val="tx1"/>
+                      </a:solidFill>
+                      <a:prstDash val="solid"/>
+                    </a:lnB>
+                    <a:lnTlToBr>
+                      <a:noFill/>
+                    </a:lnTlToBr>
+                    <a:lnBlToTr>
+                      <a:noFill/>
+                    </a:lnBlToTr>
+                    <a:noFill/>
+                  </a:tcPr>
+                </a:tc>
+              </a:tr>
+              <a:tr h="274320">
+                <a:tc>
+                  <a:txBody>
+                    <a:bodyPr/>
+                    <a:p>
+                      <a:pPr>
+                        <a:buNone/>
+                      </a:pPr>
+                      <a:r>
+                        <a:rPr lang="zh-CN" altLang="en-US" sz="1200">
+                          <a:solidFill>
+                            <a:schemeClr val="tx1"/>
+                          </a:solidFill>
+                          <a:latin typeface="宋体" panose="02010600030101010101" pitchFamily="2" charset="-122"/>
+                          <a:ea typeface="宋体" panose="02010600030101010101" pitchFamily="2" charset="-122"/>
+                        </a:rPr>
+                        <a:t>比热容</a:t>
+                      </a:r>
+                      <a:endParaRPr lang="zh-CN" altLang="en-US" sz="1200">
+                        <a:solidFill>
+                          <a:schemeClr val="tx1"/>
+                        </a:solidFill>
+                        <a:latin typeface="宋体" panose="02010600030101010101" pitchFamily="2" charset="-122"/>
+                        <a:ea typeface="宋体" panose="02010600030101010101" pitchFamily="2" charset="-122"/>
+                      </a:endParaRPr>
+                    </a:p>
+                  </a:txBody>
+                  <a:tcPr>
+                    <a:lnL w="12700">
+                      <a:solidFill>
+                        <a:schemeClr val="tx1"/>
+                      </a:solidFill>
+                      <a:prstDash val="solid"/>
+                    </a:lnL>
+                    <a:lnR w="12700">
+                      <a:solidFill>
+                        <a:schemeClr val="tx1"/>
+                      </a:solidFill>
+                      <a:prstDash val="solid"/>
+                    </a:lnR>
+                    <a:lnT w="12700">
+                      <a:solidFill>
+                        <a:schemeClr val="tx1"/>
+                      </a:solidFill>
+                      <a:prstDash val="solid"/>
+                    </a:lnT>
+                    <a:lnB w="12700">
+                      <a:solidFill>
+                        <a:schemeClr val="tx1"/>
+                      </a:solidFill>
+                      <a:prstDash val="solid"/>
+                    </a:lnB>
+                    <a:lnTlToBr>
+                      <a:noFill/>
+                    </a:lnTlToBr>
+                    <a:lnBlToTr>
+                      <a:noFill/>
+                    </a:lnBlToTr>
+                    <a:noFill/>
+                  </a:tcPr>
+                </a:tc>
+                <a:tc>
+                  <a:txBody>
+                    <a:bodyPr/>
+                    <a:p>
+                      <a:pPr>
+                        <a:buNone/>
+                      </a:pPr>
+                      <a:r>
+                        <a:rPr lang="en-US" altLang="zh-CN" sz="1200">
+                          <a:solidFill>
+                            <a:schemeClr val="tx1"/>
+                          </a:solidFill>
+                          <a:latin typeface="宋体" panose="02010600030101010101" pitchFamily="2" charset="-122"/>
+                          <a:ea typeface="宋体" panose="02010600030101010101" pitchFamily="2" charset="-122"/>
+                        </a:rPr>
+                        <a:t>4.2*10^3</a:t>
+                      </a:r>
+                      <a:endParaRPr lang="en-US" altLang="zh-CN" sz="1200">
+                        <a:solidFill>
+                          <a:schemeClr val="tx1"/>
+                        </a:solidFill>
+                        <a:latin typeface="宋体" panose="02010600030101010101" pitchFamily="2" charset="-122"/>
+                        <a:ea typeface="宋体" panose="02010600030101010101" pitchFamily="2" charset="-122"/>
+                      </a:endParaRPr>
+                    </a:p>
+                  </a:txBody>
+                  <a:tcPr>
+                    <a:lnL w="12700">
+                      <a:solidFill>
+                        <a:schemeClr val="tx1"/>
+                      </a:solidFill>
+                      <a:prstDash val="solid"/>
+                    </a:lnL>
+                    <a:lnR w="12700">
+                      <a:solidFill>
+                        <a:schemeClr val="tx1"/>
+                      </a:solidFill>
+                      <a:prstDash val="solid"/>
+                    </a:lnR>
+                    <a:lnT w="12700">
+                      <a:solidFill>
+                        <a:schemeClr val="tx1"/>
+                      </a:solidFill>
+                      <a:prstDash val="solid"/>
+                    </a:lnT>
+                    <a:lnB w="12700">
+                      <a:solidFill>
+                        <a:schemeClr val="tx1"/>
+                      </a:solidFill>
+                      <a:prstDash val="solid"/>
+                    </a:lnB>
+                    <a:lnTlToBr>
+                      <a:noFill/>
+                    </a:lnTlToBr>
+                    <a:lnBlToTr>
+                      <a:noFill/>
+                    </a:lnBlToTr>
+                    <a:noFill/>
+                  </a:tcPr>
+                </a:tc>
+                <a:tc>
+                  <a:txBody>
+                    <a:bodyPr/>
+                    <a:p>
+                      <a:pPr>
+                        <a:buNone/>
+                      </a:pPr>
+                      <a:r>
+                        <a:rPr lang="en-US" altLang="zh-CN" sz="1200">
+                          <a:solidFill>
+                            <a:schemeClr val="tx1"/>
+                          </a:solidFill>
+                          <a:latin typeface="宋体" panose="02010600030101010101" pitchFamily="2" charset="-122"/>
+                          <a:ea typeface="宋体" panose="02010600030101010101" pitchFamily="2" charset="-122"/>
+                          <a:sym typeface="+mn-ea"/>
+                        </a:rPr>
+                        <a:t>J/(kg·℃)</a:t>
+                      </a:r>
+                      <a:endParaRPr lang="en-US" altLang="zh-CN" sz="1200">
+                        <a:solidFill>
+                          <a:schemeClr val="tx1"/>
+                        </a:solidFill>
+                        <a:latin typeface="宋体" panose="02010600030101010101" pitchFamily="2" charset="-122"/>
+                        <a:ea typeface="宋体" panose="02010600030101010101" pitchFamily="2" charset="-122"/>
+                        <a:sym typeface="+mn-ea"/>
+                      </a:endParaRPr>
+                    </a:p>
+                  </a:txBody>
+                  <a:tcPr>
+                    <a:lnL w="12700">
+                      <a:solidFill>
+                        <a:schemeClr val="tx1"/>
+                      </a:solidFill>
+                      <a:prstDash val="solid"/>
+                    </a:lnL>
+                    <a:lnR w="12700">
+                      <a:solidFill>
+                        <a:schemeClr val="tx1"/>
+                      </a:solidFill>
+                      <a:prstDash val="solid"/>
+                    </a:lnR>
+                    <a:lnT w="12700">
+                      <a:solidFill>
+                        <a:schemeClr val="tx1"/>
+                      </a:solidFill>
+                      <a:prstDash val="solid"/>
+                    </a:lnT>
+                    <a:lnB w="12700">
+                      <a:solidFill>
+                        <a:schemeClr val="tx1"/>
+                      </a:solidFill>
+                      <a:prstDash val="solid"/>
+                    </a:lnB>
+                    <a:lnTlToBr>
+                      <a:noFill/>
+                    </a:lnTlToBr>
+                    <a:lnBlToTr>
+                      <a:noFill/>
+                    </a:lnBlToTr>
+                    <a:noFill/>
+                  </a:tcPr>
+                </a:tc>
+              </a:tr>
+              <a:tr h="274320">
+                <a:tc>
+                  <a:txBody>
+                    <a:bodyPr/>
+                    <a:p>
+                      <a:pPr>
+                        <a:buNone/>
+                      </a:pPr>
+                      <a:r>
+                        <a:rPr lang="zh-CN" altLang="en-US" sz="1200">
+                          <a:solidFill>
+                            <a:schemeClr val="tx1"/>
+                          </a:solidFill>
+                          <a:latin typeface="宋体" panose="02010600030101010101" pitchFamily="2" charset="-122"/>
+                          <a:ea typeface="宋体" panose="02010600030101010101" pitchFamily="2" charset="-122"/>
+                        </a:rPr>
+                        <a:t>初始温度</a:t>
+                      </a:r>
+                      <a:endParaRPr lang="zh-CN" altLang="en-US" sz="1200">
+                        <a:solidFill>
+                          <a:schemeClr val="tx1"/>
+                        </a:solidFill>
+                        <a:latin typeface="宋体" panose="02010600030101010101" pitchFamily="2" charset="-122"/>
+                        <a:ea typeface="宋体" panose="02010600030101010101" pitchFamily="2" charset="-122"/>
+                      </a:endParaRPr>
+                    </a:p>
+                  </a:txBody>
+                  <a:tcPr>
+                    <a:lnL w="12700">
+                      <a:solidFill>
+                        <a:schemeClr val="tx1"/>
+                      </a:solidFill>
+                      <a:prstDash val="solid"/>
+                    </a:lnL>
+                    <a:lnR w="12700">
+                      <a:solidFill>
+                        <a:schemeClr val="tx1"/>
+                      </a:solidFill>
+                      <a:prstDash val="solid"/>
+                    </a:lnR>
+                    <a:lnT w="12700">
+                      <a:solidFill>
+                        <a:schemeClr val="tx1"/>
+                      </a:solidFill>
+                      <a:prstDash val="solid"/>
+                    </a:lnT>
+                    <a:lnB w="12700">
+                      <a:solidFill>
+                        <a:schemeClr val="tx1"/>
+                      </a:solidFill>
+                      <a:prstDash val="solid"/>
+                    </a:lnB>
+                    <a:lnTlToBr>
+                      <a:noFill/>
+                    </a:lnTlToBr>
+                    <a:lnBlToTr>
+                      <a:noFill/>
+                    </a:lnBlToTr>
+                    <a:noFill/>
+                  </a:tcPr>
+                </a:tc>
+                <a:tc>
+                  <a:txBody>
+                    <a:bodyPr/>
+                    <a:p>
+                      <a:pPr>
+                        <a:buNone/>
+                      </a:pPr>
+                      <a:r>
+                        <a:rPr lang="en-US" altLang="zh-CN" sz="1200">
+                          <a:solidFill>
+                            <a:schemeClr val="tx1"/>
+                          </a:solidFill>
+                          <a:latin typeface="宋体" panose="02010600030101010101" pitchFamily="2" charset="-122"/>
+                          <a:ea typeface="宋体" panose="02010600030101010101" pitchFamily="2" charset="-122"/>
+                        </a:rPr>
+                        <a:t>20</a:t>
+                      </a:r>
+                      <a:endParaRPr lang="en-US" altLang="zh-CN" sz="1200">
+                        <a:solidFill>
+                          <a:schemeClr val="tx1"/>
+                        </a:solidFill>
+                        <a:latin typeface="宋体" panose="02010600030101010101" pitchFamily="2" charset="-122"/>
+                        <a:ea typeface="宋体" panose="02010600030101010101" pitchFamily="2" charset="-122"/>
+                      </a:endParaRPr>
+                    </a:p>
+                  </a:txBody>
+                  <a:tcPr>
+                    <a:lnL w="12700">
+                      <a:solidFill>
+                        <a:schemeClr val="tx1"/>
+                      </a:solidFill>
+                      <a:prstDash val="solid"/>
+                    </a:lnL>
+                    <a:lnR w="12700">
+                      <a:solidFill>
+                        <a:schemeClr val="tx1"/>
+                      </a:solidFill>
+                      <a:prstDash val="solid"/>
+                    </a:lnR>
+                    <a:lnT w="12700">
+                      <a:solidFill>
+                        <a:schemeClr val="tx1"/>
+                      </a:solidFill>
+                      <a:prstDash val="solid"/>
+                    </a:lnT>
+                    <a:lnB w="12700">
+                      <a:solidFill>
+                        <a:schemeClr val="tx1"/>
+                      </a:solidFill>
+                      <a:prstDash val="solid"/>
+                    </a:lnB>
+                    <a:lnTlToBr>
+                      <a:noFill/>
+                    </a:lnTlToBr>
+                    <a:lnBlToTr>
+                      <a:noFill/>
+                    </a:lnBlToTr>
+                    <a:noFill/>
+                  </a:tcPr>
+                </a:tc>
+                <a:tc>
+                  <a:txBody>
+                    <a:bodyPr/>
+                    <a:p>
+                      <a:pPr>
+                        <a:buNone/>
+                      </a:pPr>
+                      <a:r>
+                        <a:rPr lang="en-US" altLang="zh-CN" sz="1200">
+                          <a:solidFill>
+                            <a:schemeClr val="tx1"/>
+                          </a:solidFill>
+                          <a:latin typeface="宋体" panose="02010600030101010101" pitchFamily="2" charset="-122"/>
+                          <a:ea typeface="宋体" panose="02010600030101010101" pitchFamily="2" charset="-122"/>
+                        </a:rPr>
+                        <a:t>℃</a:t>
+                      </a:r>
+                      <a:endParaRPr lang="en-US" altLang="zh-CN" sz="1200">
+                        <a:solidFill>
+                          <a:schemeClr val="tx1"/>
+                        </a:solidFill>
+                        <a:latin typeface="宋体" panose="02010600030101010101" pitchFamily="2" charset="-122"/>
+                        <a:ea typeface="宋体" panose="02010600030101010101" pitchFamily="2" charset="-122"/>
+                      </a:endParaRPr>
+                    </a:p>
+                  </a:txBody>
+                  <a:tcPr>
+                    <a:lnL w="12700">
+                      <a:solidFill>
+                        <a:schemeClr val="tx1"/>
+                      </a:solidFill>
+                      <a:prstDash val="solid"/>
+                    </a:lnL>
+                    <a:lnR w="12700">
+                      <a:solidFill>
+                        <a:schemeClr val="tx1"/>
+                      </a:solidFill>
+                      <a:prstDash val="solid"/>
+                    </a:lnR>
+                    <a:lnT w="12700">
+                      <a:solidFill>
+                        <a:schemeClr val="tx1"/>
+                      </a:solidFill>
+                      <a:prstDash val="solid"/>
+                    </a:lnT>
+                    <a:lnB w="12700">
+                      <a:solidFill>
+                        <a:schemeClr val="tx1"/>
+                      </a:solidFill>
+                      <a:prstDash val="solid"/>
+                    </a:lnB>
+                    <a:lnTlToBr>
+                      <a:noFill/>
+                    </a:lnTlToBr>
+                    <a:lnBlToTr>
+                      <a:noFill/>
+                    </a:lnBlToTr>
+                    <a:noFill/>
+                  </a:tcPr>
+                </a:tc>
+              </a:tr>
+            </a:tbl>
+          </a:graphicData>
+        </a:graphic>
+      </p:graphicFrame>
+      <p:sp>
+        <p:nvSpPr>
+          <p:cNvPr id="11" name="下箭头 10"/>
+          <p:cNvSpPr/>
+          <p:nvPr/>
+        </p:nvSpPr>
+        <p:spPr>
+          <a:xfrm>
+            <a:off x="1656080" y="1882775"/>
+            <a:ext cx="205105" cy="333375"/>
+          </a:xfrm>
+          <a:prstGeom prst="downArrow">
+            <a:avLst/>
+          </a:prstGeom>
+          <a:noFill/>
+          <a:ln>
+            <a:solidFill>
+              <a:schemeClr val="accent4">
+                <a:lumMod val="60000"/>
+                <a:lumOff val="40000"/>
+              </a:schemeClr>
+            </a:solidFill>
+          </a:ln>
+        </p:spPr>
+        <p:style>
+          <a:lnRef idx="2">
+            <a:schemeClr val="accent1">
+              <a:lumMod val="75000"/>
+            </a:schemeClr>
+          </a:lnRef>
+          <a:fillRef idx="1">
+            <a:schemeClr val="accent1"/>
+          </a:fillRef>
+          <a:effectRef idx="0">
+            <a:srgbClr val="FFFFFF"/>
+          </a:effectRef>
+          <a:fontRef idx="minor">
+            <a:schemeClr val="lt1"/>
+          </a:fontRef>
+        </p:style>
+        <p:txBody>
+          <a:bodyPr rtlCol="0" anchor="ctr"/>
+          <a:p>
+            <a:pPr algn="ctr"/>
+            <a:endParaRPr lang="zh-CN" altLang="en-US"/>
+          </a:p>
+        </p:txBody>
+      </p:sp>
+      <p:sp>
+        <p:nvSpPr>
+          <p:cNvPr id="24" name="圆角右箭头 23"/>
+          <p:cNvSpPr/>
+          <p:nvPr/>
+        </p:nvSpPr>
+        <p:spPr>
+          <a:xfrm rot="10800000" flipH="1">
+            <a:off x="3345815" y="3171825"/>
+            <a:ext cx="508635" cy="549275"/>
+          </a:xfrm>
+          <a:prstGeom prst="bentArrow">
+            <a:avLst>
+              <a:gd name="adj1" fmla="val 25000"/>
+              <a:gd name="adj2" fmla="val 25045"/>
+              <a:gd name="adj3" fmla="val 25000"/>
+              <a:gd name="adj4" fmla="val 43750"/>
+            </a:avLst>
+          </a:prstGeom>
+          <a:noFill/>
+          <a:ln>
+            <a:solidFill>
+              <a:schemeClr val="tx1"/>
+            </a:solidFill>
+          </a:ln>
+        </p:spPr>
+        <p:style>
+          <a:lnRef idx="2">
+            <a:schemeClr val="accent1">
+              <a:lumMod val="75000"/>
+            </a:schemeClr>
+          </a:lnRef>
+          <a:fillRef idx="1">
+            <a:schemeClr val="accent1"/>
+          </a:fillRef>
+          <a:effectRef idx="0">
+            <a:srgbClr val="FFFFFF"/>
+          </a:effectRef>
+          <a:fontRef idx="minor">
+            <a:schemeClr val="lt1"/>
+          </a:fontRef>
+        </p:style>
+        <p:txBody>
+          <a:bodyPr rtlCol="0" anchor="ctr"/>
+          <a:p>
+            <a:pPr algn="ctr"/>
+            <a:endParaRPr lang="zh-CN" altLang="en-US">
+              <a:solidFill>
+                <a:schemeClr val="tx1"/>
+              </a:solidFill>
+            </a:endParaRPr>
+          </a:p>
+        </p:txBody>
+      </p:sp>
+      <p:pic>
+        <p:nvPicPr>
+          <p:cNvPr id="16" name="图片 15" descr="大模型-copy"/>
+          <p:cNvPicPr>
+            <a:picLocks noChangeAspect="1"/>
+          </p:cNvPicPr>
+          <p:nvPr/>
+        </p:nvPicPr>
+        <p:blipFill>
+          <a:blip r:embed="rId2"/>
+          <a:stretch>
+            <a:fillRect/>
+          </a:stretch>
+        </p:blipFill>
+        <p:spPr>
+          <a:xfrm>
+            <a:off x="1171575" y="1882775"/>
+            <a:ext cx="338455" cy="338455"/>
+          </a:xfrm>
+          <a:prstGeom prst="rect">
+            <a:avLst/>
+          </a:prstGeom>
+        </p:spPr>
+      </p:pic>
+      <p:pic>
+        <p:nvPicPr>
+          <p:cNvPr id="13" name="图片 12" descr="大模型-copy"/>
+          <p:cNvPicPr>
+            <a:picLocks noChangeAspect="1"/>
+          </p:cNvPicPr>
+          <p:nvPr/>
+        </p:nvPicPr>
+        <p:blipFill>
+          <a:blip r:embed="rId2"/>
+          <a:stretch>
+            <a:fillRect/>
+          </a:stretch>
+        </p:blipFill>
+        <p:spPr>
+          <a:xfrm>
+            <a:off x="3540760" y="3089275"/>
+            <a:ext cx="338455" cy="338455"/>
+          </a:xfrm>
+          <a:prstGeom prst="rect">
+            <a:avLst/>
+          </a:prstGeom>
+        </p:spPr>
+      </p:pic>
+      <p:sp>
+        <p:nvSpPr>
+          <p:cNvPr id="14" name="文本框 13"/>
           <p:cNvSpPr txBox="1"/>
           <p:nvPr/>
         </p:nvSpPr>
         <p:spPr>
           <a:xfrm>
-            <a:off x="3959225" y="1094105"/>
-            <a:ext cx="2700020" cy="3013710"/>
+            <a:off x="1852930" y="1887855"/>
+            <a:ext cx="1030605" cy="300355"/>
           </a:xfrm>
           <a:prstGeom prst="rect">
             <a:avLst/>
@@ -21252,104 +23139,480 @@
         </p:spPr>
         <p:txBody>
           <a:bodyPr wrap="square" rtlCol="0">
+            <a:spAutoFit/>
+          </a:bodyPr>
+          <a:p>
+            <a:r>
+              <a:rPr lang="zh-CN" altLang="en-US"/>
+              <a:t>公式</a:t>
+            </a:r>
+            <a:r>
+              <a:rPr lang="zh-CN" altLang="en-US"/>
+              <a:t>生成</a:t>
+            </a:r>
+            <a:endParaRPr lang="zh-CN" altLang="en-US"/>
+          </a:p>
+        </p:txBody>
+      </p:sp>
+      <p:sp>
+        <p:nvSpPr>
+          <p:cNvPr id="15" name="文本框 14"/>
+          <p:cNvSpPr txBox="1"/>
+          <p:nvPr/>
+        </p:nvSpPr>
+        <p:spPr>
+          <a:xfrm>
+            <a:off x="2860040" y="3171825"/>
+            <a:ext cx="602615" cy="534035"/>
+          </a:xfrm>
+          <a:prstGeom prst="rect">
+            <a:avLst/>
+          </a:prstGeom>
+          <a:noFill/>
+        </p:spPr>
+        <p:txBody>
+          <a:bodyPr wrap="square" rtlCol="0">
             <a:noAutofit/>
           </a:bodyPr>
-          <a:lstStyle/>
-          <a:p>
-            <a:pPr marL="285750" indent="-285750">
-              <a:lnSpc>
-                <a:spcPct val="150000"/>
-              </a:lnSpc>
-              <a:buFont typeface="Wingdings" panose="05000000000000000000" pitchFamily="2" charset="2"/>
-              <a:buChar char="n"/>
-            </a:pPr>
-            <a:r>
-              <a:rPr lang="zh-CN" altLang="en-US" sz="1400" dirty="0"/>
-              <a:t>数据集</a:t>
-            </a:r>
-            <a:br>
-              <a:rPr lang="zh-CN" altLang="en-US" sz="1400" dirty="0"/>
-            </a:br>
-            <a:r>
-              <a:rPr lang="en-US" altLang="zh-CN" sz="1400" dirty="0"/>
-              <a:t>- </a:t>
-            </a:r>
-            <a:r>
-              <a:rPr lang="zh-CN" altLang="en-US" sz="1400" dirty="0"/>
-              <a:t>使用前文构建方法得到的公式以及参数信息作为训练</a:t>
-            </a:r>
-            <a:r>
-              <a:rPr lang="zh-CN" altLang="en-US" sz="1400" dirty="0"/>
-              <a:t>数据</a:t>
-            </a:r>
-            <a:endParaRPr lang="zh-CN" altLang="en-US" sz="1400" dirty="0"/>
-          </a:p>
-          <a:p>
-            <a:pPr marL="285750" indent="-285750">
-              <a:lnSpc>
-                <a:spcPct val="150000"/>
-              </a:lnSpc>
-              <a:buFont typeface="Wingdings" panose="05000000000000000000" pitchFamily="2" charset="2"/>
-              <a:buChar char="n"/>
-            </a:pPr>
-            <a:r>
-              <a:rPr lang="zh-CN" altLang="en-US" sz="1400" dirty="0"/>
-              <a:t>三模块流程解题</a:t>
-            </a:r>
-            <a:br>
-              <a:rPr lang="zh-CN" altLang="en-US" sz="1400" dirty="0"/>
-            </a:br>
-            <a:r>
-              <a:rPr lang="en-US" altLang="zh-CN" sz="1400" dirty="0"/>
-              <a:t>- </a:t>
-            </a:r>
-            <a:r>
-              <a:rPr lang="zh-CN" altLang="en-US" sz="1400" dirty="0"/>
-              <a:t>公式生成、参数识别模块使用大模型实现</a:t>
-            </a:r>
-            <a:br>
-              <a:rPr lang="zh-CN" altLang="en-US" sz="1400" dirty="0"/>
-            </a:br>
-            <a:r>
-              <a:rPr lang="en-US" altLang="zh-CN" sz="1400" dirty="0"/>
-              <a:t>- </a:t>
-            </a:r>
-            <a:r>
-              <a:rPr lang="zh-CN" altLang="en-US" sz="1400" dirty="0"/>
-              <a:t>数值计算模块使用公式计算器</a:t>
-            </a:r>
-            <a:r>
-              <a:rPr lang="zh-CN" altLang="en-US" sz="1400" dirty="0"/>
-              <a:t>实现</a:t>
-            </a:r>
-            <a:endParaRPr lang="zh-CN" altLang="en-US" sz="1400" dirty="0"/>
+          <a:p>
+            <a:r>
+              <a:rPr lang="zh-CN" altLang="en-US"/>
+              <a:t>参数</a:t>
+            </a:r>
+            <a:r>
+              <a:rPr lang="zh-CN" altLang="en-US"/>
+              <a:t>识别</a:t>
+            </a:r>
+            <a:endParaRPr lang="zh-CN" altLang="en-US"/>
+          </a:p>
+        </p:txBody>
+      </p:sp>
+      <p:sp>
+        <p:nvSpPr>
+          <p:cNvPr id="17" name="矩形 16"/>
+          <p:cNvSpPr/>
+          <p:nvPr/>
+        </p:nvSpPr>
+        <p:spPr>
+          <a:xfrm>
+            <a:off x="208915" y="3721100"/>
+            <a:ext cx="3008630" cy="822325"/>
+          </a:xfrm>
+          <a:prstGeom prst="rect">
+            <a:avLst/>
+          </a:prstGeom>
+          <a:solidFill>
+            <a:schemeClr val="accent1">
+              <a:lumMod val="40000"/>
+              <a:lumOff val="60000"/>
+            </a:schemeClr>
+          </a:solidFill>
+        </p:spPr>
+        <p:style>
+          <a:lnRef idx="2">
+            <a:schemeClr val="accent1">
+              <a:lumMod val="75000"/>
+            </a:schemeClr>
+          </a:lnRef>
+          <a:fillRef idx="1">
+            <a:schemeClr val="accent1"/>
+          </a:fillRef>
+          <a:effectRef idx="0">
+            <a:srgbClr val="FFFFFF"/>
+          </a:effectRef>
+          <a:fontRef idx="minor">
+            <a:schemeClr val="lt1"/>
+          </a:fontRef>
+        </p:style>
+        <p:txBody>
+          <a:bodyPr rtlCol="0" anchor="ctr"/>
+          <a:p>
+            <a:pPr algn="ctr"/>
+            <a:endParaRPr lang="zh-CN" altLang="en-US"/>
+          </a:p>
+          <a:p>
+            <a:pPr algn="ctr"/>
+            <a:endParaRPr lang="en-US" altLang="zh-CN"/>
           </a:p>
         </p:txBody>
       </p:sp>
       <p:pic>
         <p:nvPicPr>
-          <p:cNvPr id="2" name="图片 1"/>
+          <p:cNvPr id="18" name="图片 17" descr="计算器"/>
           <p:cNvPicPr>
             <a:picLocks noChangeAspect="1"/>
           </p:cNvPicPr>
           <p:nvPr/>
         </p:nvPicPr>
         <p:blipFill>
-          <a:blip r:embed="rId1"/>
+          <a:blip r:embed="rId3"/>
           <a:stretch>
             <a:fillRect/>
           </a:stretch>
         </p:blipFill>
         <p:spPr>
-          <a:xfrm>
-            <a:off x="165735" y="969010"/>
-            <a:ext cx="3793490" cy="3480435"/>
+          <a:xfrm flipH="1">
+            <a:off x="130810" y="3808730"/>
+            <a:ext cx="601980" cy="608965"/>
           </a:xfrm>
           <a:prstGeom prst="rect">
             <a:avLst/>
           </a:prstGeom>
         </p:spPr>
       </p:pic>
+      <p:sp>
+        <p:nvSpPr>
+          <p:cNvPr id="19" name="下箭头 18"/>
+          <p:cNvSpPr/>
+          <p:nvPr/>
+        </p:nvSpPr>
+        <p:spPr>
+          <a:xfrm>
+            <a:off x="1656080" y="3204845"/>
+            <a:ext cx="205105" cy="435610"/>
+          </a:xfrm>
+          <a:prstGeom prst="downArrow">
+            <a:avLst/>
+          </a:prstGeom>
+          <a:noFill/>
+          <a:ln>
+            <a:solidFill>
+              <a:schemeClr val="accent5"/>
+            </a:solidFill>
+          </a:ln>
+        </p:spPr>
+        <p:style>
+          <a:lnRef idx="2">
+            <a:schemeClr val="accent1">
+              <a:lumMod val="75000"/>
+            </a:schemeClr>
+          </a:lnRef>
+          <a:fillRef idx="1">
+            <a:schemeClr val="accent1"/>
+          </a:fillRef>
+          <a:effectRef idx="0">
+            <a:srgbClr val="FFFFFF"/>
+          </a:effectRef>
+          <a:fontRef idx="minor">
+            <a:schemeClr val="lt1"/>
+          </a:fontRef>
+        </p:style>
+        <p:txBody>
+          <a:bodyPr rtlCol="0" anchor="ctr"/>
+          <a:p>
+            <a:pPr algn="ctr"/>
+            <a:endParaRPr lang="zh-CN" altLang="en-US"/>
+          </a:p>
+        </p:txBody>
+      </p:sp>
+      <p:sp>
+        <p:nvSpPr>
+          <p:cNvPr id="21" name="圆角右箭头 20"/>
+          <p:cNvSpPr/>
+          <p:nvPr/>
+        </p:nvSpPr>
+        <p:spPr>
+          <a:xfrm rot="10800000">
+            <a:off x="3346450" y="3990340"/>
+            <a:ext cx="1728470" cy="455930"/>
+          </a:xfrm>
+          <a:prstGeom prst="bentArrow">
+            <a:avLst>
+              <a:gd name="adj1" fmla="val 25000"/>
+              <a:gd name="adj2" fmla="val 25045"/>
+              <a:gd name="adj3" fmla="val 25000"/>
+              <a:gd name="adj4" fmla="val 43750"/>
+            </a:avLst>
+          </a:prstGeom>
+          <a:noFill/>
+          <a:ln>
+            <a:solidFill>
+              <a:schemeClr val="accent5"/>
+            </a:solidFill>
+          </a:ln>
+        </p:spPr>
+        <p:style>
+          <a:lnRef idx="2">
+            <a:schemeClr val="accent1">
+              <a:lumMod val="75000"/>
+            </a:schemeClr>
+          </a:lnRef>
+          <a:fillRef idx="1">
+            <a:schemeClr val="accent1"/>
+          </a:fillRef>
+          <a:effectRef idx="0">
+            <a:srgbClr val="FFFFFF"/>
+          </a:effectRef>
+          <a:fontRef idx="minor">
+            <a:schemeClr val="lt1"/>
+          </a:fontRef>
+        </p:style>
+        <p:txBody>
+          <a:bodyPr rtlCol="0" anchor="ctr"/>
+          <a:p>
+            <a:pPr algn="ctr"/>
+            <a:endParaRPr lang="zh-CN" altLang="en-US">
+              <a:solidFill>
+                <a:schemeClr val="tx1"/>
+              </a:solidFill>
+            </a:endParaRPr>
+          </a:p>
+        </p:txBody>
+      </p:sp>
+      <p:sp>
+        <p:nvSpPr>
+          <p:cNvPr id="22" name="下箭头 21"/>
+          <p:cNvSpPr/>
+          <p:nvPr/>
+        </p:nvSpPr>
+        <p:spPr>
+          <a:xfrm>
+            <a:off x="4869815" y="1866265"/>
+            <a:ext cx="205105" cy="333375"/>
+          </a:xfrm>
+          <a:prstGeom prst="downArrow">
+            <a:avLst/>
+          </a:prstGeom>
+          <a:noFill/>
+          <a:ln>
+            <a:solidFill>
+              <a:schemeClr val="tx1"/>
+            </a:solidFill>
+          </a:ln>
+        </p:spPr>
+        <p:style>
+          <a:lnRef idx="2">
+            <a:schemeClr val="accent1">
+              <a:lumMod val="75000"/>
+            </a:schemeClr>
+          </a:lnRef>
+          <a:fillRef idx="1">
+            <a:schemeClr val="accent1"/>
+          </a:fillRef>
+          <a:effectRef idx="0">
+            <a:srgbClr val="FFFFFF"/>
+          </a:effectRef>
+          <a:fontRef idx="minor">
+            <a:schemeClr val="lt1"/>
+          </a:fontRef>
+        </p:style>
+        <p:txBody>
+          <a:bodyPr rtlCol="0" anchor="ctr"/>
+          <a:p>
+            <a:pPr algn="ctr"/>
+            <a:endParaRPr lang="zh-CN" altLang="en-US"/>
+          </a:p>
+        </p:txBody>
+      </p:sp>
+      <p:sp>
+        <p:nvSpPr>
+          <p:cNvPr id="23" name="文本框 22"/>
+          <p:cNvSpPr txBox="1"/>
+          <p:nvPr/>
+        </p:nvSpPr>
+        <p:spPr>
+          <a:xfrm>
+            <a:off x="5064125" y="1878330"/>
+            <a:ext cx="1046480" cy="321310"/>
+          </a:xfrm>
+          <a:prstGeom prst="rect">
+            <a:avLst/>
+          </a:prstGeom>
+          <a:noFill/>
+        </p:spPr>
+        <p:txBody>
+          <a:bodyPr wrap="square" rtlCol="0">
+            <a:noAutofit/>
+          </a:bodyPr>
+          <a:p>
+            <a:r>
+              <a:rPr lang="zh-CN" altLang="en-US"/>
+              <a:t>参数</a:t>
+            </a:r>
+            <a:r>
+              <a:rPr lang="zh-CN" altLang="en-US"/>
+              <a:t>识别</a:t>
+            </a:r>
+            <a:endParaRPr lang="zh-CN" altLang="en-US"/>
+          </a:p>
+        </p:txBody>
+      </p:sp>
+      <p:sp>
+        <p:nvSpPr>
+          <p:cNvPr id="25" name="文本框 24"/>
+          <p:cNvSpPr txBox="1"/>
+          <p:nvPr/>
+        </p:nvSpPr>
+        <p:spPr>
+          <a:xfrm>
+            <a:off x="1852930" y="3154045"/>
+            <a:ext cx="602615" cy="534035"/>
+          </a:xfrm>
+          <a:prstGeom prst="rect">
+            <a:avLst/>
+          </a:prstGeom>
+          <a:noFill/>
+        </p:spPr>
+        <p:txBody>
+          <a:bodyPr wrap="square" rtlCol="0">
+            <a:noAutofit/>
+          </a:bodyPr>
+          <a:p>
+            <a:r>
+              <a:rPr lang="zh-CN" altLang="en-US"/>
+              <a:t>数值</a:t>
+            </a:r>
+            <a:r>
+              <a:rPr lang="zh-CN" altLang="en-US"/>
+              <a:t>计算</a:t>
+            </a:r>
+            <a:endParaRPr lang="zh-CN" altLang="en-US"/>
+          </a:p>
+        </p:txBody>
+      </p:sp>
+      <p:sp>
+        <p:nvSpPr>
+          <p:cNvPr id="26" name="文本框 25"/>
+          <p:cNvSpPr txBox="1"/>
+          <p:nvPr/>
+        </p:nvSpPr>
+        <p:spPr>
+          <a:xfrm>
+            <a:off x="3689350" y="4003040"/>
+            <a:ext cx="1149350" cy="414655"/>
+          </a:xfrm>
+          <a:prstGeom prst="rect">
+            <a:avLst/>
+          </a:prstGeom>
+          <a:noFill/>
+        </p:spPr>
+        <p:txBody>
+          <a:bodyPr wrap="square" rtlCol="0">
+            <a:noAutofit/>
+          </a:bodyPr>
+          <a:p>
+            <a:r>
+              <a:rPr lang="zh-CN" altLang="en-US"/>
+              <a:t>数值</a:t>
+            </a:r>
+            <a:r>
+              <a:rPr lang="zh-CN" altLang="en-US"/>
+              <a:t>计算</a:t>
+            </a:r>
+            <a:endParaRPr lang="zh-CN" altLang="en-US"/>
+          </a:p>
+        </p:txBody>
+      </p:sp>
+      <p:sp>
+        <p:nvSpPr>
+          <p:cNvPr id="27" name="文本框 26"/>
+          <p:cNvSpPr txBox="1"/>
+          <p:nvPr/>
+        </p:nvSpPr>
+        <p:spPr>
+          <a:xfrm>
+            <a:off x="550545" y="3796665"/>
+            <a:ext cx="2940685" cy="718185"/>
+          </a:xfrm>
+          <a:prstGeom prst="rect">
+            <a:avLst/>
+          </a:prstGeom>
+          <a:noFill/>
+        </p:spPr>
+        <p:txBody>
+          <a:bodyPr wrap="square" rtlCol="0" anchor="t">
+            <a:spAutoFit/>
+          </a:bodyPr>
+          <a:p>
+            <a:pPr algn="l"/>
+            <a:r>
+              <a:rPr lang="en-US" altLang="zh-CN">
+                <a:sym typeface="+mn-ea"/>
+              </a:rPr>
+              <a:t>[</a:t>
+            </a:r>
+            <a:r>
+              <a:rPr lang="zh-CN" altLang="en-US">
+                <a:sym typeface="+mn-ea"/>
+              </a:rPr>
+              <a:t>吸收热量</a:t>
+            </a:r>
+            <a:r>
+              <a:rPr lang="en-US" altLang="zh-CN">
+                <a:sym typeface="+mn-ea"/>
+              </a:rPr>
+              <a:t>] = ...... = 8.4*10^6 J</a:t>
+            </a:r>
+            <a:endParaRPr lang="en-US" altLang="zh-CN">
+              <a:solidFill>
+                <a:schemeClr val="tx1"/>
+              </a:solidFill>
+            </a:endParaRPr>
+          </a:p>
+          <a:p>
+            <a:pPr algn="l"/>
+            <a:r>
+              <a:rPr lang="en-US" altLang="zh-CN">
+                <a:sym typeface="+mn-ea"/>
+              </a:rPr>
+              <a:t>[</a:t>
+            </a:r>
+            <a:r>
+              <a:rPr lang="zh-CN" altLang="en-US">
+                <a:sym typeface="+mn-ea"/>
+              </a:rPr>
+              <a:t>升高温度</a:t>
+            </a:r>
+            <a:r>
+              <a:rPr lang="en-US" altLang="zh-CN">
+                <a:sym typeface="+mn-ea"/>
+              </a:rPr>
+              <a:t>] = ...... = 40</a:t>
+            </a:r>
+            <a:r>
+              <a:rPr lang="en-US" altLang="zh-CN">
+                <a:sym typeface="+mn-ea"/>
+              </a:rPr>
+              <a:t> ℃</a:t>
+            </a:r>
+            <a:endParaRPr lang="en-US" altLang="zh-CN">
+              <a:solidFill>
+                <a:schemeClr val="tx1"/>
+              </a:solidFill>
+            </a:endParaRPr>
+          </a:p>
+          <a:p>
+            <a:pPr algn="l"/>
+            <a:r>
+              <a:rPr lang="en-US" altLang="zh-CN">
+                <a:sym typeface="+mn-ea"/>
+              </a:rPr>
+              <a:t>[</a:t>
+            </a:r>
+            <a:r>
+              <a:rPr lang="zh-CN" altLang="en-US">
+                <a:sym typeface="+mn-ea"/>
+              </a:rPr>
+              <a:t>最终温度</a:t>
+            </a:r>
+            <a:r>
+              <a:rPr lang="en-US" altLang="zh-CN">
+                <a:sym typeface="+mn-ea"/>
+              </a:rPr>
+              <a:t>] = 20℃ + 40℃ = 6</a:t>
+            </a:r>
+            <a:r>
+              <a:rPr lang="en-US" altLang="zh-CN">
+                <a:sym typeface="+mn-ea"/>
+              </a:rPr>
+              <a:t>0 ℃</a:t>
+            </a:r>
+            <a:endParaRPr lang="en-US" altLang="zh-CN">
+              <a:sym typeface="+mn-ea"/>
+            </a:endParaRPr>
+          </a:p>
+        </p:txBody>
+      </p:sp>
     </p:spTree>
   </p:cSld>
   <p:clrMapOvr>
@@ -25075,7 +27338,7 @@
         </p:nvSpPr>
         <p:spPr>
           <a:xfrm>
-            <a:off x="288925" y="915035"/>
+            <a:off x="429260" y="1253490"/>
             <a:ext cx="732155" cy="414020"/>
           </a:xfrm>
           <a:prstGeom prst="rect">
@@ -25158,52 +27421,19 @@
               <a:t>-</a:t>
             </a:r>
             <a:r>
+              <a:rPr lang="zh-CN" altLang="en-US" dirty="0">
+                <a:sym typeface="+mn-ea"/>
+              </a:rPr>
+              <a:t>数值推理</a:t>
+            </a:r>
+            <a:r>
               <a:rPr lang="zh-CN" altLang="en-US" dirty="0" err="1"/>
               <a:t>数据集</a:t>
             </a:r>
-            <a:r>
-              <a:rPr lang="zh-CN" altLang="en-US" dirty="0" err="1"/>
-              <a:t>内容</a:t>
-            </a:r>
             <a:endParaRPr lang="zh-CN" altLang="en-US" dirty="0" err="1"/>
           </a:p>
         </p:txBody>
       </p:sp>
-      <p:cxnSp>
-        <p:nvCxnSpPr>
-          <p:cNvPr id="27" name="直接连接符 26"/>
-          <p:cNvCxnSpPr/>
-          <p:nvPr/>
-        </p:nvCxnSpPr>
-        <p:spPr>
-          <a:xfrm>
-            <a:off x="342265" y="1394460"/>
-            <a:ext cx="5923280" cy="0"/>
-          </a:xfrm>
-          <a:prstGeom prst="line">
-            <a:avLst/>
-          </a:prstGeom>
-          <a:ln>
-            <a:solidFill>
-              <a:schemeClr val="tx1"/>
-            </a:solidFill>
-          </a:ln>
-        </p:spPr>
-        <p:style>
-          <a:lnRef idx="2">
-            <a:schemeClr val="accent1"/>
-          </a:lnRef>
-          <a:fillRef idx="0">
-            <a:srgbClr val="FFFFFF"/>
-          </a:fillRef>
-          <a:effectRef idx="0">
-            <a:srgbClr val="FFFFFF"/>
-          </a:effectRef>
-          <a:fontRef idx="minor">
-            <a:schemeClr val="tx1"/>
-          </a:fontRef>
-        </p:style>
-      </p:cxnSp>
       <p:cxnSp>
         <p:nvCxnSpPr>
           <p:cNvPr id="29" name="直接连接符 28"/>
@@ -25212,13 +27442,13 @@
         </p:nvCxnSpPr>
         <p:spPr>
           <a:xfrm>
-            <a:off x="342265" y="3260090"/>
+            <a:off x="482600" y="1724660"/>
             <a:ext cx="5923280" cy="0"/>
           </a:xfrm>
           <a:prstGeom prst="line">
             <a:avLst/>
           </a:prstGeom>
-          <a:ln>
+          <a:ln w="25400">
             <a:solidFill>
               <a:schemeClr val="tx1"/>
             </a:solidFill>
@@ -25247,7 +27477,7 @@
         </p:nvCxnSpPr>
         <p:spPr>
           <a:xfrm>
-            <a:off x="342265" y="3956050"/>
+            <a:off x="482600" y="2420620"/>
             <a:ext cx="5923280" cy="0"/>
           </a:xfrm>
           <a:prstGeom prst="line">
@@ -25274,111 +27504,6 @@
           </a:fontRef>
         </p:style>
       </p:cxnSp>
-      <p:cxnSp>
-        <p:nvCxnSpPr>
-          <p:cNvPr id="32" name="直接连接符 31"/>
-          <p:cNvCxnSpPr/>
-          <p:nvPr/>
-        </p:nvCxnSpPr>
-        <p:spPr>
-          <a:xfrm flipH="1">
-            <a:off x="2863215" y="940435"/>
-            <a:ext cx="635" cy="3411220"/>
-          </a:xfrm>
-          <a:prstGeom prst="line">
-            <a:avLst/>
-          </a:prstGeom>
-          <a:ln>
-            <a:solidFill>
-              <a:schemeClr val="tx1"/>
-            </a:solidFill>
-          </a:ln>
-        </p:spPr>
-        <p:style>
-          <a:lnRef idx="2">
-            <a:schemeClr val="accent1"/>
-          </a:lnRef>
-          <a:fillRef idx="0">
-            <a:srgbClr val="FFFFFF"/>
-          </a:fillRef>
-          <a:effectRef idx="0">
-            <a:srgbClr val="FFFFFF"/>
-          </a:effectRef>
-          <a:fontRef idx="minor">
-            <a:schemeClr val="tx1"/>
-          </a:fontRef>
-        </p:style>
-      </p:cxnSp>
-      <p:cxnSp>
-        <p:nvCxnSpPr>
-          <p:cNvPr id="33" name="直接连接符 32"/>
-          <p:cNvCxnSpPr/>
-          <p:nvPr/>
-        </p:nvCxnSpPr>
-        <p:spPr>
-          <a:xfrm flipH="1">
-            <a:off x="4551680" y="940435"/>
-            <a:ext cx="635" cy="3411220"/>
-          </a:xfrm>
-          <a:prstGeom prst="line">
-            <a:avLst/>
-          </a:prstGeom>
-          <a:ln>
-            <a:solidFill>
-              <a:schemeClr val="tx1"/>
-            </a:solidFill>
-          </a:ln>
-        </p:spPr>
-        <p:style>
-          <a:lnRef idx="2">
-            <a:schemeClr val="accent1"/>
-          </a:lnRef>
-          <a:fillRef idx="0">
-            <a:srgbClr val="FFFFFF"/>
-          </a:fillRef>
-          <a:effectRef idx="0">
-            <a:srgbClr val="FFFFFF"/>
-          </a:effectRef>
-          <a:fontRef idx="minor">
-            <a:schemeClr val="tx1"/>
-          </a:fontRef>
-        </p:style>
-      </p:cxnSp>
-      <p:cxnSp>
-        <p:nvCxnSpPr>
-          <p:cNvPr id="34" name="直接连接符 33"/>
-          <p:cNvCxnSpPr/>
-          <p:nvPr/>
-        </p:nvCxnSpPr>
-        <p:spPr>
-          <a:xfrm flipH="1">
-            <a:off x="989330" y="940435"/>
-            <a:ext cx="635" cy="3411220"/>
-          </a:xfrm>
-          <a:prstGeom prst="line">
-            <a:avLst/>
-          </a:prstGeom>
-          <a:ln>
-            <a:solidFill>
-              <a:schemeClr val="tx1"/>
-            </a:solidFill>
-          </a:ln>
-        </p:spPr>
-        <p:style>
-          <a:lnRef idx="2">
-            <a:schemeClr val="accent1"/>
-          </a:lnRef>
-          <a:fillRef idx="0">
-            <a:srgbClr val="FFFFFF"/>
-          </a:fillRef>
-          <a:effectRef idx="0">
-            <a:srgbClr val="FFFFFF"/>
-          </a:effectRef>
-          <a:fontRef idx="minor">
-            <a:schemeClr val="tx1"/>
-          </a:fontRef>
-        </p:style>
-      </p:cxnSp>
       <p:sp>
         <p:nvSpPr>
           <p:cNvPr id="35" name="文本框 34"/>
@@ -25387,7 +27512,7 @@
         </p:nvSpPr>
         <p:spPr>
           <a:xfrm>
-            <a:off x="1560195" y="898525"/>
+            <a:off x="1700530" y="1236980"/>
             <a:ext cx="732155" cy="414020"/>
           </a:xfrm>
           <a:prstGeom prst="rect">
@@ -25424,7 +27549,7 @@
         </p:nvSpPr>
         <p:spPr>
           <a:xfrm>
-            <a:off x="3124835" y="915035"/>
+            <a:off x="2987675" y="1253490"/>
             <a:ext cx="959485" cy="414020"/>
           </a:xfrm>
           <a:prstGeom prst="rect">
@@ -25461,7 +27586,7 @@
         </p:nvSpPr>
         <p:spPr>
           <a:xfrm>
-            <a:off x="5019675" y="915035"/>
+            <a:off x="4692015" y="1236980"/>
             <a:ext cx="1174115" cy="414020"/>
           </a:xfrm>
           <a:prstGeom prst="rect">
@@ -25492,46 +27617,13 @@
       </p:sp>
       <p:sp>
         <p:nvSpPr>
-          <p:cNvPr id="38" name="文本框 37"/>
-          <p:cNvSpPr txBox="1"/>
-          <p:nvPr/>
-        </p:nvSpPr>
-        <p:spPr>
-          <a:xfrm>
-            <a:off x="349885" y="2123440"/>
-            <a:ext cx="623570" cy="509270"/>
-          </a:xfrm>
-          <a:prstGeom prst="rect">
-            <a:avLst/>
-          </a:prstGeom>
-          <a:noFill/>
-        </p:spPr>
-        <p:txBody>
-          <a:bodyPr wrap="square" rtlCol="0">
-            <a:spAutoFit/>
-          </a:bodyPr>
-          <a:p>
-            <a:r>
-              <a:rPr lang="zh-CN" altLang="en-US"/>
-              <a:t>问题</a:t>
-            </a:r>
-            <a:r>
-              <a:rPr lang="zh-CN" altLang="en-US"/>
-              <a:t>文本</a:t>
-            </a:r>
-            <a:endParaRPr lang="zh-CN" altLang="en-US"/>
-          </a:p>
-        </p:txBody>
-      </p:sp>
-      <p:sp>
-        <p:nvSpPr>
           <p:cNvPr id="39" name="文本框 38"/>
           <p:cNvSpPr txBox="1"/>
           <p:nvPr/>
         </p:nvSpPr>
         <p:spPr>
           <a:xfrm>
-            <a:off x="351790" y="3424555"/>
+            <a:off x="459105" y="1889125"/>
             <a:ext cx="623570" cy="300355"/>
           </a:xfrm>
           <a:prstGeom prst="rect">
@@ -25560,7 +27652,7 @@
         </p:nvSpPr>
         <p:spPr>
           <a:xfrm>
-            <a:off x="349885" y="4051300"/>
+            <a:off x="490220" y="2515870"/>
             <a:ext cx="623570" cy="300355"/>
           </a:xfrm>
           <a:prstGeom prst="rect">
@@ -25583,71 +27675,13 @@
       </p:sp>
       <p:sp>
         <p:nvSpPr>
-          <p:cNvPr id="2" name="文本框 1"/>
-          <p:cNvSpPr txBox="1"/>
-          <p:nvPr/>
-        </p:nvSpPr>
-        <p:spPr>
-          <a:xfrm>
-            <a:off x="981075" y="1361440"/>
-            <a:ext cx="1951990" cy="1972310"/>
-          </a:xfrm>
-          <a:prstGeom prst="rect">
-            <a:avLst/>
-          </a:prstGeom>
-          <a:noFill/>
-        </p:spPr>
-        <p:txBody>
-          <a:bodyPr wrap="square" rtlCol="0">
-            <a:spAutoFit/>
-          </a:bodyPr>
-          <a:p>
-            <a:r>
-              <a:rPr lang="zh-CN" altLang="en-US"/>
-              <a:t>在1362年……约翰因其替代人质失踪，觉得自己有义务返回英国继续囚禁……1364年，约翰二世在伦敦去世，仍保持着荣誉囚禁的身份……约翰二世重新回到囚禁中后过了多少年去世？</a:t>
-            </a:r>
-            <a:endParaRPr lang="zh-CN" altLang="en-US"/>
-          </a:p>
-        </p:txBody>
-      </p:sp>
-      <p:sp>
-        <p:nvSpPr>
-          <p:cNvPr id="5" name="文本框 4"/>
-          <p:cNvSpPr txBox="1"/>
-          <p:nvPr/>
-        </p:nvSpPr>
-        <p:spPr>
-          <a:xfrm>
-            <a:off x="2863850" y="1394460"/>
-            <a:ext cx="1493520" cy="1345565"/>
-          </a:xfrm>
-          <a:prstGeom prst="rect">
-            <a:avLst/>
-          </a:prstGeom>
-          <a:noFill/>
-        </p:spPr>
-        <p:txBody>
-          <a:bodyPr wrap="square" rtlCol="0">
-            <a:spAutoFit/>
-          </a:bodyPr>
-          <a:p>
-            <a:r>
-              <a:rPr lang="zh-CN" altLang="en-US"/>
-              <a:t>索菲亚读完了一本书的三分之二。她计算出自己比尚未阅读的部分多读了90页。她的书有多长？</a:t>
-            </a:r>
-            <a:endParaRPr lang="zh-CN" altLang="en-US"/>
-          </a:p>
-        </p:txBody>
-      </p:sp>
-      <p:sp>
-        <p:nvSpPr>
           <p:cNvPr id="6" name="文本框 5"/>
           <p:cNvSpPr txBox="1"/>
           <p:nvPr/>
         </p:nvSpPr>
         <p:spPr>
           <a:xfrm>
-            <a:off x="2830830" y="3238500"/>
+            <a:off x="2971165" y="1703070"/>
             <a:ext cx="2287905" cy="718185"/>
           </a:xfrm>
           <a:prstGeom prst="rect">
@@ -25690,7 +27724,7 @@
         </p:nvSpPr>
         <p:spPr>
           <a:xfrm>
-            <a:off x="4551680" y="3212465"/>
+            <a:off x="4692015" y="1693545"/>
             <a:ext cx="1841500" cy="932180"/>
           </a:xfrm>
           <a:prstGeom prst="rect">
@@ -25762,47 +27796,13 @@
       </p:sp>
       <p:sp>
         <p:nvSpPr>
-          <p:cNvPr id="9" name="文本框 8"/>
-          <p:cNvSpPr txBox="1"/>
-          <p:nvPr/>
-        </p:nvSpPr>
-        <p:spPr>
-          <a:xfrm>
-            <a:off x="4551680" y="1388745"/>
-            <a:ext cx="1956435" cy="1972310"/>
-          </a:xfrm>
-          <a:prstGeom prst="rect">
-            <a:avLst/>
-          </a:prstGeom>
-          <a:noFill/>
-        </p:spPr>
-        <p:txBody>
-          <a:bodyPr wrap="square" rtlCol="0">
-            <a:spAutoFit/>
-          </a:bodyPr>
-          <a:p>
-            <a:r>
-              <a:rPr lang="zh-CN" altLang="en-US">
-                <a:sym typeface="+mn-ea"/>
-              </a:rPr>
-              <a:t>珍妮特的鸭子每天产16个蛋。她每天早上吃3个做早餐，还用4个做给朋友们的松饼。她每天把剩下的鸡蛋以每个2美元的价格卖给农贸市场。那么，她每天在农贸市场赚多少钱？</a:t>
-            </a:r>
-            <a:endParaRPr lang="zh-CN" altLang="en-US"/>
-          </a:p>
-          <a:p>
-            <a:endParaRPr lang="zh-CN" altLang="en-US"/>
-          </a:p>
-        </p:txBody>
-      </p:sp>
-      <p:sp>
-        <p:nvSpPr>
           <p:cNvPr id="10" name="文本框 9"/>
           <p:cNvSpPr txBox="1"/>
           <p:nvPr/>
         </p:nvSpPr>
         <p:spPr>
           <a:xfrm>
-            <a:off x="1637665" y="3465195"/>
+            <a:off x="1700530" y="1929765"/>
             <a:ext cx="1143000" cy="454660"/>
           </a:xfrm>
           <a:prstGeom prst="rect">
@@ -25831,7 +27831,7 @@
         </p:nvSpPr>
         <p:spPr>
           <a:xfrm>
-            <a:off x="1005840" y="4051300"/>
+            <a:off x="1700530" y="2506980"/>
             <a:ext cx="1106805" cy="300355"/>
           </a:xfrm>
           <a:prstGeom prst="rect">
@@ -25864,7 +27864,7 @@
         </p:nvSpPr>
         <p:spPr>
           <a:xfrm>
-            <a:off x="2842260" y="4051300"/>
+            <a:off x="2982595" y="2515870"/>
             <a:ext cx="1106805" cy="300355"/>
           </a:xfrm>
           <a:prstGeom prst="rect">
@@ -25897,7 +27897,7 @@
         </p:nvSpPr>
         <p:spPr>
           <a:xfrm>
-            <a:off x="4551680" y="4051300"/>
+            <a:off x="4692015" y="2515870"/>
             <a:ext cx="1243330" cy="300355"/>
           </a:xfrm>
           <a:prstGeom prst="rect">
@@ -25922,86 +27922,16 @@
           </a:p>
         </p:txBody>
       </p:sp>
-    </p:spTree>
-  </p:cSld>
-  <p:clrMapOvr>
-    <a:masterClrMapping/>
-  </p:clrMapOvr>
-  <p:transition/>
-</p:sld>
-</file>
-
-<file path=ppt/slides/slide8.xml><?xml version="1.0" encoding="utf-8"?>
-<p:sld xmlns:a="http://schemas.openxmlformats.org/drawingml/2006/main" xmlns:r="http://schemas.openxmlformats.org/officeDocument/2006/relationships" xmlns:p="http://schemas.openxmlformats.org/presentationml/2006/main">
-  <p:cSld>
-    <p:spTree>
-      <p:nvGrpSpPr>
-        <p:cNvPr id="1" name=""/>
-        <p:cNvGrpSpPr/>
-        <p:nvPr/>
-      </p:nvGrpSpPr>
-      <p:grpSpPr>
-        <a:xfrm>
-          <a:off x="0" y="0"/>
-          <a:ext cx="0" cy="0"/>
-          <a:chOff x="0" y="0"/>
-          <a:chExt cx="0" cy="0"/>
-        </a:xfrm>
-      </p:grpSpPr>
-      <p:sp>
-        <p:nvSpPr>
-          <p:cNvPr id="3" name="日期占位符 2"/>
-          <p:cNvSpPr>
-            <a:spLocks noGrp="1"/>
-          </p:cNvSpPr>
-          <p:nvPr>
-            <p:ph type="dt" sz="half" idx="10"/>
-          </p:nvPr>
-        </p:nvSpPr>
-        <p:spPr/>
-        <p:txBody>
-          <a:bodyPr/>
-          <a:lstStyle/>
-          <a:p>
-            <a:fld id="{137329C2-3C36-4069-9E85-5BF3A0DCB578}" type="datetime1">
-              <a:rPr lang="zh-CN" altLang="en-US" smtClean="0"/>
-            </a:fld>
-            <a:endParaRPr lang="zh-CN" altLang="en-US" dirty="0"/>
-          </a:p>
-        </p:txBody>
-      </p:sp>
-      <p:sp>
-        <p:nvSpPr>
-          <p:cNvPr id="4" name="灯片编号占位符 3"/>
-          <p:cNvSpPr>
-            <a:spLocks noGrp="1"/>
-          </p:cNvSpPr>
-          <p:nvPr>
-            <p:ph type="sldNum" sz="quarter" idx="11"/>
-          </p:nvPr>
-        </p:nvSpPr>
-        <p:spPr/>
-        <p:txBody>
-          <a:bodyPr/>
-          <a:lstStyle/>
-          <a:p>
-            <a:fld id="{463E1EE8-403A-4D2D-AB26-5BF439A27F60}" type="slidenum">
-              <a:rPr lang="zh-CN" altLang="en-US" smtClean="0"/>
-            </a:fld>
-            <a:endParaRPr lang="zh-CN" altLang="en-US" dirty="0"/>
-          </a:p>
-        </p:txBody>
-      </p:sp>
-      <p:sp>
-        <p:nvSpPr>
-          <p:cNvPr id="6" name="文本框 5"/>
+      <p:sp>
+        <p:nvSpPr>
+          <p:cNvPr id="17" name="文本框 16"/>
           <p:cNvSpPr txBox="1"/>
           <p:nvPr/>
         </p:nvSpPr>
         <p:spPr>
           <a:xfrm>
-            <a:off x="624205" y="1228090"/>
-            <a:ext cx="2807970" cy="1035685"/>
+            <a:off x="288925" y="849630"/>
+            <a:ext cx="6179185" cy="2676525"/>
           </a:xfrm>
           <a:prstGeom prst="rect">
             <a:avLst/>
@@ -26010,7 +27940,7 @@
         </p:spPr>
         <p:txBody>
           <a:bodyPr wrap="square" rtlCol="0">
-            <a:noAutofit/>
+            <a:spAutoFit/>
           </a:bodyPr>
           <a:lstStyle/>
           <a:p>
@@ -26022,80 +27952,15 @@
               <a:buChar char="n"/>
             </a:pPr>
             <a:r>
-              <a:rPr lang="en-US" altLang="zh-CN" dirty="0"/>
-              <a:t>GSM8K</a:t>
-            </a:r>
-            <a:endParaRPr lang="en-US" altLang="zh-CN" dirty="0"/>
-          </a:p>
-          <a:p>
-            <a:pPr marL="285750" indent="-285750">
-              <a:lnSpc>
-                <a:spcPct val="150000"/>
-              </a:lnSpc>
-              <a:buFont typeface="Arial" panose="020B0604020202020204" pitchFamily="34" charset="0"/>
-              <a:buChar char="•"/>
-            </a:pPr>
-            <a:r>
-              <a:rPr lang="zh-CN" altLang="en-US" dirty="0"/>
-              <a:t>标注者答案一致性</a:t>
-            </a:r>
-            <a:r>
-              <a:rPr lang="zh-CN" altLang="en-US" dirty="0"/>
-              <a:t>检验</a:t>
-            </a:r>
-            <a:endParaRPr lang="zh-CN" altLang="en-US" dirty="0"/>
-          </a:p>
-          <a:p>
-            <a:pPr marL="285750" indent="-285750">
-              <a:lnSpc>
-                <a:spcPct val="150000"/>
-              </a:lnSpc>
-              <a:buFont typeface="Arial" panose="020B0604020202020204" pitchFamily="34" charset="0"/>
-              <a:buChar char="•"/>
-            </a:pPr>
-            <a:r>
-              <a:rPr lang="zh-CN" altLang="en-US" dirty="0"/>
-              <a:t>丰富灵活的需求</a:t>
-            </a:r>
-            <a:endParaRPr lang="en-US" altLang="zh-CN" dirty="0"/>
-          </a:p>
-          <a:p>
-            <a:pPr indent="457200">
-              <a:lnSpc>
-                <a:spcPct val="150000"/>
-              </a:lnSpc>
-              <a:buFont typeface="Wingdings" panose="05000000000000000000" pitchFamily="2" charset="2"/>
-              <a:buNone/>
-            </a:pPr>
-            <a:r>
-              <a:rPr lang="en-US" altLang="zh-CN" dirty="0"/>
-              <a:t>  </a:t>
-            </a:r>
-            <a:endParaRPr lang="zh-CN" altLang="en-US" dirty="0"/>
-          </a:p>
-        </p:txBody>
-      </p:sp>
-      <p:sp>
-        <p:nvSpPr>
-          <p:cNvPr id="9" name="文本框 8"/>
-          <p:cNvSpPr txBox="1"/>
-          <p:nvPr/>
-        </p:nvSpPr>
-        <p:spPr>
-          <a:xfrm>
-            <a:off x="624205" y="2981960"/>
-            <a:ext cx="3179445" cy="1658620"/>
-          </a:xfrm>
-          <a:prstGeom prst="rect">
-            <a:avLst/>
-          </a:prstGeom>
-          <a:noFill/>
-        </p:spPr>
-        <p:txBody>
-          <a:bodyPr wrap="square" rtlCol="0">
-            <a:spAutoFit/>
-          </a:bodyPr>
-          <a:lstStyle/>
+              <a:rPr lang="zh-CN" altLang="en-US" sz="1400" dirty="0"/>
+              <a:t>标注</a:t>
+            </a:r>
+            <a:r>
+              <a:rPr lang="zh-CN" altLang="en-US" sz="1400" dirty="0"/>
+              <a:t>内容</a:t>
+            </a:r>
+            <a:endParaRPr lang="zh-CN" altLang="en-US" sz="1400" dirty="0"/>
+          </a:p>
           <a:p>
             <a:pPr marL="285750" indent="-285750">
               <a:lnSpc>
@@ -26104,51 +27969,7 @@
               <a:buFont typeface="Wingdings" panose="05000000000000000000" pitchFamily="2" charset="2"/>
               <a:buChar char="n"/>
             </a:pPr>
-            <a:r>
-              <a:rPr lang="en-US" altLang="zh-CN">
-                <a:sym typeface="+mn-ea"/>
-              </a:rPr>
-              <a:t>MetaMathQA</a:t>
-            </a:r>
-            <a:endParaRPr lang="en-US" altLang="zh-CN">
-              <a:sym typeface="+mn-ea"/>
-            </a:endParaRPr>
-          </a:p>
-          <a:p>
-            <a:pPr marL="285750" indent="-285750">
-              <a:lnSpc>
-                <a:spcPct val="150000"/>
-              </a:lnSpc>
-              <a:buFont typeface="Arial" panose="020B0604020202020204" pitchFamily="34" charset="0"/>
-              <a:buChar char="•"/>
-            </a:pPr>
-            <a:r>
-              <a:rPr lang="zh-CN" altLang="en-US">
-                <a:sym typeface="+mn-ea"/>
-              </a:rPr>
-              <a:t>生成多样解题路径</a:t>
-            </a:r>
-            <a:endParaRPr lang="zh-CN" altLang="en-US">
-              <a:sym typeface="+mn-ea"/>
-            </a:endParaRPr>
-          </a:p>
-          <a:p>
-            <a:pPr marL="285750" indent="-285750">
-              <a:lnSpc>
-                <a:spcPct val="150000"/>
-              </a:lnSpc>
-              <a:buFont typeface="Arial" panose="020B0604020202020204" pitchFamily="34" charset="0"/>
-              <a:buChar char="•"/>
-            </a:pPr>
-            <a:r>
-              <a:rPr lang="zh-CN" altLang="en-US">
-                <a:sym typeface="+mn-ea"/>
-              </a:rPr>
-              <a:t>对问题进行自然语言改写</a:t>
-            </a:r>
-            <a:endParaRPr lang="en-US" altLang="zh-CN">
-              <a:sym typeface="+mn-ea"/>
-            </a:endParaRPr>
+            <a:endParaRPr lang="zh-CN" altLang="en-US" sz="1400" dirty="0"/>
           </a:p>
           <a:p>
             <a:pPr marL="285750" indent="-285750">
@@ -26158,364 +27979,77 @@
               <a:buFont typeface="Wingdings" panose="05000000000000000000" pitchFamily="2" charset="2"/>
               <a:buChar char="n"/>
             </a:pPr>
-            <a:r>
-              <a:rPr lang="en-US" altLang="zh-CN">
-                <a:sym typeface="+mn-ea"/>
-              </a:rPr>
-              <a:t>O</a:t>
-            </a:r>
-            <a:r>
-              <a:rPr lang="en-US" altLang="zh-CN">
-                <a:sym typeface="+mn-ea"/>
-              </a:rPr>
-              <a:t>penMathInstruct-2</a:t>
-            </a:r>
-            <a:endParaRPr lang="en-US" altLang="zh-CN">
-              <a:sym typeface="+mn-ea"/>
-            </a:endParaRPr>
+            <a:endParaRPr lang="zh-CN" altLang="en-US" sz="1400" dirty="0"/>
           </a:p>
           <a:p>
             <a:pPr marL="285750" indent="-285750">
               <a:lnSpc>
                 <a:spcPct val="150000"/>
               </a:lnSpc>
-              <a:buFont typeface="Arial" panose="020B0604020202020204" pitchFamily="34" charset="0"/>
-              <a:buChar char="•"/>
+              <a:buFont typeface="Wingdings" panose="05000000000000000000" pitchFamily="2" charset="2"/>
+              <a:buChar char="n"/>
             </a:pPr>
-            <a:r>
-              <a:rPr lang="zh-CN" altLang="en-US" dirty="0">
-                <a:sym typeface="+mn-ea"/>
-              </a:rPr>
-              <a:t>通过少样本提示词生成新</a:t>
-            </a:r>
-            <a:r>
-              <a:rPr lang="zh-CN" altLang="en-US" dirty="0">
-                <a:sym typeface="+mn-ea"/>
-              </a:rPr>
-              <a:t>问题</a:t>
-            </a:r>
-            <a:endParaRPr lang="zh-CN" altLang="en-US" dirty="0">
-              <a:sym typeface="+mn-ea"/>
-            </a:endParaRPr>
-          </a:p>
-        </p:txBody>
-      </p:sp>
-      <p:sp>
-        <p:nvSpPr>
-          <p:cNvPr id="10" name="标题 11"/>
-          <p:cNvSpPr>
-            <a:spLocks noGrp="1"/>
-          </p:cNvSpPr>
+            <a:endParaRPr lang="zh-CN" altLang="en-US" sz="1400" dirty="0"/>
+          </a:p>
+          <a:p>
+            <a:pPr marL="285750" indent="-285750">
+              <a:lnSpc>
+                <a:spcPct val="150000"/>
+              </a:lnSpc>
+              <a:buFont typeface="Wingdings" panose="05000000000000000000" pitchFamily="2" charset="2"/>
+              <a:buChar char="n"/>
+            </a:pPr>
+            <a:endParaRPr lang="zh-CN" altLang="en-US" sz="1400" dirty="0"/>
+          </a:p>
+          <a:p>
+            <a:pPr marL="285750" indent="-285750">
+              <a:lnSpc>
+                <a:spcPct val="150000"/>
+              </a:lnSpc>
+              <a:buFont typeface="Wingdings" panose="05000000000000000000" pitchFamily="2" charset="2"/>
+              <a:buChar char="n"/>
+            </a:pPr>
+            <a:endParaRPr lang="zh-CN" altLang="en-US" sz="1400" dirty="0"/>
+          </a:p>
+          <a:p>
+            <a:pPr marL="285750" indent="-285750">
+              <a:lnSpc>
+                <a:spcPct val="150000"/>
+              </a:lnSpc>
+              <a:buFont typeface="Wingdings" panose="05000000000000000000" pitchFamily="2" charset="2"/>
+              <a:buChar char="n"/>
+            </a:pPr>
+            <a:endParaRPr lang="zh-CN" altLang="en-US" sz="1400" dirty="0"/>
+          </a:p>
+          <a:p>
+            <a:pPr marL="285750" indent="-285750">
+              <a:lnSpc>
+                <a:spcPct val="150000"/>
+              </a:lnSpc>
+              <a:buFont typeface="Wingdings" panose="05000000000000000000" pitchFamily="2" charset="2"/>
+              <a:buChar char="n"/>
+            </a:pPr>
+            <a:r>
+              <a:rPr lang="zh-CN" altLang="en-US" sz="1400" dirty="0"/>
+              <a:t>构建方</a:t>
+            </a:r>
+            <a:r>
+              <a:rPr lang="zh-CN" altLang="en-US" sz="1400" dirty="0"/>
+              <a:t>式</a:t>
+            </a:r>
+            <a:endParaRPr lang="zh-CN" altLang="en-US" sz="1400" dirty="0"/>
+          </a:p>
+        </p:txBody>
+      </p:sp>
+      <p:sp>
+        <p:nvSpPr>
+          <p:cNvPr id="18" name="右箭头 17"/>
+          <p:cNvSpPr/>
           <p:nvPr/>
         </p:nvSpPr>
         <p:spPr>
           <a:xfrm>
-            <a:off x="471924" y="360000"/>
-            <a:ext cx="5920502" cy="489600"/>
-          </a:xfrm>
-          <a:prstGeom prst="rect">
-            <a:avLst/>
-          </a:prstGeom>
-        </p:spPr>
-        <p:txBody>
-          <a:bodyPr vert="horz" lIns="91440" tIns="45720" rIns="91440" bIns="45720" rtlCol="0" anchor="ctr">
-            <a:normAutofit/>
-          </a:bodyPr>
-          <a:lstStyle>
-            <a:lvl1pPr algn="l" defTabSz="514985" rtl="0" eaLnBrk="1" latinLnBrk="0" hangingPunct="1">
-              <a:lnSpc>
-                <a:spcPct val="90000"/>
-              </a:lnSpc>
-              <a:spcBef>
-                <a:spcPct val="0"/>
-              </a:spcBef>
-              <a:buNone/>
-              <a:defRPr sz="2100" kern="1200" baseline="0">
-                <a:solidFill>
-                  <a:srgbClr val="63065F"/>
-                </a:solidFill>
-                <a:latin typeface="Arial" panose="020B0604020202020204" pitchFamily="34" charset="0"/>
-                <a:ea typeface="+mj-ea"/>
-                <a:cs typeface="Arial" panose="020B0604020202020204" pitchFamily="34" charset="0"/>
-              </a:defRPr>
-            </a:lvl1pPr>
-          </a:lstStyle>
-          <a:p>
-            <a:r>
-              <a:rPr lang="zh-CN" altLang="en-US" dirty="0">
-                <a:sym typeface="+mn-ea"/>
-              </a:rPr>
-              <a:t>相关工作</a:t>
-            </a:r>
-            <a:r>
-              <a:rPr lang="en-US" altLang="zh-CN" dirty="0">
-                <a:sym typeface="+mn-ea"/>
-              </a:rPr>
-              <a:t>-</a:t>
-            </a:r>
-            <a:r>
-              <a:rPr lang="zh-CN" altLang="en-US" dirty="0" err="1"/>
-              <a:t>数据集</a:t>
-            </a:r>
-            <a:r>
-              <a:rPr lang="zh-CN" altLang="en-US" dirty="0" err="1"/>
-              <a:t>构建</a:t>
-            </a:r>
-            <a:endParaRPr lang="zh-CN" altLang="en-US" dirty="0" err="1"/>
-          </a:p>
-        </p:txBody>
-      </p:sp>
-      <p:cxnSp>
-        <p:nvCxnSpPr>
-          <p:cNvPr id="13" name="直接连接符 12"/>
-          <p:cNvCxnSpPr/>
-          <p:nvPr/>
-        </p:nvCxnSpPr>
-        <p:spPr>
-          <a:xfrm>
-            <a:off x="0" y="2408555"/>
-            <a:ext cx="6900545" cy="0"/>
-          </a:xfrm>
-          <a:prstGeom prst="line">
-            <a:avLst/>
-          </a:prstGeom>
-          <a:ln w="12700" cmpd="sng">
-            <a:solidFill>
-              <a:schemeClr val="tx1"/>
-            </a:solidFill>
-            <a:prstDash val="sysDot"/>
-          </a:ln>
-        </p:spPr>
-        <p:style>
-          <a:lnRef idx="2">
-            <a:schemeClr val="accent1"/>
-          </a:lnRef>
-          <a:fillRef idx="0">
-            <a:srgbClr val="FFFFFF"/>
-          </a:fillRef>
-          <a:effectRef idx="0">
-            <a:srgbClr val="FFFFFF"/>
-          </a:effectRef>
-          <a:fontRef idx="minor">
-            <a:schemeClr val="tx1"/>
-          </a:fontRef>
-        </p:style>
-      </p:cxnSp>
-      <p:sp>
-        <p:nvSpPr>
-          <p:cNvPr id="7" name="同侧圆角矩形 6"/>
-          <p:cNvSpPr/>
-          <p:nvPr/>
-        </p:nvSpPr>
-        <p:spPr>
-          <a:xfrm>
-            <a:off x="556260" y="824230"/>
-            <a:ext cx="2875915" cy="1395095"/>
-          </a:xfrm>
-          <a:prstGeom prst="round2SameRect">
-            <a:avLst/>
-          </a:prstGeom>
-          <a:noFill/>
-        </p:spPr>
-        <p:style>
-          <a:lnRef idx="2">
-            <a:schemeClr val="accent1">
-              <a:lumMod val="75000"/>
-            </a:schemeClr>
-          </a:lnRef>
-          <a:fillRef idx="1">
-            <a:schemeClr val="accent1"/>
-          </a:fillRef>
-          <a:effectRef idx="0">
-            <a:srgbClr val="FFFFFF"/>
-          </a:effectRef>
-          <a:fontRef idx="minor">
-            <a:schemeClr val="lt1"/>
-          </a:fontRef>
-        </p:style>
-        <p:txBody>
-          <a:bodyPr rtlCol="0" anchor="ctr"/>
-          <a:p>
-            <a:pPr algn="ctr"/>
-            <a:endParaRPr lang="zh-CN" altLang="en-US"/>
-          </a:p>
-        </p:txBody>
-      </p:sp>
-      <p:sp>
-        <p:nvSpPr>
-          <p:cNvPr id="8" name="同侧圆角矩形 7"/>
-          <p:cNvSpPr/>
-          <p:nvPr/>
-        </p:nvSpPr>
-        <p:spPr>
-          <a:xfrm>
-            <a:off x="535940" y="2618740"/>
-            <a:ext cx="2875915" cy="2021840"/>
-          </a:xfrm>
-          <a:prstGeom prst="round2SameRect">
-            <a:avLst/>
-          </a:prstGeom>
-          <a:noFill/>
-        </p:spPr>
-        <p:style>
-          <a:lnRef idx="2">
-            <a:schemeClr val="accent1">
-              <a:lumMod val="75000"/>
-            </a:schemeClr>
-          </a:lnRef>
-          <a:fillRef idx="1">
-            <a:schemeClr val="accent1"/>
-          </a:fillRef>
-          <a:effectRef idx="0">
-            <a:srgbClr val="FFFFFF"/>
-          </a:effectRef>
-          <a:fontRef idx="minor">
-            <a:schemeClr val="lt1"/>
-          </a:fontRef>
-        </p:style>
-        <p:txBody>
-          <a:bodyPr rtlCol="0" anchor="ctr"/>
-          <a:p>
-            <a:pPr algn="ctr"/>
-            <a:endParaRPr lang="zh-CN" altLang="en-US"/>
-          </a:p>
-        </p:txBody>
-      </p:sp>
-      <p:cxnSp>
-        <p:nvCxnSpPr>
-          <p:cNvPr id="11" name="直接连接符 10"/>
-          <p:cNvCxnSpPr/>
-          <p:nvPr/>
-        </p:nvCxnSpPr>
-        <p:spPr>
-          <a:xfrm>
-            <a:off x="558165" y="1216025"/>
-            <a:ext cx="2868295" cy="0"/>
-          </a:xfrm>
-          <a:prstGeom prst="line">
-            <a:avLst/>
-          </a:prstGeom>
-        </p:spPr>
-        <p:style>
-          <a:lnRef idx="2">
-            <a:schemeClr val="accent1"/>
-          </a:lnRef>
-          <a:fillRef idx="0">
-            <a:srgbClr val="FFFFFF"/>
-          </a:fillRef>
-          <a:effectRef idx="0">
-            <a:srgbClr val="FFFFFF"/>
-          </a:effectRef>
-          <a:fontRef idx="minor">
-            <a:schemeClr val="tx1"/>
-          </a:fontRef>
-        </p:style>
-      </p:cxnSp>
-      <p:cxnSp>
-        <p:nvCxnSpPr>
-          <p:cNvPr id="12" name="直接连接符 11"/>
-          <p:cNvCxnSpPr/>
-          <p:nvPr/>
-        </p:nvCxnSpPr>
-        <p:spPr>
-          <a:xfrm>
-            <a:off x="563880" y="3002280"/>
-            <a:ext cx="2868295" cy="0"/>
-          </a:xfrm>
-          <a:prstGeom prst="line">
-            <a:avLst/>
-          </a:prstGeom>
-        </p:spPr>
-        <p:style>
-          <a:lnRef idx="2">
-            <a:schemeClr val="accent1"/>
-          </a:lnRef>
-          <a:fillRef idx="0">
-            <a:srgbClr val="FFFFFF"/>
-          </a:fillRef>
-          <a:effectRef idx="0">
-            <a:srgbClr val="FFFFFF"/>
-          </a:effectRef>
-          <a:fontRef idx="minor">
-            <a:schemeClr val="tx1"/>
-          </a:fontRef>
-        </p:style>
-      </p:cxnSp>
-      <p:sp>
-        <p:nvSpPr>
-          <p:cNvPr id="14" name="文本框 13"/>
-          <p:cNvSpPr txBox="1"/>
-          <p:nvPr/>
-        </p:nvSpPr>
-        <p:spPr>
-          <a:xfrm>
-            <a:off x="716915" y="882650"/>
-            <a:ext cx="2287905" cy="300355"/>
-          </a:xfrm>
-          <a:prstGeom prst="rect">
-            <a:avLst/>
-          </a:prstGeom>
-          <a:noFill/>
-        </p:spPr>
-        <p:txBody>
-          <a:bodyPr wrap="square" rtlCol="0">
-            <a:spAutoFit/>
-          </a:bodyPr>
-          <a:p>
-            <a:r>
-              <a:rPr lang="zh-CN" altLang="en-US"/>
-              <a:t>人工</a:t>
-            </a:r>
-            <a:r>
-              <a:rPr lang="zh-CN" altLang="en-US"/>
-              <a:t>标注</a:t>
-            </a:r>
-            <a:endParaRPr lang="zh-CN" altLang="en-US"/>
-          </a:p>
-        </p:txBody>
-      </p:sp>
-      <p:sp>
-        <p:nvSpPr>
-          <p:cNvPr id="15" name="文本框 14"/>
-          <p:cNvSpPr txBox="1"/>
-          <p:nvPr/>
-        </p:nvSpPr>
-        <p:spPr>
-          <a:xfrm>
-            <a:off x="716915" y="2701925"/>
-            <a:ext cx="2287905" cy="300355"/>
-          </a:xfrm>
-          <a:prstGeom prst="rect">
-            <a:avLst/>
-          </a:prstGeom>
-          <a:noFill/>
-        </p:spPr>
-        <p:txBody>
-          <a:bodyPr wrap="square" rtlCol="0">
-            <a:spAutoFit/>
-          </a:bodyPr>
-          <a:p>
-            <a:r>
-              <a:rPr lang="zh-CN" altLang="en-US"/>
-              <a:t>大模型</a:t>
-            </a:r>
-            <a:r>
-              <a:rPr lang="zh-CN" altLang="en-US"/>
-              <a:t>生成</a:t>
-            </a:r>
-            <a:endParaRPr lang="zh-CN" altLang="en-US"/>
-          </a:p>
-        </p:txBody>
-      </p:sp>
-      <p:sp>
-        <p:nvSpPr>
-          <p:cNvPr id="16" name="右箭头 15"/>
-          <p:cNvSpPr/>
-          <p:nvPr/>
-        </p:nvSpPr>
-        <p:spPr>
-          <a:xfrm>
-            <a:off x="3744595" y="1448435"/>
+            <a:off x="2456815" y="3519805"/>
             <a:ext cx="464820" cy="295275"/>
           </a:xfrm>
           <a:prstGeom prst="rightArrow">
@@ -26551,13 +28085,13 @@
       </p:sp>
       <p:sp>
         <p:nvSpPr>
-          <p:cNvPr id="17" name="右箭头 16"/>
+          <p:cNvPr id="19" name="右箭头 18"/>
           <p:cNvSpPr/>
           <p:nvPr/>
         </p:nvSpPr>
         <p:spPr>
           <a:xfrm>
-            <a:off x="3744595" y="3659505"/>
+            <a:off x="2456815" y="4215765"/>
             <a:ext cx="464820" cy="302895"/>
           </a:xfrm>
           <a:prstGeom prst="rightArrow">
@@ -26590,13 +28124,13 @@
       </p:sp>
       <p:sp>
         <p:nvSpPr>
-          <p:cNvPr id="18" name="文本框 17"/>
+          <p:cNvPr id="20" name="文本框 19"/>
           <p:cNvSpPr txBox="1"/>
           <p:nvPr/>
         </p:nvSpPr>
         <p:spPr>
           <a:xfrm>
-            <a:off x="4465955" y="1216025"/>
+            <a:off x="3178175" y="3190240"/>
             <a:ext cx="2089150" cy="718185"/>
           </a:xfrm>
           <a:prstGeom prst="rect">
@@ -26643,13 +28177,13 @@
       </p:sp>
       <p:sp>
         <p:nvSpPr>
-          <p:cNvPr id="19" name="文本框 18"/>
+          <p:cNvPr id="21" name="文本框 20"/>
           <p:cNvSpPr txBox="1"/>
           <p:nvPr/>
         </p:nvSpPr>
         <p:spPr>
           <a:xfrm>
-            <a:off x="4465955" y="3395345"/>
+            <a:off x="3178175" y="4017645"/>
             <a:ext cx="2088515" cy="718185"/>
           </a:xfrm>
           <a:prstGeom prst="rect">
@@ -26694,6 +28228,72 @@
           </a:p>
         </p:txBody>
       </p:sp>
+      <p:sp>
+        <p:nvSpPr>
+          <p:cNvPr id="22" name="文本框 21"/>
+          <p:cNvSpPr txBox="1"/>
+          <p:nvPr/>
+        </p:nvSpPr>
+        <p:spPr>
+          <a:xfrm>
+            <a:off x="840105" y="3550920"/>
+            <a:ext cx="984250" cy="300355"/>
+          </a:xfrm>
+          <a:prstGeom prst="rect">
+            <a:avLst/>
+          </a:prstGeom>
+          <a:noFill/>
+        </p:spPr>
+        <p:txBody>
+          <a:bodyPr wrap="square" rtlCol="0">
+            <a:spAutoFit/>
+          </a:bodyPr>
+          <a:p>
+            <a:r>
+              <a:rPr lang="zh-CN" altLang="en-US"/>
+              <a:t>人工</a:t>
+            </a:r>
+            <a:r>
+              <a:rPr lang="zh-CN" altLang="en-US"/>
+              <a:t>标注</a:t>
+            </a:r>
+            <a:endParaRPr lang="zh-CN" altLang="en-US"/>
+          </a:p>
+        </p:txBody>
+      </p:sp>
+      <p:sp>
+        <p:nvSpPr>
+          <p:cNvPr id="23" name="文本框 22"/>
+          <p:cNvSpPr txBox="1"/>
+          <p:nvPr/>
+        </p:nvSpPr>
+        <p:spPr>
+          <a:xfrm>
+            <a:off x="840740" y="4218305"/>
+            <a:ext cx="1287780" cy="300355"/>
+          </a:xfrm>
+          <a:prstGeom prst="rect">
+            <a:avLst/>
+          </a:prstGeom>
+          <a:noFill/>
+        </p:spPr>
+        <p:txBody>
+          <a:bodyPr wrap="square" rtlCol="0">
+            <a:spAutoFit/>
+          </a:bodyPr>
+          <a:p>
+            <a:r>
+              <a:rPr lang="zh-CN" altLang="en-US"/>
+              <a:t>大模型</a:t>
+            </a:r>
+            <a:r>
+              <a:rPr lang="zh-CN" altLang="en-US"/>
+              <a:t>生成</a:t>
+            </a:r>
+            <a:endParaRPr lang="zh-CN" altLang="en-US"/>
+          </a:p>
+        </p:txBody>
+      </p:sp>
     </p:spTree>
   </p:cSld>
   <p:clrMapOvr>
@@ -26703,7 +28303,7 @@
 </p:sld>
 </file>
 
-<file path=ppt/slides/slide9.xml><?xml version="1.0" encoding="utf-8"?>
+<file path=ppt/slides/slide8.xml><?xml version="1.0" encoding="utf-8"?>
 <p:sld xmlns:a="http://schemas.openxmlformats.org/drawingml/2006/main" xmlns:r="http://schemas.openxmlformats.org/officeDocument/2006/relationships" xmlns:p="http://schemas.openxmlformats.org/presentationml/2006/main">
   <p:cSld>
     <p:spTree>
@@ -27640,13 +29240,121 @@
 </p:sld>
 </file>
 
+<file path=ppt/slides/slide9.xml><?xml version="1.0" encoding="utf-8"?>
+<p:sld xmlns:a="http://schemas.openxmlformats.org/drawingml/2006/main" xmlns:r="http://schemas.openxmlformats.org/officeDocument/2006/relationships" xmlns:p="http://schemas.openxmlformats.org/presentationml/2006/main">
+  <p:cSld>
+    <p:spTree>
+      <p:nvGrpSpPr>
+        <p:cNvPr id="1" name=""/>
+        <p:cNvGrpSpPr/>
+        <p:nvPr/>
+      </p:nvGrpSpPr>
+      <p:grpSpPr>
+        <a:xfrm>
+          <a:off x="0" y="0"/>
+          <a:ext cx="0" cy="0"/>
+          <a:chOff x="0" y="0"/>
+          <a:chExt cx="0" cy="0"/>
+        </a:xfrm>
+      </p:grpSpPr>
+      <p:sp>
+        <p:nvSpPr>
+          <p:cNvPr id="6" name="标题 5"/>
+          <p:cNvSpPr>
+            <a:spLocks noGrp="1"/>
+          </p:cNvSpPr>
+          <p:nvPr>
+            <p:ph type="title"/>
+          </p:nvPr>
+        </p:nvSpPr>
+        <p:spPr>
+          <a:xfrm>
+            <a:off x="0" y="1282065"/>
+            <a:ext cx="6864985" cy="1292860"/>
+          </a:xfrm>
+        </p:spPr>
+        <p:txBody>
+          <a:bodyPr/>
+          <a:lstStyle/>
+          <a:p>
+            <a:pPr algn="ctr"/>
+            <a:r>
+              <a:rPr lang="zh-CN" altLang="en-US" dirty="0">
+                <a:sym typeface="+mn-ea"/>
+              </a:rPr>
+              <a:t>基于公式的数值推理数据集构建</a:t>
+            </a:r>
+            <a:endParaRPr lang="zh-CN" altLang="en-US" dirty="0"/>
+          </a:p>
+        </p:txBody>
+      </p:sp>
+      <p:sp>
+        <p:nvSpPr>
+          <p:cNvPr id="3" name="日期占位符 2"/>
+          <p:cNvSpPr>
+            <a:spLocks noGrp="1"/>
+          </p:cNvSpPr>
+          <p:nvPr>
+            <p:ph type="dt" sz="half" idx="10"/>
+          </p:nvPr>
+        </p:nvSpPr>
+        <p:spPr/>
+        <p:txBody>
+          <a:bodyPr/>
+          <a:lstStyle/>
+          <a:p>
+            <a:fld id="{2FBB519E-D9EB-47F0-AD65-082D85248404}" type="datetime1">
+              <a:rPr lang="zh-CN" altLang="en-US" smtClean="0"/>
+            </a:fld>
+            <a:endParaRPr lang="zh-CN" altLang="en-US" dirty="0"/>
+          </a:p>
+        </p:txBody>
+      </p:sp>
+      <p:sp>
+        <p:nvSpPr>
+          <p:cNvPr id="4" name="灯片编号占位符 3"/>
+          <p:cNvSpPr>
+            <a:spLocks noGrp="1"/>
+          </p:cNvSpPr>
+          <p:nvPr>
+            <p:ph type="sldNum" sz="quarter" idx="11"/>
+          </p:nvPr>
+        </p:nvSpPr>
+        <p:spPr/>
+        <p:txBody>
+          <a:bodyPr/>
+          <a:lstStyle/>
+          <a:p>
+            <a:fld id="{463E1EE8-403A-4D2D-AB26-5BF439A27F60}" type="slidenum">
+              <a:rPr lang="zh-CN" altLang="en-US" smtClean="0"/>
+            </a:fld>
+            <a:endParaRPr lang="zh-CN" altLang="en-US" dirty="0"/>
+          </a:p>
+        </p:txBody>
+      </p:sp>
+    </p:spTree>
+  </p:cSld>
+  <p:clrMapOvr>
+    <a:masterClrMapping/>
+  </p:clrMapOvr>
+  <p:transition/>
+</p:sld>
+</file>
+
 <file path=ppt/tags/tag1.xml><?xml version="1.0" encoding="utf-8"?>
 <p:tagLst xmlns:p="http://schemas.openxmlformats.org/presentationml/2006/main">
   <p:tag name="KSO_WM_DIAGRAM_VIRTUALLY_FRAME" val="{&quot;height&quot;:212.6,&quot;left&quot;:61.5,&quot;top&quot;:91.6,&quot;width&quot;:238.9}"/>
 </p:tagLst>
 </file>
 
-<file path=ppt/tags/tag11.xml><?xml version="1.0" encoding="utf-8"?>
+<file path=ppt/tags/tag10.xml><?xml version="1.0" encoding="utf-8"?>
+<p:tagLst xmlns:p="http://schemas.openxmlformats.org/presentationml/2006/main">
+  <p:tag name="TABLE_ENDDRAG_ORIGIN_RECT" val="226*126"/>
+  <p:tag name="TABLE_ENDDRAG_RECT" val="174*315*226*126"/>
+</p:tagLst>
+</file>
+
+<file path=ppt/tags/tag12.xml><?xml version="1.0" encoding="utf-8"?>
 <p:tagLst xmlns:p="http://schemas.openxmlformats.org/presentationml/2006/main">
   <p:tag name="COMMONDATA" val="eyJoZGlkIjoiZmFhOTViNmIzMjg3YjNiOWUyNWVkYjNjNDNiZjUwMzUifQ=="/>
 </p:tagLst>
@@ -28488,7 +30196,7 @@
 </s:customData>
 </file>
 
-<file path=customXml/itemProps10.xml><?xml version="1.0" encoding="utf-8"?>
+<file path=customXml/itemProps11.xml><?xml version="1.0" encoding="utf-8"?>
 <ds:datastoreItem xmlns:ds="http://schemas.openxmlformats.org/officeDocument/2006/customXml" ds:itemID="s:customData">
   <ds:schemaRefs>
     <ds:schemaRef ds:uri="http://www.wps.cn/officeDocument/2013/wpsCustomData"/>
